--- a/slides/CSC336-Lecture-07-CSS-Positioning-and-Stacking.pptx
+++ b/slides/CSC336-Lecture-07-CSS-Positioning-and-Stacking.pptx
@@ -3633,13 +3633,14 @@
         </p:nvPicPr>
         <p:blipFill>
           <a:blip r:embed="rId1"/>
-          <a:srcRect l="0" r="0" t="0" b="0"/>
-          <a:stretch/>
+          <a:stretch>
+            <a:fillRect/>
+          </a:stretch>
         </p:blipFill>
         <p:spPr>
           <a:xfrm>
-            <a:off x="640080" y="2057400"/>
-            <a:ext cx="10911535" cy="4114800"/>
+            <a:off x="725789" y="2057400"/>
+            <a:ext cx="10740118" cy="4114800"/>
           </a:xfrm>
           <a:prstGeom prst="rect">
             <a:avLst/>
@@ -5019,13 +5020,14 @@
         </p:nvPicPr>
         <p:blipFill>
           <a:blip r:embed="rId1"/>
-          <a:srcRect l="0" r="0" t="0" b="0"/>
-          <a:stretch/>
+          <a:stretch>
+            <a:fillRect/>
+          </a:stretch>
         </p:blipFill>
         <p:spPr>
           <a:xfrm>
-            <a:off x="640080" y="2057400"/>
-            <a:ext cx="10911535" cy="4114800"/>
+            <a:off x="2885650" y="2057400"/>
+            <a:ext cx="6420394" cy="4114800"/>
           </a:xfrm>
           <a:prstGeom prst="rect">
             <a:avLst/>
@@ -6034,13 +6036,14 @@
         </p:nvPicPr>
         <p:blipFill>
           <a:blip r:embed="rId1"/>
-          <a:srcRect l="0" r="0" t="0" b="0"/>
-          <a:stretch/>
+          <a:stretch>
+            <a:fillRect/>
+          </a:stretch>
         </p:blipFill>
         <p:spPr>
           <a:xfrm>
-            <a:off x="640080" y="2057400"/>
-            <a:ext cx="10911535" cy="4114800"/>
+            <a:off x="843031" y="2057400"/>
+            <a:ext cx="10505634" cy="4114800"/>
           </a:xfrm>
           <a:prstGeom prst="rect">
             <a:avLst/>
@@ -8912,13 +8915,14 @@
         </p:nvPicPr>
         <p:blipFill>
           <a:blip r:embed="rId1"/>
-          <a:srcRect l="0" r="0" t="0" b="0"/>
-          <a:stretch/>
+          <a:stretch>
+            <a:fillRect/>
+          </a:stretch>
         </p:blipFill>
         <p:spPr>
           <a:xfrm>
-            <a:off x="640080" y="2331720"/>
-            <a:ext cx="10911535" cy="3840480"/>
+            <a:off x="4961543" y="2331720"/>
+            <a:ext cx="2268610" cy="3840480"/>
           </a:xfrm>
           <a:prstGeom prst="rect">
             <a:avLst/>
@@ -10445,13 +10449,14 @@
         </p:nvPicPr>
         <p:blipFill>
           <a:blip r:embed="rId1"/>
-          <a:srcRect l="0" r="0" t="0" b="0"/>
-          <a:stretch/>
+          <a:stretch>
+            <a:fillRect/>
+          </a:stretch>
         </p:blipFill>
         <p:spPr>
           <a:xfrm>
-            <a:off x="640080" y="2057400"/>
-            <a:ext cx="10911535" cy="4114800"/>
+            <a:off x="1249528" y="2461260"/>
+            <a:ext cx="9692640" cy="3307080"/>
           </a:xfrm>
           <a:prstGeom prst="rect">
             <a:avLst/>
@@ -11001,13 +11006,14 @@
         </p:nvPicPr>
         <p:blipFill>
           <a:blip r:embed="rId1"/>
-          <a:srcRect l="0" r="0" t="0" b="0"/>
-          <a:stretch/>
+          <a:stretch>
+            <a:fillRect/>
+          </a:stretch>
         </p:blipFill>
         <p:spPr>
           <a:xfrm>
-            <a:off x="640080" y="2057400"/>
-            <a:ext cx="10911535" cy="4114800"/>
+            <a:off x="3402138" y="2057400"/>
+            <a:ext cx="5387419" cy="4114800"/>
           </a:xfrm>
           <a:prstGeom prst="rect">
             <a:avLst/>

--- a/slides/CSC336-Lecture-07-CSS-Positioning-and-Stacking.pptx
+++ b/slides/CSC336-Lecture-07-CSS-Positioning-and-Stacking.pptx
@@ -25,9 +25,18 @@
     <p:sldId id="273" r:id="rId19"/>
     <p:sldId id="274" r:id="rId20"/>
     <p:sldId id="275" r:id="rId21"/>
+    <p:sldId id="276" r:id="rId22"/>
+    <p:sldId id="277" r:id="rId23"/>
+    <p:sldId id="278" r:id="rId24"/>
+    <p:sldId id="279" r:id="rId25"/>
+    <p:sldId id="280" r:id="rId26"/>
+    <p:sldId id="281" r:id="rId27"/>
+    <p:sldId id="282" r:id="rId28"/>
+    <p:sldId id="283" r:id="rId29"/>
+    <p:sldId id="284" r:id="rId30"/>
   </p:sldIdLst>
   <p:notesMasterIdLst>
-    <p:notesMasterId r:id="rId22"/>
+    <p:notesMasterId r:id="rId31"/>
   </p:notesMasterIdLst>
   <p:sldSz cx="12192000" cy="6858000"/>
   <p:notesSz cx="6858000" cy="12192000"/>
@@ -1601,6 +1610,798 @@
             <a:fld id="{F7021451-1387-4CA6-816F-3879F97B5CBC}" type="slidenum">
               <a:rPr lang="en-US"/>
               <a:t>20</a:t>
+            </a:fld>
+            <a:endParaRPr lang="en-US"/>
+          </a:p>
+        </p:txBody>
+      </p:sp>
+    </p:spTree>
+    <p:extLst>
+      <p:ext uri="{BB962C8B-B14F-4D97-AF65-F5344CB8AC3E}">
+        <p14:creationId xmlns:p14="http://schemas.microsoft.com/office/powerpoint/2010/main" val="1024086991"/>
+      </p:ext>
+    </p:extLst>
+  </p:cSld>
+  <p:clrMapOvr>
+    <a:masterClrMapping/>
+  </p:clrMapOvr>
+</p:notes>
+</file>
+
+<file path=ppt/notesSlides/notesSlide21.xml><?xml version="1.0" encoding="utf-8"?>
+<p:notes xmlns:a="http://schemas.openxmlformats.org/drawingml/2006/main" xmlns:r="http://schemas.openxmlformats.org/officeDocument/2006/relationships" xmlns:p="http://schemas.openxmlformats.org/presentationml/2006/main">
+  <p:cSld>
+    <p:spTree>
+      <p:nvGrpSpPr>
+        <p:cNvPr id="1" name=""/>
+        <p:cNvGrpSpPr/>
+        <p:nvPr/>
+      </p:nvGrpSpPr>
+      <p:grpSpPr>
+        <a:xfrm>
+          <a:off x="0" y="0"/>
+          <a:ext cx="0" cy="0"/>
+          <a:chOff x="0" y="0"/>
+          <a:chExt cx="0" cy="0"/>
+        </a:xfrm>
+      </p:grpSpPr>
+      <p:sp>
+        <p:nvSpPr>
+          <p:cNvPr id="2" name="Slide Image Placeholder 1"/>
+          <p:cNvSpPr>
+            <a:spLocks noGrp="1" noRot="1" noChangeAspect="1"/>
+          </p:cNvSpPr>
+          <p:nvPr>
+            <p:ph type="sldImg"/>
+          </p:nvPr>
+        </p:nvSpPr>
+        <p:spPr/>
+      </p:sp>
+      <p:sp>
+        <p:nvSpPr>
+          <p:cNvPr id="3" name="Notes Placeholder 2"/>
+          <p:cNvSpPr>
+            <a:spLocks noGrp="1"/>
+          </p:cNvSpPr>
+          <p:nvPr>
+            <p:ph type="body" idx="1"/>
+          </p:nvPr>
+        </p:nvSpPr>
+        <p:spPr/>
+        <p:txBody>
+          <a:bodyPr/>
+          <a:lstStyle/>
+          <a:p>
+            <a:r>
+              <a:rPr lang="en-US" dirty="0"/>
+              <a:t/>
+            </a:r>
+            <a:endParaRPr lang="en-US" dirty="0"/>
+          </a:p>
+        </p:txBody>
+      </p:sp>
+      <p:sp>
+        <p:nvSpPr>
+          <p:cNvPr id="4" name="Slide Number Placeholder 3"/>
+          <p:cNvSpPr>
+            <a:spLocks noGrp="1"/>
+          </p:cNvSpPr>
+          <p:nvPr>
+            <p:ph type="sldNum" sz="quarter" idx="10"/>
+          </p:nvPr>
+        </p:nvSpPr>
+        <p:spPr/>
+        <p:txBody>
+          <a:bodyPr/>
+          <a:lstStyle/>
+          <a:p>
+            <a:fld id="{F7021451-1387-4CA6-816F-3879F97B5CBC}" type="slidenum">
+              <a:rPr lang="en-US"/>
+              <a:t>21</a:t>
+            </a:fld>
+            <a:endParaRPr lang="en-US"/>
+          </a:p>
+        </p:txBody>
+      </p:sp>
+    </p:spTree>
+    <p:extLst>
+      <p:ext uri="{BB962C8B-B14F-4D97-AF65-F5344CB8AC3E}">
+        <p14:creationId xmlns:p14="http://schemas.microsoft.com/office/powerpoint/2010/main" val="1024086991"/>
+      </p:ext>
+    </p:extLst>
+  </p:cSld>
+  <p:clrMapOvr>
+    <a:masterClrMapping/>
+  </p:clrMapOvr>
+</p:notes>
+</file>
+
+<file path=ppt/notesSlides/notesSlide22.xml><?xml version="1.0" encoding="utf-8"?>
+<p:notes xmlns:a="http://schemas.openxmlformats.org/drawingml/2006/main" xmlns:r="http://schemas.openxmlformats.org/officeDocument/2006/relationships" xmlns:p="http://schemas.openxmlformats.org/presentationml/2006/main">
+  <p:cSld>
+    <p:spTree>
+      <p:nvGrpSpPr>
+        <p:cNvPr id="1" name=""/>
+        <p:cNvGrpSpPr/>
+        <p:nvPr/>
+      </p:nvGrpSpPr>
+      <p:grpSpPr>
+        <a:xfrm>
+          <a:off x="0" y="0"/>
+          <a:ext cx="0" cy="0"/>
+          <a:chOff x="0" y="0"/>
+          <a:chExt cx="0" cy="0"/>
+        </a:xfrm>
+      </p:grpSpPr>
+      <p:sp>
+        <p:nvSpPr>
+          <p:cNvPr id="2" name="Slide Image Placeholder 1"/>
+          <p:cNvSpPr>
+            <a:spLocks noGrp="1" noRot="1" noChangeAspect="1"/>
+          </p:cNvSpPr>
+          <p:nvPr>
+            <p:ph type="sldImg"/>
+          </p:nvPr>
+        </p:nvSpPr>
+        <p:spPr/>
+      </p:sp>
+      <p:sp>
+        <p:nvSpPr>
+          <p:cNvPr id="3" name="Notes Placeholder 2"/>
+          <p:cNvSpPr>
+            <a:spLocks noGrp="1"/>
+          </p:cNvSpPr>
+          <p:nvPr>
+            <p:ph type="body" idx="1"/>
+          </p:nvPr>
+        </p:nvSpPr>
+        <p:spPr/>
+        <p:txBody>
+          <a:bodyPr/>
+          <a:lstStyle/>
+          <a:p>
+            <a:r>
+              <a:rPr lang="en-US" dirty="0"/>
+              <a:t/>
+            </a:r>
+            <a:endParaRPr lang="en-US" dirty="0"/>
+          </a:p>
+        </p:txBody>
+      </p:sp>
+      <p:sp>
+        <p:nvSpPr>
+          <p:cNvPr id="4" name="Slide Number Placeholder 3"/>
+          <p:cNvSpPr>
+            <a:spLocks noGrp="1"/>
+          </p:cNvSpPr>
+          <p:nvPr>
+            <p:ph type="sldNum" sz="quarter" idx="10"/>
+          </p:nvPr>
+        </p:nvSpPr>
+        <p:spPr/>
+        <p:txBody>
+          <a:bodyPr/>
+          <a:lstStyle/>
+          <a:p>
+            <a:fld id="{F7021451-1387-4CA6-816F-3879F97B5CBC}" type="slidenum">
+              <a:rPr lang="en-US"/>
+              <a:t>22</a:t>
+            </a:fld>
+            <a:endParaRPr lang="en-US"/>
+          </a:p>
+        </p:txBody>
+      </p:sp>
+    </p:spTree>
+    <p:extLst>
+      <p:ext uri="{BB962C8B-B14F-4D97-AF65-F5344CB8AC3E}">
+        <p14:creationId xmlns:p14="http://schemas.microsoft.com/office/powerpoint/2010/main" val="1024086991"/>
+      </p:ext>
+    </p:extLst>
+  </p:cSld>
+  <p:clrMapOvr>
+    <a:masterClrMapping/>
+  </p:clrMapOvr>
+</p:notes>
+</file>
+
+<file path=ppt/notesSlides/notesSlide23.xml><?xml version="1.0" encoding="utf-8"?>
+<p:notes xmlns:a="http://schemas.openxmlformats.org/drawingml/2006/main" xmlns:r="http://schemas.openxmlformats.org/officeDocument/2006/relationships" xmlns:p="http://schemas.openxmlformats.org/presentationml/2006/main">
+  <p:cSld>
+    <p:spTree>
+      <p:nvGrpSpPr>
+        <p:cNvPr id="1" name=""/>
+        <p:cNvGrpSpPr/>
+        <p:nvPr/>
+      </p:nvGrpSpPr>
+      <p:grpSpPr>
+        <a:xfrm>
+          <a:off x="0" y="0"/>
+          <a:ext cx="0" cy="0"/>
+          <a:chOff x="0" y="0"/>
+          <a:chExt cx="0" cy="0"/>
+        </a:xfrm>
+      </p:grpSpPr>
+      <p:sp>
+        <p:nvSpPr>
+          <p:cNvPr id="2" name="Slide Image Placeholder 1"/>
+          <p:cNvSpPr>
+            <a:spLocks noGrp="1" noRot="1" noChangeAspect="1"/>
+          </p:cNvSpPr>
+          <p:nvPr>
+            <p:ph type="sldImg"/>
+          </p:nvPr>
+        </p:nvSpPr>
+        <p:spPr/>
+      </p:sp>
+      <p:sp>
+        <p:nvSpPr>
+          <p:cNvPr id="3" name="Notes Placeholder 2"/>
+          <p:cNvSpPr>
+            <a:spLocks noGrp="1"/>
+          </p:cNvSpPr>
+          <p:nvPr>
+            <p:ph type="body" idx="1"/>
+          </p:nvPr>
+        </p:nvSpPr>
+        <p:spPr/>
+        <p:txBody>
+          <a:bodyPr/>
+          <a:lstStyle/>
+          <a:p>
+            <a:r>
+              <a:rPr lang="en-US" dirty="0"/>
+              <a:t/>
+            </a:r>
+            <a:endParaRPr lang="en-US" dirty="0"/>
+          </a:p>
+        </p:txBody>
+      </p:sp>
+      <p:sp>
+        <p:nvSpPr>
+          <p:cNvPr id="4" name="Slide Number Placeholder 3"/>
+          <p:cNvSpPr>
+            <a:spLocks noGrp="1"/>
+          </p:cNvSpPr>
+          <p:nvPr>
+            <p:ph type="sldNum" sz="quarter" idx="10"/>
+          </p:nvPr>
+        </p:nvSpPr>
+        <p:spPr/>
+        <p:txBody>
+          <a:bodyPr/>
+          <a:lstStyle/>
+          <a:p>
+            <a:fld id="{F7021451-1387-4CA6-816F-3879F97B5CBC}" type="slidenum">
+              <a:rPr lang="en-US"/>
+              <a:t>23</a:t>
+            </a:fld>
+            <a:endParaRPr lang="en-US"/>
+          </a:p>
+        </p:txBody>
+      </p:sp>
+    </p:spTree>
+    <p:extLst>
+      <p:ext uri="{BB962C8B-B14F-4D97-AF65-F5344CB8AC3E}">
+        <p14:creationId xmlns:p14="http://schemas.microsoft.com/office/powerpoint/2010/main" val="1024086991"/>
+      </p:ext>
+    </p:extLst>
+  </p:cSld>
+  <p:clrMapOvr>
+    <a:masterClrMapping/>
+  </p:clrMapOvr>
+</p:notes>
+</file>
+
+<file path=ppt/notesSlides/notesSlide24.xml><?xml version="1.0" encoding="utf-8"?>
+<p:notes xmlns:a="http://schemas.openxmlformats.org/drawingml/2006/main" xmlns:r="http://schemas.openxmlformats.org/officeDocument/2006/relationships" xmlns:p="http://schemas.openxmlformats.org/presentationml/2006/main">
+  <p:cSld>
+    <p:spTree>
+      <p:nvGrpSpPr>
+        <p:cNvPr id="1" name=""/>
+        <p:cNvGrpSpPr/>
+        <p:nvPr/>
+      </p:nvGrpSpPr>
+      <p:grpSpPr>
+        <a:xfrm>
+          <a:off x="0" y="0"/>
+          <a:ext cx="0" cy="0"/>
+          <a:chOff x="0" y="0"/>
+          <a:chExt cx="0" cy="0"/>
+        </a:xfrm>
+      </p:grpSpPr>
+      <p:sp>
+        <p:nvSpPr>
+          <p:cNvPr id="2" name="Slide Image Placeholder 1"/>
+          <p:cNvSpPr>
+            <a:spLocks noGrp="1" noRot="1" noChangeAspect="1"/>
+          </p:cNvSpPr>
+          <p:nvPr>
+            <p:ph type="sldImg"/>
+          </p:nvPr>
+        </p:nvSpPr>
+        <p:spPr/>
+      </p:sp>
+      <p:sp>
+        <p:nvSpPr>
+          <p:cNvPr id="3" name="Notes Placeholder 2"/>
+          <p:cNvSpPr>
+            <a:spLocks noGrp="1"/>
+          </p:cNvSpPr>
+          <p:nvPr>
+            <p:ph type="body" idx="1"/>
+          </p:nvPr>
+        </p:nvSpPr>
+        <p:spPr/>
+        <p:txBody>
+          <a:bodyPr/>
+          <a:lstStyle/>
+          <a:p>
+            <a:r>
+              <a:rPr lang="en-US" dirty="0"/>
+              <a:t/>
+            </a:r>
+            <a:endParaRPr lang="en-US" dirty="0"/>
+          </a:p>
+        </p:txBody>
+      </p:sp>
+      <p:sp>
+        <p:nvSpPr>
+          <p:cNvPr id="4" name="Slide Number Placeholder 3"/>
+          <p:cNvSpPr>
+            <a:spLocks noGrp="1"/>
+          </p:cNvSpPr>
+          <p:nvPr>
+            <p:ph type="sldNum" sz="quarter" idx="10"/>
+          </p:nvPr>
+        </p:nvSpPr>
+        <p:spPr/>
+        <p:txBody>
+          <a:bodyPr/>
+          <a:lstStyle/>
+          <a:p>
+            <a:fld id="{F7021451-1387-4CA6-816F-3879F97B5CBC}" type="slidenum">
+              <a:rPr lang="en-US"/>
+              <a:t>24</a:t>
+            </a:fld>
+            <a:endParaRPr lang="en-US"/>
+          </a:p>
+        </p:txBody>
+      </p:sp>
+    </p:spTree>
+    <p:extLst>
+      <p:ext uri="{BB962C8B-B14F-4D97-AF65-F5344CB8AC3E}">
+        <p14:creationId xmlns:p14="http://schemas.microsoft.com/office/powerpoint/2010/main" val="1024086991"/>
+      </p:ext>
+    </p:extLst>
+  </p:cSld>
+  <p:clrMapOvr>
+    <a:masterClrMapping/>
+  </p:clrMapOvr>
+</p:notes>
+</file>
+
+<file path=ppt/notesSlides/notesSlide25.xml><?xml version="1.0" encoding="utf-8"?>
+<p:notes xmlns:a="http://schemas.openxmlformats.org/drawingml/2006/main" xmlns:r="http://schemas.openxmlformats.org/officeDocument/2006/relationships" xmlns:p="http://schemas.openxmlformats.org/presentationml/2006/main">
+  <p:cSld>
+    <p:spTree>
+      <p:nvGrpSpPr>
+        <p:cNvPr id="1" name=""/>
+        <p:cNvGrpSpPr/>
+        <p:nvPr/>
+      </p:nvGrpSpPr>
+      <p:grpSpPr>
+        <a:xfrm>
+          <a:off x="0" y="0"/>
+          <a:ext cx="0" cy="0"/>
+          <a:chOff x="0" y="0"/>
+          <a:chExt cx="0" cy="0"/>
+        </a:xfrm>
+      </p:grpSpPr>
+      <p:sp>
+        <p:nvSpPr>
+          <p:cNvPr id="2" name="Slide Image Placeholder 1"/>
+          <p:cNvSpPr>
+            <a:spLocks noGrp="1" noRot="1" noChangeAspect="1"/>
+          </p:cNvSpPr>
+          <p:nvPr>
+            <p:ph type="sldImg"/>
+          </p:nvPr>
+        </p:nvSpPr>
+        <p:spPr/>
+      </p:sp>
+      <p:sp>
+        <p:nvSpPr>
+          <p:cNvPr id="3" name="Notes Placeholder 2"/>
+          <p:cNvSpPr>
+            <a:spLocks noGrp="1"/>
+          </p:cNvSpPr>
+          <p:nvPr>
+            <p:ph type="body" idx="1"/>
+          </p:nvPr>
+        </p:nvSpPr>
+        <p:spPr/>
+        <p:txBody>
+          <a:bodyPr/>
+          <a:lstStyle/>
+          <a:p>
+            <a:r>
+              <a:rPr lang="en-US" dirty="0"/>
+              <a:t/>
+            </a:r>
+            <a:endParaRPr lang="en-US" dirty="0"/>
+          </a:p>
+        </p:txBody>
+      </p:sp>
+      <p:sp>
+        <p:nvSpPr>
+          <p:cNvPr id="4" name="Slide Number Placeholder 3"/>
+          <p:cNvSpPr>
+            <a:spLocks noGrp="1"/>
+          </p:cNvSpPr>
+          <p:nvPr>
+            <p:ph type="sldNum" sz="quarter" idx="10"/>
+          </p:nvPr>
+        </p:nvSpPr>
+        <p:spPr/>
+        <p:txBody>
+          <a:bodyPr/>
+          <a:lstStyle/>
+          <a:p>
+            <a:fld id="{F7021451-1387-4CA6-816F-3879F97B5CBC}" type="slidenum">
+              <a:rPr lang="en-US"/>
+              <a:t>25</a:t>
+            </a:fld>
+            <a:endParaRPr lang="en-US"/>
+          </a:p>
+        </p:txBody>
+      </p:sp>
+    </p:spTree>
+    <p:extLst>
+      <p:ext uri="{BB962C8B-B14F-4D97-AF65-F5344CB8AC3E}">
+        <p14:creationId xmlns:p14="http://schemas.microsoft.com/office/powerpoint/2010/main" val="1024086991"/>
+      </p:ext>
+    </p:extLst>
+  </p:cSld>
+  <p:clrMapOvr>
+    <a:masterClrMapping/>
+  </p:clrMapOvr>
+</p:notes>
+</file>
+
+<file path=ppt/notesSlides/notesSlide26.xml><?xml version="1.0" encoding="utf-8"?>
+<p:notes xmlns:a="http://schemas.openxmlformats.org/drawingml/2006/main" xmlns:r="http://schemas.openxmlformats.org/officeDocument/2006/relationships" xmlns:p="http://schemas.openxmlformats.org/presentationml/2006/main">
+  <p:cSld>
+    <p:spTree>
+      <p:nvGrpSpPr>
+        <p:cNvPr id="1" name=""/>
+        <p:cNvGrpSpPr/>
+        <p:nvPr/>
+      </p:nvGrpSpPr>
+      <p:grpSpPr>
+        <a:xfrm>
+          <a:off x="0" y="0"/>
+          <a:ext cx="0" cy="0"/>
+          <a:chOff x="0" y="0"/>
+          <a:chExt cx="0" cy="0"/>
+        </a:xfrm>
+      </p:grpSpPr>
+      <p:sp>
+        <p:nvSpPr>
+          <p:cNvPr id="2" name="Slide Image Placeholder 1"/>
+          <p:cNvSpPr>
+            <a:spLocks noGrp="1" noRot="1" noChangeAspect="1"/>
+          </p:cNvSpPr>
+          <p:nvPr>
+            <p:ph type="sldImg"/>
+          </p:nvPr>
+        </p:nvSpPr>
+        <p:spPr/>
+      </p:sp>
+      <p:sp>
+        <p:nvSpPr>
+          <p:cNvPr id="3" name="Notes Placeholder 2"/>
+          <p:cNvSpPr>
+            <a:spLocks noGrp="1"/>
+          </p:cNvSpPr>
+          <p:nvPr>
+            <p:ph type="body" idx="1"/>
+          </p:nvPr>
+        </p:nvSpPr>
+        <p:spPr/>
+        <p:txBody>
+          <a:bodyPr/>
+          <a:lstStyle/>
+          <a:p>
+            <a:r>
+              <a:rPr lang="en-US" dirty="0"/>
+              <a:t/>
+            </a:r>
+            <a:endParaRPr lang="en-US" dirty="0"/>
+          </a:p>
+        </p:txBody>
+      </p:sp>
+      <p:sp>
+        <p:nvSpPr>
+          <p:cNvPr id="4" name="Slide Number Placeholder 3"/>
+          <p:cNvSpPr>
+            <a:spLocks noGrp="1"/>
+          </p:cNvSpPr>
+          <p:nvPr>
+            <p:ph type="sldNum" sz="quarter" idx="10"/>
+          </p:nvPr>
+        </p:nvSpPr>
+        <p:spPr/>
+        <p:txBody>
+          <a:bodyPr/>
+          <a:lstStyle/>
+          <a:p>
+            <a:fld id="{F7021451-1387-4CA6-816F-3879F97B5CBC}" type="slidenum">
+              <a:rPr lang="en-US"/>
+              <a:t>26</a:t>
+            </a:fld>
+            <a:endParaRPr lang="en-US"/>
+          </a:p>
+        </p:txBody>
+      </p:sp>
+    </p:spTree>
+    <p:extLst>
+      <p:ext uri="{BB962C8B-B14F-4D97-AF65-F5344CB8AC3E}">
+        <p14:creationId xmlns:p14="http://schemas.microsoft.com/office/powerpoint/2010/main" val="1024086991"/>
+      </p:ext>
+    </p:extLst>
+  </p:cSld>
+  <p:clrMapOvr>
+    <a:masterClrMapping/>
+  </p:clrMapOvr>
+</p:notes>
+</file>
+
+<file path=ppt/notesSlides/notesSlide27.xml><?xml version="1.0" encoding="utf-8"?>
+<p:notes xmlns:a="http://schemas.openxmlformats.org/drawingml/2006/main" xmlns:r="http://schemas.openxmlformats.org/officeDocument/2006/relationships" xmlns:p="http://schemas.openxmlformats.org/presentationml/2006/main">
+  <p:cSld>
+    <p:spTree>
+      <p:nvGrpSpPr>
+        <p:cNvPr id="1" name=""/>
+        <p:cNvGrpSpPr/>
+        <p:nvPr/>
+      </p:nvGrpSpPr>
+      <p:grpSpPr>
+        <a:xfrm>
+          <a:off x="0" y="0"/>
+          <a:ext cx="0" cy="0"/>
+          <a:chOff x="0" y="0"/>
+          <a:chExt cx="0" cy="0"/>
+        </a:xfrm>
+      </p:grpSpPr>
+      <p:sp>
+        <p:nvSpPr>
+          <p:cNvPr id="2" name="Slide Image Placeholder 1"/>
+          <p:cNvSpPr>
+            <a:spLocks noGrp="1" noRot="1" noChangeAspect="1"/>
+          </p:cNvSpPr>
+          <p:nvPr>
+            <p:ph type="sldImg"/>
+          </p:nvPr>
+        </p:nvSpPr>
+        <p:spPr/>
+      </p:sp>
+      <p:sp>
+        <p:nvSpPr>
+          <p:cNvPr id="3" name="Notes Placeholder 2"/>
+          <p:cNvSpPr>
+            <a:spLocks noGrp="1"/>
+          </p:cNvSpPr>
+          <p:nvPr>
+            <p:ph type="body" idx="1"/>
+          </p:nvPr>
+        </p:nvSpPr>
+        <p:spPr/>
+        <p:txBody>
+          <a:bodyPr/>
+          <a:lstStyle/>
+          <a:p>
+            <a:r>
+              <a:rPr lang="en-US" dirty="0"/>
+              <a:t/>
+            </a:r>
+            <a:endParaRPr lang="en-US" dirty="0"/>
+          </a:p>
+        </p:txBody>
+      </p:sp>
+      <p:sp>
+        <p:nvSpPr>
+          <p:cNvPr id="4" name="Slide Number Placeholder 3"/>
+          <p:cNvSpPr>
+            <a:spLocks noGrp="1"/>
+          </p:cNvSpPr>
+          <p:nvPr>
+            <p:ph type="sldNum" sz="quarter" idx="10"/>
+          </p:nvPr>
+        </p:nvSpPr>
+        <p:spPr/>
+        <p:txBody>
+          <a:bodyPr/>
+          <a:lstStyle/>
+          <a:p>
+            <a:fld id="{F7021451-1387-4CA6-816F-3879F97B5CBC}" type="slidenum">
+              <a:rPr lang="en-US"/>
+              <a:t>27</a:t>
+            </a:fld>
+            <a:endParaRPr lang="en-US"/>
+          </a:p>
+        </p:txBody>
+      </p:sp>
+    </p:spTree>
+    <p:extLst>
+      <p:ext uri="{BB962C8B-B14F-4D97-AF65-F5344CB8AC3E}">
+        <p14:creationId xmlns:p14="http://schemas.microsoft.com/office/powerpoint/2010/main" val="1024086991"/>
+      </p:ext>
+    </p:extLst>
+  </p:cSld>
+  <p:clrMapOvr>
+    <a:masterClrMapping/>
+  </p:clrMapOvr>
+</p:notes>
+</file>
+
+<file path=ppt/notesSlides/notesSlide28.xml><?xml version="1.0" encoding="utf-8"?>
+<p:notes xmlns:a="http://schemas.openxmlformats.org/drawingml/2006/main" xmlns:r="http://schemas.openxmlformats.org/officeDocument/2006/relationships" xmlns:p="http://schemas.openxmlformats.org/presentationml/2006/main">
+  <p:cSld>
+    <p:spTree>
+      <p:nvGrpSpPr>
+        <p:cNvPr id="1" name=""/>
+        <p:cNvGrpSpPr/>
+        <p:nvPr/>
+      </p:nvGrpSpPr>
+      <p:grpSpPr>
+        <a:xfrm>
+          <a:off x="0" y="0"/>
+          <a:ext cx="0" cy="0"/>
+          <a:chOff x="0" y="0"/>
+          <a:chExt cx="0" cy="0"/>
+        </a:xfrm>
+      </p:grpSpPr>
+      <p:sp>
+        <p:nvSpPr>
+          <p:cNvPr id="2" name="Slide Image Placeholder 1"/>
+          <p:cNvSpPr>
+            <a:spLocks noGrp="1" noRot="1" noChangeAspect="1"/>
+          </p:cNvSpPr>
+          <p:nvPr>
+            <p:ph type="sldImg"/>
+          </p:nvPr>
+        </p:nvSpPr>
+        <p:spPr/>
+      </p:sp>
+      <p:sp>
+        <p:nvSpPr>
+          <p:cNvPr id="3" name="Notes Placeholder 2"/>
+          <p:cNvSpPr>
+            <a:spLocks noGrp="1"/>
+          </p:cNvSpPr>
+          <p:nvPr>
+            <p:ph type="body" idx="1"/>
+          </p:nvPr>
+        </p:nvSpPr>
+        <p:spPr/>
+        <p:txBody>
+          <a:bodyPr/>
+          <a:lstStyle/>
+          <a:p>
+            <a:r>
+              <a:rPr lang="en-US" dirty="0"/>
+              <a:t/>
+            </a:r>
+            <a:endParaRPr lang="en-US" dirty="0"/>
+          </a:p>
+        </p:txBody>
+      </p:sp>
+      <p:sp>
+        <p:nvSpPr>
+          <p:cNvPr id="4" name="Slide Number Placeholder 3"/>
+          <p:cNvSpPr>
+            <a:spLocks noGrp="1"/>
+          </p:cNvSpPr>
+          <p:nvPr>
+            <p:ph type="sldNum" sz="quarter" idx="10"/>
+          </p:nvPr>
+        </p:nvSpPr>
+        <p:spPr/>
+        <p:txBody>
+          <a:bodyPr/>
+          <a:lstStyle/>
+          <a:p>
+            <a:fld id="{F7021451-1387-4CA6-816F-3879F97B5CBC}" type="slidenum">
+              <a:rPr lang="en-US"/>
+              <a:t>28</a:t>
+            </a:fld>
+            <a:endParaRPr lang="en-US"/>
+          </a:p>
+        </p:txBody>
+      </p:sp>
+    </p:spTree>
+    <p:extLst>
+      <p:ext uri="{BB962C8B-B14F-4D97-AF65-F5344CB8AC3E}">
+        <p14:creationId xmlns:p14="http://schemas.microsoft.com/office/powerpoint/2010/main" val="1024086991"/>
+      </p:ext>
+    </p:extLst>
+  </p:cSld>
+  <p:clrMapOvr>
+    <a:masterClrMapping/>
+  </p:clrMapOvr>
+</p:notes>
+</file>
+
+<file path=ppt/notesSlides/notesSlide29.xml><?xml version="1.0" encoding="utf-8"?>
+<p:notes xmlns:a="http://schemas.openxmlformats.org/drawingml/2006/main" xmlns:r="http://schemas.openxmlformats.org/officeDocument/2006/relationships" xmlns:p="http://schemas.openxmlformats.org/presentationml/2006/main">
+  <p:cSld>
+    <p:spTree>
+      <p:nvGrpSpPr>
+        <p:cNvPr id="1" name=""/>
+        <p:cNvGrpSpPr/>
+        <p:nvPr/>
+      </p:nvGrpSpPr>
+      <p:grpSpPr>
+        <a:xfrm>
+          <a:off x="0" y="0"/>
+          <a:ext cx="0" cy="0"/>
+          <a:chOff x="0" y="0"/>
+          <a:chExt cx="0" cy="0"/>
+        </a:xfrm>
+      </p:grpSpPr>
+      <p:sp>
+        <p:nvSpPr>
+          <p:cNvPr id="2" name="Slide Image Placeholder 1"/>
+          <p:cNvSpPr>
+            <a:spLocks noGrp="1" noRot="1" noChangeAspect="1"/>
+          </p:cNvSpPr>
+          <p:nvPr>
+            <p:ph type="sldImg"/>
+          </p:nvPr>
+        </p:nvSpPr>
+        <p:spPr/>
+      </p:sp>
+      <p:sp>
+        <p:nvSpPr>
+          <p:cNvPr id="3" name="Notes Placeholder 2"/>
+          <p:cNvSpPr>
+            <a:spLocks noGrp="1"/>
+          </p:cNvSpPr>
+          <p:nvPr>
+            <p:ph type="body" idx="1"/>
+          </p:nvPr>
+        </p:nvSpPr>
+        <p:spPr/>
+        <p:txBody>
+          <a:bodyPr/>
+          <a:lstStyle/>
+          <a:p>
+            <a:r>
+              <a:rPr lang="en-US" dirty="0"/>
+              <a:t/>
+            </a:r>
+            <a:endParaRPr lang="en-US" dirty="0"/>
+          </a:p>
+        </p:txBody>
+      </p:sp>
+      <p:sp>
+        <p:nvSpPr>
+          <p:cNvPr id="4" name="Slide Number Placeholder 3"/>
+          <p:cNvSpPr>
+            <a:spLocks noGrp="1"/>
+          </p:cNvSpPr>
+          <p:nvPr>
+            <p:ph type="sldNum" sz="quarter" idx="10"/>
+          </p:nvPr>
+        </p:nvSpPr>
+        <p:spPr/>
+        <p:txBody>
+          <a:bodyPr/>
+          <a:lstStyle/>
+          <a:p>
+            <a:fld id="{F7021451-1387-4CA6-816F-3879F97B5CBC}" type="slidenum">
+              <a:rPr lang="en-US"/>
+              <a:t>29</a:t>
             </a:fld>
             <a:endParaRPr lang="en-US"/>
           </a:p>
@@ -2888,7 +3689,7 @@
                 <a:ea typeface="Calibri" pitchFamily="34" charset="-122"/>
                 <a:cs typeface="Calibri" pitchFamily="34" charset="-120"/>
               </a:rPr>
-              <a:t>STACKING ORDER</a:t>
+              <a:t>A COMMON PATTERN</a:t>
             </a:r>
             <a:endParaRPr lang="en-US" sz="1300" dirty="0"/>
           </a:p>
@@ -2927,7 +3728,7 @@
                 <a:ea typeface="Cambria" pitchFamily="34" charset="-122"/>
                 <a:cs typeface="Cambria" pitchFamily="34" charset="-120"/>
               </a:rPr>
-              <a:t>Stacking Contexts</a:t>
+              <a:t>Relative Parent, Absolute Child</a:t>
             </a:r>
             <a:endParaRPr lang="en-US" sz="3400" dirty="0"/>
           </a:p>
@@ -2941,14 +3742,16 @@
         </p:nvSpPr>
         <p:spPr>
           <a:xfrm>
-            <a:off x="685800" y="2185416"/>
-            <a:ext cx="82296" cy="82296"/>
-          </a:xfrm>
-          <a:prstGeom prst="ellipse">
-            <a:avLst/>
+            <a:off x="640080" y="1965960"/>
+            <a:ext cx="10911535" cy="2990088"/>
+          </a:xfrm>
+          <a:prstGeom prst="roundRect">
+            <a:avLst>
+              <a:gd name="adj" fmla="val 2446"/>
+            </a:avLst>
           </a:prstGeom>
           <a:solidFill>
-            <a:srgbClr val="FF8A3D"/>
+            <a:srgbClr val="1E1E4C"/>
           </a:solidFill>
           <a:ln/>
         </p:spPr>
@@ -2961,24 +3764,155 @@
         </p:nvSpPr>
         <p:spPr>
           <a:xfrm>
-            <a:off x="960120" y="1892808"/>
-            <a:ext cx="10591495" cy="640080"/>
-          </a:xfrm>
-          <a:prstGeom prst="rect">
-            <a:avLst/>
-          </a:prstGeom>
-          <a:noFill/>
-          <a:ln/>
-        </p:spPr>
-        <p:txBody>
-          <a:bodyPr wrap="square" lIns="0" tIns="0" rIns="0" bIns="0" rtlCol="0" anchor="ctr"/>
+            <a:off x="960120" y="2194560"/>
+            <a:ext cx="10271455" cy="2532888"/>
+          </a:xfrm>
+          <a:prstGeom prst="rect">
+            <a:avLst/>
+          </a:prstGeom>
+          <a:noFill/>
+          <a:ln/>
+        </p:spPr>
+        <p:txBody>
+          <a:bodyPr wrap="square" lIns="0" tIns="0" rIns="0" bIns="0" rtlCol="0" anchor="t"/>
           <a:lstStyle/>
           <a:p>
             <a:pPr indent="0" marL="0">
-              <a:buNone/>
-            </a:pPr>
-            <a:r>
-              <a:rPr lang="en-US" sz="1500" dirty="0">
+              <a:lnSpc>
+                <a:spcPct val="125000"/>
+              </a:lnSpc>
+              <a:buNone/>
+            </a:pPr>
+            <a:r>
+              <a:rPr lang="en-US" sz="1400" dirty="0">
+                <a:solidFill>
+                  <a:srgbClr val="C9D3F5"/>
+                </a:solidFill>
+                <a:latin typeface="Courier New" pitchFamily="34" charset="0"/>
+                <a:ea typeface="Courier New" pitchFamily="34" charset="-122"/>
+                <a:cs typeface="Courier New" pitchFamily="34" charset="-120"/>
+              </a:rPr>
+              <a:t>.card { position: relative; }</a:t>
+            </a:r>
+            <a:endParaRPr lang="en-US" sz="1400" dirty="0"/>
+          </a:p>
+          <a:p>
+            <a:pPr indent="0" marL="0">
+              <a:lnSpc>
+                <a:spcPct val="125000"/>
+              </a:lnSpc>
+              <a:buNone/>
+            </a:pPr>
+            <a:endParaRPr lang="en-US" sz="1400" dirty="0"/>
+          </a:p>
+          <a:p>
+            <a:pPr indent="0" marL="0">
+              <a:lnSpc>
+                <a:spcPct val="125000"/>
+              </a:lnSpc>
+              <a:buNone/>
+            </a:pPr>
+            <a:r>
+              <a:rPr lang="en-US" sz="1400" dirty="0">
+                <a:solidFill>
+                  <a:srgbClr val="C9D3F5"/>
+                </a:solidFill>
+                <a:latin typeface="Courier New" pitchFamily="34" charset="0"/>
+                <a:ea typeface="Courier New" pitchFamily="34" charset="-122"/>
+                <a:cs typeface="Courier New" pitchFamily="34" charset="-120"/>
+              </a:rPr>
+              <a:t>.card .badge {</a:t>
+            </a:r>
+            <a:endParaRPr lang="en-US" sz="1400" dirty="0"/>
+          </a:p>
+          <a:p>
+            <a:pPr indent="0" marL="0">
+              <a:lnSpc>
+                <a:spcPct val="125000"/>
+              </a:lnSpc>
+              <a:buNone/>
+            </a:pPr>
+            <a:r>
+              <a:rPr lang="en-US" sz="1400" dirty="0">
+                <a:solidFill>
+                  <a:srgbClr val="C9D3F5"/>
+                </a:solidFill>
+                <a:latin typeface="Courier New" pitchFamily="34" charset="0"/>
+                <a:ea typeface="Courier New" pitchFamily="34" charset="-122"/>
+                <a:cs typeface="Courier New" pitchFamily="34" charset="-120"/>
+              </a:rPr>
+              <a:t>  position: absolute;</a:t>
+            </a:r>
+            <a:endParaRPr lang="en-US" sz="1400" dirty="0"/>
+          </a:p>
+          <a:p>
+            <a:pPr indent="0" marL="0">
+              <a:lnSpc>
+                <a:spcPct val="125000"/>
+              </a:lnSpc>
+              <a:buNone/>
+            </a:pPr>
+            <a:r>
+              <a:rPr lang="en-US" sz="1400" dirty="0">
+                <a:solidFill>
+                  <a:srgbClr val="C9D3F5"/>
+                </a:solidFill>
+                <a:latin typeface="Courier New" pitchFamily="34" charset="0"/>
+                <a:ea typeface="Courier New" pitchFamily="34" charset="-122"/>
+                <a:cs typeface="Courier New" pitchFamily="34" charset="-120"/>
+              </a:rPr>
+              <a:t>  top: 8px; right: 8px;</a:t>
+            </a:r>
+            <a:endParaRPr lang="en-US" sz="1400" dirty="0"/>
+          </a:p>
+          <a:p>
+            <a:pPr indent="0" marL="0">
+              <a:lnSpc>
+                <a:spcPct val="125000"/>
+              </a:lnSpc>
+              <a:buNone/>
+            </a:pPr>
+            <a:r>
+              <a:rPr lang="en-US" sz="1400" dirty="0">
+                <a:solidFill>
+                  <a:srgbClr val="C9D3F5"/>
+                </a:solidFill>
+                <a:latin typeface="Courier New" pitchFamily="34" charset="0"/>
+                <a:ea typeface="Courier New" pitchFamily="34" charset="-122"/>
+                <a:cs typeface="Courier New" pitchFamily="34" charset="-120"/>
+              </a:rPr>
+              <a:t>}</a:t>
+            </a:r>
+            <a:endParaRPr lang="en-US" sz="1400" dirty="0"/>
+          </a:p>
+        </p:txBody>
+      </p:sp>
+      <p:sp>
+        <p:nvSpPr>
+          <p:cNvPr id="6" name="Text 4"/>
+          <p:cNvSpPr txBox="1"/>
+          <p:nvPr/>
+        </p:nvSpPr>
+        <p:spPr>
+          <a:xfrm>
+            <a:off x="640080" y="5184648"/>
+            <a:ext cx="10911535" cy="1078992"/>
+          </a:xfrm>
+          <a:prstGeom prst="rect">
+            <a:avLst/>
+          </a:prstGeom>
+          <a:noFill/>
+          <a:ln/>
+        </p:spPr>
+        <p:txBody>
+          <a:bodyPr wrap="square" lIns="0" tIns="0" rIns="0" bIns="0" rtlCol="0" anchor="t"/>
+          <a:lstStyle/>
+          <a:p>
+            <a:pPr indent="0" marL="0">
+              <a:buNone/>
+            </a:pPr>
+            <a:r>
+              <a:rPr lang="en-US" sz="1300" dirty="0">
                 <a:solidFill>
                   <a:srgbClr val="26262F"/>
                 </a:solidFill>
@@ -2986,31 +3920,11 @@
                 <a:ea typeface="Calibri" pitchFamily="34" charset="-122"/>
                 <a:cs typeface="Calibri" pitchFamily="34" charset="-120"/>
               </a:rPr>
-              <a:t>A stacking context is a self-contained layer for z-index comparisons</a:t>
-            </a:r>
-            <a:endParaRPr lang="en-US" sz="1500" dirty="0"/>
-          </a:p>
-        </p:txBody>
-      </p:sp>
-      <p:sp>
-        <p:nvSpPr>
-          <p:cNvPr id="6" name="Shape 4"/>
-          <p:cNvSpPr/>
-          <p:nvPr/>
-        </p:nvSpPr>
-        <p:spPr>
-          <a:xfrm>
-            <a:off x="685800" y="3008376"/>
-            <a:ext cx="82296" cy="82296"/>
-          </a:xfrm>
-          <a:prstGeom prst="ellipse">
-            <a:avLst/>
-          </a:prstGeom>
-          <a:solidFill>
-            <a:srgbClr val="FF8A3D"/>
-          </a:solidFill>
-          <a:ln/>
-        </p:spPr>
+              <a:t>.card becomes the containing block, so the badge is pinned to the card's corner, not the whole page.</a:t>
+            </a:r>
+            <a:endParaRPr lang="en-US" sz="1300" dirty="0"/>
+          </a:p>
+        </p:txBody>
       </p:sp>
       <p:sp>
         <p:nvSpPr>
@@ -3020,129 +3934,31 @@
         </p:nvSpPr>
         <p:spPr>
           <a:xfrm>
-            <a:off x="960120" y="2715768"/>
-            <a:ext cx="10591495" cy="640080"/>
-          </a:xfrm>
-          <a:prstGeom prst="rect">
-            <a:avLst/>
-          </a:prstGeom>
-          <a:noFill/>
-          <a:ln/>
-        </p:spPr>
-        <p:txBody>
-          <a:bodyPr wrap="square" lIns="0" tIns="0" rIns="0" bIns="0" rtlCol="0" anchor="ctr"/>
-          <a:lstStyle/>
-          <a:p>
-            <a:pPr indent="0" marL="0">
-              <a:buNone/>
-            </a:pPr>
-            <a:r>
-              <a:rPr lang="en-US" sz="1500" dirty="0">
-                <a:solidFill>
-                  <a:srgbClr val="26262F"/>
+            <a:off x="640080" y="6446520"/>
+            <a:ext cx="8686800" cy="292608"/>
+          </a:xfrm>
+          <a:prstGeom prst="rect">
+            <a:avLst/>
+          </a:prstGeom>
+          <a:noFill/>
+          <a:ln/>
+        </p:spPr>
+        <p:txBody>
+          <a:bodyPr wrap="square" lIns="0" tIns="0" rIns="0" bIns="0" rtlCol="0" anchor="ctr"/>
+          <a:lstStyle/>
+          <a:p>
+            <a:pPr algn="l" indent="0" marL="0">
+              <a:buNone/>
+            </a:pPr>
+            <a:r>
+              <a:rPr lang="en-US" sz="900" dirty="0">
+                <a:solidFill>
+                  <a:srgbClr val="5D5D72"/>
                 </a:solidFill>
                 <a:latin typeface="Calibri" pitchFamily="34" charset="0"/>
                 <a:ea typeface="Calibri" pitchFamily="34" charset="-122"/>
                 <a:cs typeface="Calibri" pitchFamily="34" charset="-120"/>
               </a:rPr>
-              <a:t>position + z-index, opacity &lt; 1, or transform can create a new stacking context</a:t>
-            </a:r>
-            <a:endParaRPr lang="en-US" sz="1500" dirty="0"/>
-          </a:p>
-        </p:txBody>
-      </p:sp>
-      <p:sp>
-        <p:nvSpPr>
-          <p:cNvPr id="8" name="Shape 6"/>
-          <p:cNvSpPr/>
-          <p:nvPr/>
-        </p:nvSpPr>
-        <p:spPr>
-          <a:xfrm>
-            <a:off x="685800" y="3831336"/>
-            <a:ext cx="82296" cy="82296"/>
-          </a:xfrm>
-          <a:prstGeom prst="ellipse">
-            <a:avLst/>
-          </a:prstGeom>
-          <a:solidFill>
-            <a:srgbClr val="FF8A3D"/>
-          </a:solidFill>
-          <a:ln/>
-        </p:spPr>
-      </p:sp>
-      <p:sp>
-        <p:nvSpPr>
-          <p:cNvPr id="9" name="Text 7"/>
-          <p:cNvSpPr txBox="1"/>
-          <p:nvPr/>
-        </p:nvSpPr>
-        <p:spPr>
-          <a:xfrm>
-            <a:off x="960120" y="3538728"/>
-            <a:ext cx="10591495" cy="640080"/>
-          </a:xfrm>
-          <a:prstGeom prst="rect">
-            <a:avLst/>
-          </a:prstGeom>
-          <a:noFill/>
-          <a:ln/>
-        </p:spPr>
-        <p:txBody>
-          <a:bodyPr wrap="square" lIns="0" tIns="0" rIns="0" bIns="0" rtlCol="0" anchor="ctr"/>
-          <a:lstStyle/>
-          <a:p>
-            <a:pPr indent="0" marL="0">
-              <a:buNone/>
-            </a:pPr>
-            <a:r>
-              <a:rPr lang="en-US" sz="1500" dirty="0">
-                <a:solidFill>
-                  <a:srgbClr val="26262F"/>
-                </a:solidFill>
-                <a:latin typeface="Calibri" pitchFamily="34" charset="0"/>
-                <a:ea typeface="Calibri" pitchFamily="34" charset="-122"/>
-                <a:cs typeface="Calibri" pitchFamily="34" charset="-120"/>
-              </a:rPr>
-              <a:t>z-index values only compare WITHIN the same stacking context — a huge z-index can still lose if it's trapped inside an ancestor's context</a:t>
-            </a:r>
-            <a:endParaRPr lang="en-US" sz="1500" dirty="0"/>
-          </a:p>
-        </p:txBody>
-      </p:sp>
-      <p:sp>
-        <p:nvSpPr>
-          <p:cNvPr id="10" name="Text 8"/>
-          <p:cNvSpPr txBox="1"/>
-          <p:nvPr/>
-        </p:nvSpPr>
-        <p:spPr>
-          <a:xfrm>
-            <a:off x="640080" y="6446520"/>
-            <a:ext cx="8686800" cy="292608"/>
-          </a:xfrm>
-          <a:prstGeom prst="rect">
-            <a:avLst/>
-          </a:prstGeom>
-          <a:noFill/>
-          <a:ln/>
-        </p:spPr>
-        <p:txBody>
-          <a:bodyPr wrap="square" lIns="0" tIns="0" rIns="0" bIns="0" rtlCol="0" anchor="ctr"/>
-          <a:lstStyle/>
-          <a:p>
-            <a:pPr algn="l" indent="0" marL="0">
-              <a:buNone/>
-            </a:pPr>
-            <a:r>
-              <a:rPr lang="en-US" sz="900" dirty="0">
-                <a:solidFill>
-                  <a:srgbClr val="5D5D72"/>
-                </a:solidFill>
-                <a:latin typeface="Calibri" pitchFamily="34" charset="0"/>
-                <a:ea typeface="Calibri" pitchFamily="34" charset="-122"/>
-                <a:cs typeface="Calibri" pitchFamily="34" charset="-120"/>
-              </a:rPr>
               <a:t>Usman Akram  •  COMSATS University Islamabad</a:t>
             </a:r>
             <a:endParaRPr lang="en-US" sz="900" dirty="0"/>
@@ -3151,7 +3967,7 @@
       </p:sp>
       <p:sp>
         <p:nvSpPr>
-          <p:cNvPr id="11" name="Text 9"/>
+          <p:cNvPr id="8" name="Text 6"/>
           <p:cNvSpPr txBox="1"/>
           <p:nvPr/>
         </p:nvSpPr>
@@ -3253,7 +4069,7 @@
                 <a:ea typeface="Calibri" pitchFamily="34" charset="-122"/>
                 <a:cs typeface="Calibri" pitchFamily="34" charset="-120"/>
               </a:rPr>
-              <a:t>FLOATS</a:t>
+              <a:t>A COMMON PATTERN</a:t>
             </a:r>
             <a:endParaRPr lang="en-US" sz="1300" dirty="0"/>
           </a:p>
@@ -3292,7 +4108,7 @@
                 <a:ea typeface="Cambria" pitchFamily="34" charset="-122"/>
                 <a:cs typeface="Cambria" pitchFamily="34" charset="-120"/>
               </a:rPr>
-              <a:t>float: left</a:t>
+              <a:t>The Badge, Rendered</a:t>
             </a:r>
             <a:endParaRPr lang="en-US" sz="3400" dirty="0"/>
           </a:p>
@@ -3306,134 +4122,89 @@
         </p:nvSpPr>
         <p:spPr>
           <a:xfrm>
-            <a:off x="640080" y="1965960"/>
-            <a:ext cx="10911535" cy="1069848"/>
+            <a:off x="530352" y="1947672"/>
+            <a:ext cx="11130991" cy="4334256"/>
           </a:xfrm>
           <a:prstGeom prst="roundRect">
             <a:avLst>
-              <a:gd name="adj" fmla="val 6838"/>
+              <a:gd name="adj" fmla="val 1266"/>
             </a:avLst>
           </a:prstGeom>
           <a:solidFill>
-            <a:srgbClr val="1E1E4C"/>
+            <a:srgbClr val="FFFFFF"/>
           </a:solidFill>
-          <a:ln/>
-        </p:spPr>
-      </p:sp>
-      <p:sp>
-        <p:nvSpPr>
-          <p:cNvPr id="5" name="Text 3"/>
-          <p:cNvSpPr txBox="1"/>
-          <p:nvPr/>
-        </p:nvSpPr>
-        <p:spPr>
-          <a:xfrm>
-            <a:off x="960120" y="2194560"/>
-            <a:ext cx="10271455" cy="612648"/>
-          </a:xfrm>
-          <a:prstGeom prst="rect">
-            <a:avLst/>
-          </a:prstGeom>
-          <a:noFill/>
-          <a:ln/>
-        </p:spPr>
-        <p:txBody>
-          <a:bodyPr wrap="square" lIns="0" tIns="0" rIns="0" bIns="0" rtlCol="0" anchor="t"/>
-          <a:lstStyle/>
-          <a:p>
-            <a:pPr indent="0" marL="0">
-              <a:lnSpc>
-                <a:spcPct val="125000"/>
-              </a:lnSpc>
-              <a:buNone/>
-            </a:pPr>
-            <a:r>
-              <a:rPr lang="en-US" sz="1400" dirty="0">
-                <a:solidFill>
-                  <a:srgbClr val="C9D3F5"/>
-                </a:solidFill>
-                <a:latin typeface="Courier New" pitchFamily="34" charset="0"/>
-                <a:ea typeface="Courier New" pitchFamily="34" charset="-122"/>
-                <a:cs typeface="Courier New" pitchFamily="34" charset="-120"/>
-              </a:rPr>
-              <a:t>.image { float: left; margin-right: 15px; }</a:t>
-            </a:r>
-            <a:endParaRPr lang="en-US" sz="1400" dirty="0"/>
-          </a:p>
-        </p:txBody>
-      </p:sp>
-      <p:sp>
-        <p:nvSpPr>
-          <p:cNvPr id="6" name="Text 4"/>
-          <p:cNvSpPr txBox="1"/>
-          <p:nvPr/>
-        </p:nvSpPr>
-        <p:spPr>
-          <a:xfrm>
-            <a:off x="640080" y="3264408"/>
-            <a:ext cx="10911535" cy="2999232"/>
-          </a:xfrm>
-          <a:prstGeom prst="rect">
-            <a:avLst/>
-          </a:prstGeom>
-          <a:noFill/>
-          <a:ln/>
-        </p:spPr>
-        <p:txBody>
-          <a:bodyPr wrap="square" lIns="0" tIns="0" rIns="0" bIns="0" rtlCol="0" anchor="t"/>
-          <a:lstStyle/>
-          <a:p>
-            <a:pPr indent="0" marL="0">
-              <a:buNone/>
-            </a:pPr>
-            <a:r>
-              <a:rPr lang="en-US" sz="1300" dirty="0">
-                <a:solidFill>
-                  <a:srgbClr val="26262F"/>
+          <a:ln w="12700">
+            <a:solidFill>
+              <a:srgbClr val="E2E2EE"/>
+            </a:solidFill>
+            <a:prstDash val="solid"/>
+          </a:ln>
+          <a:effectLst>
+            <a:outerShdw sx="100000" sy="100000" kx="0" ky="0" algn="bl" rotWithShape="0" blurRad="101600" dist="38100" dir="5400000">
+              <a:srgbClr val="000000">
+                <a:alpha val="12000"/>
+              </a:srgbClr>
+            </a:outerShdw>
+          </a:effectLst>
+        </p:spPr>
+      </p:sp>
+      <p:pic>
+        <p:nvPicPr>
+          <p:cNvPr id="5" name="Image 0" descr="D:/GitHub/mern-web-book/docs/assets/img/lecture-07/card-badge.png">    </p:cNvPr>
+          <p:cNvPicPr>
+            <a:picLocks noChangeAspect="1"/>
+          </p:cNvPicPr>
+          <p:nvPr/>
+        </p:nvPicPr>
+        <p:blipFill>
+          <a:blip r:embed="rId1"/>
+          <a:stretch>
+            <a:fillRect/>
+          </a:stretch>
+        </p:blipFill>
+        <p:spPr>
+          <a:xfrm>
+            <a:off x="1249528" y="2461260"/>
+            <a:ext cx="9692640" cy="3307080"/>
+          </a:xfrm>
+          <a:prstGeom prst="rect">
+            <a:avLst/>
+          </a:prstGeom>
+        </p:spPr>
+      </p:pic>
+      <p:sp>
+        <p:nvSpPr>
+          <p:cNvPr id="6" name="Text 3"/>
+          <p:cNvSpPr txBox="1"/>
+          <p:nvPr/>
+        </p:nvSpPr>
+        <p:spPr>
+          <a:xfrm>
+            <a:off x="640080" y="6446520"/>
+            <a:ext cx="8686800" cy="292608"/>
+          </a:xfrm>
+          <a:prstGeom prst="rect">
+            <a:avLst/>
+          </a:prstGeom>
+          <a:noFill/>
+          <a:ln/>
+        </p:spPr>
+        <p:txBody>
+          <a:bodyPr wrap="square" lIns="0" tIns="0" rIns="0" bIns="0" rtlCol="0" anchor="ctr"/>
+          <a:lstStyle/>
+          <a:p>
+            <a:pPr algn="l" indent="0" marL="0">
+              <a:buNone/>
+            </a:pPr>
+            <a:r>
+              <a:rPr lang="en-US" sz="900" dirty="0">
+                <a:solidFill>
+                  <a:srgbClr val="5D5D72"/>
                 </a:solidFill>
                 <a:latin typeface="Calibri" pitchFamily="34" charset="0"/>
                 <a:ea typeface="Calibri" pitchFamily="34" charset="-122"/>
                 <a:cs typeface="Calibri" pitchFamily="34" charset="-120"/>
               </a:rPr>
-              <a:t>Originally for text wrapping around an image. A floated element shifts to one edge; other content flows around it.</a:t>
-            </a:r>
-            <a:endParaRPr lang="en-US" sz="1300" dirty="0"/>
-          </a:p>
-        </p:txBody>
-      </p:sp>
-      <p:sp>
-        <p:nvSpPr>
-          <p:cNvPr id="7" name="Text 5"/>
-          <p:cNvSpPr txBox="1"/>
-          <p:nvPr/>
-        </p:nvSpPr>
-        <p:spPr>
-          <a:xfrm>
-            <a:off x="640080" y="6446520"/>
-            <a:ext cx="8686800" cy="292608"/>
-          </a:xfrm>
-          <a:prstGeom prst="rect">
-            <a:avLst/>
-          </a:prstGeom>
-          <a:noFill/>
-          <a:ln/>
-        </p:spPr>
-        <p:txBody>
-          <a:bodyPr wrap="square" lIns="0" tIns="0" rIns="0" bIns="0" rtlCol="0" anchor="ctr"/>
-          <a:lstStyle/>
-          <a:p>
-            <a:pPr algn="l" indent="0" marL="0">
-              <a:buNone/>
-            </a:pPr>
-            <a:r>
-              <a:rPr lang="en-US" sz="900" dirty="0">
-                <a:solidFill>
-                  <a:srgbClr val="5D5D72"/>
-                </a:solidFill>
-                <a:latin typeface="Calibri" pitchFamily="34" charset="0"/>
-                <a:ea typeface="Calibri" pitchFamily="34" charset="-122"/>
-                <a:cs typeface="Calibri" pitchFamily="34" charset="-120"/>
-              </a:rPr>
               <a:t>Usman Akram  •  COMSATS University Islamabad</a:t>
             </a:r>
             <a:endParaRPr lang="en-US" sz="900" dirty="0"/>
@@ -3442,7 +4213,7 @@
       </p:sp>
       <p:sp>
         <p:nvSpPr>
-          <p:cNvPr id="8" name="Text 6"/>
+          <p:cNvPr id="7" name="Text 4"/>
           <p:cNvSpPr txBox="1"/>
           <p:nvPr/>
         </p:nvSpPr>
@@ -3544,7 +4315,7 @@
                 <a:ea typeface="Calibri" pitchFamily="34" charset="-122"/>
                 <a:cs typeface="Calibri" pitchFamily="34" charset="-120"/>
               </a:rPr>
-              <a:t>FLOATS</a:t>
+              <a:t>A COMMON MISTAKE</a:t>
             </a:r>
             <a:endParaRPr lang="en-US" sz="1300" dirty="0"/>
           </a:p>
@@ -3583,7 +4354,7 @@
                 <a:ea typeface="Cambria" pitchFamily="34" charset="-122"/>
                 <a:cs typeface="Cambria" pitchFamily="34" charset="-120"/>
               </a:rPr>
-              <a:t>Text Wrapping a Float, Rendered</a:t>
+              <a:t>Absolute Without a Positioned Ancestor</a:t>
             </a:r>
             <a:endParaRPr lang="en-US" sz="3400" dirty="0"/>
           </a:p>
@@ -3597,89 +4368,174 @@
         </p:nvSpPr>
         <p:spPr>
           <a:xfrm>
-            <a:off x="530352" y="1947672"/>
-            <a:ext cx="11130991" cy="4334256"/>
+            <a:off x="640080" y="1965960"/>
+            <a:ext cx="10911535" cy="1837944"/>
           </a:xfrm>
           <a:prstGeom prst="roundRect">
             <a:avLst>
-              <a:gd name="adj" fmla="val 1266"/>
+              <a:gd name="adj" fmla="val 3980"/>
             </a:avLst>
           </a:prstGeom>
           <a:solidFill>
-            <a:srgbClr val="FFFFFF"/>
+            <a:srgbClr val="1E1E4C"/>
           </a:solidFill>
-          <a:ln w="12700">
-            <a:solidFill>
-              <a:srgbClr val="E2E2EE"/>
-            </a:solidFill>
-            <a:prstDash val="solid"/>
-          </a:ln>
-          <a:effectLst>
-            <a:outerShdw sx="100000" sy="100000" kx="0" ky="0" algn="bl" rotWithShape="0" blurRad="101600" dist="38100" dir="5400000">
-              <a:srgbClr val="000000">
-                <a:alpha val="12000"/>
-              </a:srgbClr>
-            </a:outerShdw>
-          </a:effectLst>
-        </p:spPr>
-      </p:sp>
-      <p:pic>
-        <p:nvPicPr>
-          <p:cNvPr id="5" name="Image 0" descr="D:/GitHub/mern-web-book/docs/assets/img/lecture-07/float-wrap.png">    </p:cNvPr>
-          <p:cNvPicPr>
-            <a:picLocks noChangeAspect="1"/>
-          </p:cNvPicPr>
-          <p:nvPr/>
-        </p:nvPicPr>
-        <p:blipFill>
-          <a:blip r:embed="rId1"/>
-          <a:stretch>
-            <a:fillRect/>
-          </a:stretch>
-        </p:blipFill>
-        <p:spPr>
-          <a:xfrm>
-            <a:off x="725789" y="2057400"/>
-            <a:ext cx="10740118" cy="4114800"/>
-          </a:xfrm>
-          <a:prstGeom prst="rect">
-            <a:avLst/>
-          </a:prstGeom>
-        </p:spPr>
-      </p:pic>
-      <p:sp>
-        <p:nvSpPr>
-          <p:cNvPr id="6" name="Text 3"/>
-          <p:cNvSpPr txBox="1"/>
-          <p:nvPr/>
-        </p:nvSpPr>
-        <p:spPr>
-          <a:xfrm>
-            <a:off x="640080" y="6446520"/>
-            <a:ext cx="8686800" cy="292608"/>
-          </a:xfrm>
-          <a:prstGeom prst="rect">
-            <a:avLst/>
-          </a:prstGeom>
-          <a:noFill/>
-          <a:ln/>
-        </p:spPr>
-        <p:txBody>
-          <a:bodyPr wrap="square" lIns="0" tIns="0" rIns="0" bIns="0" rtlCol="0" anchor="ctr"/>
-          <a:lstStyle/>
-          <a:p>
-            <a:pPr algn="l" indent="0" marL="0">
-              <a:buNone/>
-            </a:pPr>
-            <a:r>
-              <a:rPr lang="en-US" sz="900" dirty="0">
-                <a:solidFill>
-                  <a:srgbClr val="5D5D72"/>
+          <a:ln/>
+        </p:spPr>
+      </p:sp>
+      <p:sp>
+        <p:nvSpPr>
+          <p:cNvPr id="5" name="Text 3"/>
+          <p:cNvSpPr txBox="1"/>
+          <p:nvPr/>
+        </p:nvSpPr>
+        <p:spPr>
+          <a:xfrm>
+            <a:off x="960120" y="2194560"/>
+            <a:ext cx="10271455" cy="1380744"/>
+          </a:xfrm>
+          <a:prstGeom prst="rect">
+            <a:avLst/>
+          </a:prstGeom>
+          <a:noFill/>
+          <a:ln/>
+        </p:spPr>
+        <p:txBody>
+          <a:bodyPr wrap="square" lIns="0" tIns="0" rIns="0" bIns="0" rtlCol="0" anchor="t"/>
+          <a:lstStyle/>
+          <a:p>
+            <a:pPr indent="0" marL="0">
+              <a:lnSpc>
+                <a:spcPct val="125000"/>
+              </a:lnSpc>
+              <a:buNone/>
+            </a:pPr>
+            <a:r>
+              <a:rPr lang="en-US" sz="1400" dirty="0">
+                <a:solidFill>
+                  <a:srgbClr val="C9D3F5"/>
+                </a:solidFill>
+                <a:latin typeface="Courier New" pitchFamily="34" charset="0"/>
+                <a:ea typeface="Courier New" pitchFamily="34" charset="-122"/>
+                <a:cs typeface="Courier New" pitchFamily="34" charset="-120"/>
+              </a:rPr>
+              <a:t>&lt;div class="card"&gt;          &lt;!-- position NOT set --&gt;</a:t>
+            </a:r>
+            <a:endParaRPr lang="en-US" sz="1400" dirty="0"/>
+          </a:p>
+          <a:p>
+            <a:pPr indent="0" marL="0">
+              <a:lnSpc>
+                <a:spcPct val="125000"/>
+              </a:lnSpc>
+              <a:buNone/>
+            </a:pPr>
+            <a:r>
+              <a:rPr lang="en-US" sz="1400" dirty="0">
+                <a:solidFill>
+                  <a:srgbClr val="C9D3F5"/>
+                </a:solidFill>
+                <a:latin typeface="Courier New" pitchFamily="34" charset="0"/>
+                <a:ea typeface="Courier New" pitchFamily="34" charset="-122"/>
+                <a:cs typeface="Courier New" pitchFamily="34" charset="-120"/>
+              </a:rPr>
+              <a:t>  &lt;span class="badge"&gt;New&lt;/span&gt;  &lt;!-- position: absolute; top:8px; right:8px; --&gt;</a:t>
+            </a:r>
+            <a:endParaRPr lang="en-US" sz="1400" dirty="0"/>
+          </a:p>
+          <a:p>
+            <a:pPr indent="0" marL="0">
+              <a:lnSpc>
+                <a:spcPct val="125000"/>
+              </a:lnSpc>
+              <a:buNone/>
+            </a:pPr>
+            <a:r>
+              <a:rPr lang="en-US" sz="1400" dirty="0">
+                <a:solidFill>
+                  <a:srgbClr val="C9D3F5"/>
+                </a:solidFill>
+                <a:latin typeface="Courier New" pitchFamily="34" charset="0"/>
+                <a:ea typeface="Courier New" pitchFamily="34" charset="-122"/>
+                <a:cs typeface="Courier New" pitchFamily="34" charset="-120"/>
+              </a:rPr>
+              <a:t>&lt;/div&gt;</a:t>
+            </a:r>
+            <a:endParaRPr lang="en-US" sz="1400" dirty="0"/>
+          </a:p>
+        </p:txBody>
+      </p:sp>
+      <p:sp>
+        <p:nvSpPr>
+          <p:cNvPr id="6" name="Text 4"/>
+          <p:cNvSpPr txBox="1"/>
+          <p:nvPr/>
+        </p:nvSpPr>
+        <p:spPr>
+          <a:xfrm>
+            <a:off x="640080" y="4032504"/>
+            <a:ext cx="10911535" cy="2231136"/>
+          </a:xfrm>
+          <a:prstGeom prst="rect">
+            <a:avLst/>
+          </a:prstGeom>
+          <a:noFill/>
+          <a:ln/>
+        </p:spPr>
+        <p:txBody>
+          <a:bodyPr wrap="square" lIns="0" tIns="0" rIns="0" bIns="0" rtlCol="0" anchor="t"/>
+          <a:lstStyle/>
+          <a:p>
+            <a:pPr indent="0" marL="0">
+              <a:buNone/>
+            </a:pPr>
+            <a:r>
+              <a:rPr lang="en-US" sz="1300" dirty="0">
+                <a:solidFill>
+                  <a:srgbClr val="26262F"/>
                 </a:solidFill>
                 <a:latin typeface="Calibri" pitchFamily="34" charset="0"/>
                 <a:ea typeface="Calibri" pitchFamily="34" charset="-122"/>
                 <a:cs typeface="Calibri" pitchFamily="34" charset="-120"/>
               </a:rPr>
+              <a:t>Without position: relative on .card, .badge's containing block becomes the whole page — it jumps to the page's top-right corner, not the card's.</a:t>
+            </a:r>
+            <a:endParaRPr lang="en-US" sz="1300" dirty="0"/>
+          </a:p>
+        </p:txBody>
+      </p:sp>
+      <p:sp>
+        <p:nvSpPr>
+          <p:cNvPr id="7" name="Text 5"/>
+          <p:cNvSpPr txBox="1"/>
+          <p:nvPr/>
+        </p:nvSpPr>
+        <p:spPr>
+          <a:xfrm>
+            <a:off x="640080" y="6446520"/>
+            <a:ext cx="8686800" cy="292608"/>
+          </a:xfrm>
+          <a:prstGeom prst="rect">
+            <a:avLst/>
+          </a:prstGeom>
+          <a:noFill/>
+          <a:ln/>
+        </p:spPr>
+        <p:txBody>
+          <a:bodyPr wrap="square" lIns="0" tIns="0" rIns="0" bIns="0" rtlCol="0" anchor="ctr"/>
+          <a:lstStyle/>
+          <a:p>
+            <a:pPr algn="l" indent="0" marL="0">
+              <a:buNone/>
+            </a:pPr>
+            <a:r>
+              <a:rPr lang="en-US" sz="900" dirty="0">
+                <a:solidFill>
+                  <a:srgbClr val="5D5D72"/>
+                </a:solidFill>
+                <a:latin typeface="Calibri" pitchFamily="34" charset="0"/>
+                <a:ea typeface="Calibri" pitchFamily="34" charset="-122"/>
+                <a:cs typeface="Calibri" pitchFamily="34" charset="-120"/>
+              </a:rPr>
               <a:t>Usman Akram  •  COMSATS University Islamabad</a:t>
             </a:r>
             <a:endParaRPr lang="en-US" sz="900" dirty="0"/>
@@ -3688,7 +4544,7 @@
       </p:sp>
       <p:sp>
         <p:nvSpPr>
-          <p:cNvPr id="7" name="Text 4"/>
+          <p:cNvPr id="8" name="Text 6"/>
           <p:cNvSpPr txBox="1"/>
           <p:nvPr/>
         </p:nvSpPr>
@@ -3790,7 +4646,7 @@
                 <a:ea typeface="Calibri" pitchFamily="34" charset="-122"/>
                 <a:cs typeface="Calibri" pitchFamily="34" charset="-120"/>
               </a:rPr>
-              <a:t>FLOATS</a:t>
+              <a:t>STACKING ORDER</a:t>
             </a:r>
             <a:endParaRPr lang="en-US" sz="1300" dirty="0"/>
           </a:p>
@@ -3829,6 +4685,3219 @@
                 <a:ea typeface="Cambria" pitchFamily="34" charset="-122"/>
                 <a:cs typeface="Cambria" pitchFamily="34" charset="-120"/>
               </a:rPr>
+              <a:t>z-index</a:t>
+            </a:r>
+            <a:endParaRPr lang="en-US" sz="3400" dirty="0"/>
+          </a:p>
+        </p:txBody>
+      </p:sp>
+      <p:sp>
+        <p:nvSpPr>
+          <p:cNvPr id="4" name="Shape 2"/>
+          <p:cNvSpPr/>
+          <p:nvPr/>
+        </p:nvSpPr>
+        <p:spPr>
+          <a:xfrm>
+            <a:off x="640080" y="1965960"/>
+            <a:ext cx="10911535" cy="1453896"/>
+          </a:xfrm>
+          <a:prstGeom prst="roundRect">
+            <a:avLst>
+              <a:gd name="adj" fmla="val 5031"/>
+            </a:avLst>
+          </a:prstGeom>
+          <a:solidFill>
+            <a:srgbClr val="1E1E4C"/>
+          </a:solidFill>
+          <a:ln/>
+        </p:spPr>
+      </p:sp>
+      <p:sp>
+        <p:nvSpPr>
+          <p:cNvPr id="5" name="Text 3"/>
+          <p:cNvSpPr txBox="1"/>
+          <p:nvPr/>
+        </p:nvSpPr>
+        <p:spPr>
+          <a:xfrm>
+            <a:off x="960120" y="2194560"/>
+            <a:ext cx="10271455" cy="996696"/>
+          </a:xfrm>
+          <a:prstGeom prst="rect">
+            <a:avLst/>
+          </a:prstGeom>
+          <a:noFill/>
+          <a:ln/>
+        </p:spPr>
+        <p:txBody>
+          <a:bodyPr wrap="square" lIns="0" tIns="0" rIns="0" bIns="0" rtlCol="0" anchor="t"/>
+          <a:lstStyle/>
+          <a:p>
+            <a:pPr indent="0" marL="0">
+              <a:lnSpc>
+                <a:spcPct val="125000"/>
+              </a:lnSpc>
+              <a:buNone/>
+            </a:pPr>
+            <a:r>
+              <a:rPr lang="en-US" sz="1400" dirty="0">
+                <a:solidFill>
+                  <a:srgbClr val="C9D3F5"/>
+                </a:solidFill>
+                <a:latin typeface="Courier New" pitchFamily="34" charset="0"/>
+                <a:ea typeface="Courier New" pitchFamily="34" charset="-122"/>
+                <a:cs typeface="Courier New" pitchFamily="34" charset="-120"/>
+              </a:rPr>
+              <a:t>.back  { position: absolute; z-index: 1; }</a:t>
+            </a:r>
+            <a:endParaRPr lang="en-US" sz="1400" dirty="0"/>
+          </a:p>
+          <a:p>
+            <a:pPr indent="0" marL="0">
+              <a:lnSpc>
+                <a:spcPct val="125000"/>
+              </a:lnSpc>
+              <a:buNone/>
+            </a:pPr>
+            <a:r>
+              <a:rPr lang="en-US" sz="1400" dirty="0">
+                <a:solidFill>
+                  <a:srgbClr val="C9D3F5"/>
+                </a:solidFill>
+                <a:latin typeface="Courier New" pitchFamily="34" charset="0"/>
+                <a:ea typeface="Courier New" pitchFamily="34" charset="-122"/>
+                <a:cs typeface="Courier New" pitchFamily="34" charset="-120"/>
+              </a:rPr>
+              <a:t>.front { position: absolute; z-index: 2; }  /* drawn on top */</a:t>
+            </a:r>
+            <a:endParaRPr lang="en-US" sz="1400" dirty="0"/>
+          </a:p>
+        </p:txBody>
+      </p:sp>
+      <p:sp>
+        <p:nvSpPr>
+          <p:cNvPr id="6" name="Text 4"/>
+          <p:cNvSpPr txBox="1"/>
+          <p:nvPr/>
+        </p:nvSpPr>
+        <p:spPr>
+          <a:xfrm>
+            <a:off x="640080" y="3648456"/>
+            <a:ext cx="10911535" cy="2615184"/>
+          </a:xfrm>
+          <a:prstGeom prst="rect">
+            <a:avLst/>
+          </a:prstGeom>
+          <a:noFill/>
+          <a:ln/>
+        </p:spPr>
+        <p:txBody>
+          <a:bodyPr wrap="square" lIns="0" tIns="0" rIns="0" bIns="0" rtlCol="0" anchor="t"/>
+          <a:lstStyle/>
+          <a:p>
+            <a:pPr indent="0" marL="0">
+              <a:buNone/>
+            </a:pPr>
+            <a:r>
+              <a:rPr lang="en-US" sz="1300" dirty="0">
+                <a:solidFill>
+                  <a:srgbClr val="26262F"/>
+                </a:solidFill>
+                <a:latin typeface="Calibri" pitchFamily="34" charset="0"/>
+                <a:ea typeface="Calibri" pitchFamily="34" charset="-122"/>
+                <a:cs typeface="Calibri" pitchFamily="34" charset="-120"/>
+              </a:rPr>
+              <a:t>z-index only works on positioned elements (not static) — a higher value draws on top among overlapping elements.</a:t>
+            </a:r>
+            <a:endParaRPr lang="en-US" sz="1300" dirty="0"/>
+          </a:p>
+        </p:txBody>
+      </p:sp>
+      <p:sp>
+        <p:nvSpPr>
+          <p:cNvPr id="7" name="Text 5"/>
+          <p:cNvSpPr txBox="1"/>
+          <p:nvPr/>
+        </p:nvSpPr>
+        <p:spPr>
+          <a:xfrm>
+            <a:off x="640080" y="6446520"/>
+            <a:ext cx="8686800" cy="292608"/>
+          </a:xfrm>
+          <a:prstGeom prst="rect">
+            <a:avLst/>
+          </a:prstGeom>
+          <a:noFill/>
+          <a:ln/>
+        </p:spPr>
+        <p:txBody>
+          <a:bodyPr wrap="square" lIns="0" tIns="0" rIns="0" bIns="0" rtlCol="0" anchor="ctr"/>
+          <a:lstStyle/>
+          <a:p>
+            <a:pPr algn="l" indent="0" marL="0">
+              <a:buNone/>
+            </a:pPr>
+            <a:r>
+              <a:rPr lang="en-US" sz="900" dirty="0">
+                <a:solidFill>
+                  <a:srgbClr val="5D5D72"/>
+                </a:solidFill>
+                <a:latin typeface="Calibri" pitchFamily="34" charset="0"/>
+                <a:ea typeface="Calibri" pitchFamily="34" charset="-122"/>
+                <a:cs typeface="Calibri" pitchFamily="34" charset="-120"/>
+              </a:rPr>
+              <a:t>Usman Akram  •  COMSATS University Islamabad</a:t>
+            </a:r>
+            <a:endParaRPr lang="en-US" sz="900" dirty="0"/>
+          </a:p>
+        </p:txBody>
+      </p:sp>
+      <p:sp>
+        <p:nvSpPr>
+          <p:cNvPr id="8" name="Text 6"/>
+          <p:cNvSpPr txBox="1"/>
+          <p:nvPr/>
+        </p:nvSpPr>
+        <p:spPr>
+          <a:xfrm>
+            <a:off x="11155680" y="6446520"/>
+            <a:ext cx="457200" cy="292608"/>
+          </a:xfrm>
+          <a:prstGeom prst="rect">
+            <a:avLst/>
+          </a:prstGeom>
+          <a:noFill/>
+          <a:ln/>
+        </p:spPr>
+        <p:txBody>
+          <a:bodyPr wrap="square" lIns="0" tIns="0" rIns="0" bIns="0" rtlCol="0" anchor="ctr"/>
+          <a:lstStyle/>
+          <a:p>
+            <a:pPr algn="r" indent="0" marL="0">
+              <a:buNone/>
+            </a:pPr>
+            <a:r>
+              <a:rPr lang="en-US" sz="900" dirty="0">
+                <a:solidFill>
+                  <a:srgbClr val="5D5D72"/>
+                </a:solidFill>
+                <a:latin typeface="Calibri" pitchFamily="34" charset="0"/>
+                <a:ea typeface="Calibri" pitchFamily="34" charset="-122"/>
+                <a:cs typeface="Calibri" pitchFamily="34" charset="-120"/>
+              </a:rPr>
+              <a:t>13</a:t>
+            </a:r>
+            <a:endParaRPr lang="en-US" sz="900" dirty="0"/>
+          </a:p>
+        </p:txBody>
+      </p:sp>
+    </p:spTree>
+  </p:cSld>
+  <p:clrMapOvr>
+    <a:masterClrMapping/>
+  </p:clrMapOvr>
+</p:sld>
+</file>
+
+<file path=ppt/slides/slide14.xml><?xml version="1.0" encoding="utf-8"?>
+<p:sld xmlns:a="http://schemas.openxmlformats.org/drawingml/2006/main" xmlns:r="http://schemas.openxmlformats.org/officeDocument/2006/relationships" xmlns:p="http://schemas.openxmlformats.org/presentationml/2006/main">
+  <p:cSld name="Slide 14">
+    <p:bg>
+      <p:bgPr>
+        <a:solidFill>
+          <a:srgbClr val="FFFFFF"/>
+        </a:solidFill>
+      </p:bgPr>
+    </p:bg>
+    <p:spTree>
+      <p:nvGrpSpPr>
+        <p:cNvPr id="1" name=""/>
+        <p:cNvGrpSpPr/>
+        <p:nvPr/>
+      </p:nvGrpSpPr>
+      <p:grpSpPr>
+        <a:xfrm>
+          <a:off x="0" y="0"/>
+          <a:ext cx="0" cy="0"/>
+          <a:chOff x="0" y="0"/>
+          <a:chExt cx="0" cy="0"/>
+        </a:xfrm>
+      </p:grpSpPr>
+      <p:sp>
+        <p:nvSpPr>
+          <p:cNvPr id="2" name="Text 0"/>
+          <p:cNvSpPr txBox="1"/>
+          <p:nvPr/>
+        </p:nvSpPr>
+        <p:spPr>
+          <a:xfrm>
+            <a:off x="640080" y="457200"/>
+            <a:ext cx="10058400" cy="365760"/>
+          </a:xfrm>
+          <a:prstGeom prst="rect">
+            <a:avLst/>
+          </a:prstGeom>
+          <a:noFill/>
+          <a:ln/>
+        </p:spPr>
+        <p:txBody>
+          <a:bodyPr wrap="square" lIns="0" tIns="0" rIns="0" bIns="0" rtlCol="0" anchor="ctr"/>
+          <a:lstStyle/>
+          <a:p>
+            <a:pPr algn="l" indent="0" marL="0">
+              <a:buNone/>
+            </a:pPr>
+            <a:r>
+              <a:rPr lang="en-US" sz="1300" b="1" spc="300" kern="0" dirty="0">
+                <a:solidFill>
+                  <a:srgbClr val="FF8A3D"/>
+                </a:solidFill>
+                <a:latin typeface="Calibri" pitchFamily="34" charset="0"/>
+                <a:ea typeface="Calibri" pitchFamily="34" charset="-122"/>
+                <a:cs typeface="Calibri" pitchFamily="34" charset="-120"/>
+              </a:rPr>
+              <a:t>STACKING ORDER</a:t>
+            </a:r>
+            <a:endParaRPr lang="en-US" sz="1300" dirty="0"/>
+          </a:p>
+        </p:txBody>
+      </p:sp>
+      <p:sp>
+        <p:nvSpPr>
+          <p:cNvPr id="3" name="Text 1"/>
+          <p:cNvSpPr txBox="1"/>
+          <p:nvPr/>
+        </p:nvSpPr>
+        <p:spPr>
+          <a:xfrm>
+            <a:off x="640080" y="841248"/>
+            <a:ext cx="10881360" cy="914400"/>
+          </a:xfrm>
+          <a:prstGeom prst="rect">
+            <a:avLst/>
+          </a:prstGeom>
+          <a:noFill/>
+          <a:ln/>
+        </p:spPr>
+        <p:txBody>
+          <a:bodyPr wrap="square" lIns="0" tIns="0" rIns="0" bIns="0" rtlCol="0" anchor="ctr"/>
+          <a:lstStyle/>
+          <a:p>
+            <a:pPr algn="l" indent="0" marL="0">
+              <a:buNone/>
+            </a:pPr>
+            <a:r>
+              <a:rPr lang="en-US" sz="3400" b="1" dirty="0">
+                <a:solidFill>
+                  <a:srgbClr val="2B2B7A"/>
+                </a:solidFill>
+                <a:latin typeface="Cambria" pitchFamily="34" charset="0"/>
+                <a:ea typeface="Cambria" pitchFamily="34" charset="-122"/>
+                <a:cs typeface="Cambria" pitchFamily="34" charset="-120"/>
+              </a:rPr>
+              <a:t>z-index, Rendered</a:t>
+            </a:r>
+            <a:endParaRPr lang="en-US" sz="3400" dirty="0"/>
+          </a:p>
+        </p:txBody>
+      </p:sp>
+      <p:sp>
+        <p:nvSpPr>
+          <p:cNvPr id="4" name="Shape 2"/>
+          <p:cNvSpPr/>
+          <p:nvPr/>
+        </p:nvSpPr>
+        <p:spPr>
+          <a:xfrm>
+            <a:off x="530352" y="1947672"/>
+            <a:ext cx="11130991" cy="4334256"/>
+          </a:xfrm>
+          <a:prstGeom prst="roundRect">
+            <a:avLst>
+              <a:gd name="adj" fmla="val 1266"/>
+            </a:avLst>
+          </a:prstGeom>
+          <a:solidFill>
+            <a:srgbClr val="FFFFFF"/>
+          </a:solidFill>
+          <a:ln w="12700">
+            <a:solidFill>
+              <a:srgbClr val="E2E2EE"/>
+            </a:solidFill>
+            <a:prstDash val="solid"/>
+          </a:ln>
+          <a:effectLst>
+            <a:outerShdw sx="100000" sy="100000" kx="0" ky="0" algn="bl" rotWithShape="0" blurRad="101600" dist="38100" dir="5400000">
+              <a:srgbClr val="000000">
+                <a:alpha val="12000"/>
+              </a:srgbClr>
+            </a:outerShdw>
+          </a:effectLst>
+        </p:spPr>
+      </p:sp>
+      <p:pic>
+        <p:nvPicPr>
+          <p:cNvPr id="5" name="Image 0" descr="D:/GitHub/mern-web-book/docs/assets/img/lecture-07/z-index-stacking.png">    </p:cNvPr>
+          <p:cNvPicPr>
+            <a:picLocks noChangeAspect="1"/>
+          </p:cNvPicPr>
+          <p:nvPr/>
+        </p:nvPicPr>
+        <p:blipFill>
+          <a:blip r:embed="rId1"/>
+          <a:stretch>
+            <a:fillRect/>
+          </a:stretch>
+        </p:blipFill>
+        <p:spPr>
+          <a:xfrm>
+            <a:off x="3402138" y="2057400"/>
+            <a:ext cx="5387419" cy="4114800"/>
+          </a:xfrm>
+          <a:prstGeom prst="rect">
+            <a:avLst/>
+          </a:prstGeom>
+        </p:spPr>
+      </p:pic>
+      <p:sp>
+        <p:nvSpPr>
+          <p:cNvPr id="6" name="Text 3"/>
+          <p:cNvSpPr txBox="1"/>
+          <p:nvPr/>
+        </p:nvSpPr>
+        <p:spPr>
+          <a:xfrm>
+            <a:off x="640080" y="6446520"/>
+            <a:ext cx="8686800" cy="292608"/>
+          </a:xfrm>
+          <a:prstGeom prst="rect">
+            <a:avLst/>
+          </a:prstGeom>
+          <a:noFill/>
+          <a:ln/>
+        </p:spPr>
+        <p:txBody>
+          <a:bodyPr wrap="square" lIns="0" tIns="0" rIns="0" bIns="0" rtlCol="0" anchor="ctr"/>
+          <a:lstStyle/>
+          <a:p>
+            <a:pPr algn="l" indent="0" marL="0">
+              <a:buNone/>
+            </a:pPr>
+            <a:r>
+              <a:rPr lang="en-US" sz="900" dirty="0">
+                <a:solidFill>
+                  <a:srgbClr val="5D5D72"/>
+                </a:solidFill>
+                <a:latin typeface="Calibri" pitchFamily="34" charset="0"/>
+                <a:ea typeface="Calibri" pitchFamily="34" charset="-122"/>
+                <a:cs typeface="Calibri" pitchFamily="34" charset="-120"/>
+              </a:rPr>
+              <a:t>Usman Akram  •  COMSATS University Islamabad</a:t>
+            </a:r>
+            <a:endParaRPr lang="en-US" sz="900" dirty="0"/>
+          </a:p>
+        </p:txBody>
+      </p:sp>
+      <p:sp>
+        <p:nvSpPr>
+          <p:cNvPr id="7" name="Text 4"/>
+          <p:cNvSpPr txBox="1"/>
+          <p:nvPr/>
+        </p:nvSpPr>
+        <p:spPr>
+          <a:xfrm>
+            <a:off x="11155680" y="6446520"/>
+            <a:ext cx="457200" cy="292608"/>
+          </a:xfrm>
+          <a:prstGeom prst="rect">
+            <a:avLst/>
+          </a:prstGeom>
+          <a:noFill/>
+          <a:ln/>
+        </p:spPr>
+        <p:txBody>
+          <a:bodyPr wrap="square" lIns="0" tIns="0" rIns="0" bIns="0" rtlCol="0" anchor="ctr"/>
+          <a:lstStyle/>
+          <a:p>
+            <a:pPr algn="r" indent="0" marL="0">
+              <a:buNone/>
+            </a:pPr>
+            <a:r>
+              <a:rPr lang="en-US" sz="900" dirty="0">
+                <a:solidFill>
+                  <a:srgbClr val="5D5D72"/>
+                </a:solidFill>
+                <a:latin typeface="Calibri" pitchFamily="34" charset="0"/>
+                <a:ea typeface="Calibri" pitchFamily="34" charset="-122"/>
+                <a:cs typeface="Calibri" pitchFamily="34" charset="-120"/>
+              </a:rPr>
+              <a:t>14</a:t>
+            </a:r>
+            <a:endParaRPr lang="en-US" sz="900" dirty="0"/>
+          </a:p>
+        </p:txBody>
+      </p:sp>
+    </p:spTree>
+  </p:cSld>
+  <p:clrMapOvr>
+    <a:masterClrMapping/>
+  </p:clrMapOvr>
+</p:sld>
+</file>
+
+<file path=ppt/slides/slide15.xml><?xml version="1.0" encoding="utf-8"?>
+<p:sld xmlns:a="http://schemas.openxmlformats.org/drawingml/2006/main" xmlns:r="http://schemas.openxmlformats.org/officeDocument/2006/relationships" xmlns:p="http://schemas.openxmlformats.org/presentationml/2006/main">
+  <p:cSld name="Slide 15">
+    <p:bg>
+      <p:bgPr>
+        <a:solidFill>
+          <a:srgbClr val="FFFFFF"/>
+        </a:solidFill>
+      </p:bgPr>
+    </p:bg>
+    <p:spTree>
+      <p:nvGrpSpPr>
+        <p:cNvPr id="1" name=""/>
+        <p:cNvGrpSpPr/>
+        <p:nvPr/>
+      </p:nvGrpSpPr>
+      <p:grpSpPr>
+        <a:xfrm>
+          <a:off x="0" y="0"/>
+          <a:ext cx="0" cy="0"/>
+          <a:chOff x="0" y="0"/>
+          <a:chExt cx="0" cy="0"/>
+        </a:xfrm>
+      </p:grpSpPr>
+      <p:sp>
+        <p:nvSpPr>
+          <p:cNvPr id="2" name="Text 0"/>
+          <p:cNvSpPr txBox="1"/>
+          <p:nvPr/>
+        </p:nvSpPr>
+        <p:spPr>
+          <a:xfrm>
+            <a:off x="640080" y="457200"/>
+            <a:ext cx="10058400" cy="365760"/>
+          </a:xfrm>
+          <a:prstGeom prst="rect">
+            <a:avLst/>
+          </a:prstGeom>
+          <a:noFill/>
+          <a:ln/>
+        </p:spPr>
+        <p:txBody>
+          <a:bodyPr wrap="square" lIns="0" tIns="0" rIns="0" bIns="0" rtlCol="0" anchor="ctr"/>
+          <a:lstStyle/>
+          <a:p>
+            <a:pPr algn="l" indent="0" marL="0">
+              <a:buNone/>
+            </a:pPr>
+            <a:r>
+              <a:rPr lang="en-US" sz="1300" b="1" spc="300" kern="0" dirty="0">
+                <a:solidFill>
+                  <a:srgbClr val="FF8A3D"/>
+                </a:solidFill>
+                <a:latin typeface="Calibri" pitchFamily="34" charset="0"/>
+                <a:ea typeface="Calibri" pitchFamily="34" charset="-122"/>
+                <a:cs typeface="Calibri" pitchFamily="34" charset="-120"/>
+              </a:rPr>
+              <a:t>STACKING ORDER</a:t>
+            </a:r>
+            <a:endParaRPr lang="en-US" sz="1300" dirty="0"/>
+          </a:p>
+        </p:txBody>
+      </p:sp>
+      <p:sp>
+        <p:nvSpPr>
+          <p:cNvPr id="3" name="Text 1"/>
+          <p:cNvSpPr txBox="1"/>
+          <p:nvPr/>
+        </p:nvSpPr>
+        <p:spPr>
+          <a:xfrm>
+            <a:off x="640080" y="841248"/>
+            <a:ext cx="10881360" cy="914400"/>
+          </a:xfrm>
+          <a:prstGeom prst="rect">
+            <a:avLst/>
+          </a:prstGeom>
+          <a:noFill/>
+          <a:ln/>
+        </p:spPr>
+        <p:txBody>
+          <a:bodyPr wrap="square" lIns="0" tIns="0" rIns="0" bIns="0" rtlCol="0" anchor="ctr"/>
+          <a:lstStyle/>
+          <a:p>
+            <a:pPr algn="l" indent="0" marL="0">
+              <a:buNone/>
+            </a:pPr>
+            <a:r>
+              <a:rPr lang="en-US" sz="3400" b="1" dirty="0">
+                <a:solidFill>
+                  <a:srgbClr val="2B2B7A"/>
+                </a:solidFill>
+                <a:latin typeface="Cambria" pitchFamily="34" charset="0"/>
+                <a:ea typeface="Cambria" pitchFamily="34" charset="-122"/>
+                <a:cs typeface="Cambria" pitchFamily="34" charset="-120"/>
+              </a:rPr>
+              <a:t>Stacking Contexts</a:t>
+            </a:r>
+            <a:endParaRPr lang="en-US" sz="3400" dirty="0"/>
+          </a:p>
+        </p:txBody>
+      </p:sp>
+      <p:sp>
+        <p:nvSpPr>
+          <p:cNvPr id="4" name="Shape 2"/>
+          <p:cNvSpPr/>
+          <p:nvPr/>
+        </p:nvSpPr>
+        <p:spPr>
+          <a:xfrm>
+            <a:off x="685800" y="2185416"/>
+            <a:ext cx="82296" cy="82296"/>
+          </a:xfrm>
+          <a:prstGeom prst="ellipse">
+            <a:avLst/>
+          </a:prstGeom>
+          <a:solidFill>
+            <a:srgbClr val="FF8A3D"/>
+          </a:solidFill>
+          <a:ln/>
+        </p:spPr>
+      </p:sp>
+      <p:sp>
+        <p:nvSpPr>
+          <p:cNvPr id="5" name="Text 3"/>
+          <p:cNvSpPr txBox="1"/>
+          <p:nvPr/>
+        </p:nvSpPr>
+        <p:spPr>
+          <a:xfrm>
+            <a:off x="960120" y="1892808"/>
+            <a:ext cx="10591495" cy="640080"/>
+          </a:xfrm>
+          <a:prstGeom prst="rect">
+            <a:avLst/>
+          </a:prstGeom>
+          <a:noFill/>
+          <a:ln/>
+        </p:spPr>
+        <p:txBody>
+          <a:bodyPr wrap="square" lIns="0" tIns="0" rIns="0" bIns="0" rtlCol="0" anchor="ctr"/>
+          <a:lstStyle/>
+          <a:p>
+            <a:pPr indent="0" marL="0">
+              <a:buNone/>
+            </a:pPr>
+            <a:r>
+              <a:rPr lang="en-US" sz="1500" dirty="0">
+                <a:solidFill>
+                  <a:srgbClr val="26262F"/>
+                </a:solidFill>
+                <a:latin typeface="Calibri" pitchFamily="34" charset="0"/>
+                <a:ea typeface="Calibri" pitchFamily="34" charset="-122"/>
+                <a:cs typeface="Calibri" pitchFamily="34" charset="-120"/>
+              </a:rPr>
+              <a:t>A stacking context is a self-contained layer for z-index comparisons</a:t>
+            </a:r>
+            <a:endParaRPr lang="en-US" sz="1500" dirty="0"/>
+          </a:p>
+        </p:txBody>
+      </p:sp>
+      <p:sp>
+        <p:nvSpPr>
+          <p:cNvPr id="6" name="Shape 4"/>
+          <p:cNvSpPr/>
+          <p:nvPr/>
+        </p:nvSpPr>
+        <p:spPr>
+          <a:xfrm>
+            <a:off x="685800" y="3008376"/>
+            <a:ext cx="82296" cy="82296"/>
+          </a:xfrm>
+          <a:prstGeom prst="ellipse">
+            <a:avLst/>
+          </a:prstGeom>
+          <a:solidFill>
+            <a:srgbClr val="FF8A3D"/>
+          </a:solidFill>
+          <a:ln/>
+        </p:spPr>
+      </p:sp>
+      <p:sp>
+        <p:nvSpPr>
+          <p:cNvPr id="7" name="Text 5"/>
+          <p:cNvSpPr txBox="1"/>
+          <p:nvPr/>
+        </p:nvSpPr>
+        <p:spPr>
+          <a:xfrm>
+            <a:off x="960120" y="2715768"/>
+            <a:ext cx="10591495" cy="640080"/>
+          </a:xfrm>
+          <a:prstGeom prst="rect">
+            <a:avLst/>
+          </a:prstGeom>
+          <a:noFill/>
+          <a:ln/>
+        </p:spPr>
+        <p:txBody>
+          <a:bodyPr wrap="square" lIns="0" tIns="0" rIns="0" bIns="0" rtlCol="0" anchor="ctr"/>
+          <a:lstStyle/>
+          <a:p>
+            <a:pPr indent="0" marL="0">
+              <a:buNone/>
+            </a:pPr>
+            <a:r>
+              <a:rPr lang="en-US" sz="1500" dirty="0">
+                <a:solidFill>
+                  <a:srgbClr val="26262F"/>
+                </a:solidFill>
+                <a:latin typeface="Calibri" pitchFamily="34" charset="0"/>
+                <a:ea typeface="Calibri" pitchFamily="34" charset="-122"/>
+                <a:cs typeface="Calibri" pitchFamily="34" charset="-120"/>
+              </a:rPr>
+              <a:t>position + z-index, opacity &lt; 1, or transform can create a new stacking context</a:t>
+            </a:r>
+            <a:endParaRPr lang="en-US" sz="1500" dirty="0"/>
+          </a:p>
+        </p:txBody>
+      </p:sp>
+      <p:sp>
+        <p:nvSpPr>
+          <p:cNvPr id="8" name="Shape 6"/>
+          <p:cNvSpPr/>
+          <p:nvPr/>
+        </p:nvSpPr>
+        <p:spPr>
+          <a:xfrm>
+            <a:off x="685800" y="3831336"/>
+            <a:ext cx="82296" cy="82296"/>
+          </a:xfrm>
+          <a:prstGeom prst="ellipse">
+            <a:avLst/>
+          </a:prstGeom>
+          <a:solidFill>
+            <a:srgbClr val="FF8A3D"/>
+          </a:solidFill>
+          <a:ln/>
+        </p:spPr>
+      </p:sp>
+      <p:sp>
+        <p:nvSpPr>
+          <p:cNvPr id="9" name="Text 7"/>
+          <p:cNvSpPr txBox="1"/>
+          <p:nvPr/>
+        </p:nvSpPr>
+        <p:spPr>
+          <a:xfrm>
+            <a:off x="960120" y="3538728"/>
+            <a:ext cx="10591495" cy="640080"/>
+          </a:xfrm>
+          <a:prstGeom prst="rect">
+            <a:avLst/>
+          </a:prstGeom>
+          <a:noFill/>
+          <a:ln/>
+        </p:spPr>
+        <p:txBody>
+          <a:bodyPr wrap="square" lIns="0" tIns="0" rIns="0" bIns="0" rtlCol="0" anchor="ctr"/>
+          <a:lstStyle/>
+          <a:p>
+            <a:pPr indent="0" marL="0">
+              <a:buNone/>
+            </a:pPr>
+            <a:r>
+              <a:rPr lang="en-US" sz="1500" dirty="0">
+                <a:solidFill>
+                  <a:srgbClr val="26262F"/>
+                </a:solidFill>
+                <a:latin typeface="Calibri" pitchFamily="34" charset="0"/>
+                <a:ea typeface="Calibri" pitchFamily="34" charset="-122"/>
+                <a:cs typeface="Calibri" pitchFamily="34" charset="-120"/>
+              </a:rPr>
+              <a:t>z-index values only compare WITHIN the same stacking context — a huge z-index can still lose if it's trapped inside an ancestor's context</a:t>
+            </a:r>
+            <a:endParaRPr lang="en-US" sz="1500" dirty="0"/>
+          </a:p>
+        </p:txBody>
+      </p:sp>
+      <p:sp>
+        <p:nvSpPr>
+          <p:cNvPr id="10" name="Text 8"/>
+          <p:cNvSpPr txBox="1"/>
+          <p:nvPr/>
+        </p:nvSpPr>
+        <p:spPr>
+          <a:xfrm>
+            <a:off x="640080" y="6446520"/>
+            <a:ext cx="8686800" cy="292608"/>
+          </a:xfrm>
+          <a:prstGeom prst="rect">
+            <a:avLst/>
+          </a:prstGeom>
+          <a:noFill/>
+          <a:ln/>
+        </p:spPr>
+        <p:txBody>
+          <a:bodyPr wrap="square" lIns="0" tIns="0" rIns="0" bIns="0" rtlCol="0" anchor="ctr"/>
+          <a:lstStyle/>
+          <a:p>
+            <a:pPr algn="l" indent="0" marL="0">
+              <a:buNone/>
+            </a:pPr>
+            <a:r>
+              <a:rPr lang="en-US" sz="900" dirty="0">
+                <a:solidFill>
+                  <a:srgbClr val="5D5D72"/>
+                </a:solidFill>
+                <a:latin typeface="Calibri" pitchFamily="34" charset="0"/>
+                <a:ea typeface="Calibri" pitchFamily="34" charset="-122"/>
+                <a:cs typeface="Calibri" pitchFamily="34" charset="-120"/>
+              </a:rPr>
+              <a:t>Usman Akram  •  COMSATS University Islamabad</a:t>
+            </a:r>
+            <a:endParaRPr lang="en-US" sz="900" dirty="0"/>
+          </a:p>
+        </p:txBody>
+      </p:sp>
+      <p:sp>
+        <p:nvSpPr>
+          <p:cNvPr id="11" name="Text 9"/>
+          <p:cNvSpPr txBox="1"/>
+          <p:nvPr/>
+        </p:nvSpPr>
+        <p:spPr>
+          <a:xfrm>
+            <a:off x="11155680" y="6446520"/>
+            <a:ext cx="457200" cy="292608"/>
+          </a:xfrm>
+          <a:prstGeom prst="rect">
+            <a:avLst/>
+          </a:prstGeom>
+          <a:noFill/>
+          <a:ln/>
+        </p:spPr>
+        <p:txBody>
+          <a:bodyPr wrap="square" lIns="0" tIns="0" rIns="0" bIns="0" rtlCol="0" anchor="ctr"/>
+          <a:lstStyle/>
+          <a:p>
+            <a:pPr algn="r" indent="0" marL="0">
+              <a:buNone/>
+            </a:pPr>
+            <a:r>
+              <a:rPr lang="en-US" sz="900" dirty="0">
+                <a:solidFill>
+                  <a:srgbClr val="5D5D72"/>
+                </a:solidFill>
+                <a:latin typeface="Calibri" pitchFamily="34" charset="0"/>
+                <a:ea typeface="Calibri" pitchFamily="34" charset="-122"/>
+                <a:cs typeface="Calibri" pitchFamily="34" charset="-120"/>
+              </a:rPr>
+              <a:t>15</a:t>
+            </a:r>
+            <a:endParaRPr lang="en-US" sz="900" dirty="0"/>
+          </a:p>
+        </p:txBody>
+      </p:sp>
+    </p:spTree>
+  </p:cSld>
+  <p:clrMapOvr>
+    <a:masterClrMapping/>
+  </p:clrMapOvr>
+</p:sld>
+</file>
+
+<file path=ppt/slides/slide16.xml><?xml version="1.0" encoding="utf-8"?>
+<p:sld xmlns:a="http://schemas.openxmlformats.org/drawingml/2006/main" xmlns:r="http://schemas.openxmlformats.org/officeDocument/2006/relationships" xmlns:p="http://schemas.openxmlformats.org/presentationml/2006/main">
+  <p:cSld name="Slide 16">
+    <p:bg>
+      <p:bgPr>
+        <a:solidFill>
+          <a:srgbClr val="FFFFFF"/>
+        </a:solidFill>
+      </p:bgPr>
+    </p:bg>
+    <p:spTree>
+      <p:nvGrpSpPr>
+        <p:cNvPr id="1" name=""/>
+        <p:cNvGrpSpPr/>
+        <p:nvPr/>
+      </p:nvGrpSpPr>
+      <p:grpSpPr>
+        <a:xfrm>
+          <a:off x="0" y="0"/>
+          <a:ext cx="0" cy="0"/>
+          <a:chOff x="0" y="0"/>
+          <a:chExt cx="0" cy="0"/>
+        </a:xfrm>
+      </p:grpSpPr>
+      <p:sp>
+        <p:nvSpPr>
+          <p:cNvPr id="2" name="Text 0"/>
+          <p:cNvSpPr txBox="1"/>
+          <p:nvPr/>
+        </p:nvSpPr>
+        <p:spPr>
+          <a:xfrm>
+            <a:off x="640080" y="457200"/>
+            <a:ext cx="10058400" cy="365760"/>
+          </a:xfrm>
+          <a:prstGeom prst="rect">
+            <a:avLst/>
+          </a:prstGeom>
+          <a:noFill/>
+          <a:ln/>
+        </p:spPr>
+        <p:txBody>
+          <a:bodyPr wrap="square" lIns="0" tIns="0" rIns="0" bIns="0" rtlCol="0" anchor="ctr"/>
+          <a:lstStyle/>
+          <a:p>
+            <a:pPr algn="l" indent="0" marL="0">
+              <a:buNone/>
+            </a:pPr>
+            <a:r>
+              <a:rPr lang="en-US" sz="1300" b="1" spc="300" kern="0" dirty="0">
+                <a:solidFill>
+                  <a:srgbClr val="FF8A3D"/>
+                </a:solidFill>
+                <a:latin typeface="Calibri" pitchFamily="34" charset="0"/>
+                <a:ea typeface="Calibri" pitchFamily="34" charset="-122"/>
+                <a:cs typeface="Calibri" pitchFamily="34" charset="-120"/>
+              </a:rPr>
+              <a:t>FLOATS</a:t>
+            </a:r>
+            <a:endParaRPr lang="en-US" sz="1300" dirty="0"/>
+          </a:p>
+        </p:txBody>
+      </p:sp>
+      <p:sp>
+        <p:nvSpPr>
+          <p:cNvPr id="3" name="Text 1"/>
+          <p:cNvSpPr txBox="1"/>
+          <p:nvPr/>
+        </p:nvSpPr>
+        <p:spPr>
+          <a:xfrm>
+            <a:off x="640080" y="841248"/>
+            <a:ext cx="10881360" cy="914400"/>
+          </a:xfrm>
+          <a:prstGeom prst="rect">
+            <a:avLst/>
+          </a:prstGeom>
+          <a:noFill/>
+          <a:ln/>
+        </p:spPr>
+        <p:txBody>
+          <a:bodyPr wrap="square" lIns="0" tIns="0" rIns="0" bIns="0" rtlCol="0" anchor="ctr"/>
+          <a:lstStyle/>
+          <a:p>
+            <a:pPr algn="l" indent="0" marL="0">
+              <a:buNone/>
+            </a:pPr>
+            <a:r>
+              <a:rPr lang="en-US" sz="3400" b="1" dirty="0">
+                <a:solidFill>
+                  <a:srgbClr val="2B2B7A"/>
+                </a:solidFill>
+                <a:latin typeface="Cambria" pitchFamily="34" charset="0"/>
+                <a:ea typeface="Cambria" pitchFamily="34" charset="-122"/>
+                <a:cs typeface="Cambria" pitchFamily="34" charset="-120"/>
+              </a:rPr>
+              <a:t>float: left</a:t>
+            </a:r>
+            <a:endParaRPr lang="en-US" sz="3400" dirty="0"/>
+          </a:p>
+        </p:txBody>
+      </p:sp>
+      <p:sp>
+        <p:nvSpPr>
+          <p:cNvPr id="4" name="Shape 2"/>
+          <p:cNvSpPr/>
+          <p:nvPr/>
+        </p:nvSpPr>
+        <p:spPr>
+          <a:xfrm>
+            <a:off x="640080" y="1965960"/>
+            <a:ext cx="10911535" cy="1069848"/>
+          </a:xfrm>
+          <a:prstGeom prst="roundRect">
+            <a:avLst>
+              <a:gd name="adj" fmla="val 6838"/>
+            </a:avLst>
+          </a:prstGeom>
+          <a:solidFill>
+            <a:srgbClr val="1E1E4C"/>
+          </a:solidFill>
+          <a:ln/>
+        </p:spPr>
+      </p:sp>
+      <p:sp>
+        <p:nvSpPr>
+          <p:cNvPr id="5" name="Text 3"/>
+          <p:cNvSpPr txBox="1"/>
+          <p:nvPr/>
+        </p:nvSpPr>
+        <p:spPr>
+          <a:xfrm>
+            <a:off x="960120" y="2194560"/>
+            <a:ext cx="10271455" cy="612648"/>
+          </a:xfrm>
+          <a:prstGeom prst="rect">
+            <a:avLst/>
+          </a:prstGeom>
+          <a:noFill/>
+          <a:ln/>
+        </p:spPr>
+        <p:txBody>
+          <a:bodyPr wrap="square" lIns="0" tIns="0" rIns="0" bIns="0" rtlCol="0" anchor="t"/>
+          <a:lstStyle/>
+          <a:p>
+            <a:pPr indent="0" marL="0">
+              <a:lnSpc>
+                <a:spcPct val="125000"/>
+              </a:lnSpc>
+              <a:buNone/>
+            </a:pPr>
+            <a:r>
+              <a:rPr lang="en-US" sz="1400" dirty="0">
+                <a:solidFill>
+                  <a:srgbClr val="C9D3F5"/>
+                </a:solidFill>
+                <a:latin typeface="Courier New" pitchFamily="34" charset="0"/>
+                <a:ea typeface="Courier New" pitchFamily="34" charset="-122"/>
+                <a:cs typeface="Courier New" pitchFamily="34" charset="-120"/>
+              </a:rPr>
+              <a:t>.image { float: left; margin-right: 15px; }</a:t>
+            </a:r>
+            <a:endParaRPr lang="en-US" sz="1400" dirty="0"/>
+          </a:p>
+        </p:txBody>
+      </p:sp>
+      <p:sp>
+        <p:nvSpPr>
+          <p:cNvPr id="6" name="Text 4"/>
+          <p:cNvSpPr txBox="1"/>
+          <p:nvPr/>
+        </p:nvSpPr>
+        <p:spPr>
+          <a:xfrm>
+            <a:off x="640080" y="3264408"/>
+            <a:ext cx="10911535" cy="2999232"/>
+          </a:xfrm>
+          <a:prstGeom prst="rect">
+            <a:avLst/>
+          </a:prstGeom>
+          <a:noFill/>
+          <a:ln/>
+        </p:spPr>
+        <p:txBody>
+          <a:bodyPr wrap="square" lIns="0" tIns="0" rIns="0" bIns="0" rtlCol="0" anchor="t"/>
+          <a:lstStyle/>
+          <a:p>
+            <a:pPr indent="0" marL="0">
+              <a:buNone/>
+            </a:pPr>
+            <a:r>
+              <a:rPr lang="en-US" sz="1300" dirty="0">
+                <a:solidFill>
+                  <a:srgbClr val="26262F"/>
+                </a:solidFill>
+                <a:latin typeface="Calibri" pitchFamily="34" charset="0"/>
+                <a:ea typeface="Calibri" pitchFamily="34" charset="-122"/>
+                <a:cs typeface="Calibri" pitchFamily="34" charset="-120"/>
+              </a:rPr>
+              <a:t>Originally for text wrapping around an image. A floated element shifts to one edge; other content flows around it.</a:t>
+            </a:r>
+            <a:endParaRPr lang="en-US" sz="1300" dirty="0"/>
+          </a:p>
+        </p:txBody>
+      </p:sp>
+      <p:sp>
+        <p:nvSpPr>
+          <p:cNvPr id="7" name="Text 5"/>
+          <p:cNvSpPr txBox="1"/>
+          <p:nvPr/>
+        </p:nvSpPr>
+        <p:spPr>
+          <a:xfrm>
+            <a:off x="640080" y="6446520"/>
+            <a:ext cx="8686800" cy="292608"/>
+          </a:xfrm>
+          <a:prstGeom prst="rect">
+            <a:avLst/>
+          </a:prstGeom>
+          <a:noFill/>
+          <a:ln/>
+        </p:spPr>
+        <p:txBody>
+          <a:bodyPr wrap="square" lIns="0" tIns="0" rIns="0" bIns="0" rtlCol="0" anchor="ctr"/>
+          <a:lstStyle/>
+          <a:p>
+            <a:pPr algn="l" indent="0" marL="0">
+              <a:buNone/>
+            </a:pPr>
+            <a:r>
+              <a:rPr lang="en-US" sz="900" dirty="0">
+                <a:solidFill>
+                  <a:srgbClr val="5D5D72"/>
+                </a:solidFill>
+                <a:latin typeface="Calibri" pitchFamily="34" charset="0"/>
+                <a:ea typeface="Calibri" pitchFamily="34" charset="-122"/>
+                <a:cs typeface="Calibri" pitchFamily="34" charset="-120"/>
+              </a:rPr>
+              <a:t>Usman Akram  •  COMSATS University Islamabad</a:t>
+            </a:r>
+            <a:endParaRPr lang="en-US" sz="900" dirty="0"/>
+          </a:p>
+        </p:txBody>
+      </p:sp>
+      <p:sp>
+        <p:nvSpPr>
+          <p:cNvPr id="8" name="Text 6"/>
+          <p:cNvSpPr txBox="1"/>
+          <p:nvPr/>
+        </p:nvSpPr>
+        <p:spPr>
+          <a:xfrm>
+            <a:off x="11155680" y="6446520"/>
+            <a:ext cx="457200" cy="292608"/>
+          </a:xfrm>
+          <a:prstGeom prst="rect">
+            <a:avLst/>
+          </a:prstGeom>
+          <a:noFill/>
+          <a:ln/>
+        </p:spPr>
+        <p:txBody>
+          <a:bodyPr wrap="square" lIns="0" tIns="0" rIns="0" bIns="0" rtlCol="0" anchor="ctr"/>
+          <a:lstStyle/>
+          <a:p>
+            <a:pPr algn="r" indent="0" marL="0">
+              <a:buNone/>
+            </a:pPr>
+            <a:r>
+              <a:rPr lang="en-US" sz="900" dirty="0">
+                <a:solidFill>
+                  <a:srgbClr val="5D5D72"/>
+                </a:solidFill>
+                <a:latin typeface="Calibri" pitchFamily="34" charset="0"/>
+                <a:ea typeface="Calibri" pitchFamily="34" charset="-122"/>
+                <a:cs typeface="Calibri" pitchFamily="34" charset="-120"/>
+              </a:rPr>
+              <a:t>16</a:t>
+            </a:r>
+            <a:endParaRPr lang="en-US" sz="900" dirty="0"/>
+          </a:p>
+        </p:txBody>
+      </p:sp>
+    </p:spTree>
+  </p:cSld>
+  <p:clrMapOvr>
+    <a:masterClrMapping/>
+  </p:clrMapOvr>
+</p:sld>
+</file>
+
+<file path=ppt/slides/slide17.xml><?xml version="1.0" encoding="utf-8"?>
+<p:sld xmlns:a="http://schemas.openxmlformats.org/drawingml/2006/main" xmlns:r="http://schemas.openxmlformats.org/officeDocument/2006/relationships" xmlns:p="http://schemas.openxmlformats.org/presentationml/2006/main">
+  <p:cSld name="Slide 17">
+    <p:bg>
+      <p:bgPr>
+        <a:solidFill>
+          <a:srgbClr val="FFFFFF"/>
+        </a:solidFill>
+      </p:bgPr>
+    </p:bg>
+    <p:spTree>
+      <p:nvGrpSpPr>
+        <p:cNvPr id="1" name=""/>
+        <p:cNvGrpSpPr/>
+        <p:nvPr/>
+      </p:nvGrpSpPr>
+      <p:grpSpPr>
+        <a:xfrm>
+          <a:off x="0" y="0"/>
+          <a:ext cx="0" cy="0"/>
+          <a:chOff x="0" y="0"/>
+          <a:chExt cx="0" cy="0"/>
+        </a:xfrm>
+      </p:grpSpPr>
+      <p:sp>
+        <p:nvSpPr>
+          <p:cNvPr id="2" name="Text 0"/>
+          <p:cNvSpPr txBox="1"/>
+          <p:nvPr/>
+        </p:nvSpPr>
+        <p:spPr>
+          <a:xfrm>
+            <a:off x="640080" y="457200"/>
+            <a:ext cx="10058400" cy="365760"/>
+          </a:xfrm>
+          <a:prstGeom prst="rect">
+            <a:avLst/>
+          </a:prstGeom>
+          <a:noFill/>
+          <a:ln/>
+        </p:spPr>
+        <p:txBody>
+          <a:bodyPr wrap="square" lIns="0" tIns="0" rIns="0" bIns="0" rtlCol="0" anchor="ctr"/>
+          <a:lstStyle/>
+          <a:p>
+            <a:pPr algn="l" indent="0" marL="0">
+              <a:buNone/>
+            </a:pPr>
+            <a:r>
+              <a:rPr lang="en-US" sz="1300" b="1" spc="300" kern="0" dirty="0">
+                <a:solidFill>
+                  <a:srgbClr val="FF8A3D"/>
+                </a:solidFill>
+                <a:latin typeface="Calibri" pitchFamily="34" charset="0"/>
+                <a:ea typeface="Calibri" pitchFamily="34" charset="-122"/>
+                <a:cs typeface="Calibri" pitchFamily="34" charset="-120"/>
+              </a:rPr>
+              <a:t>FLOATS</a:t>
+            </a:r>
+            <a:endParaRPr lang="en-US" sz="1300" dirty="0"/>
+          </a:p>
+        </p:txBody>
+      </p:sp>
+      <p:sp>
+        <p:nvSpPr>
+          <p:cNvPr id="3" name="Text 1"/>
+          <p:cNvSpPr txBox="1"/>
+          <p:nvPr/>
+        </p:nvSpPr>
+        <p:spPr>
+          <a:xfrm>
+            <a:off x="640080" y="841248"/>
+            <a:ext cx="10881360" cy="914400"/>
+          </a:xfrm>
+          <a:prstGeom prst="rect">
+            <a:avLst/>
+          </a:prstGeom>
+          <a:noFill/>
+          <a:ln/>
+        </p:spPr>
+        <p:txBody>
+          <a:bodyPr wrap="square" lIns="0" tIns="0" rIns="0" bIns="0" rtlCol="0" anchor="ctr"/>
+          <a:lstStyle/>
+          <a:p>
+            <a:pPr algn="l" indent="0" marL="0">
+              <a:buNone/>
+            </a:pPr>
+            <a:r>
+              <a:rPr lang="en-US" sz="3400" b="1" dirty="0">
+                <a:solidFill>
+                  <a:srgbClr val="2B2B7A"/>
+                </a:solidFill>
+                <a:latin typeface="Cambria" pitchFamily="34" charset="0"/>
+                <a:ea typeface="Cambria" pitchFamily="34" charset="-122"/>
+                <a:cs typeface="Cambria" pitchFamily="34" charset="-120"/>
+              </a:rPr>
+              <a:t>Text Wrapping a Float, Rendered</a:t>
+            </a:r>
+            <a:endParaRPr lang="en-US" sz="3400" dirty="0"/>
+          </a:p>
+        </p:txBody>
+      </p:sp>
+      <p:sp>
+        <p:nvSpPr>
+          <p:cNvPr id="4" name="Shape 2"/>
+          <p:cNvSpPr/>
+          <p:nvPr/>
+        </p:nvSpPr>
+        <p:spPr>
+          <a:xfrm>
+            <a:off x="530352" y="1947672"/>
+            <a:ext cx="11130991" cy="4334256"/>
+          </a:xfrm>
+          <a:prstGeom prst="roundRect">
+            <a:avLst>
+              <a:gd name="adj" fmla="val 1266"/>
+            </a:avLst>
+          </a:prstGeom>
+          <a:solidFill>
+            <a:srgbClr val="FFFFFF"/>
+          </a:solidFill>
+          <a:ln w="12700">
+            <a:solidFill>
+              <a:srgbClr val="E2E2EE"/>
+            </a:solidFill>
+            <a:prstDash val="solid"/>
+          </a:ln>
+          <a:effectLst>
+            <a:outerShdw sx="100000" sy="100000" kx="0" ky="0" algn="bl" rotWithShape="0" blurRad="101600" dist="38100" dir="5400000">
+              <a:srgbClr val="000000">
+                <a:alpha val="12000"/>
+              </a:srgbClr>
+            </a:outerShdw>
+          </a:effectLst>
+        </p:spPr>
+      </p:sp>
+      <p:pic>
+        <p:nvPicPr>
+          <p:cNvPr id="5" name="Image 0" descr="D:/GitHub/mern-web-book/docs/assets/img/lecture-07/float-wrap.png">    </p:cNvPr>
+          <p:cNvPicPr>
+            <a:picLocks noChangeAspect="1"/>
+          </p:cNvPicPr>
+          <p:nvPr/>
+        </p:nvPicPr>
+        <p:blipFill>
+          <a:blip r:embed="rId1"/>
+          <a:stretch>
+            <a:fillRect/>
+          </a:stretch>
+        </p:blipFill>
+        <p:spPr>
+          <a:xfrm>
+            <a:off x="725789" y="2057400"/>
+            <a:ext cx="10740118" cy="4114800"/>
+          </a:xfrm>
+          <a:prstGeom prst="rect">
+            <a:avLst/>
+          </a:prstGeom>
+        </p:spPr>
+      </p:pic>
+      <p:sp>
+        <p:nvSpPr>
+          <p:cNvPr id="6" name="Text 3"/>
+          <p:cNvSpPr txBox="1"/>
+          <p:nvPr/>
+        </p:nvSpPr>
+        <p:spPr>
+          <a:xfrm>
+            <a:off x="640080" y="6446520"/>
+            <a:ext cx="8686800" cy="292608"/>
+          </a:xfrm>
+          <a:prstGeom prst="rect">
+            <a:avLst/>
+          </a:prstGeom>
+          <a:noFill/>
+          <a:ln/>
+        </p:spPr>
+        <p:txBody>
+          <a:bodyPr wrap="square" lIns="0" tIns="0" rIns="0" bIns="0" rtlCol="0" anchor="ctr"/>
+          <a:lstStyle/>
+          <a:p>
+            <a:pPr algn="l" indent="0" marL="0">
+              <a:buNone/>
+            </a:pPr>
+            <a:r>
+              <a:rPr lang="en-US" sz="900" dirty="0">
+                <a:solidFill>
+                  <a:srgbClr val="5D5D72"/>
+                </a:solidFill>
+                <a:latin typeface="Calibri" pitchFamily="34" charset="0"/>
+                <a:ea typeface="Calibri" pitchFamily="34" charset="-122"/>
+                <a:cs typeface="Calibri" pitchFamily="34" charset="-120"/>
+              </a:rPr>
+              <a:t>Usman Akram  •  COMSATS University Islamabad</a:t>
+            </a:r>
+            <a:endParaRPr lang="en-US" sz="900" dirty="0"/>
+          </a:p>
+        </p:txBody>
+      </p:sp>
+      <p:sp>
+        <p:nvSpPr>
+          <p:cNvPr id="7" name="Text 4"/>
+          <p:cNvSpPr txBox="1"/>
+          <p:nvPr/>
+        </p:nvSpPr>
+        <p:spPr>
+          <a:xfrm>
+            <a:off x="11155680" y="6446520"/>
+            <a:ext cx="457200" cy="292608"/>
+          </a:xfrm>
+          <a:prstGeom prst="rect">
+            <a:avLst/>
+          </a:prstGeom>
+          <a:noFill/>
+          <a:ln/>
+        </p:spPr>
+        <p:txBody>
+          <a:bodyPr wrap="square" lIns="0" tIns="0" rIns="0" bIns="0" rtlCol="0" anchor="ctr"/>
+          <a:lstStyle/>
+          <a:p>
+            <a:pPr algn="r" indent="0" marL="0">
+              <a:buNone/>
+            </a:pPr>
+            <a:r>
+              <a:rPr lang="en-US" sz="900" dirty="0">
+                <a:solidFill>
+                  <a:srgbClr val="5D5D72"/>
+                </a:solidFill>
+                <a:latin typeface="Calibri" pitchFamily="34" charset="0"/>
+                <a:ea typeface="Calibri" pitchFamily="34" charset="-122"/>
+                <a:cs typeface="Calibri" pitchFamily="34" charset="-120"/>
+              </a:rPr>
+              <a:t>17</a:t>
+            </a:r>
+            <a:endParaRPr lang="en-US" sz="900" dirty="0"/>
+          </a:p>
+        </p:txBody>
+      </p:sp>
+    </p:spTree>
+  </p:cSld>
+  <p:clrMapOvr>
+    <a:masterClrMapping/>
+  </p:clrMapOvr>
+</p:sld>
+</file>
+
+<file path=ppt/slides/slide18.xml><?xml version="1.0" encoding="utf-8"?>
+<p:sld xmlns:a="http://schemas.openxmlformats.org/drawingml/2006/main" xmlns:r="http://schemas.openxmlformats.org/officeDocument/2006/relationships" xmlns:p="http://schemas.openxmlformats.org/presentationml/2006/main">
+  <p:cSld name="Slide 18">
+    <p:bg>
+      <p:bgPr>
+        <a:solidFill>
+          <a:srgbClr val="FFFFFF"/>
+        </a:solidFill>
+      </p:bgPr>
+    </p:bg>
+    <p:spTree>
+      <p:nvGrpSpPr>
+        <p:cNvPr id="1" name=""/>
+        <p:cNvGrpSpPr/>
+        <p:nvPr/>
+      </p:nvGrpSpPr>
+      <p:grpSpPr>
+        <a:xfrm>
+          <a:off x="0" y="0"/>
+          <a:ext cx="0" cy="0"/>
+          <a:chOff x="0" y="0"/>
+          <a:chExt cx="0" cy="0"/>
+        </a:xfrm>
+      </p:grpSpPr>
+      <p:sp>
+        <p:nvSpPr>
+          <p:cNvPr id="2" name="Text 0"/>
+          <p:cNvSpPr txBox="1"/>
+          <p:nvPr/>
+        </p:nvSpPr>
+        <p:spPr>
+          <a:xfrm>
+            <a:off x="640080" y="457200"/>
+            <a:ext cx="10058400" cy="365760"/>
+          </a:xfrm>
+          <a:prstGeom prst="rect">
+            <a:avLst/>
+          </a:prstGeom>
+          <a:noFill/>
+          <a:ln/>
+        </p:spPr>
+        <p:txBody>
+          <a:bodyPr wrap="square" lIns="0" tIns="0" rIns="0" bIns="0" rtlCol="0" anchor="ctr"/>
+          <a:lstStyle/>
+          <a:p>
+            <a:pPr algn="l" indent="0" marL="0">
+              <a:buNone/>
+            </a:pPr>
+            <a:r>
+              <a:rPr lang="en-US" sz="1300" b="1" spc="300" kern="0" dirty="0">
+                <a:solidFill>
+                  <a:srgbClr val="FF8A3D"/>
+                </a:solidFill>
+                <a:latin typeface="Calibri" pitchFamily="34" charset="0"/>
+                <a:ea typeface="Calibri" pitchFamily="34" charset="-122"/>
+                <a:cs typeface="Calibri" pitchFamily="34" charset="-120"/>
+              </a:rPr>
+              <a:t>FLOATS</a:t>
+            </a:r>
+            <a:endParaRPr lang="en-US" sz="1300" dirty="0"/>
+          </a:p>
+        </p:txBody>
+      </p:sp>
+      <p:sp>
+        <p:nvSpPr>
+          <p:cNvPr id="3" name="Text 1"/>
+          <p:cNvSpPr txBox="1"/>
+          <p:nvPr/>
+        </p:nvSpPr>
+        <p:spPr>
+          <a:xfrm>
+            <a:off x="640080" y="841248"/>
+            <a:ext cx="10881360" cy="914400"/>
+          </a:xfrm>
+          <a:prstGeom prst="rect">
+            <a:avLst/>
+          </a:prstGeom>
+          <a:noFill/>
+          <a:ln/>
+        </p:spPr>
+        <p:txBody>
+          <a:bodyPr wrap="square" lIns="0" tIns="0" rIns="0" bIns="0" rtlCol="0" anchor="ctr"/>
+          <a:lstStyle/>
+          <a:p>
+            <a:pPr algn="l" indent="0" marL="0">
+              <a:buNone/>
+            </a:pPr>
+            <a:r>
+              <a:rPr lang="en-US" sz="3400" b="1" dirty="0">
+                <a:solidFill>
+                  <a:srgbClr val="2B2B7A"/>
+                </a:solidFill>
+                <a:latin typeface="Cambria" pitchFamily="34" charset="0"/>
+                <a:ea typeface="Cambria" pitchFamily="34" charset="-122"/>
+                <a:cs typeface="Cambria" pitchFamily="34" charset="-120"/>
+              </a:rPr>
+              <a:t>float: right — the Mirror Image</a:t>
+            </a:r>
+            <a:endParaRPr lang="en-US" sz="3400" dirty="0"/>
+          </a:p>
+        </p:txBody>
+      </p:sp>
+      <p:sp>
+        <p:nvSpPr>
+          <p:cNvPr id="4" name="Shape 2"/>
+          <p:cNvSpPr/>
+          <p:nvPr/>
+        </p:nvSpPr>
+        <p:spPr>
+          <a:xfrm>
+            <a:off x="640080" y="1965960"/>
+            <a:ext cx="10911535" cy="2221992"/>
+          </a:xfrm>
+          <a:prstGeom prst="roundRect">
+            <a:avLst>
+              <a:gd name="adj" fmla="val 3292"/>
+            </a:avLst>
+          </a:prstGeom>
+          <a:solidFill>
+            <a:srgbClr val="1E1E4C"/>
+          </a:solidFill>
+          <a:ln/>
+        </p:spPr>
+      </p:sp>
+      <p:sp>
+        <p:nvSpPr>
+          <p:cNvPr id="5" name="Text 3"/>
+          <p:cNvSpPr txBox="1"/>
+          <p:nvPr/>
+        </p:nvSpPr>
+        <p:spPr>
+          <a:xfrm>
+            <a:off x="960120" y="2194560"/>
+            <a:ext cx="10271455" cy="1764792"/>
+          </a:xfrm>
+          <a:prstGeom prst="rect">
+            <a:avLst/>
+          </a:prstGeom>
+          <a:noFill/>
+          <a:ln/>
+        </p:spPr>
+        <p:txBody>
+          <a:bodyPr wrap="square" lIns="0" tIns="0" rIns="0" bIns="0" rtlCol="0" anchor="t"/>
+          <a:lstStyle/>
+          <a:p>
+            <a:pPr indent="0" marL="0">
+              <a:lnSpc>
+                <a:spcPct val="125000"/>
+              </a:lnSpc>
+              <a:buNone/>
+            </a:pPr>
+            <a:r>
+              <a:rPr lang="en-US" sz="1400" dirty="0">
+                <a:solidFill>
+                  <a:srgbClr val="C9D3F5"/>
+                </a:solidFill>
+                <a:latin typeface="Courier New" pitchFamily="34" charset="0"/>
+                <a:ea typeface="Courier New" pitchFamily="34" charset="-122"/>
+                <a:cs typeface="Courier New" pitchFamily="34" charset="-120"/>
+              </a:rPr>
+              <a:t>.image {</a:t>
+            </a:r>
+            <a:endParaRPr lang="en-US" sz="1400" dirty="0"/>
+          </a:p>
+          <a:p>
+            <a:pPr indent="0" marL="0">
+              <a:lnSpc>
+                <a:spcPct val="125000"/>
+              </a:lnSpc>
+              <a:buNone/>
+            </a:pPr>
+            <a:r>
+              <a:rPr lang="en-US" sz="1400" dirty="0">
+                <a:solidFill>
+                  <a:srgbClr val="C9D3F5"/>
+                </a:solidFill>
+                <a:latin typeface="Courier New" pitchFamily="34" charset="0"/>
+                <a:ea typeface="Courier New" pitchFamily="34" charset="-122"/>
+                <a:cs typeface="Courier New" pitchFamily="34" charset="-120"/>
+              </a:rPr>
+              <a:t>  float: right;</a:t>
+            </a:r>
+            <a:endParaRPr lang="en-US" sz="1400" dirty="0"/>
+          </a:p>
+          <a:p>
+            <a:pPr indent="0" marL="0">
+              <a:lnSpc>
+                <a:spcPct val="125000"/>
+              </a:lnSpc>
+              <a:buNone/>
+            </a:pPr>
+            <a:r>
+              <a:rPr lang="en-US" sz="1400" dirty="0">
+                <a:solidFill>
+                  <a:srgbClr val="C9D3F5"/>
+                </a:solidFill>
+                <a:latin typeface="Courier New" pitchFamily="34" charset="0"/>
+                <a:ea typeface="Courier New" pitchFamily="34" charset="-122"/>
+                <a:cs typeface="Courier New" pitchFamily="34" charset="-120"/>
+              </a:rPr>
+              <a:t>  margin-left: 15px;</a:t>
+            </a:r>
+            <a:endParaRPr lang="en-US" sz="1400" dirty="0"/>
+          </a:p>
+          <a:p>
+            <a:pPr indent="0" marL="0">
+              <a:lnSpc>
+                <a:spcPct val="125000"/>
+              </a:lnSpc>
+              <a:buNone/>
+            </a:pPr>
+            <a:r>
+              <a:rPr lang="en-US" sz="1400" dirty="0">
+                <a:solidFill>
+                  <a:srgbClr val="C9D3F5"/>
+                </a:solidFill>
+                <a:latin typeface="Courier New" pitchFamily="34" charset="0"/>
+                <a:ea typeface="Courier New" pitchFamily="34" charset="-122"/>
+                <a:cs typeface="Courier New" pitchFamily="34" charset="-120"/>
+              </a:rPr>
+              <a:t>}</a:t>
+            </a:r>
+            <a:endParaRPr lang="en-US" sz="1400" dirty="0"/>
+          </a:p>
+        </p:txBody>
+      </p:sp>
+      <p:sp>
+        <p:nvSpPr>
+          <p:cNvPr id="6" name="Text 4"/>
+          <p:cNvSpPr txBox="1"/>
+          <p:nvPr/>
+        </p:nvSpPr>
+        <p:spPr>
+          <a:xfrm>
+            <a:off x="640080" y="4416552"/>
+            <a:ext cx="10911535" cy="1847088"/>
+          </a:xfrm>
+          <a:prstGeom prst="rect">
+            <a:avLst/>
+          </a:prstGeom>
+          <a:noFill/>
+          <a:ln/>
+        </p:spPr>
+        <p:txBody>
+          <a:bodyPr wrap="square" lIns="0" tIns="0" rIns="0" bIns="0" rtlCol="0" anchor="t"/>
+          <a:lstStyle/>
+          <a:p>
+            <a:pPr indent="0" marL="0">
+              <a:buNone/>
+            </a:pPr>
+            <a:r>
+              <a:rPr lang="en-US" sz="1300" dirty="0">
+                <a:solidFill>
+                  <a:srgbClr val="26262F"/>
+                </a:solidFill>
+                <a:latin typeface="Calibri" pitchFamily="34" charset="0"/>
+                <a:ea typeface="Calibri" pitchFamily="34" charset="-122"/>
+                <a:cs typeface="Calibri" pitchFamily="34" charset="-120"/>
+              </a:rPr>
+              <a:t>Exactly the same idea, flipped: the image sits at the right edge, and text wraps along its left side instead.</a:t>
+            </a:r>
+            <a:endParaRPr lang="en-US" sz="1300" dirty="0"/>
+          </a:p>
+        </p:txBody>
+      </p:sp>
+      <p:sp>
+        <p:nvSpPr>
+          <p:cNvPr id="7" name="Text 5"/>
+          <p:cNvSpPr txBox="1"/>
+          <p:nvPr/>
+        </p:nvSpPr>
+        <p:spPr>
+          <a:xfrm>
+            <a:off x="640080" y="6446520"/>
+            <a:ext cx="8686800" cy="292608"/>
+          </a:xfrm>
+          <a:prstGeom prst="rect">
+            <a:avLst/>
+          </a:prstGeom>
+          <a:noFill/>
+          <a:ln/>
+        </p:spPr>
+        <p:txBody>
+          <a:bodyPr wrap="square" lIns="0" tIns="0" rIns="0" bIns="0" rtlCol="0" anchor="ctr"/>
+          <a:lstStyle/>
+          <a:p>
+            <a:pPr algn="l" indent="0" marL="0">
+              <a:buNone/>
+            </a:pPr>
+            <a:r>
+              <a:rPr lang="en-US" sz="900" dirty="0">
+                <a:solidFill>
+                  <a:srgbClr val="5D5D72"/>
+                </a:solidFill>
+                <a:latin typeface="Calibri" pitchFamily="34" charset="0"/>
+                <a:ea typeface="Calibri" pitchFamily="34" charset="-122"/>
+                <a:cs typeface="Calibri" pitchFamily="34" charset="-120"/>
+              </a:rPr>
+              <a:t>Usman Akram  •  COMSATS University Islamabad</a:t>
+            </a:r>
+            <a:endParaRPr lang="en-US" sz="900" dirty="0"/>
+          </a:p>
+        </p:txBody>
+      </p:sp>
+      <p:sp>
+        <p:nvSpPr>
+          <p:cNvPr id="8" name="Text 6"/>
+          <p:cNvSpPr txBox="1"/>
+          <p:nvPr/>
+        </p:nvSpPr>
+        <p:spPr>
+          <a:xfrm>
+            <a:off x="11155680" y="6446520"/>
+            <a:ext cx="457200" cy="292608"/>
+          </a:xfrm>
+          <a:prstGeom prst="rect">
+            <a:avLst/>
+          </a:prstGeom>
+          <a:noFill/>
+          <a:ln/>
+        </p:spPr>
+        <p:txBody>
+          <a:bodyPr wrap="square" lIns="0" tIns="0" rIns="0" bIns="0" rtlCol="0" anchor="ctr"/>
+          <a:lstStyle/>
+          <a:p>
+            <a:pPr algn="r" indent="0" marL="0">
+              <a:buNone/>
+            </a:pPr>
+            <a:r>
+              <a:rPr lang="en-US" sz="900" dirty="0">
+                <a:solidFill>
+                  <a:srgbClr val="5D5D72"/>
+                </a:solidFill>
+                <a:latin typeface="Calibri" pitchFamily="34" charset="0"/>
+                <a:ea typeface="Calibri" pitchFamily="34" charset="-122"/>
+                <a:cs typeface="Calibri" pitchFamily="34" charset="-120"/>
+              </a:rPr>
+              <a:t>18</a:t>
+            </a:r>
+            <a:endParaRPr lang="en-US" sz="900" dirty="0"/>
+          </a:p>
+        </p:txBody>
+      </p:sp>
+    </p:spTree>
+  </p:cSld>
+  <p:clrMapOvr>
+    <a:masterClrMapping/>
+  </p:clrMapOvr>
+</p:sld>
+</file>
+
+<file path=ppt/slides/slide19.xml><?xml version="1.0" encoding="utf-8"?>
+<p:sld xmlns:a="http://schemas.openxmlformats.org/drawingml/2006/main" xmlns:r="http://schemas.openxmlformats.org/officeDocument/2006/relationships" xmlns:p="http://schemas.openxmlformats.org/presentationml/2006/main">
+  <p:cSld name="Slide 19">
+    <p:bg>
+      <p:bgPr>
+        <a:solidFill>
+          <a:srgbClr val="FFFFFF"/>
+        </a:solidFill>
+      </p:bgPr>
+    </p:bg>
+    <p:spTree>
+      <p:nvGrpSpPr>
+        <p:cNvPr id="1" name=""/>
+        <p:cNvGrpSpPr/>
+        <p:nvPr/>
+      </p:nvGrpSpPr>
+      <p:grpSpPr>
+        <a:xfrm>
+          <a:off x="0" y="0"/>
+          <a:ext cx="0" cy="0"/>
+          <a:chOff x="0" y="0"/>
+          <a:chExt cx="0" cy="0"/>
+        </a:xfrm>
+      </p:grpSpPr>
+      <p:sp>
+        <p:nvSpPr>
+          <p:cNvPr id="2" name="Text 0"/>
+          <p:cNvSpPr txBox="1"/>
+          <p:nvPr/>
+        </p:nvSpPr>
+        <p:spPr>
+          <a:xfrm>
+            <a:off x="640080" y="457200"/>
+            <a:ext cx="10058400" cy="365760"/>
+          </a:xfrm>
+          <a:prstGeom prst="rect">
+            <a:avLst/>
+          </a:prstGeom>
+          <a:noFill/>
+          <a:ln/>
+        </p:spPr>
+        <p:txBody>
+          <a:bodyPr wrap="square" lIns="0" tIns="0" rIns="0" bIns="0" rtlCol="0" anchor="ctr"/>
+          <a:lstStyle/>
+          <a:p>
+            <a:pPr algn="l" indent="0" marL="0">
+              <a:buNone/>
+            </a:pPr>
+            <a:r>
+              <a:rPr lang="en-US" sz="1300" b="1" spc="300" kern="0" dirty="0">
+                <a:solidFill>
+                  <a:srgbClr val="FF8A3D"/>
+                </a:solidFill>
+                <a:latin typeface="Calibri" pitchFamily="34" charset="0"/>
+                <a:ea typeface="Calibri" pitchFamily="34" charset="-122"/>
+                <a:cs typeface="Calibri" pitchFamily="34" charset="-120"/>
+              </a:rPr>
+              <a:t>FLOATS</a:t>
+            </a:r>
+            <a:endParaRPr lang="en-US" sz="1300" dirty="0"/>
+          </a:p>
+        </p:txBody>
+      </p:sp>
+      <p:sp>
+        <p:nvSpPr>
+          <p:cNvPr id="3" name="Text 1"/>
+          <p:cNvSpPr txBox="1"/>
+          <p:nvPr/>
+        </p:nvSpPr>
+        <p:spPr>
+          <a:xfrm>
+            <a:off x="640080" y="841248"/>
+            <a:ext cx="10881360" cy="914400"/>
+          </a:xfrm>
+          <a:prstGeom prst="rect">
+            <a:avLst/>
+          </a:prstGeom>
+          <a:noFill/>
+          <a:ln/>
+        </p:spPr>
+        <p:txBody>
+          <a:bodyPr wrap="square" lIns="0" tIns="0" rIns="0" bIns="0" rtlCol="0" anchor="ctr"/>
+          <a:lstStyle/>
+          <a:p>
+            <a:pPr algn="l" indent="0" marL="0">
+              <a:buNone/>
+            </a:pPr>
+            <a:r>
+              <a:rPr lang="en-US" sz="3400" b="1" dirty="0">
+                <a:solidFill>
+                  <a:srgbClr val="2B2B7A"/>
+                </a:solidFill>
+                <a:latin typeface="Cambria" pitchFamily="34" charset="0"/>
+                <a:ea typeface="Cambria" pitchFamily="34" charset="-122"/>
+                <a:cs typeface="Cambria" pitchFamily="34" charset="-120"/>
+              </a:rPr>
+              <a:t>A Classic Two-Column Layout</a:t>
+            </a:r>
+            <a:endParaRPr lang="en-US" sz="3400" dirty="0"/>
+          </a:p>
+        </p:txBody>
+      </p:sp>
+      <p:sp>
+        <p:nvSpPr>
+          <p:cNvPr id="4" name="Shape 2"/>
+          <p:cNvSpPr/>
+          <p:nvPr/>
+        </p:nvSpPr>
+        <p:spPr>
+          <a:xfrm>
+            <a:off x="640080" y="1965960"/>
+            <a:ext cx="10911535" cy="2606040"/>
+          </a:xfrm>
+          <a:prstGeom prst="roundRect">
+            <a:avLst>
+              <a:gd name="adj" fmla="val 2807"/>
+            </a:avLst>
+          </a:prstGeom>
+          <a:solidFill>
+            <a:srgbClr val="1E1E4C"/>
+          </a:solidFill>
+          <a:ln/>
+        </p:spPr>
+      </p:sp>
+      <p:sp>
+        <p:nvSpPr>
+          <p:cNvPr id="5" name="Text 3"/>
+          <p:cNvSpPr txBox="1"/>
+          <p:nvPr/>
+        </p:nvSpPr>
+        <p:spPr>
+          <a:xfrm>
+            <a:off x="960120" y="2194560"/>
+            <a:ext cx="10271455" cy="2148840"/>
+          </a:xfrm>
+          <a:prstGeom prst="rect">
+            <a:avLst/>
+          </a:prstGeom>
+          <a:noFill/>
+          <a:ln/>
+        </p:spPr>
+        <p:txBody>
+          <a:bodyPr wrap="square" lIns="0" tIns="0" rIns="0" bIns="0" rtlCol="0" anchor="t"/>
+          <a:lstStyle/>
+          <a:p>
+            <a:pPr indent="0" marL="0">
+              <a:lnSpc>
+                <a:spcPct val="125000"/>
+              </a:lnSpc>
+              <a:buNone/>
+            </a:pPr>
+            <a:r>
+              <a:rPr lang="en-US" sz="1400" dirty="0">
+                <a:solidFill>
+                  <a:srgbClr val="C9D3F5"/>
+                </a:solidFill>
+                <a:latin typeface="Courier New" pitchFamily="34" charset="0"/>
+                <a:ea typeface="Courier New" pitchFamily="34" charset="-122"/>
+                <a:cs typeface="Courier New" pitchFamily="34" charset="-120"/>
+              </a:rPr>
+              <a:t>.sidebar { float: left;  width: 25%; }</a:t>
+            </a:r>
+            <a:endParaRPr lang="en-US" sz="1400" dirty="0"/>
+          </a:p>
+          <a:p>
+            <a:pPr indent="0" marL="0">
+              <a:lnSpc>
+                <a:spcPct val="125000"/>
+              </a:lnSpc>
+              <a:buNone/>
+            </a:pPr>
+            <a:r>
+              <a:rPr lang="en-US" sz="1400" dirty="0">
+                <a:solidFill>
+                  <a:srgbClr val="C9D3F5"/>
+                </a:solidFill>
+                <a:latin typeface="Courier New" pitchFamily="34" charset="0"/>
+                <a:ea typeface="Courier New" pitchFamily="34" charset="-122"/>
+                <a:cs typeface="Courier New" pitchFamily="34" charset="-120"/>
+              </a:rPr>
+              <a:t>.main    { float: left;  width: 75%; }</a:t>
+            </a:r>
+            <a:endParaRPr lang="en-US" sz="1400" dirty="0"/>
+          </a:p>
+          <a:p>
+            <a:pPr indent="0" marL="0">
+              <a:lnSpc>
+                <a:spcPct val="125000"/>
+              </a:lnSpc>
+              <a:buNone/>
+            </a:pPr>
+            <a:endParaRPr lang="en-US" sz="1400" dirty="0"/>
+          </a:p>
+          <a:p>
+            <a:pPr indent="0" marL="0">
+              <a:lnSpc>
+                <a:spcPct val="125000"/>
+              </a:lnSpc>
+              <a:buNone/>
+            </a:pPr>
+            <a:r>
+              <a:rPr lang="en-US" sz="1400" dirty="0">
+                <a:solidFill>
+                  <a:srgbClr val="C9D3F5"/>
+                </a:solidFill>
+                <a:latin typeface="Courier New" pitchFamily="34" charset="0"/>
+                <a:ea typeface="Courier New" pitchFamily="34" charset="-122"/>
+                <a:cs typeface="Courier New" pitchFamily="34" charset="-120"/>
+              </a:rPr>
+              <a:t>&lt;div class="sidebar"&gt;...&lt;/div&gt;</a:t>
+            </a:r>
+            <a:endParaRPr lang="en-US" sz="1400" dirty="0"/>
+          </a:p>
+          <a:p>
+            <a:pPr indent="0" marL="0">
+              <a:lnSpc>
+                <a:spcPct val="125000"/>
+              </a:lnSpc>
+              <a:buNone/>
+            </a:pPr>
+            <a:r>
+              <a:rPr lang="en-US" sz="1400" dirty="0">
+                <a:solidFill>
+                  <a:srgbClr val="C9D3F5"/>
+                </a:solidFill>
+                <a:latin typeface="Courier New" pitchFamily="34" charset="0"/>
+                <a:ea typeface="Courier New" pitchFamily="34" charset="-122"/>
+                <a:cs typeface="Courier New" pitchFamily="34" charset="-120"/>
+              </a:rPr>
+              <a:t>&lt;div class="main"&gt;...&lt;/div&gt;</a:t>
+            </a:r>
+            <a:endParaRPr lang="en-US" sz="1400" dirty="0"/>
+          </a:p>
+        </p:txBody>
+      </p:sp>
+      <p:sp>
+        <p:nvSpPr>
+          <p:cNvPr id="6" name="Text 4"/>
+          <p:cNvSpPr txBox="1"/>
+          <p:nvPr/>
+        </p:nvSpPr>
+        <p:spPr>
+          <a:xfrm>
+            <a:off x="640080" y="4800600"/>
+            <a:ext cx="10911535" cy="1463040"/>
+          </a:xfrm>
+          <a:prstGeom prst="rect">
+            <a:avLst/>
+          </a:prstGeom>
+          <a:noFill/>
+          <a:ln/>
+        </p:spPr>
+        <p:txBody>
+          <a:bodyPr wrap="square" lIns="0" tIns="0" rIns="0" bIns="0" rtlCol="0" anchor="t"/>
+          <a:lstStyle/>
+          <a:p>
+            <a:pPr indent="0" marL="0">
+              <a:buNone/>
+            </a:pPr>
+            <a:r>
+              <a:rPr lang="en-US" sz="1300" dirty="0">
+                <a:solidFill>
+                  <a:srgbClr val="26262F"/>
+                </a:solidFill>
+                <a:latin typeface="Calibri" pitchFamily="34" charset="0"/>
+                <a:ea typeface="Calibri" pitchFamily="34" charset="-122"/>
+                <a:cs typeface="Calibri" pitchFamily="34" charset="-120"/>
+              </a:rPr>
+              <a:t>Before flexbox and grid existed, this float + matching-width pattern was the standard way to place two columns side by side.</a:t>
+            </a:r>
+            <a:endParaRPr lang="en-US" sz="1300" dirty="0"/>
+          </a:p>
+        </p:txBody>
+      </p:sp>
+      <p:sp>
+        <p:nvSpPr>
+          <p:cNvPr id="7" name="Text 5"/>
+          <p:cNvSpPr txBox="1"/>
+          <p:nvPr/>
+        </p:nvSpPr>
+        <p:spPr>
+          <a:xfrm>
+            <a:off x="640080" y="6446520"/>
+            <a:ext cx="8686800" cy="292608"/>
+          </a:xfrm>
+          <a:prstGeom prst="rect">
+            <a:avLst/>
+          </a:prstGeom>
+          <a:noFill/>
+          <a:ln/>
+        </p:spPr>
+        <p:txBody>
+          <a:bodyPr wrap="square" lIns="0" tIns="0" rIns="0" bIns="0" rtlCol="0" anchor="ctr"/>
+          <a:lstStyle/>
+          <a:p>
+            <a:pPr algn="l" indent="0" marL="0">
+              <a:buNone/>
+            </a:pPr>
+            <a:r>
+              <a:rPr lang="en-US" sz="900" dirty="0">
+                <a:solidFill>
+                  <a:srgbClr val="5D5D72"/>
+                </a:solidFill>
+                <a:latin typeface="Calibri" pitchFamily="34" charset="0"/>
+                <a:ea typeface="Calibri" pitchFamily="34" charset="-122"/>
+                <a:cs typeface="Calibri" pitchFamily="34" charset="-120"/>
+              </a:rPr>
+              <a:t>Usman Akram  •  COMSATS University Islamabad</a:t>
+            </a:r>
+            <a:endParaRPr lang="en-US" sz="900" dirty="0"/>
+          </a:p>
+        </p:txBody>
+      </p:sp>
+      <p:sp>
+        <p:nvSpPr>
+          <p:cNvPr id="8" name="Text 6"/>
+          <p:cNvSpPr txBox="1"/>
+          <p:nvPr/>
+        </p:nvSpPr>
+        <p:spPr>
+          <a:xfrm>
+            <a:off x="11155680" y="6446520"/>
+            <a:ext cx="457200" cy="292608"/>
+          </a:xfrm>
+          <a:prstGeom prst="rect">
+            <a:avLst/>
+          </a:prstGeom>
+          <a:noFill/>
+          <a:ln/>
+        </p:spPr>
+        <p:txBody>
+          <a:bodyPr wrap="square" lIns="0" tIns="0" rIns="0" bIns="0" rtlCol="0" anchor="ctr"/>
+          <a:lstStyle/>
+          <a:p>
+            <a:pPr algn="r" indent="0" marL="0">
+              <a:buNone/>
+            </a:pPr>
+            <a:r>
+              <a:rPr lang="en-US" sz="900" dirty="0">
+                <a:solidFill>
+                  <a:srgbClr val="5D5D72"/>
+                </a:solidFill>
+                <a:latin typeface="Calibri" pitchFamily="34" charset="0"/>
+                <a:ea typeface="Calibri" pitchFamily="34" charset="-122"/>
+                <a:cs typeface="Calibri" pitchFamily="34" charset="-120"/>
+              </a:rPr>
+              <a:t>19</a:t>
+            </a:r>
+            <a:endParaRPr lang="en-US" sz="900" dirty="0"/>
+          </a:p>
+        </p:txBody>
+      </p:sp>
+    </p:spTree>
+  </p:cSld>
+  <p:clrMapOvr>
+    <a:masterClrMapping/>
+  </p:clrMapOvr>
+</p:sld>
+</file>
+
+<file path=ppt/slides/slide2.xml><?xml version="1.0" encoding="utf-8"?>
+<p:sld xmlns:a="http://schemas.openxmlformats.org/drawingml/2006/main" xmlns:r="http://schemas.openxmlformats.org/officeDocument/2006/relationships" xmlns:p="http://schemas.openxmlformats.org/presentationml/2006/main">
+  <p:cSld name="Slide 2">
+    <p:bg>
+      <p:bgPr>
+        <a:solidFill>
+          <a:srgbClr val="FFFFFF"/>
+        </a:solidFill>
+      </p:bgPr>
+    </p:bg>
+    <p:spTree>
+      <p:nvGrpSpPr>
+        <p:cNvPr id="1" name=""/>
+        <p:cNvGrpSpPr/>
+        <p:nvPr/>
+      </p:nvGrpSpPr>
+      <p:grpSpPr>
+        <a:xfrm>
+          <a:off x="0" y="0"/>
+          <a:ext cx="0" cy="0"/>
+          <a:chOff x="0" y="0"/>
+          <a:chExt cx="0" cy="0"/>
+        </a:xfrm>
+      </p:grpSpPr>
+      <p:sp>
+        <p:nvSpPr>
+          <p:cNvPr id="2" name="Text 0"/>
+          <p:cNvSpPr txBox="1"/>
+          <p:nvPr/>
+        </p:nvSpPr>
+        <p:spPr>
+          <a:xfrm>
+            <a:off x="640080" y="457200"/>
+            <a:ext cx="10058400" cy="365760"/>
+          </a:xfrm>
+          <a:prstGeom prst="rect">
+            <a:avLst/>
+          </a:prstGeom>
+          <a:noFill/>
+          <a:ln/>
+        </p:spPr>
+        <p:txBody>
+          <a:bodyPr wrap="square" lIns="0" tIns="0" rIns="0" bIns="0" rtlCol="0" anchor="ctr"/>
+          <a:lstStyle/>
+          <a:p>
+            <a:pPr algn="l" indent="0" marL="0">
+              <a:buNone/>
+            </a:pPr>
+            <a:r>
+              <a:rPr lang="en-US" sz="1300" b="1" spc="300" kern="0" dirty="0">
+                <a:solidFill>
+                  <a:srgbClr val="FF8A3D"/>
+                </a:solidFill>
+                <a:latin typeface="Calibri" pitchFamily="34" charset="0"/>
+                <a:ea typeface="Calibri" pitchFamily="34" charset="-122"/>
+                <a:cs typeface="Calibri" pitchFamily="34" charset="-120"/>
+              </a:rPr>
+              <a:t>OVERVIEW</a:t>
+            </a:r>
+            <a:endParaRPr lang="en-US" sz="1300" dirty="0"/>
+          </a:p>
+        </p:txBody>
+      </p:sp>
+      <p:sp>
+        <p:nvSpPr>
+          <p:cNvPr id="3" name="Text 1"/>
+          <p:cNvSpPr txBox="1"/>
+          <p:nvPr/>
+        </p:nvSpPr>
+        <p:spPr>
+          <a:xfrm>
+            <a:off x="640080" y="841248"/>
+            <a:ext cx="10881360" cy="914400"/>
+          </a:xfrm>
+          <a:prstGeom prst="rect">
+            <a:avLst/>
+          </a:prstGeom>
+          <a:noFill/>
+          <a:ln/>
+        </p:spPr>
+        <p:txBody>
+          <a:bodyPr wrap="square" lIns="0" tIns="0" rIns="0" bIns="0" rtlCol="0" anchor="ctr"/>
+          <a:lstStyle/>
+          <a:p>
+            <a:pPr algn="l" indent="0" marL="0">
+              <a:buNone/>
+            </a:pPr>
+            <a:r>
+              <a:rPr lang="en-US" sz="3400" b="1" dirty="0">
+                <a:solidFill>
+                  <a:srgbClr val="2B2B7A"/>
+                </a:solidFill>
+                <a:latin typeface="Cambria" pitchFamily="34" charset="0"/>
+                <a:ea typeface="Cambria" pitchFamily="34" charset="-122"/>
+                <a:cs typeface="Cambria" pitchFamily="34" charset="-120"/>
+              </a:rPr>
+              <a:t>In This Lecture</a:t>
+            </a:r>
+            <a:endParaRPr lang="en-US" sz="3400" dirty="0"/>
+          </a:p>
+        </p:txBody>
+      </p:sp>
+      <p:sp>
+        <p:nvSpPr>
+          <p:cNvPr id="4" name="Shape 2"/>
+          <p:cNvSpPr/>
+          <p:nvPr/>
+        </p:nvSpPr>
+        <p:spPr>
+          <a:xfrm>
+            <a:off x="685800" y="1965960"/>
+            <a:ext cx="457200" cy="457200"/>
+          </a:xfrm>
+          <a:prstGeom prst="ellipse">
+            <a:avLst/>
+          </a:prstGeom>
+          <a:solidFill>
+            <a:srgbClr val="FF8A3D"/>
+          </a:solidFill>
+          <a:ln/>
+        </p:spPr>
+      </p:sp>
+      <p:sp>
+        <p:nvSpPr>
+          <p:cNvPr id="5" name="Text 3"/>
+          <p:cNvSpPr txBox="1"/>
+          <p:nvPr/>
+        </p:nvSpPr>
+        <p:spPr>
+          <a:xfrm>
+            <a:off x="685800" y="1965960"/>
+            <a:ext cx="457200" cy="457200"/>
+          </a:xfrm>
+          <a:prstGeom prst="rect">
+            <a:avLst/>
+          </a:prstGeom>
+          <a:noFill/>
+          <a:ln/>
+        </p:spPr>
+        <p:txBody>
+          <a:bodyPr wrap="square" lIns="0" tIns="0" rIns="0" bIns="0" rtlCol="0" anchor="ctr"/>
+          <a:lstStyle/>
+          <a:p>
+            <a:pPr algn="ctr" indent="0" marL="0">
+              <a:buNone/>
+            </a:pPr>
+            <a:r>
+              <a:rPr lang="en-US" sz="1500" b="1" dirty="0">
+                <a:solidFill>
+                  <a:srgbClr val="FFFFFF"/>
+                </a:solidFill>
+                <a:latin typeface="Calibri" pitchFamily="34" charset="0"/>
+                <a:ea typeface="Calibri" pitchFamily="34" charset="-122"/>
+                <a:cs typeface="Calibri" pitchFamily="34" charset="-120"/>
+              </a:rPr>
+              <a:t>1</a:t>
+            </a:r>
+            <a:endParaRPr lang="en-US" sz="1500" dirty="0"/>
+          </a:p>
+        </p:txBody>
+      </p:sp>
+      <p:sp>
+        <p:nvSpPr>
+          <p:cNvPr id="6" name="Text 4"/>
+          <p:cNvSpPr txBox="1"/>
+          <p:nvPr/>
+        </p:nvSpPr>
+        <p:spPr>
+          <a:xfrm>
+            <a:off x="1371600" y="1892808"/>
+            <a:ext cx="10180015" cy="640080"/>
+          </a:xfrm>
+          <a:prstGeom prst="rect">
+            <a:avLst/>
+          </a:prstGeom>
+          <a:noFill/>
+          <a:ln/>
+        </p:spPr>
+        <p:txBody>
+          <a:bodyPr wrap="square" lIns="0" tIns="0" rIns="0" bIns="0" rtlCol="0" anchor="ctr"/>
+          <a:lstStyle/>
+          <a:p>
+            <a:pPr indent="0" marL="0">
+              <a:buNone/>
+            </a:pPr>
+            <a:r>
+              <a:rPr lang="en-US" sz="1500" dirty="0">
+                <a:solidFill>
+                  <a:srgbClr val="26262F"/>
+                </a:solidFill>
+                <a:latin typeface="Calibri" pitchFamily="34" charset="0"/>
+                <a:ea typeface="Calibri" pitchFamily="34" charset="-122"/>
+                <a:cs typeface="Calibri" pitchFamily="34" charset="-120"/>
+              </a:rPr>
+              <a:t>Normal document flow and static positioning</a:t>
+            </a:r>
+            <a:endParaRPr lang="en-US" sz="1500" dirty="0"/>
+          </a:p>
+        </p:txBody>
+      </p:sp>
+      <p:sp>
+        <p:nvSpPr>
+          <p:cNvPr id="7" name="Shape 5"/>
+          <p:cNvSpPr/>
+          <p:nvPr/>
+        </p:nvSpPr>
+        <p:spPr>
+          <a:xfrm>
+            <a:off x="685800" y="2788920"/>
+            <a:ext cx="457200" cy="457200"/>
+          </a:xfrm>
+          <a:prstGeom prst="ellipse">
+            <a:avLst/>
+          </a:prstGeom>
+          <a:solidFill>
+            <a:srgbClr val="FF8A3D"/>
+          </a:solidFill>
+          <a:ln/>
+        </p:spPr>
+      </p:sp>
+      <p:sp>
+        <p:nvSpPr>
+          <p:cNvPr id="8" name="Text 6"/>
+          <p:cNvSpPr txBox="1"/>
+          <p:nvPr/>
+        </p:nvSpPr>
+        <p:spPr>
+          <a:xfrm>
+            <a:off x="685800" y="2788920"/>
+            <a:ext cx="457200" cy="457200"/>
+          </a:xfrm>
+          <a:prstGeom prst="rect">
+            <a:avLst/>
+          </a:prstGeom>
+          <a:noFill/>
+          <a:ln/>
+        </p:spPr>
+        <p:txBody>
+          <a:bodyPr wrap="square" lIns="0" tIns="0" rIns="0" bIns="0" rtlCol="0" anchor="ctr"/>
+          <a:lstStyle/>
+          <a:p>
+            <a:pPr algn="ctr" indent="0" marL="0">
+              <a:buNone/>
+            </a:pPr>
+            <a:r>
+              <a:rPr lang="en-US" sz="1500" b="1" dirty="0">
+                <a:solidFill>
+                  <a:srgbClr val="FFFFFF"/>
+                </a:solidFill>
+                <a:latin typeface="Calibri" pitchFamily="34" charset="0"/>
+                <a:ea typeface="Calibri" pitchFamily="34" charset="-122"/>
+                <a:cs typeface="Calibri" pitchFamily="34" charset="-120"/>
+              </a:rPr>
+              <a:t>2</a:t>
+            </a:r>
+            <a:endParaRPr lang="en-US" sz="1500" dirty="0"/>
+          </a:p>
+        </p:txBody>
+      </p:sp>
+      <p:sp>
+        <p:nvSpPr>
+          <p:cNvPr id="9" name="Text 7"/>
+          <p:cNvSpPr txBox="1"/>
+          <p:nvPr/>
+        </p:nvSpPr>
+        <p:spPr>
+          <a:xfrm>
+            <a:off x="1371600" y="2715768"/>
+            <a:ext cx="10180015" cy="640080"/>
+          </a:xfrm>
+          <a:prstGeom prst="rect">
+            <a:avLst/>
+          </a:prstGeom>
+          <a:noFill/>
+          <a:ln/>
+        </p:spPr>
+        <p:txBody>
+          <a:bodyPr wrap="square" lIns="0" tIns="0" rIns="0" bIns="0" rtlCol="0" anchor="ctr"/>
+          <a:lstStyle/>
+          <a:p>
+            <a:pPr indent="0" marL="0">
+              <a:buNone/>
+            </a:pPr>
+            <a:r>
+              <a:rPr lang="en-US" sz="1500" dirty="0">
+                <a:solidFill>
+                  <a:srgbClr val="26262F"/>
+                </a:solidFill>
+                <a:latin typeface="Calibri" pitchFamily="34" charset="0"/>
+                <a:ea typeface="Calibri" pitchFamily="34" charset="-122"/>
+                <a:cs typeface="Calibri" pitchFamily="34" charset="-120"/>
+              </a:rPr>
+              <a:t>The four positioning schemes: relative, absolute, fixed, and sticky — with a worked example of each</a:t>
+            </a:r>
+            <a:endParaRPr lang="en-US" sz="1500" dirty="0"/>
+          </a:p>
+        </p:txBody>
+      </p:sp>
+      <p:sp>
+        <p:nvSpPr>
+          <p:cNvPr id="10" name="Shape 8"/>
+          <p:cNvSpPr/>
+          <p:nvPr/>
+        </p:nvSpPr>
+        <p:spPr>
+          <a:xfrm>
+            <a:off x="685800" y="3611880"/>
+            <a:ext cx="457200" cy="457200"/>
+          </a:xfrm>
+          <a:prstGeom prst="ellipse">
+            <a:avLst/>
+          </a:prstGeom>
+          <a:solidFill>
+            <a:srgbClr val="FF8A3D"/>
+          </a:solidFill>
+          <a:ln/>
+        </p:spPr>
+      </p:sp>
+      <p:sp>
+        <p:nvSpPr>
+          <p:cNvPr id="11" name="Text 9"/>
+          <p:cNvSpPr txBox="1"/>
+          <p:nvPr/>
+        </p:nvSpPr>
+        <p:spPr>
+          <a:xfrm>
+            <a:off x="685800" y="3611880"/>
+            <a:ext cx="457200" cy="457200"/>
+          </a:xfrm>
+          <a:prstGeom prst="rect">
+            <a:avLst/>
+          </a:prstGeom>
+          <a:noFill/>
+          <a:ln/>
+        </p:spPr>
+        <p:txBody>
+          <a:bodyPr wrap="square" lIns="0" tIns="0" rIns="0" bIns="0" rtlCol="0" anchor="ctr"/>
+          <a:lstStyle/>
+          <a:p>
+            <a:pPr algn="ctr" indent="0" marL="0">
+              <a:buNone/>
+            </a:pPr>
+            <a:r>
+              <a:rPr lang="en-US" sz="1500" b="1" dirty="0">
+                <a:solidFill>
+                  <a:srgbClr val="FFFFFF"/>
+                </a:solidFill>
+                <a:latin typeface="Calibri" pitchFamily="34" charset="0"/>
+                <a:ea typeface="Calibri" pitchFamily="34" charset="-122"/>
+                <a:cs typeface="Calibri" pitchFamily="34" charset="-120"/>
+              </a:rPr>
+              <a:t>3</a:t>
+            </a:r>
+            <a:endParaRPr lang="en-US" sz="1500" dirty="0"/>
+          </a:p>
+        </p:txBody>
+      </p:sp>
+      <p:sp>
+        <p:nvSpPr>
+          <p:cNvPr id="12" name="Text 10"/>
+          <p:cNvSpPr txBox="1"/>
+          <p:nvPr/>
+        </p:nvSpPr>
+        <p:spPr>
+          <a:xfrm>
+            <a:off x="1371600" y="3538728"/>
+            <a:ext cx="10180015" cy="640080"/>
+          </a:xfrm>
+          <a:prstGeom prst="rect">
+            <a:avLst/>
+          </a:prstGeom>
+          <a:noFill/>
+          <a:ln/>
+        </p:spPr>
+        <p:txBody>
+          <a:bodyPr wrap="square" lIns="0" tIns="0" rIns="0" bIns="0" rtlCol="0" anchor="ctr"/>
+          <a:lstStyle/>
+          <a:p>
+            <a:pPr indent="0" marL="0">
+              <a:buNone/>
+            </a:pPr>
+            <a:r>
+              <a:rPr lang="en-US" sz="1500" dirty="0">
+                <a:solidFill>
+                  <a:srgbClr val="26262F"/>
+                </a:solidFill>
+                <a:latin typeface="Calibri" pitchFamily="34" charset="0"/>
+                <a:ea typeface="Calibri" pitchFamily="34" charset="-122"/>
+                <a:cs typeface="Calibri" pitchFamily="34" charset="-120"/>
+              </a:rPr>
+              <a:t>Offset properties, the containing block, and a common mistake</a:t>
+            </a:r>
+            <a:endParaRPr lang="en-US" sz="1500" dirty="0"/>
+          </a:p>
+        </p:txBody>
+      </p:sp>
+      <p:sp>
+        <p:nvSpPr>
+          <p:cNvPr id="13" name="Shape 11"/>
+          <p:cNvSpPr/>
+          <p:nvPr/>
+        </p:nvSpPr>
+        <p:spPr>
+          <a:xfrm>
+            <a:off x="685800" y="4434840"/>
+            <a:ext cx="457200" cy="457200"/>
+          </a:xfrm>
+          <a:prstGeom prst="ellipse">
+            <a:avLst/>
+          </a:prstGeom>
+          <a:solidFill>
+            <a:srgbClr val="FF8A3D"/>
+          </a:solidFill>
+          <a:ln/>
+        </p:spPr>
+      </p:sp>
+      <p:sp>
+        <p:nvSpPr>
+          <p:cNvPr id="14" name="Text 12"/>
+          <p:cNvSpPr txBox="1"/>
+          <p:nvPr/>
+        </p:nvSpPr>
+        <p:spPr>
+          <a:xfrm>
+            <a:off x="685800" y="4434840"/>
+            <a:ext cx="457200" cy="457200"/>
+          </a:xfrm>
+          <a:prstGeom prst="rect">
+            <a:avLst/>
+          </a:prstGeom>
+          <a:noFill/>
+          <a:ln/>
+        </p:spPr>
+        <p:txBody>
+          <a:bodyPr wrap="square" lIns="0" tIns="0" rIns="0" bIns="0" rtlCol="0" anchor="ctr"/>
+          <a:lstStyle/>
+          <a:p>
+            <a:pPr algn="ctr" indent="0" marL="0">
+              <a:buNone/>
+            </a:pPr>
+            <a:r>
+              <a:rPr lang="en-US" sz="1500" b="1" dirty="0">
+                <a:solidFill>
+                  <a:srgbClr val="FFFFFF"/>
+                </a:solidFill>
+                <a:latin typeface="Calibri" pitchFamily="34" charset="0"/>
+                <a:ea typeface="Calibri" pitchFamily="34" charset="-122"/>
+                <a:cs typeface="Calibri" pitchFamily="34" charset="-120"/>
+              </a:rPr>
+              <a:t>4</a:t>
+            </a:r>
+            <a:endParaRPr lang="en-US" sz="1500" dirty="0"/>
+          </a:p>
+        </p:txBody>
+      </p:sp>
+      <p:sp>
+        <p:nvSpPr>
+          <p:cNvPr id="15" name="Text 13"/>
+          <p:cNvSpPr txBox="1"/>
+          <p:nvPr/>
+        </p:nvSpPr>
+        <p:spPr>
+          <a:xfrm>
+            <a:off x="1371600" y="4361688"/>
+            <a:ext cx="10180015" cy="640080"/>
+          </a:xfrm>
+          <a:prstGeom prst="rect">
+            <a:avLst/>
+          </a:prstGeom>
+          <a:noFill/>
+          <a:ln/>
+        </p:spPr>
+        <p:txBody>
+          <a:bodyPr wrap="square" lIns="0" tIns="0" rIns="0" bIns="0" rtlCol="0" anchor="ctr"/>
+          <a:lstStyle/>
+          <a:p>
+            <a:pPr indent="0" marL="0">
+              <a:buNone/>
+            </a:pPr>
+            <a:r>
+              <a:rPr lang="en-US" sz="1500" dirty="0">
+                <a:solidFill>
+                  <a:srgbClr val="26262F"/>
+                </a:solidFill>
+                <a:latin typeface="Calibri" pitchFamily="34" charset="0"/>
+                <a:ea typeface="Calibri" pitchFamily="34" charset="-122"/>
+                <a:cs typeface="Calibri" pitchFamily="34" charset="-120"/>
+              </a:rPr>
+              <a:t>z-index and stacking contexts</a:t>
+            </a:r>
+            <a:endParaRPr lang="en-US" sz="1500" dirty="0"/>
+          </a:p>
+        </p:txBody>
+      </p:sp>
+      <p:sp>
+        <p:nvSpPr>
+          <p:cNvPr id="16" name="Shape 14"/>
+          <p:cNvSpPr/>
+          <p:nvPr/>
+        </p:nvSpPr>
+        <p:spPr>
+          <a:xfrm>
+            <a:off x="685800" y="5257800"/>
+            <a:ext cx="457200" cy="457200"/>
+          </a:xfrm>
+          <a:prstGeom prst="ellipse">
+            <a:avLst/>
+          </a:prstGeom>
+          <a:solidFill>
+            <a:srgbClr val="FF8A3D"/>
+          </a:solidFill>
+          <a:ln/>
+        </p:spPr>
+      </p:sp>
+      <p:sp>
+        <p:nvSpPr>
+          <p:cNvPr id="17" name="Text 15"/>
+          <p:cNvSpPr txBox="1"/>
+          <p:nvPr/>
+        </p:nvSpPr>
+        <p:spPr>
+          <a:xfrm>
+            <a:off x="685800" y="5257800"/>
+            <a:ext cx="457200" cy="457200"/>
+          </a:xfrm>
+          <a:prstGeom prst="rect">
+            <a:avLst/>
+          </a:prstGeom>
+          <a:noFill/>
+          <a:ln/>
+        </p:spPr>
+        <p:txBody>
+          <a:bodyPr wrap="square" lIns="0" tIns="0" rIns="0" bIns="0" rtlCol="0" anchor="ctr"/>
+          <a:lstStyle/>
+          <a:p>
+            <a:pPr algn="ctr" indent="0" marL="0">
+              <a:buNone/>
+            </a:pPr>
+            <a:r>
+              <a:rPr lang="en-US" sz="1500" b="1" dirty="0">
+                <a:solidFill>
+                  <a:srgbClr val="FFFFFF"/>
+                </a:solidFill>
+                <a:latin typeface="Calibri" pitchFamily="34" charset="0"/>
+                <a:ea typeface="Calibri" pitchFamily="34" charset="-122"/>
+                <a:cs typeface="Calibri" pitchFamily="34" charset="-120"/>
+              </a:rPr>
+              <a:t>5</a:t>
+            </a:r>
+            <a:endParaRPr lang="en-US" sz="1500" dirty="0"/>
+          </a:p>
+        </p:txBody>
+      </p:sp>
+      <p:sp>
+        <p:nvSpPr>
+          <p:cNvPr id="18" name="Text 16"/>
+          <p:cNvSpPr txBox="1"/>
+          <p:nvPr/>
+        </p:nvSpPr>
+        <p:spPr>
+          <a:xfrm>
+            <a:off x="1371600" y="5184648"/>
+            <a:ext cx="10180015" cy="640080"/>
+          </a:xfrm>
+          <a:prstGeom prst="rect">
+            <a:avLst/>
+          </a:prstGeom>
+          <a:noFill/>
+          <a:ln/>
+        </p:spPr>
+        <p:txBody>
+          <a:bodyPr wrap="square" lIns="0" tIns="0" rIns="0" bIns="0" rtlCol="0" anchor="ctr"/>
+          <a:lstStyle/>
+          <a:p>
+            <a:pPr indent="0" marL="0">
+              <a:buNone/>
+            </a:pPr>
+            <a:r>
+              <a:rPr lang="en-US" sz="1500" dirty="0">
+                <a:solidFill>
+                  <a:srgbClr val="26262F"/>
+                </a:solidFill>
+                <a:latin typeface="Calibri" pitchFamily="34" charset="0"/>
+                <a:ea typeface="Calibri" pitchFamily="34" charset="-122"/>
+                <a:cs typeface="Calibri" pitchFamily="34" charset="-120"/>
+              </a:rPr>
+              <a:t>Floats — left, right, side-by-side columns, clearing, and common gotchas</a:t>
+            </a:r>
+            <a:endParaRPr lang="en-US" sz="1500" dirty="0"/>
+          </a:p>
+        </p:txBody>
+      </p:sp>
+      <p:sp>
+        <p:nvSpPr>
+          <p:cNvPr id="19" name="Text 17"/>
+          <p:cNvSpPr txBox="1"/>
+          <p:nvPr/>
+        </p:nvSpPr>
+        <p:spPr>
+          <a:xfrm>
+            <a:off x="640080" y="6446520"/>
+            <a:ext cx="8686800" cy="292608"/>
+          </a:xfrm>
+          <a:prstGeom prst="rect">
+            <a:avLst/>
+          </a:prstGeom>
+          <a:noFill/>
+          <a:ln/>
+        </p:spPr>
+        <p:txBody>
+          <a:bodyPr wrap="square" lIns="0" tIns="0" rIns="0" bIns="0" rtlCol="0" anchor="ctr"/>
+          <a:lstStyle/>
+          <a:p>
+            <a:pPr algn="l" indent="0" marL="0">
+              <a:buNone/>
+            </a:pPr>
+            <a:r>
+              <a:rPr lang="en-US" sz="900" dirty="0">
+                <a:solidFill>
+                  <a:srgbClr val="5D5D72"/>
+                </a:solidFill>
+                <a:latin typeface="Calibri" pitchFamily="34" charset="0"/>
+                <a:ea typeface="Calibri" pitchFamily="34" charset="-122"/>
+                <a:cs typeface="Calibri" pitchFamily="34" charset="-120"/>
+              </a:rPr>
+              <a:t>Usman Akram  •  COMSATS University Islamabad</a:t>
+            </a:r>
+            <a:endParaRPr lang="en-US" sz="900" dirty="0"/>
+          </a:p>
+        </p:txBody>
+      </p:sp>
+      <p:sp>
+        <p:nvSpPr>
+          <p:cNvPr id="20" name="Text 18"/>
+          <p:cNvSpPr txBox="1"/>
+          <p:nvPr/>
+        </p:nvSpPr>
+        <p:spPr>
+          <a:xfrm>
+            <a:off x="11155680" y="6446520"/>
+            <a:ext cx="457200" cy="292608"/>
+          </a:xfrm>
+          <a:prstGeom prst="rect">
+            <a:avLst/>
+          </a:prstGeom>
+          <a:noFill/>
+          <a:ln/>
+        </p:spPr>
+        <p:txBody>
+          <a:bodyPr wrap="square" lIns="0" tIns="0" rIns="0" bIns="0" rtlCol="0" anchor="ctr"/>
+          <a:lstStyle/>
+          <a:p>
+            <a:pPr algn="r" indent="0" marL="0">
+              <a:buNone/>
+            </a:pPr>
+            <a:r>
+              <a:rPr lang="en-US" sz="900" dirty="0">
+                <a:solidFill>
+                  <a:srgbClr val="5D5D72"/>
+                </a:solidFill>
+                <a:latin typeface="Calibri" pitchFamily="34" charset="0"/>
+                <a:ea typeface="Calibri" pitchFamily="34" charset="-122"/>
+                <a:cs typeface="Calibri" pitchFamily="34" charset="-120"/>
+              </a:rPr>
+              <a:t>2</a:t>
+            </a:r>
+            <a:endParaRPr lang="en-US" sz="900" dirty="0"/>
+          </a:p>
+        </p:txBody>
+      </p:sp>
+    </p:spTree>
+  </p:cSld>
+  <p:clrMapOvr>
+    <a:masterClrMapping/>
+  </p:clrMapOvr>
+</p:sld>
+</file>
+
+<file path=ppt/slides/slide20.xml><?xml version="1.0" encoding="utf-8"?>
+<p:sld xmlns:a="http://schemas.openxmlformats.org/drawingml/2006/main" xmlns:r="http://schemas.openxmlformats.org/officeDocument/2006/relationships" xmlns:p="http://schemas.openxmlformats.org/presentationml/2006/main">
+  <p:cSld name="Slide 20">
+    <p:bg>
+      <p:bgPr>
+        <a:solidFill>
+          <a:srgbClr val="FFFFFF"/>
+        </a:solidFill>
+      </p:bgPr>
+    </p:bg>
+    <p:spTree>
+      <p:nvGrpSpPr>
+        <p:cNvPr id="1" name=""/>
+        <p:cNvGrpSpPr/>
+        <p:nvPr/>
+      </p:nvGrpSpPr>
+      <p:grpSpPr>
+        <a:xfrm>
+          <a:off x="0" y="0"/>
+          <a:ext cx="0" cy="0"/>
+          <a:chOff x="0" y="0"/>
+          <a:chExt cx="0" cy="0"/>
+        </a:xfrm>
+      </p:grpSpPr>
+      <p:sp>
+        <p:nvSpPr>
+          <p:cNvPr id="2" name="Text 0"/>
+          <p:cNvSpPr txBox="1"/>
+          <p:nvPr/>
+        </p:nvSpPr>
+        <p:spPr>
+          <a:xfrm>
+            <a:off x="640080" y="457200"/>
+            <a:ext cx="10058400" cy="365760"/>
+          </a:xfrm>
+          <a:prstGeom prst="rect">
+            <a:avLst/>
+          </a:prstGeom>
+          <a:noFill/>
+          <a:ln/>
+        </p:spPr>
+        <p:txBody>
+          <a:bodyPr wrap="square" lIns="0" tIns="0" rIns="0" bIns="0" rtlCol="0" anchor="ctr"/>
+          <a:lstStyle/>
+          <a:p>
+            <a:pPr algn="l" indent="0" marL="0">
+              <a:buNone/>
+            </a:pPr>
+            <a:r>
+              <a:rPr lang="en-US" sz="1300" b="1" spc="300" kern="0" dirty="0">
+                <a:solidFill>
+                  <a:srgbClr val="FF8A3D"/>
+                </a:solidFill>
+                <a:latin typeface="Calibri" pitchFamily="34" charset="0"/>
+                <a:ea typeface="Calibri" pitchFamily="34" charset="-122"/>
+                <a:cs typeface="Calibri" pitchFamily="34" charset="-120"/>
+              </a:rPr>
+              <a:t>FLOATS</a:t>
+            </a:r>
+            <a:endParaRPr lang="en-US" sz="1300" dirty="0"/>
+          </a:p>
+        </p:txBody>
+      </p:sp>
+      <p:sp>
+        <p:nvSpPr>
+          <p:cNvPr id="3" name="Text 1"/>
+          <p:cNvSpPr txBox="1"/>
+          <p:nvPr/>
+        </p:nvSpPr>
+        <p:spPr>
+          <a:xfrm>
+            <a:off x="640080" y="841248"/>
+            <a:ext cx="10881360" cy="914400"/>
+          </a:xfrm>
+          <a:prstGeom prst="rect">
+            <a:avLst/>
+          </a:prstGeom>
+          <a:noFill/>
+          <a:ln/>
+        </p:spPr>
+        <p:txBody>
+          <a:bodyPr wrap="square" lIns="0" tIns="0" rIns="0" bIns="0" rtlCol="0" anchor="ctr"/>
+          <a:lstStyle/>
+          <a:p>
+            <a:pPr algn="l" indent="0" marL="0">
+              <a:buNone/>
+            </a:pPr>
+            <a:r>
+              <a:rPr lang="en-US" sz="3400" b="1" dirty="0">
+                <a:solidFill>
+                  <a:srgbClr val="2B2B7A"/>
+                </a:solidFill>
+                <a:latin typeface="Cambria" pitchFamily="34" charset="0"/>
+                <a:ea typeface="Cambria" pitchFamily="34" charset="-122"/>
+                <a:cs typeface="Cambria" pitchFamily="34" charset="-120"/>
+              </a:rPr>
+              <a:t>Float Gotchas Worth Knowing</a:t>
+            </a:r>
+            <a:endParaRPr lang="en-US" sz="3400" dirty="0"/>
+          </a:p>
+        </p:txBody>
+      </p:sp>
+      <p:sp>
+        <p:nvSpPr>
+          <p:cNvPr id="4" name="Shape 2"/>
+          <p:cNvSpPr/>
+          <p:nvPr/>
+        </p:nvSpPr>
+        <p:spPr>
+          <a:xfrm>
+            <a:off x="685800" y="2185416"/>
+            <a:ext cx="82296" cy="82296"/>
+          </a:xfrm>
+          <a:prstGeom prst="ellipse">
+            <a:avLst/>
+          </a:prstGeom>
+          <a:solidFill>
+            <a:srgbClr val="FF8A3D"/>
+          </a:solidFill>
+          <a:ln/>
+        </p:spPr>
+      </p:sp>
+      <p:sp>
+        <p:nvSpPr>
+          <p:cNvPr id="5" name="Text 3"/>
+          <p:cNvSpPr txBox="1"/>
+          <p:nvPr/>
+        </p:nvSpPr>
+        <p:spPr>
+          <a:xfrm>
+            <a:off x="960120" y="1892808"/>
+            <a:ext cx="10591495" cy="640080"/>
+          </a:xfrm>
+          <a:prstGeom prst="rect">
+            <a:avLst/>
+          </a:prstGeom>
+          <a:noFill/>
+          <a:ln/>
+        </p:spPr>
+        <p:txBody>
+          <a:bodyPr wrap="square" lIns="0" tIns="0" rIns="0" bIns="0" rtlCol="0" anchor="ctr"/>
+          <a:lstStyle/>
+          <a:p>
+            <a:pPr indent="0" marL="0">
+              <a:buNone/>
+            </a:pPr>
+            <a:r>
+              <a:rPr lang="en-US" sz="1500" dirty="0">
+                <a:solidFill>
+                  <a:srgbClr val="26262F"/>
+                </a:solidFill>
+                <a:latin typeface="Calibri" pitchFamily="34" charset="0"/>
+                <a:ea typeface="Calibri" pitchFamily="34" charset="-122"/>
+                <a:cs typeface="Calibri" pitchFamily="34" charset="-120"/>
+              </a:rPr>
+              <a:t>A floated element needs an explicit width — without one, it can shrink to fit its content unpredictably</a:t>
+            </a:r>
+            <a:endParaRPr lang="en-US" sz="1500" dirty="0"/>
+          </a:p>
+        </p:txBody>
+      </p:sp>
+      <p:sp>
+        <p:nvSpPr>
+          <p:cNvPr id="6" name="Shape 4"/>
+          <p:cNvSpPr/>
+          <p:nvPr/>
+        </p:nvSpPr>
+        <p:spPr>
+          <a:xfrm>
+            <a:off x="685800" y="3008376"/>
+            <a:ext cx="82296" cy="82296"/>
+          </a:xfrm>
+          <a:prstGeom prst="ellipse">
+            <a:avLst/>
+          </a:prstGeom>
+          <a:solidFill>
+            <a:srgbClr val="FF8A3D"/>
+          </a:solidFill>
+          <a:ln/>
+        </p:spPr>
+      </p:sp>
+      <p:sp>
+        <p:nvSpPr>
+          <p:cNvPr id="7" name="Text 5"/>
+          <p:cNvSpPr txBox="1"/>
+          <p:nvPr/>
+        </p:nvSpPr>
+        <p:spPr>
+          <a:xfrm>
+            <a:off x="960120" y="2715768"/>
+            <a:ext cx="10591495" cy="640080"/>
+          </a:xfrm>
+          <a:prstGeom prst="rect">
+            <a:avLst/>
+          </a:prstGeom>
+          <a:noFill/>
+          <a:ln/>
+        </p:spPr>
+        <p:txBody>
+          <a:bodyPr wrap="square" lIns="0" tIns="0" rIns="0" bIns="0" rtlCol="0" anchor="ctr"/>
+          <a:lstStyle/>
+          <a:p>
+            <a:pPr indent="0" marL="0">
+              <a:buNone/>
+            </a:pPr>
+            <a:r>
+              <a:rPr lang="en-US" sz="1500" dirty="0">
+                <a:solidFill>
+                  <a:srgbClr val="26262F"/>
+                </a:solidFill>
+                <a:latin typeface="Calibri" pitchFamily="34" charset="0"/>
+                <a:ea typeface="Calibri" pitchFamily="34" charset="-122"/>
+                <a:cs typeface="Calibri" pitchFamily="34" charset="-120"/>
+              </a:rPr>
+              <a:t>Floating an inline element (like a &lt;span&gt;) makes it behave like a block for sizing purposes</a:t>
+            </a:r>
+            <a:endParaRPr lang="en-US" sz="1500" dirty="0"/>
+          </a:p>
+        </p:txBody>
+      </p:sp>
+      <p:sp>
+        <p:nvSpPr>
+          <p:cNvPr id="8" name="Shape 6"/>
+          <p:cNvSpPr/>
+          <p:nvPr/>
+        </p:nvSpPr>
+        <p:spPr>
+          <a:xfrm>
+            <a:off x="685800" y="3831336"/>
+            <a:ext cx="82296" cy="82296"/>
+          </a:xfrm>
+          <a:prstGeom prst="ellipse">
+            <a:avLst/>
+          </a:prstGeom>
+          <a:solidFill>
+            <a:srgbClr val="FF8A3D"/>
+          </a:solidFill>
+          <a:ln/>
+        </p:spPr>
+      </p:sp>
+      <p:sp>
+        <p:nvSpPr>
+          <p:cNvPr id="9" name="Text 7"/>
+          <p:cNvSpPr txBox="1"/>
+          <p:nvPr/>
+        </p:nvSpPr>
+        <p:spPr>
+          <a:xfrm>
+            <a:off x="960120" y="3538728"/>
+            <a:ext cx="10591495" cy="640080"/>
+          </a:xfrm>
+          <a:prstGeom prst="rect">
+            <a:avLst/>
+          </a:prstGeom>
+          <a:noFill/>
+          <a:ln/>
+        </p:spPr>
+        <p:txBody>
+          <a:bodyPr wrap="square" lIns="0" tIns="0" rIns="0" bIns="0" rtlCol="0" anchor="ctr"/>
+          <a:lstStyle/>
+          <a:p>
+            <a:pPr indent="0" marL="0">
+              <a:buNone/>
+            </a:pPr>
+            <a:r>
+              <a:rPr lang="en-US" sz="1500" dirty="0">
+                <a:solidFill>
+                  <a:srgbClr val="26262F"/>
+                </a:solidFill>
+                <a:latin typeface="Calibri" pitchFamily="34" charset="0"/>
+                <a:ea typeface="Calibri" pitchFamily="34" charset="-122"/>
+                <a:cs typeface="Calibri" pitchFamily="34" charset="-120"/>
+              </a:rPr>
+              <a:t>A float only affects the elements AFTER it in the HTML — it never moves content that comes before it</a:t>
+            </a:r>
+            <a:endParaRPr lang="en-US" sz="1500" dirty="0"/>
+          </a:p>
+        </p:txBody>
+      </p:sp>
+      <p:sp>
+        <p:nvSpPr>
+          <p:cNvPr id="10" name="Text 8"/>
+          <p:cNvSpPr txBox="1"/>
+          <p:nvPr/>
+        </p:nvSpPr>
+        <p:spPr>
+          <a:xfrm>
+            <a:off x="640080" y="6446520"/>
+            <a:ext cx="8686800" cy="292608"/>
+          </a:xfrm>
+          <a:prstGeom prst="rect">
+            <a:avLst/>
+          </a:prstGeom>
+          <a:noFill/>
+          <a:ln/>
+        </p:spPr>
+        <p:txBody>
+          <a:bodyPr wrap="square" lIns="0" tIns="0" rIns="0" bIns="0" rtlCol="0" anchor="ctr"/>
+          <a:lstStyle/>
+          <a:p>
+            <a:pPr algn="l" indent="0" marL="0">
+              <a:buNone/>
+            </a:pPr>
+            <a:r>
+              <a:rPr lang="en-US" sz="900" dirty="0">
+                <a:solidFill>
+                  <a:srgbClr val="5D5D72"/>
+                </a:solidFill>
+                <a:latin typeface="Calibri" pitchFamily="34" charset="0"/>
+                <a:ea typeface="Calibri" pitchFamily="34" charset="-122"/>
+                <a:cs typeface="Calibri" pitchFamily="34" charset="-120"/>
+              </a:rPr>
+              <a:t>Usman Akram  •  COMSATS University Islamabad</a:t>
+            </a:r>
+            <a:endParaRPr lang="en-US" sz="900" dirty="0"/>
+          </a:p>
+        </p:txBody>
+      </p:sp>
+      <p:sp>
+        <p:nvSpPr>
+          <p:cNvPr id="11" name="Text 9"/>
+          <p:cNvSpPr txBox="1"/>
+          <p:nvPr/>
+        </p:nvSpPr>
+        <p:spPr>
+          <a:xfrm>
+            <a:off x="11155680" y="6446520"/>
+            <a:ext cx="457200" cy="292608"/>
+          </a:xfrm>
+          <a:prstGeom prst="rect">
+            <a:avLst/>
+          </a:prstGeom>
+          <a:noFill/>
+          <a:ln/>
+        </p:spPr>
+        <p:txBody>
+          <a:bodyPr wrap="square" lIns="0" tIns="0" rIns="0" bIns="0" rtlCol="0" anchor="ctr"/>
+          <a:lstStyle/>
+          <a:p>
+            <a:pPr algn="r" indent="0" marL="0">
+              <a:buNone/>
+            </a:pPr>
+            <a:r>
+              <a:rPr lang="en-US" sz="900" dirty="0">
+                <a:solidFill>
+                  <a:srgbClr val="5D5D72"/>
+                </a:solidFill>
+                <a:latin typeface="Calibri" pitchFamily="34" charset="0"/>
+                <a:ea typeface="Calibri" pitchFamily="34" charset="-122"/>
+                <a:cs typeface="Calibri" pitchFamily="34" charset="-120"/>
+              </a:rPr>
+              <a:t>20</a:t>
+            </a:r>
+            <a:endParaRPr lang="en-US" sz="900" dirty="0"/>
+          </a:p>
+        </p:txBody>
+      </p:sp>
+    </p:spTree>
+  </p:cSld>
+  <p:clrMapOvr>
+    <a:masterClrMapping/>
+  </p:clrMapOvr>
+</p:sld>
+</file>
+
+<file path=ppt/slides/slide21.xml><?xml version="1.0" encoding="utf-8"?>
+<p:sld xmlns:a="http://schemas.openxmlformats.org/drawingml/2006/main" xmlns:r="http://schemas.openxmlformats.org/officeDocument/2006/relationships" xmlns:p="http://schemas.openxmlformats.org/presentationml/2006/main">
+  <p:cSld name="Slide 21">
+    <p:bg>
+      <p:bgPr>
+        <a:solidFill>
+          <a:srgbClr val="FFFFFF"/>
+        </a:solidFill>
+      </p:bgPr>
+    </p:bg>
+    <p:spTree>
+      <p:nvGrpSpPr>
+        <p:cNvPr id="1" name=""/>
+        <p:cNvGrpSpPr/>
+        <p:nvPr/>
+      </p:nvGrpSpPr>
+      <p:grpSpPr>
+        <a:xfrm>
+          <a:off x="0" y="0"/>
+          <a:ext cx="0" cy="0"/>
+          <a:chOff x="0" y="0"/>
+          <a:chExt cx="0" cy="0"/>
+        </a:xfrm>
+      </p:grpSpPr>
+      <p:sp>
+        <p:nvSpPr>
+          <p:cNvPr id="2" name="Text 0"/>
+          <p:cNvSpPr txBox="1"/>
+          <p:nvPr/>
+        </p:nvSpPr>
+        <p:spPr>
+          <a:xfrm>
+            <a:off x="640080" y="457200"/>
+            <a:ext cx="10058400" cy="365760"/>
+          </a:xfrm>
+          <a:prstGeom prst="rect">
+            <a:avLst/>
+          </a:prstGeom>
+          <a:noFill/>
+          <a:ln/>
+        </p:spPr>
+        <p:txBody>
+          <a:bodyPr wrap="square" lIns="0" tIns="0" rIns="0" bIns="0" rtlCol="0" anchor="ctr"/>
+          <a:lstStyle/>
+          <a:p>
+            <a:pPr algn="l" indent="0" marL="0">
+              <a:buNone/>
+            </a:pPr>
+            <a:r>
+              <a:rPr lang="en-US" sz="1300" b="1" spc="300" kern="0" dirty="0">
+                <a:solidFill>
+                  <a:srgbClr val="FF8A3D"/>
+                </a:solidFill>
+                <a:latin typeface="Calibri" pitchFamily="34" charset="0"/>
+                <a:ea typeface="Calibri" pitchFamily="34" charset="-122"/>
+                <a:cs typeface="Calibri" pitchFamily="34" charset="-120"/>
+              </a:rPr>
+              <a:t>FLOATS</a:t>
+            </a:r>
+            <a:endParaRPr lang="en-US" sz="1300" dirty="0"/>
+          </a:p>
+        </p:txBody>
+      </p:sp>
+      <p:sp>
+        <p:nvSpPr>
+          <p:cNvPr id="3" name="Text 1"/>
+          <p:cNvSpPr txBox="1"/>
+          <p:nvPr/>
+        </p:nvSpPr>
+        <p:spPr>
+          <a:xfrm>
+            <a:off x="640080" y="841248"/>
+            <a:ext cx="10881360" cy="914400"/>
+          </a:xfrm>
+          <a:prstGeom prst="rect">
+            <a:avLst/>
+          </a:prstGeom>
+          <a:noFill/>
+          <a:ln/>
+        </p:spPr>
+        <p:txBody>
+          <a:bodyPr wrap="square" lIns="0" tIns="0" rIns="0" bIns="0" rtlCol="0" anchor="ctr"/>
+          <a:lstStyle/>
+          <a:p>
+            <a:pPr algn="l" indent="0" marL="0">
+              <a:buNone/>
+            </a:pPr>
+            <a:r>
+              <a:rPr lang="en-US" sz="3400" b="1" dirty="0">
+                <a:solidFill>
+                  <a:srgbClr val="2B2B7A"/>
+                </a:solidFill>
+                <a:latin typeface="Cambria" pitchFamily="34" charset="0"/>
+                <a:ea typeface="Cambria" pitchFamily="34" charset="-122"/>
+                <a:cs typeface="Cambria" pitchFamily="34" charset="-120"/>
+              </a:rPr>
               <a:t>The clear Property</a:t>
             </a:r>
             <a:endParaRPr lang="en-US" sz="3400" dirty="0"/>
@@ -3837,7 +7906,7 @@
       </p:sp>
       <p:graphicFrame>
         <p:nvGraphicFramePr>
-          <p:cNvPr id="14" name="Table 0"/>
+          <p:cNvPr id="22" name="Table 0"/>
           <p:cNvGraphicFramePr>
             <a:graphicFrameLocks noGrp="1"/>
           </p:cNvGraphicFramePr>
@@ -4489,7 +8558,7 @@
                 <a:ea typeface="Calibri" pitchFamily="34" charset="-122"/>
                 <a:cs typeface="Calibri" pitchFamily="34" charset="-120"/>
               </a:rPr>
-              <a:t>13</a:t>
+              <a:t>21</a:t>
             </a:r>
             <a:endParaRPr lang="en-US" sz="900" dirty="0"/>
           </a:p>
@@ -4503,9 +8572,9 @@
 </p:sld>
 </file>
 
-<file path=ppt/slides/slide14.xml><?xml version="1.0" encoding="utf-8"?>
+<file path=ppt/slides/slide22.xml><?xml version="1.0" encoding="utf-8"?>
 <p:sld xmlns:a="http://schemas.openxmlformats.org/drawingml/2006/main" xmlns:r="http://schemas.openxmlformats.org/officeDocument/2006/relationships" xmlns:p="http://schemas.openxmlformats.org/presentationml/2006/main">
-  <p:cSld name="Slide 14">
+  <p:cSld name="Slide 22">
     <p:bg>
       <p:bgPr>
         <a:solidFill>
@@ -4599,7 +8668,7 @@
                 <a:ea typeface="Cambria" pitchFamily="34" charset="-122"/>
                 <a:cs typeface="Cambria" pitchFamily="34" charset="-120"/>
               </a:rPr>
-              <a:t>The Collapsing Parent Problem</a:t>
+              <a:t>clear, on Its Own</a:t>
             </a:r>
             <a:endParaRPr lang="en-US" sz="3400" dirty="0"/>
           </a:p>
@@ -4614,11 +8683,11 @@
         <p:spPr>
           <a:xfrm>
             <a:off x="640080" y="1965960"/>
-            <a:ext cx="10911535" cy="2606040"/>
+            <a:ext cx="10911535" cy="1837944"/>
           </a:xfrm>
           <a:prstGeom prst="roundRect">
             <a:avLst>
-              <a:gd name="adj" fmla="val 2807"/>
+              <a:gd name="adj" fmla="val 3980"/>
             </a:avLst>
           </a:prstGeom>
           <a:solidFill>
@@ -4636,7 +8705,7 @@
         <p:spPr>
           <a:xfrm>
             <a:off x="960120" y="2194560"/>
-            <a:ext cx="10271455" cy="2148840"/>
+            <a:ext cx="10271455" cy="1380744"/>
           </a:xfrm>
           <a:prstGeom prst="rect">
             <a:avLst/>
@@ -4663,7 +8732,7 @@
                 <a:ea typeface="Courier New" pitchFamily="34" charset="-122"/>
                 <a:cs typeface="Courier New" pitchFamily="34" charset="-120"/>
               </a:rPr>
-              <a:t>.clearfix::after {</a:t>
+              <a:t>&lt;img class="photo" style="float:left;" ...&gt;</a:t>
             </a:r>
             <a:endParaRPr lang="en-US" sz="1400" dirty="0"/>
           </a:p>
@@ -4683,7 +8752,7 @@
                 <a:ea typeface="Courier New" pitchFamily="34" charset="-122"/>
                 <a:cs typeface="Courier New" pitchFamily="34" charset="-120"/>
               </a:rPr>
-              <a:t>  content: "";</a:t>
+              <a:t>&lt;p&gt;Text wraps the floated photo.&lt;/p&gt;</a:t>
             </a:r>
             <a:endParaRPr lang="en-US" sz="1400" dirty="0"/>
           </a:p>
@@ -4703,50 +8772,10 @@
                 <a:ea typeface="Courier New" pitchFamily="34" charset="-122"/>
                 <a:cs typeface="Courier New" pitchFamily="34" charset="-120"/>
               </a:rPr>
-              <a:t>  display: block;</a:t>
+              <a:t>&lt;h2 style="clear: both;"&gt;Next Section&lt;/h2&gt;</a:t>
             </a:r>
             <a:endParaRPr lang="en-US" sz="1400" dirty="0"/>
           </a:p>
-          <a:p>
-            <a:pPr indent="0" marL="0">
-              <a:lnSpc>
-                <a:spcPct val="125000"/>
-              </a:lnSpc>
-              <a:buNone/>
-            </a:pPr>
-            <a:r>
-              <a:rPr lang="en-US" sz="1400" dirty="0">
-                <a:solidFill>
-                  <a:srgbClr val="C9D3F5"/>
-                </a:solidFill>
-                <a:latin typeface="Courier New" pitchFamily="34" charset="0"/>
-                <a:ea typeface="Courier New" pitchFamily="34" charset="-122"/>
-                <a:cs typeface="Courier New" pitchFamily="34" charset="-120"/>
-              </a:rPr>
-              <a:t>  clear: both;</a:t>
-            </a:r>
-            <a:endParaRPr lang="en-US" sz="1400" dirty="0"/>
-          </a:p>
-          <a:p>
-            <a:pPr indent="0" marL="0">
-              <a:lnSpc>
-                <a:spcPct val="125000"/>
-              </a:lnSpc>
-              <a:buNone/>
-            </a:pPr>
-            <a:r>
-              <a:rPr lang="en-US" sz="1400" dirty="0">
-                <a:solidFill>
-                  <a:srgbClr val="C9D3F5"/>
-                </a:solidFill>
-                <a:latin typeface="Courier New" pitchFamily="34" charset="0"/>
-                <a:ea typeface="Courier New" pitchFamily="34" charset="-122"/>
-                <a:cs typeface="Courier New" pitchFamily="34" charset="-120"/>
-              </a:rPr>
-              <a:t>}</a:t>
-            </a:r>
-            <a:endParaRPr lang="en-US" sz="1400" dirty="0"/>
-          </a:p>
         </p:txBody>
       </p:sp>
       <p:sp>
@@ -4757,8 +8786,8 @@
         </p:nvSpPr>
         <p:spPr>
           <a:xfrm>
-            <a:off x="640080" y="4800600"/>
-            <a:ext cx="10911535" cy="1463040"/>
+            <a:off x="640080" y="4032504"/>
+            <a:ext cx="10911535" cy="2231136"/>
           </a:xfrm>
           <a:prstGeom prst="rect">
             <a:avLst/>
@@ -4782,7 +8811,7 @@
                 <a:ea typeface="Calibri" pitchFamily="34" charset="-122"/>
                 <a:cs typeface="Calibri" pitchFamily="34" charset="-120"/>
               </a:rPr>
-              <a:t>If every child is floated, a container collapses to zero height. .clearfix adds an invisible element with clear: both to force the parent to contain its floated children again.</a:t>
+              <a:t>Without clear: both, the heading could get squeezed into the space beside the float instead of starting cleanly below it.</a:t>
             </a:r>
             <a:endParaRPr lang="en-US" sz="1300" dirty="0"/>
           </a:p>
@@ -4860,7 +8889,7 @@
                 <a:ea typeface="Calibri" pitchFamily="34" charset="-122"/>
                 <a:cs typeface="Calibri" pitchFamily="34" charset="-120"/>
               </a:rPr>
-              <a:t>14</a:t>
+              <a:t>22</a:t>
             </a:r>
             <a:endParaRPr lang="en-US" sz="900" dirty="0"/>
           </a:p>
@@ -4874,9 +8903,9 @@
 </p:sld>
 </file>
 
-<file path=ppt/slides/slide15.xml><?xml version="1.0" encoding="utf-8"?>
+<file path=ppt/slides/slide23.xml><?xml version="1.0" encoding="utf-8"?>
 <p:sld xmlns:a="http://schemas.openxmlformats.org/drawingml/2006/main" xmlns:r="http://schemas.openxmlformats.org/officeDocument/2006/relationships" xmlns:p="http://schemas.openxmlformats.org/presentationml/2006/main">
-  <p:cSld name="Slide 15">
+  <p:cSld name="Slide 23">
     <p:bg>
       <p:bgPr>
         <a:solidFill>
@@ -4970,7 +8999,7 @@
                 <a:ea typeface="Cambria" pitchFamily="34" charset="-122"/>
                 <a:cs typeface="Cambria" pitchFamily="34" charset="-120"/>
               </a:rPr>
-              <a:t>Clearfix, Before and After</a:t>
+              <a:t>The Collapsing Parent Problem</a:t>
             </a:r>
             <a:endParaRPr lang="en-US" sz="3400" dirty="0"/>
           </a:p>
@@ -4984,117 +9013,203 @@
         </p:nvSpPr>
         <p:spPr>
           <a:xfrm>
-            <a:off x="530352" y="1947672"/>
-            <a:ext cx="11130991" cy="4334256"/>
+            <a:off x="640080" y="1965960"/>
+            <a:ext cx="10911535" cy="2606040"/>
           </a:xfrm>
           <a:prstGeom prst="roundRect">
             <a:avLst>
-              <a:gd name="adj" fmla="val 1266"/>
+              <a:gd name="adj" fmla="val 2807"/>
             </a:avLst>
           </a:prstGeom>
           <a:solidFill>
-            <a:srgbClr val="FFFFFF"/>
+            <a:srgbClr val="1E1E4C"/>
           </a:solidFill>
-          <a:ln w="12700">
-            <a:solidFill>
-              <a:srgbClr val="E2E2EE"/>
-            </a:solidFill>
-            <a:prstDash val="solid"/>
-          </a:ln>
-          <a:effectLst>
-            <a:outerShdw sx="100000" sy="100000" kx="0" ky="0" algn="bl" rotWithShape="0" blurRad="101600" dist="38100" dir="5400000">
-              <a:srgbClr val="000000">
-                <a:alpha val="12000"/>
-              </a:srgbClr>
-            </a:outerShdw>
-          </a:effectLst>
-        </p:spPr>
-      </p:sp>
-      <p:pic>
-        <p:nvPicPr>
-          <p:cNvPr id="5" name="Image 0" descr="D:/GitHub/mern-web-book/docs/assets/img/lecture-07/clearfix-before-after.png">    </p:cNvPr>
-          <p:cNvPicPr>
-            <a:picLocks noChangeAspect="1"/>
-          </p:cNvPicPr>
-          <p:nvPr/>
-        </p:nvPicPr>
-        <p:blipFill>
-          <a:blip r:embed="rId1"/>
-          <a:stretch>
-            <a:fillRect/>
-          </a:stretch>
-        </p:blipFill>
-        <p:spPr>
-          <a:xfrm>
-            <a:off x="2885650" y="2057400"/>
-            <a:ext cx="6420394" cy="4114800"/>
-          </a:xfrm>
-          <a:prstGeom prst="rect">
-            <a:avLst/>
-          </a:prstGeom>
-        </p:spPr>
-      </p:pic>
-      <p:sp>
-        <p:nvSpPr>
-          <p:cNvPr id="6" name="Text 3"/>
-          <p:cNvSpPr txBox="1"/>
-          <p:nvPr/>
-        </p:nvSpPr>
-        <p:spPr>
-          <a:xfrm>
-            <a:off x="640080" y="6446520"/>
-            <a:ext cx="8686800" cy="292608"/>
-          </a:xfrm>
-          <a:prstGeom prst="rect">
-            <a:avLst/>
-          </a:prstGeom>
-          <a:noFill/>
-          <a:ln/>
-        </p:spPr>
-        <p:txBody>
-          <a:bodyPr wrap="square" lIns="0" tIns="0" rIns="0" bIns="0" rtlCol="0" anchor="ctr"/>
-          <a:lstStyle/>
-          <a:p>
-            <a:pPr algn="l" indent="0" marL="0">
-              <a:buNone/>
-            </a:pPr>
-            <a:r>
-              <a:rPr lang="en-US" sz="900" dirty="0">
-                <a:solidFill>
-                  <a:srgbClr val="5D5D72"/>
+          <a:ln/>
+        </p:spPr>
+      </p:sp>
+      <p:sp>
+        <p:nvSpPr>
+          <p:cNvPr id="5" name="Text 3"/>
+          <p:cNvSpPr txBox="1"/>
+          <p:nvPr/>
+        </p:nvSpPr>
+        <p:spPr>
+          <a:xfrm>
+            <a:off x="960120" y="2194560"/>
+            <a:ext cx="10271455" cy="2148840"/>
+          </a:xfrm>
+          <a:prstGeom prst="rect">
+            <a:avLst/>
+          </a:prstGeom>
+          <a:noFill/>
+          <a:ln/>
+        </p:spPr>
+        <p:txBody>
+          <a:bodyPr wrap="square" lIns="0" tIns="0" rIns="0" bIns="0" rtlCol="0" anchor="t"/>
+          <a:lstStyle/>
+          <a:p>
+            <a:pPr indent="0" marL="0">
+              <a:lnSpc>
+                <a:spcPct val="125000"/>
+              </a:lnSpc>
+              <a:buNone/>
+            </a:pPr>
+            <a:r>
+              <a:rPr lang="en-US" sz="1400" dirty="0">
+                <a:solidFill>
+                  <a:srgbClr val="C9D3F5"/>
+                </a:solidFill>
+                <a:latin typeface="Courier New" pitchFamily="34" charset="0"/>
+                <a:ea typeface="Courier New" pitchFamily="34" charset="-122"/>
+                <a:cs typeface="Courier New" pitchFamily="34" charset="-120"/>
+              </a:rPr>
+              <a:t>.clearfix::after {</a:t>
+            </a:r>
+            <a:endParaRPr lang="en-US" sz="1400" dirty="0"/>
+          </a:p>
+          <a:p>
+            <a:pPr indent="0" marL="0">
+              <a:lnSpc>
+                <a:spcPct val="125000"/>
+              </a:lnSpc>
+              <a:buNone/>
+            </a:pPr>
+            <a:r>
+              <a:rPr lang="en-US" sz="1400" dirty="0">
+                <a:solidFill>
+                  <a:srgbClr val="C9D3F5"/>
+                </a:solidFill>
+                <a:latin typeface="Courier New" pitchFamily="34" charset="0"/>
+                <a:ea typeface="Courier New" pitchFamily="34" charset="-122"/>
+                <a:cs typeface="Courier New" pitchFamily="34" charset="-120"/>
+              </a:rPr>
+              <a:t>  content: "";</a:t>
+            </a:r>
+            <a:endParaRPr lang="en-US" sz="1400" dirty="0"/>
+          </a:p>
+          <a:p>
+            <a:pPr indent="0" marL="0">
+              <a:lnSpc>
+                <a:spcPct val="125000"/>
+              </a:lnSpc>
+              <a:buNone/>
+            </a:pPr>
+            <a:r>
+              <a:rPr lang="en-US" sz="1400" dirty="0">
+                <a:solidFill>
+                  <a:srgbClr val="C9D3F5"/>
+                </a:solidFill>
+                <a:latin typeface="Courier New" pitchFamily="34" charset="0"/>
+                <a:ea typeface="Courier New" pitchFamily="34" charset="-122"/>
+                <a:cs typeface="Courier New" pitchFamily="34" charset="-120"/>
+              </a:rPr>
+              <a:t>  display: block;</a:t>
+            </a:r>
+            <a:endParaRPr lang="en-US" sz="1400" dirty="0"/>
+          </a:p>
+          <a:p>
+            <a:pPr indent="0" marL="0">
+              <a:lnSpc>
+                <a:spcPct val="125000"/>
+              </a:lnSpc>
+              <a:buNone/>
+            </a:pPr>
+            <a:r>
+              <a:rPr lang="en-US" sz="1400" dirty="0">
+                <a:solidFill>
+                  <a:srgbClr val="C9D3F5"/>
+                </a:solidFill>
+                <a:latin typeface="Courier New" pitchFamily="34" charset="0"/>
+                <a:ea typeface="Courier New" pitchFamily="34" charset="-122"/>
+                <a:cs typeface="Courier New" pitchFamily="34" charset="-120"/>
+              </a:rPr>
+              <a:t>  clear: both;</a:t>
+            </a:r>
+            <a:endParaRPr lang="en-US" sz="1400" dirty="0"/>
+          </a:p>
+          <a:p>
+            <a:pPr indent="0" marL="0">
+              <a:lnSpc>
+                <a:spcPct val="125000"/>
+              </a:lnSpc>
+              <a:buNone/>
+            </a:pPr>
+            <a:r>
+              <a:rPr lang="en-US" sz="1400" dirty="0">
+                <a:solidFill>
+                  <a:srgbClr val="C9D3F5"/>
+                </a:solidFill>
+                <a:latin typeface="Courier New" pitchFamily="34" charset="0"/>
+                <a:ea typeface="Courier New" pitchFamily="34" charset="-122"/>
+                <a:cs typeface="Courier New" pitchFamily="34" charset="-120"/>
+              </a:rPr>
+              <a:t>}</a:t>
+            </a:r>
+            <a:endParaRPr lang="en-US" sz="1400" dirty="0"/>
+          </a:p>
+        </p:txBody>
+      </p:sp>
+      <p:sp>
+        <p:nvSpPr>
+          <p:cNvPr id="6" name="Text 4"/>
+          <p:cNvSpPr txBox="1"/>
+          <p:nvPr/>
+        </p:nvSpPr>
+        <p:spPr>
+          <a:xfrm>
+            <a:off x="640080" y="4800600"/>
+            <a:ext cx="10911535" cy="1463040"/>
+          </a:xfrm>
+          <a:prstGeom prst="rect">
+            <a:avLst/>
+          </a:prstGeom>
+          <a:noFill/>
+          <a:ln/>
+        </p:spPr>
+        <p:txBody>
+          <a:bodyPr wrap="square" lIns="0" tIns="0" rIns="0" bIns="0" rtlCol="0" anchor="t"/>
+          <a:lstStyle/>
+          <a:p>
+            <a:pPr indent="0" marL="0">
+              <a:buNone/>
+            </a:pPr>
+            <a:r>
+              <a:rPr lang="en-US" sz="1300" dirty="0">
+                <a:solidFill>
+                  <a:srgbClr val="26262F"/>
                 </a:solidFill>
                 <a:latin typeface="Calibri" pitchFamily="34" charset="0"/>
                 <a:ea typeface="Calibri" pitchFamily="34" charset="-122"/>
                 <a:cs typeface="Calibri" pitchFamily="34" charset="-120"/>
               </a:rPr>
-              <a:t>Usman Akram  •  COMSATS University Islamabad</a:t>
-            </a:r>
-            <a:endParaRPr lang="en-US" sz="900" dirty="0"/>
-          </a:p>
-        </p:txBody>
-      </p:sp>
-      <p:sp>
-        <p:nvSpPr>
-          <p:cNvPr id="7" name="Text 4"/>
-          <p:cNvSpPr txBox="1"/>
-          <p:nvPr/>
-        </p:nvSpPr>
-        <p:spPr>
-          <a:xfrm>
-            <a:off x="11155680" y="6446520"/>
-            <a:ext cx="457200" cy="292608"/>
-          </a:xfrm>
-          <a:prstGeom prst="rect">
-            <a:avLst/>
-          </a:prstGeom>
-          <a:noFill/>
-          <a:ln/>
-        </p:spPr>
-        <p:txBody>
-          <a:bodyPr wrap="square" lIns="0" tIns="0" rIns="0" bIns="0" rtlCol="0" anchor="ctr"/>
-          <a:lstStyle/>
-          <a:p>
-            <a:pPr algn="r" indent="0" marL="0">
+              <a:t>If every child is floated, a container collapses to zero height. .clearfix adds an invisible element with clear: both to force the parent to contain its floated children again.</a:t>
+            </a:r>
+            <a:endParaRPr lang="en-US" sz="1300" dirty="0"/>
+          </a:p>
+        </p:txBody>
+      </p:sp>
+      <p:sp>
+        <p:nvSpPr>
+          <p:cNvPr id="7" name="Text 5"/>
+          <p:cNvSpPr txBox="1"/>
+          <p:nvPr/>
+        </p:nvSpPr>
+        <p:spPr>
+          <a:xfrm>
+            <a:off x="640080" y="6446520"/>
+            <a:ext cx="8686800" cy="292608"/>
+          </a:xfrm>
+          <a:prstGeom prst="rect">
+            <a:avLst/>
+          </a:prstGeom>
+          <a:noFill/>
+          <a:ln/>
+        </p:spPr>
+        <p:txBody>
+          <a:bodyPr wrap="square" lIns="0" tIns="0" rIns="0" bIns="0" rtlCol="0" anchor="ctr"/>
+          <a:lstStyle/>
+          <a:p>
+            <a:pPr algn="l" indent="0" marL="0">
               <a:buNone/>
             </a:pPr>
             <a:r>
@@ -5106,7 +9221,46 @@
                 <a:ea typeface="Calibri" pitchFamily="34" charset="-122"/>
                 <a:cs typeface="Calibri" pitchFamily="34" charset="-120"/>
               </a:rPr>
-              <a:t>15</a:t>
+              <a:t>Usman Akram  •  COMSATS University Islamabad</a:t>
+            </a:r>
+            <a:endParaRPr lang="en-US" sz="900" dirty="0"/>
+          </a:p>
+        </p:txBody>
+      </p:sp>
+      <p:sp>
+        <p:nvSpPr>
+          <p:cNvPr id="8" name="Text 6"/>
+          <p:cNvSpPr txBox="1"/>
+          <p:nvPr/>
+        </p:nvSpPr>
+        <p:spPr>
+          <a:xfrm>
+            <a:off x="11155680" y="6446520"/>
+            <a:ext cx="457200" cy="292608"/>
+          </a:xfrm>
+          <a:prstGeom prst="rect">
+            <a:avLst/>
+          </a:prstGeom>
+          <a:noFill/>
+          <a:ln/>
+        </p:spPr>
+        <p:txBody>
+          <a:bodyPr wrap="square" lIns="0" tIns="0" rIns="0" bIns="0" rtlCol="0" anchor="ctr"/>
+          <a:lstStyle/>
+          <a:p>
+            <a:pPr algn="r" indent="0" marL="0">
+              <a:buNone/>
+            </a:pPr>
+            <a:r>
+              <a:rPr lang="en-US" sz="900" dirty="0">
+                <a:solidFill>
+                  <a:srgbClr val="5D5D72"/>
+                </a:solidFill>
+                <a:latin typeface="Calibri" pitchFamily="34" charset="0"/>
+                <a:ea typeface="Calibri" pitchFamily="34" charset="-122"/>
+                <a:cs typeface="Calibri" pitchFamily="34" charset="-120"/>
+              </a:rPr>
+              <a:t>23</a:t>
             </a:r>
             <a:endParaRPr lang="en-US" sz="900" dirty="0"/>
           </a:p>
@@ -5120,9 +9274,9 @@
 </p:sld>
 </file>
 
-<file path=ppt/slides/slide16.xml><?xml version="1.0" encoding="utf-8"?>
+<file path=ppt/slides/slide24.xml><?xml version="1.0" encoding="utf-8"?>
 <p:sld xmlns:a="http://schemas.openxmlformats.org/drawingml/2006/main" xmlns:r="http://schemas.openxmlformats.org/officeDocument/2006/relationships" xmlns:p="http://schemas.openxmlformats.org/presentationml/2006/main">
-  <p:cSld name="Slide 16">
+  <p:cSld name="Slide 24">
     <p:bg>
       <p:bgPr>
         <a:solidFill>
@@ -5177,7 +9331,7 @@
                 <a:ea typeface="Calibri" pitchFamily="34" charset="-122"/>
                 <a:cs typeface="Calibri" pitchFamily="34" charset="-120"/>
               </a:rPr>
-              <a:t>OVERFLOW</a:t>
+              <a:t>FLOATS</a:t>
             </a:r>
             <a:endParaRPr lang="en-US" sz="1300" dirty="0"/>
           </a:p>
@@ -5216,6 +9370,252 @@
                 <a:ea typeface="Cambria" pitchFamily="34" charset="-122"/>
                 <a:cs typeface="Cambria" pitchFamily="34" charset="-120"/>
               </a:rPr>
+              <a:t>Clearfix, Before and After</a:t>
+            </a:r>
+            <a:endParaRPr lang="en-US" sz="3400" dirty="0"/>
+          </a:p>
+        </p:txBody>
+      </p:sp>
+      <p:sp>
+        <p:nvSpPr>
+          <p:cNvPr id="4" name="Shape 2"/>
+          <p:cNvSpPr/>
+          <p:nvPr/>
+        </p:nvSpPr>
+        <p:spPr>
+          <a:xfrm>
+            <a:off x="530352" y="1947672"/>
+            <a:ext cx="11130991" cy="4334256"/>
+          </a:xfrm>
+          <a:prstGeom prst="roundRect">
+            <a:avLst>
+              <a:gd name="adj" fmla="val 1266"/>
+            </a:avLst>
+          </a:prstGeom>
+          <a:solidFill>
+            <a:srgbClr val="FFFFFF"/>
+          </a:solidFill>
+          <a:ln w="12700">
+            <a:solidFill>
+              <a:srgbClr val="E2E2EE"/>
+            </a:solidFill>
+            <a:prstDash val="solid"/>
+          </a:ln>
+          <a:effectLst>
+            <a:outerShdw sx="100000" sy="100000" kx="0" ky="0" algn="bl" rotWithShape="0" blurRad="101600" dist="38100" dir="5400000">
+              <a:srgbClr val="000000">
+                <a:alpha val="12000"/>
+              </a:srgbClr>
+            </a:outerShdw>
+          </a:effectLst>
+        </p:spPr>
+      </p:sp>
+      <p:pic>
+        <p:nvPicPr>
+          <p:cNvPr id="5" name="Image 0" descr="D:/GitHub/mern-web-book/docs/assets/img/lecture-07/clearfix-before-after.png">    </p:cNvPr>
+          <p:cNvPicPr>
+            <a:picLocks noChangeAspect="1"/>
+          </p:cNvPicPr>
+          <p:nvPr/>
+        </p:nvPicPr>
+        <p:blipFill>
+          <a:blip r:embed="rId1"/>
+          <a:stretch>
+            <a:fillRect/>
+          </a:stretch>
+        </p:blipFill>
+        <p:spPr>
+          <a:xfrm>
+            <a:off x="2885650" y="2057400"/>
+            <a:ext cx="6420394" cy="4114800"/>
+          </a:xfrm>
+          <a:prstGeom prst="rect">
+            <a:avLst/>
+          </a:prstGeom>
+        </p:spPr>
+      </p:pic>
+      <p:sp>
+        <p:nvSpPr>
+          <p:cNvPr id="6" name="Text 3"/>
+          <p:cNvSpPr txBox="1"/>
+          <p:nvPr/>
+        </p:nvSpPr>
+        <p:spPr>
+          <a:xfrm>
+            <a:off x="640080" y="6446520"/>
+            <a:ext cx="8686800" cy="292608"/>
+          </a:xfrm>
+          <a:prstGeom prst="rect">
+            <a:avLst/>
+          </a:prstGeom>
+          <a:noFill/>
+          <a:ln/>
+        </p:spPr>
+        <p:txBody>
+          <a:bodyPr wrap="square" lIns="0" tIns="0" rIns="0" bIns="0" rtlCol="0" anchor="ctr"/>
+          <a:lstStyle/>
+          <a:p>
+            <a:pPr algn="l" indent="0" marL="0">
+              <a:buNone/>
+            </a:pPr>
+            <a:r>
+              <a:rPr lang="en-US" sz="900" dirty="0">
+                <a:solidFill>
+                  <a:srgbClr val="5D5D72"/>
+                </a:solidFill>
+                <a:latin typeface="Calibri" pitchFamily="34" charset="0"/>
+                <a:ea typeface="Calibri" pitchFamily="34" charset="-122"/>
+                <a:cs typeface="Calibri" pitchFamily="34" charset="-120"/>
+              </a:rPr>
+              <a:t>Usman Akram  •  COMSATS University Islamabad</a:t>
+            </a:r>
+            <a:endParaRPr lang="en-US" sz="900" dirty="0"/>
+          </a:p>
+        </p:txBody>
+      </p:sp>
+      <p:sp>
+        <p:nvSpPr>
+          <p:cNvPr id="7" name="Text 4"/>
+          <p:cNvSpPr txBox="1"/>
+          <p:nvPr/>
+        </p:nvSpPr>
+        <p:spPr>
+          <a:xfrm>
+            <a:off x="11155680" y="6446520"/>
+            <a:ext cx="457200" cy="292608"/>
+          </a:xfrm>
+          <a:prstGeom prst="rect">
+            <a:avLst/>
+          </a:prstGeom>
+          <a:noFill/>
+          <a:ln/>
+        </p:spPr>
+        <p:txBody>
+          <a:bodyPr wrap="square" lIns="0" tIns="0" rIns="0" bIns="0" rtlCol="0" anchor="ctr"/>
+          <a:lstStyle/>
+          <a:p>
+            <a:pPr algn="r" indent="0" marL="0">
+              <a:buNone/>
+            </a:pPr>
+            <a:r>
+              <a:rPr lang="en-US" sz="900" dirty="0">
+                <a:solidFill>
+                  <a:srgbClr val="5D5D72"/>
+                </a:solidFill>
+                <a:latin typeface="Calibri" pitchFamily="34" charset="0"/>
+                <a:ea typeface="Calibri" pitchFamily="34" charset="-122"/>
+                <a:cs typeface="Calibri" pitchFamily="34" charset="-120"/>
+              </a:rPr>
+              <a:t>24</a:t>
+            </a:r>
+            <a:endParaRPr lang="en-US" sz="900" dirty="0"/>
+          </a:p>
+        </p:txBody>
+      </p:sp>
+    </p:spTree>
+  </p:cSld>
+  <p:clrMapOvr>
+    <a:masterClrMapping/>
+  </p:clrMapOvr>
+</p:sld>
+</file>
+
+<file path=ppt/slides/slide25.xml><?xml version="1.0" encoding="utf-8"?>
+<p:sld xmlns:a="http://schemas.openxmlformats.org/drawingml/2006/main" xmlns:r="http://schemas.openxmlformats.org/officeDocument/2006/relationships" xmlns:p="http://schemas.openxmlformats.org/presentationml/2006/main">
+  <p:cSld name="Slide 25">
+    <p:bg>
+      <p:bgPr>
+        <a:solidFill>
+          <a:srgbClr val="FFFFFF"/>
+        </a:solidFill>
+      </p:bgPr>
+    </p:bg>
+    <p:spTree>
+      <p:nvGrpSpPr>
+        <p:cNvPr id="1" name=""/>
+        <p:cNvGrpSpPr/>
+        <p:nvPr/>
+      </p:nvGrpSpPr>
+      <p:grpSpPr>
+        <a:xfrm>
+          <a:off x="0" y="0"/>
+          <a:ext cx="0" cy="0"/>
+          <a:chOff x="0" y="0"/>
+          <a:chExt cx="0" cy="0"/>
+        </a:xfrm>
+      </p:grpSpPr>
+      <p:sp>
+        <p:nvSpPr>
+          <p:cNvPr id="2" name="Text 0"/>
+          <p:cNvSpPr txBox="1"/>
+          <p:nvPr/>
+        </p:nvSpPr>
+        <p:spPr>
+          <a:xfrm>
+            <a:off x="640080" y="457200"/>
+            <a:ext cx="10058400" cy="365760"/>
+          </a:xfrm>
+          <a:prstGeom prst="rect">
+            <a:avLst/>
+          </a:prstGeom>
+          <a:noFill/>
+          <a:ln/>
+        </p:spPr>
+        <p:txBody>
+          <a:bodyPr wrap="square" lIns="0" tIns="0" rIns="0" bIns="0" rtlCol="0" anchor="ctr"/>
+          <a:lstStyle/>
+          <a:p>
+            <a:pPr algn="l" indent="0" marL="0">
+              <a:buNone/>
+            </a:pPr>
+            <a:r>
+              <a:rPr lang="en-US" sz="1300" b="1" spc="300" kern="0" dirty="0">
+                <a:solidFill>
+                  <a:srgbClr val="FF8A3D"/>
+                </a:solidFill>
+                <a:latin typeface="Calibri" pitchFamily="34" charset="0"/>
+                <a:ea typeface="Calibri" pitchFamily="34" charset="-122"/>
+                <a:cs typeface="Calibri" pitchFamily="34" charset="-120"/>
+              </a:rPr>
+              <a:t>OVERFLOW</a:t>
+            </a:r>
+            <a:endParaRPr lang="en-US" sz="1300" dirty="0"/>
+          </a:p>
+        </p:txBody>
+      </p:sp>
+      <p:sp>
+        <p:nvSpPr>
+          <p:cNvPr id="3" name="Text 1"/>
+          <p:cNvSpPr txBox="1"/>
+          <p:nvPr/>
+        </p:nvSpPr>
+        <p:spPr>
+          <a:xfrm>
+            <a:off x="640080" y="841248"/>
+            <a:ext cx="10881360" cy="914400"/>
+          </a:xfrm>
+          <a:prstGeom prst="rect">
+            <a:avLst/>
+          </a:prstGeom>
+          <a:noFill/>
+          <a:ln/>
+        </p:spPr>
+        <p:txBody>
+          <a:bodyPr wrap="square" lIns="0" tIns="0" rIns="0" bIns="0" rtlCol="0" anchor="ctr"/>
+          <a:lstStyle/>
+          <a:p>
+            <a:pPr algn="l" indent="0" marL="0">
+              <a:buNone/>
+            </a:pPr>
+            <a:r>
+              <a:rPr lang="en-US" sz="3400" b="1" dirty="0">
+                <a:solidFill>
+                  <a:srgbClr val="2B2B7A"/>
+                </a:solidFill>
+                <a:latin typeface="Cambria" pitchFamily="34" charset="0"/>
+                <a:ea typeface="Cambria" pitchFamily="34" charset="-122"/>
+                <a:cs typeface="Cambria" pitchFamily="34" charset="-120"/>
+              </a:rPr>
               <a:t>Containing Floats — a Simpler Alternative</a:t>
             </a:r>
             <a:endParaRPr lang="en-US" sz="3400" dirty="0"/>
@@ -5224,7 +9624,7 @@
       </p:sp>
       <p:graphicFrame>
         <p:nvGraphicFramePr>
-          <p:cNvPr id="17" name="Table 0"/>
+          <p:cNvPr id="26" name="Table 0"/>
           <p:cNvGraphicFramePr>
             <a:graphicFrameLocks noGrp="1"/>
           </p:cNvGraphicFramePr>
@@ -5876,7 +10276,7 @@
                 <a:ea typeface="Calibri" pitchFamily="34" charset="-122"/>
                 <a:cs typeface="Calibri" pitchFamily="34" charset="-120"/>
               </a:rPr>
-              <a:t>16</a:t>
+              <a:t>25</a:t>
             </a:r>
             <a:endParaRPr lang="en-US" sz="900" dirty="0"/>
           </a:p>
@@ -5890,9 +10290,9 @@
 </p:sld>
 </file>
 
-<file path=ppt/slides/slide17.xml><?xml version="1.0" encoding="utf-8"?>
+<file path=ppt/slides/slide26.xml><?xml version="1.0" encoding="utf-8"?>
 <p:sld xmlns:a="http://schemas.openxmlformats.org/drawingml/2006/main" xmlns:r="http://schemas.openxmlformats.org/officeDocument/2006/relationships" xmlns:p="http://schemas.openxmlformats.org/presentationml/2006/main">
-  <p:cSld name="Slide 17">
+  <p:cSld name="Slide 26">
     <p:bg>
       <p:bgPr>
         <a:solidFill>
@@ -6122,7 +10522,7 @@
                 <a:ea typeface="Calibri" pitchFamily="34" charset="-122"/>
                 <a:cs typeface="Calibri" pitchFamily="34" charset="-120"/>
               </a:rPr>
-              <a:t>17</a:t>
+              <a:t>26</a:t>
             </a:r>
             <a:endParaRPr lang="en-US" sz="900" dirty="0"/>
           </a:p>
@@ -6136,9 +10536,9 @@
 </p:sld>
 </file>
 
-<file path=ppt/slides/slide18.xml><?xml version="1.0" encoding="utf-8"?>
+<file path=ppt/slides/slide27.xml><?xml version="1.0" encoding="utf-8"?>
 <p:sld xmlns:a="http://schemas.openxmlformats.org/drawingml/2006/main" xmlns:r="http://schemas.openxmlformats.org/officeDocument/2006/relationships" xmlns:p="http://schemas.openxmlformats.org/presentationml/2006/main">
-  <p:cSld name="Slide 18">
+  <p:cSld name="Slide 27">
     <p:bg>
       <p:bgPr>
         <a:solidFill>
@@ -6415,7 +10815,7 @@
                 <a:ea typeface="Calibri" pitchFamily="34" charset="-122"/>
                 <a:cs typeface="Calibri" pitchFamily="34" charset="-120"/>
               </a:rPr>
-              <a:t>18</a:t>
+              <a:t>27</a:t>
             </a:r>
             <a:endParaRPr lang="en-US" sz="900" dirty="0"/>
           </a:p>
@@ -6429,9 +10829,9 @@
 </p:sld>
 </file>
 
-<file path=ppt/slides/slide19.xml><?xml version="1.0" encoding="utf-8"?>
+<file path=ppt/slides/slide28.xml><?xml version="1.0" encoding="utf-8"?>
 <p:sld xmlns:a="http://schemas.openxmlformats.org/drawingml/2006/main" xmlns:r="http://schemas.openxmlformats.org/officeDocument/2006/relationships" xmlns:p="http://schemas.openxmlformats.org/presentationml/2006/main">
-  <p:cSld name="Slide 19">
+  <p:cSld name="Slide 28">
     <p:bg>
       <p:bgPr>
         <a:solidFill>
@@ -6710,65 +11110,85 @@
       </p:sp>
       <p:sp>
         <p:nvSpPr>
-          <p:cNvPr id="10" name="Text 8"/>
-          <p:cNvSpPr txBox="1"/>
-          <p:nvPr/>
-        </p:nvSpPr>
-        <p:spPr>
-          <a:xfrm>
-            <a:off x="640080" y="6446520"/>
-            <a:ext cx="8686800" cy="292608"/>
-          </a:xfrm>
-          <a:prstGeom prst="rect">
-            <a:avLst/>
-          </a:prstGeom>
-          <a:noFill/>
-          <a:ln/>
-        </p:spPr>
-        <p:txBody>
-          <a:bodyPr wrap="square" lIns="0" tIns="0" rIns="0" bIns="0" rtlCol="0" anchor="ctr"/>
-          <a:lstStyle/>
-          <a:p>
-            <a:pPr algn="l" indent="0" marL="0">
-              <a:buNone/>
-            </a:pPr>
-            <a:r>
-              <a:rPr lang="en-US" sz="900" dirty="0">
-                <a:solidFill>
-                  <a:srgbClr val="5D5D72"/>
+          <p:cNvPr id="10" name="Shape 8"/>
+          <p:cNvSpPr/>
+          <p:nvPr/>
+        </p:nvSpPr>
+        <p:spPr>
+          <a:xfrm>
+            <a:off x="685800" y="4654296"/>
+            <a:ext cx="82296" cy="82296"/>
+          </a:xfrm>
+          <a:prstGeom prst="ellipse">
+            <a:avLst/>
+          </a:prstGeom>
+          <a:solidFill>
+            <a:srgbClr val="FF8A3D"/>
+          </a:solidFill>
+          <a:ln/>
+        </p:spPr>
+      </p:sp>
+      <p:sp>
+        <p:nvSpPr>
+          <p:cNvPr id="11" name="Text 9"/>
+          <p:cNvSpPr txBox="1"/>
+          <p:nvPr/>
+        </p:nvSpPr>
+        <p:spPr>
+          <a:xfrm>
+            <a:off x="960120" y="4361688"/>
+            <a:ext cx="10591495" cy="640080"/>
+          </a:xfrm>
+          <a:prstGeom prst="rect">
+            <a:avLst/>
+          </a:prstGeom>
+          <a:noFill/>
+          <a:ln/>
+        </p:spPr>
+        <p:txBody>
+          <a:bodyPr wrap="square" lIns="0" tIns="0" rIns="0" bIns="0" rtlCol="0" anchor="ctr"/>
+          <a:lstStyle/>
+          <a:p>
+            <a:pPr indent="0" marL="0">
+              <a:buNone/>
+            </a:pPr>
+            <a:r>
+              <a:rPr lang="en-US" sz="1500" dirty="0">
+                <a:solidFill>
+                  <a:srgbClr val="26262F"/>
                 </a:solidFill>
                 <a:latin typeface="Calibri" pitchFamily="34" charset="0"/>
                 <a:ea typeface="Calibri" pitchFamily="34" charset="-122"/>
                 <a:cs typeface="Calibri" pitchFamily="34" charset="-120"/>
               </a:rPr>
-              <a:t>Usman Akram  •  COMSATS University Islamabad</a:t>
-            </a:r>
-            <a:endParaRPr lang="en-US" sz="900" dirty="0"/>
-          </a:p>
-        </p:txBody>
-      </p:sp>
-      <p:sp>
-        <p:nvSpPr>
-          <p:cNvPr id="11" name="Text 9"/>
-          <p:cNvSpPr txBox="1"/>
-          <p:nvPr/>
-        </p:nvSpPr>
-        <p:spPr>
-          <a:xfrm>
-            <a:off x="11155680" y="6446520"/>
-            <a:ext cx="457200" cy="292608"/>
-          </a:xfrm>
-          <a:prstGeom prst="rect">
-            <a:avLst/>
-          </a:prstGeom>
-          <a:noFill/>
-          <a:ln/>
-        </p:spPr>
-        <p:txBody>
-          <a:bodyPr wrap="square" lIns="0" tIns="0" rIns="0" bIns="0" rtlCol="0" anchor="ctr"/>
-          <a:lstStyle/>
-          <a:p>
-            <a:pPr algn="r" indent="0" marL="0">
+              <a:t>A floated element with no explicit width, or an un-cleared float, are the two most common float bugs</a:t>
+            </a:r>
+            <a:endParaRPr lang="en-US" sz="1500" dirty="0"/>
+          </a:p>
+        </p:txBody>
+      </p:sp>
+      <p:sp>
+        <p:nvSpPr>
+          <p:cNvPr id="12" name="Text 10"/>
+          <p:cNvSpPr txBox="1"/>
+          <p:nvPr/>
+        </p:nvSpPr>
+        <p:spPr>
+          <a:xfrm>
+            <a:off x="640080" y="6446520"/>
+            <a:ext cx="8686800" cy="292608"/>
+          </a:xfrm>
+          <a:prstGeom prst="rect">
+            <a:avLst/>
+          </a:prstGeom>
+          <a:noFill/>
+          <a:ln/>
+        </p:spPr>
+        <p:txBody>
+          <a:bodyPr wrap="square" lIns="0" tIns="0" rIns="0" bIns="0" rtlCol="0" anchor="ctr"/>
+          <a:lstStyle/>
+          <a:p>
+            <a:pPr algn="l" indent="0" marL="0">
               <a:buNone/>
             </a:pPr>
             <a:r>
@@ -6780,7 +11200,46 @@
                 <a:ea typeface="Calibri" pitchFamily="34" charset="-122"/>
                 <a:cs typeface="Calibri" pitchFamily="34" charset="-120"/>
               </a:rPr>
-              <a:t>19</a:t>
+              <a:t>Usman Akram  •  COMSATS University Islamabad</a:t>
+            </a:r>
+            <a:endParaRPr lang="en-US" sz="900" dirty="0"/>
+          </a:p>
+        </p:txBody>
+      </p:sp>
+      <p:sp>
+        <p:nvSpPr>
+          <p:cNvPr id="13" name="Text 11"/>
+          <p:cNvSpPr txBox="1"/>
+          <p:nvPr/>
+        </p:nvSpPr>
+        <p:spPr>
+          <a:xfrm>
+            <a:off x="11155680" y="6446520"/>
+            <a:ext cx="457200" cy="292608"/>
+          </a:xfrm>
+          <a:prstGeom prst="rect">
+            <a:avLst/>
+          </a:prstGeom>
+          <a:noFill/>
+          <a:ln/>
+        </p:spPr>
+        <p:txBody>
+          <a:bodyPr wrap="square" lIns="0" tIns="0" rIns="0" bIns="0" rtlCol="0" anchor="ctr"/>
+          <a:lstStyle/>
+          <a:p>
+            <a:pPr algn="r" indent="0" marL="0">
+              <a:buNone/>
+            </a:pPr>
+            <a:r>
+              <a:rPr lang="en-US" sz="900" dirty="0">
+                <a:solidFill>
+                  <a:srgbClr val="5D5D72"/>
+                </a:solidFill>
+                <a:latin typeface="Calibri" pitchFamily="34" charset="0"/>
+                <a:ea typeface="Calibri" pitchFamily="34" charset="-122"/>
+                <a:cs typeface="Calibri" pitchFamily="34" charset="-120"/>
+              </a:rPr>
+              <a:t>28</a:t>
             </a:r>
             <a:endParaRPr lang="en-US" sz="900" dirty="0"/>
           </a:p>
@@ -6794,687 +11253,9 @@
 </p:sld>
 </file>
 
-<file path=ppt/slides/slide2.xml><?xml version="1.0" encoding="utf-8"?>
+<file path=ppt/slides/slide29.xml><?xml version="1.0" encoding="utf-8"?>
 <p:sld xmlns:a="http://schemas.openxmlformats.org/drawingml/2006/main" xmlns:r="http://schemas.openxmlformats.org/officeDocument/2006/relationships" xmlns:p="http://schemas.openxmlformats.org/presentationml/2006/main">
-  <p:cSld name="Slide 2">
-    <p:bg>
-      <p:bgPr>
-        <a:solidFill>
-          <a:srgbClr val="FFFFFF"/>
-        </a:solidFill>
-      </p:bgPr>
-    </p:bg>
-    <p:spTree>
-      <p:nvGrpSpPr>
-        <p:cNvPr id="1" name=""/>
-        <p:cNvGrpSpPr/>
-        <p:nvPr/>
-      </p:nvGrpSpPr>
-      <p:grpSpPr>
-        <a:xfrm>
-          <a:off x="0" y="0"/>
-          <a:ext cx="0" cy="0"/>
-          <a:chOff x="0" y="0"/>
-          <a:chExt cx="0" cy="0"/>
-        </a:xfrm>
-      </p:grpSpPr>
-      <p:sp>
-        <p:nvSpPr>
-          <p:cNvPr id="2" name="Text 0"/>
-          <p:cNvSpPr txBox="1"/>
-          <p:nvPr/>
-        </p:nvSpPr>
-        <p:spPr>
-          <a:xfrm>
-            <a:off x="640080" y="457200"/>
-            <a:ext cx="10058400" cy="365760"/>
-          </a:xfrm>
-          <a:prstGeom prst="rect">
-            <a:avLst/>
-          </a:prstGeom>
-          <a:noFill/>
-          <a:ln/>
-        </p:spPr>
-        <p:txBody>
-          <a:bodyPr wrap="square" lIns="0" tIns="0" rIns="0" bIns="0" rtlCol="0" anchor="ctr"/>
-          <a:lstStyle/>
-          <a:p>
-            <a:pPr algn="l" indent="0" marL="0">
-              <a:buNone/>
-            </a:pPr>
-            <a:r>
-              <a:rPr lang="en-US" sz="1300" b="1" spc="300" kern="0" dirty="0">
-                <a:solidFill>
-                  <a:srgbClr val="FF8A3D"/>
-                </a:solidFill>
-                <a:latin typeface="Calibri" pitchFamily="34" charset="0"/>
-                <a:ea typeface="Calibri" pitchFamily="34" charset="-122"/>
-                <a:cs typeface="Calibri" pitchFamily="34" charset="-120"/>
-              </a:rPr>
-              <a:t>OVERVIEW</a:t>
-            </a:r>
-            <a:endParaRPr lang="en-US" sz="1300" dirty="0"/>
-          </a:p>
-        </p:txBody>
-      </p:sp>
-      <p:sp>
-        <p:nvSpPr>
-          <p:cNvPr id="3" name="Text 1"/>
-          <p:cNvSpPr txBox="1"/>
-          <p:nvPr/>
-        </p:nvSpPr>
-        <p:spPr>
-          <a:xfrm>
-            <a:off x="640080" y="841248"/>
-            <a:ext cx="10881360" cy="914400"/>
-          </a:xfrm>
-          <a:prstGeom prst="rect">
-            <a:avLst/>
-          </a:prstGeom>
-          <a:noFill/>
-          <a:ln/>
-        </p:spPr>
-        <p:txBody>
-          <a:bodyPr wrap="square" lIns="0" tIns="0" rIns="0" bIns="0" rtlCol="0" anchor="ctr"/>
-          <a:lstStyle/>
-          <a:p>
-            <a:pPr algn="l" indent="0" marL="0">
-              <a:buNone/>
-            </a:pPr>
-            <a:r>
-              <a:rPr lang="en-US" sz="3400" b="1" dirty="0">
-                <a:solidFill>
-                  <a:srgbClr val="2B2B7A"/>
-                </a:solidFill>
-                <a:latin typeface="Cambria" pitchFamily="34" charset="0"/>
-                <a:ea typeface="Cambria" pitchFamily="34" charset="-122"/>
-                <a:cs typeface="Cambria" pitchFamily="34" charset="-120"/>
-              </a:rPr>
-              <a:t>In This Lecture</a:t>
-            </a:r>
-            <a:endParaRPr lang="en-US" sz="3400" dirty="0"/>
-          </a:p>
-        </p:txBody>
-      </p:sp>
-      <p:sp>
-        <p:nvSpPr>
-          <p:cNvPr id="4" name="Shape 2"/>
-          <p:cNvSpPr/>
-          <p:nvPr/>
-        </p:nvSpPr>
-        <p:spPr>
-          <a:xfrm>
-            <a:off x="685800" y="1965960"/>
-            <a:ext cx="457200" cy="457200"/>
-          </a:xfrm>
-          <a:prstGeom prst="ellipse">
-            <a:avLst/>
-          </a:prstGeom>
-          <a:solidFill>
-            <a:srgbClr val="FF8A3D"/>
-          </a:solidFill>
-          <a:ln/>
-        </p:spPr>
-      </p:sp>
-      <p:sp>
-        <p:nvSpPr>
-          <p:cNvPr id="5" name="Text 3"/>
-          <p:cNvSpPr txBox="1"/>
-          <p:nvPr/>
-        </p:nvSpPr>
-        <p:spPr>
-          <a:xfrm>
-            <a:off x="685800" y="1965960"/>
-            <a:ext cx="457200" cy="457200"/>
-          </a:xfrm>
-          <a:prstGeom prst="rect">
-            <a:avLst/>
-          </a:prstGeom>
-          <a:noFill/>
-          <a:ln/>
-        </p:spPr>
-        <p:txBody>
-          <a:bodyPr wrap="square" lIns="0" tIns="0" rIns="0" bIns="0" rtlCol="0" anchor="ctr"/>
-          <a:lstStyle/>
-          <a:p>
-            <a:pPr algn="ctr" indent="0" marL="0">
-              <a:buNone/>
-            </a:pPr>
-            <a:r>
-              <a:rPr lang="en-US" sz="1500" b="1" dirty="0">
-                <a:solidFill>
-                  <a:srgbClr val="FFFFFF"/>
-                </a:solidFill>
-                <a:latin typeface="Calibri" pitchFamily="34" charset="0"/>
-                <a:ea typeface="Calibri" pitchFamily="34" charset="-122"/>
-                <a:cs typeface="Calibri" pitchFamily="34" charset="-120"/>
-              </a:rPr>
-              <a:t>1</a:t>
-            </a:r>
-            <a:endParaRPr lang="en-US" sz="1500" dirty="0"/>
-          </a:p>
-        </p:txBody>
-      </p:sp>
-      <p:sp>
-        <p:nvSpPr>
-          <p:cNvPr id="6" name="Text 4"/>
-          <p:cNvSpPr txBox="1"/>
-          <p:nvPr/>
-        </p:nvSpPr>
-        <p:spPr>
-          <a:xfrm>
-            <a:off x="1371600" y="1892808"/>
-            <a:ext cx="10180015" cy="640080"/>
-          </a:xfrm>
-          <a:prstGeom prst="rect">
-            <a:avLst/>
-          </a:prstGeom>
-          <a:noFill/>
-          <a:ln/>
-        </p:spPr>
-        <p:txBody>
-          <a:bodyPr wrap="square" lIns="0" tIns="0" rIns="0" bIns="0" rtlCol="0" anchor="ctr"/>
-          <a:lstStyle/>
-          <a:p>
-            <a:pPr indent="0" marL="0">
-              <a:buNone/>
-            </a:pPr>
-            <a:r>
-              <a:rPr lang="en-US" sz="1500" dirty="0">
-                <a:solidFill>
-                  <a:srgbClr val="26262F"/>
-                </a:solidFill>
-                <a:latin typeface="Calibri" pitchFamily="34" charset="0"/>
-                <a:ea typeface="Calibri" pitchFamily="34" charset="-122"/>
-                <a:cs typeface="Calibri" pitchFamily="34" charset="-120"/>
-              </a:rPr>
-              <a:t>Normal document flow and static positioning</a:t>
-            </a:r>
-            <a:endParaRPr lang="en-US" sz="1500" dirty="0"/>
-          </a:p>
-        </p:txBody>
-      </p:sp>
-      <p:sp>
-        <p:nvSpPr>
-          <p:cNvPr id="7" name="Shape 5"/>
-          <p:cNvSpPr/>
-          <p:nvPr/>
-        </p:nvSpPr>
-        <p:spPr>
-          <a:xfrm>
-            <a:off x="685800" y="2788920"/>
-            <a:ext cx="457200" cy="457200"/>
-          </a:xfrm>
-          <a:prstGeom prst="ellipse">
-            <a:avLst/>
-          </a:prstGeom>
-          <a:solidFill>
-            <a:srgbClr val="FF8A3D"/>
-          </a:solidFill>
-          <a:ln/>
-        </p:spPr>
-      </p:sp>
-      <p:sp>
-        <p:nvSpPr>
-          <p:cNvPr id="8" name="Text 6"/>
-          <p:cNvSpPr txBox="1"/>
-          <p:nvPr/>
-        </p:nvSpPr>
-        <p:spPr>
-          <a:xfrm>
-            <a:off x="685800" y="2788920"/>
-            <a:ext cx="457200" cy="457200"/>
-          </a:xfrm>
-          <a:prstGeom prst="rect">
-            <a:avLst/>
-          </a:prstGeom>
-          <a:noFill/>
-          <a:ln/>
-        </p:spPr>
-        <p:txBody>
-          <a:bodyPr wrap="square" lIns="0" tIns="0" rIns="0" bIns="0" rtlCol="0" anchor="ctr"/>
-          <a:lstStyle/>
-          <a:p>
-            <a:pPr algn="ctr" indent="0" marL="0">
-              <a:buNone/>
-            </a:pPr>
-            <a:r>
-              <a:rPr lang="en-US" sz="1500" b="1" dirty="0">
-                <a:solidFill>
-                  <a:srgbClr val="FFFFFF"/>
-                </a:solidFill>
-                <a:latin typeface="Calibri" pitchFamily="34" charset="0"/>
-                <a:ea typeface="Calibri" pitchFamily="34" charset="-122"/>
-                <a:cs typeface="Calibri" pitchFamily="34" charset="-120"/>
-              </a:rPr>
-              <a:t>2</a:t>
-            </a:r>
-            <a:endParaRPr lang="en-US" sz="1500" dirty="0"/>
-          </a:p>
-        </p:txBody>
-      </p:sp>
-      <p:sp>
-        <p:nvSpPr>
-          <p:cNvPr id="9" name="Text 7"/>
-          <p:cNvSpPr txBox="1"/>
-          <p:nvPr/>
-        </p:nvSpPr>
-        <p:spPr>
-          <a:xfrm>
-            <a:off x="1371600" y="2715768"/>
-            <a:ext cx="10180015" cy="640080"/>
-          </a:xfrm>
-          <a:prstGeom prst="rect">
-            <a:avLst/>
-          </a:prstGeom>
-          <a:noFill/>
-          <a:ln/>
-        </p:spPr>
-        <p:txBody>
-          <a:bodyPr wrap="square" lIns="0" tIns="0" rIns="0" bIns="0" rtlCol="0" anchor="ctr"/>
-          <a:lstStyle/>
-          <a:p>
-            <a:pPr indent="0" marL="0">
-              <a:buNone/>
-            </a:pPr>
-            <a:r>
-              <a:rPr lang="en-US" sz="1500" dirty="0">
-                <a:solidFill>
-                  <a:srgbClr val="26262F"/>
-                </a:solidFill>
-                <a:latin typeface="Calibri" pitchFamily="34" charset="0"/>
-                <a:ea typeface="Calibri" pitchFamily="34" charset="-122"/>
-                <a:cs typeface="Calibri" pitchFamily="34" charset="-120"/>
-              </a:rPr>
-              <a:t>The four positioning schemes: relative, absolute, fixed, and sticky</a:t>
-            </a:r>
-            <a:endParaRPr lang="en-US" sz="1500" dirty="0"/>
-          </a:p>
-        </p:txBody>
-      </p:sp>
-      <p:sp>
-        <p:nvSpPr>
-          <p:cNvPr id="10" name="Shape 8"/>
-          <p:cNvSpPr/>
-          <p:nvPr/>
-        </p:nvSpPr>
-        <p:spPr>
-          <a:xfrm>
-            <a:off x="685800" y="3611880"/>
-            <a:ext cx="457200" cy="457200"/>
-          </a:xfrm>
-          <a:prstGeom prst="ellipse">
-            <a:avLst/>
-          </a:prstGeom>
-          <a:solidFill>
-            <a:srgbClr val="FF8A3D"/>
-          </a:solidFill>
-          <a:ln/>
-        </p:spPr>
-      </p:sp>
-      <p:sp>
-        <p:nvSpPr>
-          <p:cNvPr id="11" name="Text 9"/>
-          <p:cNvSpPr txBox="1"/>
-          <p:nvPr/>
-        </p:nvSpPr>
-        <p:spPr>
-          <a:xfrm>
-            <a:off x="685800" y="3611880"/>
-            <a:ext cx="457200" cy="457200"/>
-          </a:xfrm>
-          <a:prstGeom prst="rect">
-            <a:avLst/>
-          </a:prstGeom>
-          <a:noFill/>
-          <a:ln/>
-        </p:spPr>
-        <p:txBody>
-          <a:bodyPr wrap="square" lIns="0" tIns="0" rIns="0" bIns="0" rtlCol="0" anchor="ctr"/>
-          <a:lstStyle/>
-          <a:p>
-            <a:pPr algn="ctr" indent="0" marL="0">
-              <a:buNone/>
-            </a:pPr>
-            <a:r>
-              <a:rPr lang="en-US" sz="1500" b="1" dirty="0">
-                <a:solidFill>
-                  <a:srgbClr val="FFFFFF"/>
-                </a:solidFill>
-                <a:latin typeface="Calibri" pitchFamily="34" charset="0"/>
-                <a:ea typeface="Calibri" pitchFamily="34" charset="-122"/>
-                <a:cs typeface="Calibri" pitchFamily="34" charset="-120"/>
-              </a:rPr>
-              <a:t>3</a:t>
-            </a:r>
-            <a:endParaRPr lang="en-US" sz="1500" dirty="0"/>
-          </a:p>
-        </p:txBody>
-      </p:sp>
-      <p:sp>
-        <p:nvSpPr>
-          <p:cNvPr id="12" name="Text 10"/>
-          <p:cNvSpPr txBox="1"/>
-          <p:nvPr/>
-        </p:nvSpPr>
-        <p:spPr>
-          <a:xfrm>
-            <a:off x="1371600" y="3538728"/>
-            <a:ext cx="10180015" cy="640080"/>
-          </a:xfrm>
-          <a:prstGeom prst="rect">
-            <a:avLst/>
-          </a:prstGeom>
-          <a:noFill/>
-          <a:ln/>
-        </p:spPr>
-        <p:txBody>
-          <a:bodyPr wrap="square" lIns="0" tIns="0" rIns="0" bIns="0" rtlCol="0" anchor="ctr"/>
-          <a:lstStyle/>
-          <a:p>
-            <a:pPr indent="0" marL="0">
-              <a:buNone/>
-            </a:pPr>
-            <a:r>
-              <a:rPr lang="en-US" sz="1500" dirty="0">
-                <a:solidFill>
-                  <a:srgbClr val="26262F"/>
-                </a:solidFill>
-                <a:latin typeface="Calibri" pitchFamily="34" charset="0"/>
-                <a:ea typeface="Calibri" pitchFamily="34" charset="-122"/>
-                <a:cs typeface="Calibri" pitchFamily="34" charset="-120"/>
-              </a:rPr>
-              <a:t>Offset properties and the containing block</a:t>
-            </a:r>
-            <a:endParaRPr lang="en-US" sz="1500" dirty="0"/>
-          </a:p>
-        </p:txBody>
-      </p:sp>
-      <p:sp>
-        <p:nvSpPr>
-          <p:cNvPr id="13" name="Shape 11"/>
-          <p:cNvSpPr/>
-          <p:nvPr/>
-        </p:nvSpPr>
-        <p:spPr>
-          <a:xfrm>
-            <a:off x="685800" y="4434840"/>
-            <a:ext cx="457200" cy="457200"/>
-          </a:xfrm>
-          <a:prstGeom prst="ellipse">
-            <a:avLst/>
-          </a:prstGeom>
-          <a:solidFill>
-            <a:srgbClr val="FF8A3D"/>
-          </a:solidFill>
-          <a:ln/>
-        </p:spPr>
-      </p:sp>
-      <p:sp>
-        <p:nvSpPr>
-          <p:cNvPr id="14" name="Text 12"/>
-          <p:cNvSpPr txBox="1"/>
-          <p:nvPr/>
-        </p:nvSpPr>
-        <p:spPr>
-          <a:xfrm>
-            <a:off x="685800" y="4434840"/>
-            <a:ext cx="457200" cy="457200"/>
-          </a:xfrm>
-          <a:prstGeom prst="rect">
-            <a:avLst/>
-          </a:prstGeom>
-          <a:noFill/>
-          <a:ln/>
-        </p:spPr>
-        <p:txBody>
-          <a:bodyPr wrap="square" lIns="0" tIns="0" rIns="0" bIns="0" rtlCol="0" anchor="ctr"/>
-          <a:lstStyle/>
-          <a:p>
-            <a:pPr algn="ctr" indent="0" marL="0">
-              <a:buNone/>
-            </a:pPr>
-            <a:r>
-              <a:rPr lang="en-US" sz="1500" b="1" dirty="0">
-                <a:solidFill>
-                  <a:srgbClr val="FFFFFF"/>
-                </a:solidFill>
-                <a:latin typeface="Calibri" pitchFamily="34" charset="0"/>
-                <a:ea typeface="Calibri" pitchFamily="34" charset="-122"/>
-                <a:cs typeface="Calibri" pitchFamily="34" charset="-120"/>
-              </a:rPr>
-              <a:t>4</a:t>
-            </a:r>
-            <a:endParaRPr lang="en-US" sz="1500" dirty="0"/>
-          </a:p>
-        </p:txBody>
-      </p:sp>
-      <p:sp>
-        <p:nvSpPr>
-          <p:cNvPr id="15" name="Text 13"/>
-          <p:cNvSpPr txBox="1"/>
-          <p:nvPr/>
-        </p:nvSpPr>
-        <p:spPr>
-          <a:xfrm>
-            <a:off x="1371600" y="4361688"/>
-            <a:ext cx="10180015" cy="640080"/>
-          </a:xfrm>
-          <a:prstGeom prst="rect">
-            <a:avLst/>
-          </a:prstGeom>
-          <a:noFill/>
-          <a:ln/>
-        </p:spPr>
-        <p:txBody>
-          <a:bodyPr wrap="square" lIns="0" tIns="0" rIns="0" bIns="0" rtlCol="0" anchor="ctr"/>
-          <a:lstStyle/>
-          <a:p>
-            <a:pPr indent="0" marL="0">
-              <a:buNone/>
-            </a:pPr>
-            <a:r>
-              <a:rPr lang="en-US" sz="1500" dirty="0">
-                <a:solidFill>
-                  <a:srgbClr val="26262F"/>
-                </a:solidFill>
-                <a:latin typeface="Calibri" pitchFamily="34" charset="0"/>
-                <a:ea typeface="Calibri" pitchFamily="34" charset="-122"/>
-                <a:cs typeface="Calibri" pitchFamily="34" charset="-120"/>
-              </a:rPr>
-              <a:t>z-index and stacking contexts</a:t>
-            </a:r>
-            <a:endParaRPr lang="en-US" sz="1500" dirty="0"/>
-          </a:p>
-        </p:txBody>
-      </p:sp>
-      <p:sp>
-        <p:nvSpPr>
-          <p:cNvPr id="16" name="Shape 14"/>
-          <p:cNvSpPr/>
-          <p:nvPr/>
-        </p:nvSpPr>
-        <p:spPr>
-          <a:xfrm>
-            <a:off x="685800" y="5257800"/>
-            <a:ext cx="457200" cy="457200"/>
-          </a:xfrm>
-          <a:prstGeom prst="ellipse">
-            <a:avLst/>
-          </a:prstGeom>
-          <a:solidFill>
-            <a:srgbClr val="FF8A3D"/>
-          </a:solidFill>
-          <a:ln/>
-        </p:spPr>
-      </p:sp>
-      <p:sp>
-        <p:nvSpPr>
-          <p:cNvPr id="17" name="Text 15"/>
-          <p:cNvSpPr txBox="1"/>
-          <p:nvPr/>
-        </p:nvSpPr>
-        <p:spPr>
-          <a:xfrm>
-            <a:off x="685800" y="5257800"/>
-            <a:ext cx="457200" cy="457200"/>
-          </a:xfrm>
-          <a:prstGeom prst="rect">
-            <a:avLst/>
-          </a:prstGeom>
-          <a:noFill/>
-          <a:ln/>
-        </p:spPr>
-        <p:txBody>
-          <a:bodyPr wrap="square" lIns="0" tIns="0" rIns="0" bIns="0" rtlCol="0" anchor="ctr"/>
-          <a:lstStyle/>
-          <a:p>
-            <a:pPr algn="ctr" indent="0" marL="0">
-              <a:buNone/>
-            </a:pPr>
-            <a:r>
-              <a:rPr lang="en-US" sz="1500" b="1" dirty="0">
-                <a:solidFill>
-                  <a:srgbClr val="FFFFFF"/>
-                </a:solidFill>
-                <a:latin typeface="Calibri" pitchFamily="34" charset="0"/>
-                <a:ea typeface="Calibri" pitchFamily="34" charset="-122"/>
-                <a:cs typeface="Calibri" pitchFamily="34" charset="-120"/>
-              </a:rPr>
-              <a:t>5</a:t>
-            </a:r>
-            <a:endParaRPr lang="en-US" sz="1500" dirty="0"/>
-          </a:p>
-        </p:txBody>
-      </p:sp>
-      <p:sp>
-        <p:nvSpPr>
-          <p:cNvPr id="18" name="Text 16"/>
-          <p:cNvSpPr txBox="1"/>
-          <p:nvPr/>
-        </p:nvSpPr>
-        <p:spPr>
-          <a:xfrm>
-            <a:off x="1371600" y="5184648"/>
-            <a:ext cx="10180015" cy="640080"/>
-          </a:xfrm>
-          <a:prstGeom prst="rect">
-            <a:avLst/>
-          </a:prstGeom>
-          <a:noFill/>
-          <a:ln/>
-        </p:spPr>
-        <p:txBody>
-          <a:bodyPr wrap="square" lIns="0" tIns="0" rIns="0" bIns="0" rtlCol="0" anchor="ctr"/>
-          <a:lstStyle/>
-          <a:p>
-            <a:pPr indent="0" marL="0">
-              <a:buNone/>
-            </a:pPr>
-            <a:r>
-              <a:rPr lang="en-US" sz="1500" dirty="0">
-                <a:solidFill>
-                  <a:srgbClr val="26262F"/>
-                </a:solidFill>
-                <a:latin typeface="Calibri" pitchFamily="34" charset="0"/>
-                <a:ea typeface="Calibri" pitchFamily="34" charset="-122"/>
-                <a:cs typeface="Calibri" pitchFamily="34" charset="-120"/>
-              </a:rPr>
-              <a:t>Floats, the clear property, overflow, and common layout pitfalls</a:t>
-            </a:r>
-            <a:endParaRPr lang="en-US" sz="1500" dirty="0"/>
-          </a:p>
-        </p:txBody>
-      </p:sp>
-      <p:sp>
-        <p:nvSpPr>
-          <p:cNvPr id="19" name="Text 17"/>
-          <p:cNvSpPr txBox="1"/>
-          <p:nvPr/>
-        </p:nvSpPr>
-        <p:spPr>
-          <a:xfrm>
-            <a:off x="640080" y="6446520"/>
-            <a:ext cx="8686800" cy="292608"/>
-          </a:xfrm>
-          <a:prstGeom prst="rect">
-            <a:avLst/>
-          </a:prstGeom>
-          <a:noFill/>
-          <a:ln/>
-        </p:spPr>
-        <p:txBody>
-          <a:bodyPr wrap="square" lIns="0" tIns="0" rIns="0" bIns="0" rtlCol="0" anchor="ctr"/>
-          <a:lstStyle/>
-          <a:p>
-            <a:pPr algn="l" indent="0" marL="0">
-              <a:buNone/>
-            </a:pPr>
-            <a:r>
-              <a:rPr lang="en-US" sz="900" dirty="0">
-                <a:solidFill>
-                  <a:srgbClr val="5D5D72"/>
-                </a:solidFill>
-                <a:latin typeface="Calibri" pitchFamily="34" charset="0"/>
-                <a:ea typeface="Calibri" pitchFamily="34" charset="-122"/>
-                <a:cs typeface="Calibri" pitchFamily="34" charset="-120"/>
-              </a:rPr>
-              <a:t>Usman Akram  •  COMSATS University Islamabad</a:t>
-            </a:r>
-            <a:endParaRPr lang="en-US" sz="900" dirty="0"/>
-          </a:p>
-        </p:txBody>
-      </p:sp>
-      <p:sp>
-        <p:nvSpPr>
-          <p:cNvPr id="20" name="Text 18"/>
-          <p:cNvSpPr txBox="1"/>
-          <p:nvPr/>
-        </p:nvSpPr>
-        <p:spPr>
-          <a:xfrm>
-            <a:off x="11155680" y="6446520"/>
-            <a:ext cx="457200" cy="292608"/>
-          </a:xfrm>
-          <a:prstGeom prst="rect">
-            <a:avLst/>
-          </a:prstGeom>
-          <a:noFill/>
-          <a:ln/>
-        </p:spPr>
-        <p:txBody>
-          <a:bodyPr wrap="square" lIns="0" tIns="0" rIns="0" bIns="0" rtlCol="0" anchor="ctr"/>
-          <a:lstStyle/>
-          <a:p>
-            <a:pPr algn="r" indent="0" marL="0">
-              <a:buNone/>
-            </a:pPr>
-            <a:r>
-              <a:rPr lang="en-US" sz="900" dirty="0">
-                <a:solidFill>
-                  <a:srgbClr val="5D5D72"/>
-                </a:solidFill>
-                <a:latin typeface="Calibri" pitchFamily="34" charset="0"/>
-                <a:ea typeface="Calibri" pitchFamily="34" charset="-122"/>
-                <a:cs typeface="Calibri" pitchFamily="34" charset="-120"/>
-              </a:rPr>
-              <a:t>2</a:t>
-            </a:r>
-            <a:endParaRPr lang="en-US" sz="900" dirty="0"/>
-          </a:p>
-        </p:txBody>
-      </p:sp>
-    </p:spTree>
-  </p:cSld>
-  <p:clrMapOvr>
-    <a:masterClrMapping/>
-  </p:clrMapOvr>
-</p:sld>
-</file>
-
-<file path=ppt/slides/slide20.xml><?xml version="1.0" encoding="utf-8"?>
-<p:sld xmlns:a="http://schemas.openxmlformats.org/drawingml/2006/main" xmlns:r="http://schemas.openxmlformats.org/officeDocument/2006/relationships" xmlns:p="http://schemas.openxmlformats.org/presentationml/2006/main">
-  <p:cSld name="Slide 20">
+  <p:cSld name="Slide 29">
     <p:bg>
       <p:bgPr>
         <a:solidFill>
@@ -7862,7 +11643,7 @@
                 <a:ea typeface="Calibri" pitchFamily="34" charset="-122"/>
                 <a:cs typeface="Calibri" pitchFamily="34" charset="-120"/>
               </a:rPr>
-              <a:t>The containing block for absolute is the nearest positioned ancestor — the relative-parent, absolute-child pattern.</a:t>
+              <a:t>The containing block for absolute is the nearest positioned ancestor — forgetting it sends the element to the whole page.</a:t>
             </a:r>
             <a:endParaRPr lang="en-US" sz="1250" dirty="0"/>
           </a:p>
@@ -8058,7 +11839,7 @@
                 <a:ea typeface="Calibri" pitchFamily="34" charset="-122"/>
                 <a:cs typeface="Calibri" pitchFamily="34" charset="-120"/>
               </a:rPr>
-              <a:t>Floats pull an element aside and let content wrap it; a floats-only container can collapse unless cleared or given overflow other than visible.</a:t>
+              <a:t>float: left/right pulls an element aside and wraps content around it — give it a width, and clear or contain its parent.</a:t>
             </a:r>
             <a:endParaRPr lang="en-US" sz="1250" dirty="0"/>
           </a:p>
@@ -8234,7 +12015,7 @@
                 <a:ea typeface="Calibri" pitchFamily="34" charset="-122"/>
                 <a:cs typeface="Calibri" pitchFamily="34" charset="-120"/>
               </a:rPr>
-              <a:t>20</a:t>
+              <a:t>29</a:t>
             </a:r>
             <a:endParaRPr lang="en-US" sz="900" dirty="0"/>
           </a:p>
@@ -9072,7 +12853,7 @@
                 <a:ea typeface="Calibri" pitchFamily="34" charset="-122"/>
                 <a:cs typeface="Calibri" pitchFamily="34" charset="-120"/>
               </a:rPr>
-              <a:t>THE POSITIONING SCHEMES</a:t>
+              <a:t>SCHEME 1 OF 4</a:t>
             </a:r>
             <a:endParaRPr lang="en-US" sz="1300" dirty="0"/>
           </a:p>
@@ -9111,6 +12892,1470 @@
                 <a:ea typeface="Cambria" pitchFamily="34" charset="-122"/>
                 <a:cs typeface="Cambria" pitchFamily="34" charset="-120"/>
               </a:rPr>
+              <a:t>relative</a:t>
+            </a:r>
+            <a:endParaRPr lang="en-US" sz="3400" dirty="0"/>
+          </a:p>
+        </p:txBody>
+      </p:sp>
+      <p:sp>
+        <p:nvSpPr>
+          <p:cNvPr id="4" name="Shape 2"/>
+          <p:cNvSpPr/>
+          <p:nvPr/>
+        </p:nvSpPr>
+        <p:spPr>
+          <a:xfrm>
+            <a:off x="640080" y="1965960"/>
+            <a:ext cx="10911535" cy="2606040"/>
+          </a:xfrm>
+          <a:prstGeom prst="roundRect">
+            <a:avLst>
+              <a:gd name="adj" fmla="val 2807"/>
+            </a:avLst>
+          </a:prstGeom>
+          <a:solidFill>
+            <a:srgbClr val="1E1E4C"/>
+          </a:solidFill>
+          <a:ln/>
+        </p:spPr>
+      </p:sp>
+      <p:sp>
+        <p:nvSpPr>
+          <p:cNvPr id="5" name="Text 3"/>
+          <p:cNvSpPr txBox="1"/>
+          <p:nvPr/>
+        </p:nvSpPr>
+        <p:spPr>
+          <a:xfrm>
+            <a:off x="960120" y="2194560"/>
+            <a:ext cx="10271455" cy="2148840"/>
+          </a:xfrm>
+          <a:prstGeom prst="rect">
+            <a:avLst/>
+          </a:prstGeom>
+          <a:noFill/>
+          <a:ln/>
+        </p:spPr>
+        <p:txBody>
+          <a:bodyPr wrap="square" lIns="0" tIns="0" rIns="0" bIns="0" rtlCol="0" anchor="t"/>
+          <a:lstStyle/>
+          <a:p>
+            <a:pPr indent="0" marL="0">
+              <a:lnSpc>
+                <a:spcPct val="125000"/>
+              </a:lnSpc>
+              <a:buNone/>
+            </a:pPr>
+            <a:r>
+              <a:rPr lang="en-US" sz="1400" dirty="0">
+                <a:solidFill>
+                  <a:srgbClr val="C9D3F5"/>
+                </a:solidFill>
+                <a:latin typeface="Courier New" pitchFamily="34" charset="0"/>
+                <a:ea typeface="Courier New" pitchFamily="34" charset="-122"/>
+                <a:cs typeface="Courier New" pitchFamily="34" charset="-120"/>
+              </a:rPr>
+              <a:t>.box {</a:t>
+            </a:r>
+            <a:endParaRPr lang="en-US" sz="1400" dirty="0"/>
+          </a:p>
+          <a:p>
+            <a:pPr indent="0" marL="0">
+              <a:lnSpc>
+                <a:spcPct val="125000"/>
+              </a:lnSpc>
+              <a:buNone/>
+            </a:pPr>
+            <a:r>
+              <a:rPr lang="en-US" sz="1400" dirty="0">
+                <a:solidFill>
+                  <a:srgbClr val="C9D3F5"/>
+                </a:solidFill>
+                <a:latin typeface="Courier New" pitchFamily="34" charset="0"/>
+                <a:ea typeface="Courier New" pitchFamily="34" charset="-122"/>
+                <a:cs typeface="Courier New" pitchFamily="34" charset="-120"/>
+              </a:rPr>
+              <a:t>  position: relative;</a:t>
+            </a:r>
+            <a:endParaRPr lang="en-US" sz="1400" dirty="0"/>
+          </a:p>
+          <a:p>
+            <a:pPr indent="0" marL="0">
+              <a:lnSpc>
+                <a:spcPct val="125000"/>
+              </a:lnSpc>
+              <a:buNone/>
+            </a:pPr>
+            <a:r>
+              <a:rPr lang="en-US" sz="1400" dirty="0">
+                <a:solidFill>
+                  <a:srgbClr val="C9D3F5"/>
+                </a:solidFill>
+                <a:latin typeface="Courier New" pitchFamily="34" charset="0"/>
+                <a:ea typeface="Courier New" pitchFamily="34" charset="-122"/>
+                <a:cs typeface="Courier New" pitchFamily="34" charset="-120"/>
+              </a:rPr>
+              <a:t>  top: 10px;   /* 10px down from its normal spot */</a:t>
+            </a:r>
+            <a:endParaRPr lang="en-US" sz="1400" dirty="0"/>
+          </a:p>
+          <a:p>
+            <a:pPr indent="0" marL="0">
+              <a:lnSpc>
+                <a:spcPct val="125000"/>
+              </a:lnSpc>
+              <a:buNone/>
+            </a:pPr>
+            <a:r>
+              <a:rPr lang="en-US" sz="1400" dirty="0">
+                <a:solidFill>
+                  <a:srgbClr val="C9D3F5"/>
+                </a:solidFill>
+                <a:latin typeface="Courier New" pitchFamily="34" charset="0"/>
+                <a:ea typeface="Courier New" pitchFamily="34" charset="-122"/>
+                <a:cs typeface="Courier New" pitchFamily="34" charset="-120"/>
+              </a:rPr>
+              <a:t>  left: 20px;  /* 20px right of its normal spot */</a:t>
+            </a:r>
+            <a:endParaRPr lang="en-US" sz="1400" dirty="0"/>
+          </a:p>
+          <a:p>
+            <a:pPr indent="0" marL="0">
+              <a:lnSpc>
+                <a:spcPct val="125000"/>
+              </a:lnSpc>
+              <a:buNone/>
+            </a:pPr>
+            <a:r>
+              <a:rPr lang="en-US" sz="1400" dirty="0">
+                <a:solidFill>
+                  <a:srgbClr val="C9D3F5"/>
+                </a:solidFill>
+                <a:latin typeface="Courier New" pitchFamily="34" charset="0"/>
+                <a:ea typeface="Courier New" pitchFamily="34" charset="-122"/>
+                <a:cs typeface="Courier New" pitchFamily="34" charset="-120"/>
+              </a:rPr>
+              <a:t>}</a:t>
+            </a:r>
+            <a:endParaRPr lang="en-US" sz="1400" dirty="0"/>
+          </a:p>
+        </p:txBody>
+      </p:sp>
+      <p:sp>
+        <p:nvSpPr>
+          <p:cNvPr id="6" name="Text 4"/>
+          <p:cNvSpPr txBox="1"/>
+          <p:nvPr/>
+        </p:nvSpPr>
+        <p:spPr>
+          <a:xfrm>
+            <a:off x="640080" y="4800600"/>
+            <a:ext cx="10911535" cy="1463040"/>
+          </a:xfrm>
+          <a:prstGeom prst="rect">
+            <a:avLst/>
+          </a:prstGeom>
+          <a:noFill/>
+          <a:ln/>
+        </p:spPr>
+        <p:txBody>
+          <a:bodyPr wrap="square" lIns="0" tIns="0" rIns="0" bIns="0" rtlCol="0" anchor="t"/>
+          <a:lstStyle/>
+          <a:p>
+            <a:pPr indent="0" marL="0">
+              <a:buNone/>
+            </a:pPr>
+            <a:r>
+              <a:rPr lang="en-US" sz="1300" dirty="0">
+                <a:solidFill>
+                  <a:srgbClr val="26262F"/>
+                </a:solidFill>
+                <a:latin typeface="Calibri" pitchFamily="34" charset="0"/>
+                <a:ea typeface="Calibri" pitchFamily="34" charset="-122"/>
+                <a:cs typeface="Calibri" pitchFamily="34" charset="-120"/>
+              </a:rPr>
+              <a:t>The box's original space stays reserved — other elements behave as though it never moved, even though it's now drawn 10px/20px away.</a:t>
+            </a:r>
+            <a:endParaRPr lang="en-US" sz="1300" dirty="0"/>
+          </a:p>
+        </p:txBody>
+      </p:sp>
+      <p:sp>
+        <p:nvSpPr>
+          <p:cNvPr id="7" name="Text 5"/>
+          <p:cNvSpPr txBox="1"/>
+          <p:nvPr/>
+        </p:nvSpPr>
+        <p:spPr>
+          <a:xfrm>
+            <a:off x="640080" y="6446520"/>
+            <a:ext cx="8686800" cy="292608"/>
+          </a:xfrm>
+          <a:prstGeom prst="rect">
+            <a:avLst/>
+          </a:prstGeom>
+          <a:noFill/>
+          <a:ln/>
+        </p:spPr>
+        <p:txBody>
+          <a:bodyPr wrap="square" lIns="0" tIns="0" rIns="0" bIns="0" rtlCol="0" anchor="ctr"/>
+          <a:lstStyle/>
+          <a:p>
+            <a:pPr algn="l" indent="0" marL="0">
+              <a:buNone/>
+            </a:pPr>
+            <a:r>
+              <a:rPr lang="en-US" sz="900" dirty="0">
+                <a:solidFill>
+                  <a:srgbClr val="5D5D72"/>
+                </a:solidFill>
+                <a:latin typeface="Calibri" pitchFamily="34" charset="0"/>
+                <a:ea typeface="Calibri" pitchFamily="34" charset="-122"/>
+                <a:cs typeface="Calibri" pitchFamily="34" charset="-120"/>
+              </a:rPr>
+              <a:t>Usman Akram  •  COMSATS University Islamabad</a:t>
+            </a:r>
+            <a:endParaRPr lang="en-US" sz="900" dirty="0"/>
+          </a:p>
+        </p:txBody>
+      </p:sp>
+      <p:sp>
+        <p:nvSpPr>
+          <p:cNvPr id="8" name="Text 6"/>
+          <p:cNvSpPr txBox="1"/>
+          <p:nvPr/>
+        </p:nvSpPr>
+        <p:spPr>
+          <a:xfrm>
+            <a:off x="11155680" y="6446520"/>
+            <a:ext cx="457200" cy="292608"/>
+          </a:xfrm>
+          <a:prstGeom prst="rect">
+            <a:avLst/>
+          </a:prstGeom>
+          <a:noFill/>
+          <a:ln/>
+        </p:spPr>
+        <p:txBody>
+          <a:bodyPr wrap="square" lIns="0" tIns="0" rIns="0" bIns="0" rtlCol="0" anchor="ctr"/>
+          <a:lstStyle/>
+          <a:p>
+            <a:pPr algn="r" indent="0" marL="0">
+              <a:buNone/>
+            </a:pPr>
+            <a:r>
+              <a:rPr lang="en-US" sz="900" dirty="0">
+                <a:solidFill>
+                  <a:srgbClr val="5D5D72"/>
+                </a:solidFill>
+                <a:latin typeface="Calibri" pitchFamily="34" charset="0"/>
+                <a:ea typeface="Calibri" pitchFamily="34" charset="-122"/>
+                <a:cs typeface="Calibri" pitchFamily="34" charset="-120"/>
+              </a:rPr>
+              <a:t>5</a:t>
+            </a:r>
+            <a:endParaRPr lang="en-US" sz="900" dirty="0"/>
+          </a:p>
+        </p:txBody>
+      </p:sp>
+    </p:spTree>
+  </p:cSld>
+  <p:clrMapOvr>
+    <a:masterClrMapping/>
+  </p:clrMapOvr>
+</p:sld>
+</file>
+
+<file path=ppt/slides/slide6.xml><?xml version="1.0" encoding="utf-8"?>
+<p:sld xmlns:a="http://schemas.openxmlformats.org/drawingml/2006/main" xmlns:r="http://schemas.openxmlformats.org/officeDocument/2006/relationships" xmlns:p="http://schemas.openxmlformats.org/presentationml/2006/main">
+  <p:cSld name="Slide 6">
+    <p:bg>
+      <p:bgPr>
+        <a:solidFill>
+          <a:srgbClr val="FFFFFF"/>
+        </a:solidFill>
+      </p:bgPr>
+    </p:bg>
+    <p:spTree>
+      <p:nvGrpSpPr>
+        <p:cNvPr id="1" name=""/>
+        <p:cNvGrpSpPr/>
+        <p:nvPr/>
+      </p:nvGrpSpPr>
+      <p:grpSpPr>
+        <a:xfrm>
+          <a:off x="0" y="0"/>
+          <a:ext cx="0" cy="0"/>
+          <a:chOff x="0" y="0"/>
+          <a:chExt cx="0" cy="0"/>
+        </a:xfrm>
+      </p:grpSpPr>
+      <p:sp>
+        <p:nvSpPr>
+          <p:cNvPr id="2" name="Text 0"/>
+          <p:cNvSpPr txBox="1"/>
+          <p:nvPr/>
+        </p:nvSpPr>
+        <p:spPr>
+          <a:xfrm>
+            <a:off x="640080" y="457200"/>
+            <a:ext cx="10058400" cy="365760"/>
+          </a:xfrm>
+          <a:prstGeom prst="rect">
+            <a:avLst/>
+          </a:prstGeom>
+          <a:noFill/>
+          <a:ln/>
+        </p:spPr>
+        <p:txBody>
+          <a:bodyPr wrap="square" lIns="0" tIns="0" rIns="0" bIns="0" rtlCol="0" anchor="ctr"/>
+          <a:lstStyle/>
+          <a:p>
+            <a:pPr algn="l" indent="0" marL="0">
+              <a:buNone/>
+            </a:pPr>
+            <a:r>
+              <a:rPr lang="en-US" sz="1300" b="1" spc="300" kern="0" dirty="0">
+                <a:solidFill>
+                  <a:srgbClr val="FF8A3D"/>
+                </a:solidFill>
+                <a:latin typeface="Calibri" pitchFamily="34" charset="0"/>
+                <a:ea typeface="Calibri" pitchFamily="34" charset="-122"/>
+                <a:cs typeface="Calibri" pitchFamily="34" charset="-120"/>
+              </a:rPr>
+              <a:t>SCHEME 2 OF 4</a:t>
+            </a:r>
+            <a:endParaRPr lang="en-US" sz="1300" dirty="0"/>
+          </a:p>
+        </p:txBody>
+      </p:sp>
+      <p:sp>
+        <p:nvSpPr>
+          <p:cNvPr id="3" name="Text 1"/>
+          <p:cNvSpPr txBox="1"/>
+          <p:nvPr/>
+        </p:nvSpPr>
+        <p:spPr>
+          <a:xfrm>
+            <a:off x="640080" y="841248"/>
+            <a:ext cx="10881360" cy="914400"/>
+          </a:xfrm>
+          <a:prstGeom prst="rect">
+            <a:avLst/>
+          </a:prstGeom>
+          <a:noFill/>
+          <a:ln/>
+        </p:spPr>
+        <p:txBody>
+          <a:bodyPr wrap="square" lIns="0" tIns="0" rIns="0" bIns="0" rtlCol="0" anchor="ctr"/>
+          <a:lstStyle/>
+          <a:p>
+            <a:pPr algn="l" indent="0" marL="0">
+              <a:buNone/>
+            </a:pPr>
+            <a:r>
+              <a:rPr lang="en-US" sz="3400" b="1" dirty="0">
+                <a:solidFill>
+                  <a:srgbClr val="2B2B7A"/>
+                </a:solidFill>
+                <a:latin typeface="Cambria" pitchFamily="34" charset="0"/>
+                <a:ea typeface="Cambria" pitchFamily="34" charset="-122"/>
+                <a:cs typeface="Cambria" pitchFamily="34" charset="-120"/>
+              </a:rPr>
+              <a:t>absolute</a:t>
+            </a:r>
+            <a:endParaRPr lang="en-US" sz="3400" dirty="0"/>
+          </a:p>
+        </p:txBody>
+      </p:sp>
+      <p:sp>
+        <p:nvSpPr>
+          <p:cNvPr id="4" name="Shape 2"/>
+          <p:cNvSpPr/>
+          <p:nvPr/>
+        </p:nvSpPr>
+        <p:spPr>
+          <a:xfrm>
+            <a:off x="640080" y="1965960"/>
+            <a:ext cx="10911535" cy="2606040"/>
+          </a:xfrm>
+          <a:prstGeom prst="roundRect">
+            <a:avLst>
+              <a:gd name="adj" fmla="val 2807"/>
+            </a:avLst>
+          </a:prstGeom>
+          <a:solidFill>
+            <a:srgbClr val="1E1E4C"/>
+          </a:solidFill>
+          <a:ln/>
+        </p:spPr>
+      </p:sp>
+      <p:sp>
+        <p:nvSpPr>
+          <p:cNvPr id="5" name="Text 3"/>
+          <p:cNvSpPr txBox="1"/>
+          <p:nvPr/>
+        </p:nvSpPr>
+        <p:spPr>
+          <a:xfrm>
+            <a:off x="960120" y="2194560"/>
+            <a:ext cx="10271455" cy="2148840"/>
+          </a:xfrm>
+          <a:prstGeom prst="rect">
+            <a:avLst/>
+          </a:prstGeom>
+          <a:noFill/>
+          <a:ln/>
+        </p:spPr>
+        <p:txBody>
+          <a:bodyPr wrap="square" lIns="0" tIns="0" rIns="0" bIns="0" rtlCol="0" anchor="t"/>
+          <a:lstStyle/>
+          <a:p>
+            <a:pPr indent="0" marL="0">
+              <a:lnSpc>
+                <a:spcPct val="125000"/>
+              </a:lnSpc>
+              <a:buNone/>
+            </a:pPr>
+            <a:r>
+              <a:rPr lang="en-US" sz="1400" dirty="0">
+                <a:solidFill>
+                  <a:srgbClr val="C9D3F5"/>
+                </a:solidFill>
+                <a:latin typeface="Courier New" pitchFamily="34" charset="0"/>
+                <a:ea typeface="Courier New" pitchFamily="34" charset="-122"/>
+                <a:cs typeface="Courier New" pitchFamily="34" charset="-120"/>
+              </a:rPr>
+              <a:t>.box {</a:t>
+            </a:r>
+            <a:endParaRPr lang="en-US" sz="1400" dirty="0"/>
+          </a:p>
+          <a:p>
+            <a:pPr indent="0" marL="0">
+              <a:lnSpc>
+                <a:spcPct val="125000"/>
+              </a:lnSpc>
+              <a:buNone/>
+            </a:pPr>
+            <a:r>
+              <a:rPr lang="en-US" sz="1400" dirty="0">
+                <a:solidFill>
+                  <a:srgbClr val="C9D3F5"/>
+                </a:solidFill>
+                <a:latin typeface="Courier New" pitchFamily="34" charset="0"/>
+                <a:ea typeface="Courier New" pitchFamily="34" charset="-122"/>
+                <a:cs typeface="Courier New" pitchFamily="34" charset="-120"/>
+              </a:rPr>
+              <a:t>  position: absolute;</a:t>
+            </a:r>
+            <a:endParaRPr lang="en-US" sz="1400" dirty="0"/>
+          </a:p>
+          <a:p>
+            <a:pPr indent="0" marL="0">
+              <a:lnSpc>
+                <a:spcPct val="125000"/>
+              </a:lnSpc>
+              <a:buNone/>
+            </a:pPr>
+            <a:r>
+              <a:rPr lang="en-US" sz="1400" dirty="0">
+                <a:solidFill>
+                  <a:srgbClr val="C9D3F5"/>
+                </a:solidFill>
+                <a:latin typeface="Courier New" pitchFamily="34" charset="0"/>
+                <a:ea typeface="Courier New" pitchFamily="34" charset="-122"/>
+                <a:cs typeface="Courier New" pitchFamily="34" charset="-120"/>
+              </a:rPr>
+              <a:t>  top: 0;</a:t>
+            </a:r>
+            <a:endParaRPr lang="en-US" sz="1400" dirty="0"/>
+          </a:p>
+          <a:p>
+            <a:pPr indent="0" marL="0">
+              <a:lnSpc>
+                <a:spcPct val="125000"/>
+              </a:lnSpc>
+              <a:buNone/>
+            </a:pPr>
+            <a:r>
+              <a:rPr lang="en-US" sz="1400" dirty="0">
+                <a:solidFill>
+                  <a:srgbClr val="C9D3F5"/>
+                </a:solidFill>
+                <a:latin typeface="Courier New" pitchFamily="34" charset="0"/>
+                <a:ea typeface="Courier New" pitchFamily="34" charset="-122"/>
+                <a:cs typeface="Courier New" pitchFamily="34" charset="-120"/>
+              </a:rPr>
+              <a:t>  right: 0;</a:t>
+            </a:r>
+            <a:endParaRPr lang="en-US" sz="1400" dirty="0"/>
+          </a:p>
+          <a:p>
+            <a:pPr indent="0" marL="0">
+              <a:lnSpc>
+                <a:spcPct val="125000"/>
+              </a:lnSpc>
+              <a:buNone/>
+            </a:pPr>
+            <a:r>
+              <a:rPr lang="en-US" sz="1400" dirty="0">
+                <a:solidFill>
+                  <a:srgbClr val="C9D3F5"/>
+                </a:solidFill>
+                <a:latin typeface="Courier New" pitchFamily="34" charset="0"/>
+                <a:ea typeface="Courier New" pitchFamily="34" charset="-122"/>
+                <a:cs typeface="Courier New" pitchFamily="34" charset="-120"/>
+              </a:rPr>
+              <a:t>}</a:t>
+            </a:r>
+            <a:endParaRPr lang="en-US" sz="1400" dirty="0"/>
+          </a:p>
+        </p:txBody>
+      </p:sp>
+      <p:sp>
+        <p:nvSpPr>
+          <p:cNvPr id="6" name="Text 4"/>
+          <p:cNvSpPr txBox="1"/>
+          <p:nvPr/>
+        </p:nvSpPr>
+        <p:spPr>
+          <a:xfrm>
+            <a:off x="640080" y="4800600"/>
+            <a:ext cx="10911535" cy="1463040"/>
+          </a:xfrm>
+          <a:prstGeom prst="rect">
+            <a:avLst/>
+          </a:prstGeom>
+          <a:noFill/>
+          <a:ln/>
+        </p:spPr>
+        <p:txBody>
+          <a:bodyPr wrap="square" lIns="0" tIns="0" rIns="0" bIns="0" rtlCol="0" anchor="t"/>
+          <a:lstStyle/>
+          <a:p>
+            <a:pPr indent="0" marL="0">
+              <a:buNone/>
+            </a:pPr>
+            <a:r>
+              <a:rPr lang="en-US" sz="1300" dirty="0">
+                <a:solidFill>
+                  <a:srgbClr val="26262F"/>
+                </a:solidFill>
+                <a:latin typeface="Calibri" pitchFamily="34" charset="0"/>
+                <a:ea typeface="Calibri" pitchFamily="34" charset="-122"/>
+                <a:cs typeface="Calibri" pitchFamily="34" charset="-120"/>
+              </a:rPr>
+              <a:t>Removed from flow entirely — siblings slide into the space it used to occupy. Positioned against its containing block, not where it used to sit.</a:t>
+            </a:r>
+            <a:endParaRPr lang="en-US" sz="1300" dirty="0"/>
+          </a:p>
+        </p:txBody>
+      </p:sp>
+      <p:sp>
+        <p:nvSpPr>
+          <p:cNvPr id="7" name="Text 5"/>
+          <p:cNvSpPr txBox="1"/>
+          <p:nvPr/>
+        </p:nvSpPr>
+        <p:spPr>
+          <a:xfrm>
+            <a:off x="640080" y="6446520"/>
+            <a:ext cx="8686800" cy="292608"/>
+          </a:xfrm>
+          <a:prstGeom prst="rect">
+            <a:avLst/>
+          </a:prstGeom>
+          <a:noFill/>
+          <a:ln/>
+        </p:spPr>
+        <p:txBody>
+          <a:bodyPr wrap="square" lIns="0" tIns="0" rIns="0" bIns="0" rtlCol="0" anchor="ctr"/>
+          <a:lstStyle/>
+          <a:p>
+            <a:pPr algn="l" indent="0" marL="0">
+              <a:buNone/>
+            </a:pPr>
+            <a:r>
+              <a:rPr lang="en-US" sz="900" dirty="0">
+                <a:solidFill>
+                  <a:srgbClr val="5D5D72"/>
+                </a:solidFill>
+                <a:latin typeface="Calibri" pitchFamily="34" charset="0"/>
+                <a:ea typeface="Calibri" pitchFamily="34" charset="-122"/>
+                <a:cs typeface="Calibri" pitchFamily="34" charset="-120"/>
+              </a:rPr>
+              <a:t>Usman Akram  •  COMSATS University Islamabad</a:t>
+            </a:r>
+            <a:endParaRPr lang="en-US" sz="900" dirty="0"/>
+          </a:p>
+        </p:txBody>
+      </p:sp>
+      <p:sp>
+        <p:nvSpPr>
+          <p:cNvPr id="8" name="Text 6"/>
+          <p:cNvSpPr txBox="1"/>
+          <p:nvPr/>
+        </p:nvSpPr>
+        <p:spPr>
+          <a:xfrm>
+            <a:off x="11155680" y="6446520"/>
+            <a:ext cx="457200" cy="292608"/>
+          </a:xfrm>
+          <a:prstGeom prst="rect">
+            <a:avLst/>
+          </a:prstGeom>
+          <a:noFill/>
+          <a:ln/>
+        </p:spPr>
+        <p:txBody>
+          <a:bodyPr wrap="square" lIns="0" tIns="0" rIns="0" bIns="0" rtlCol="0" anchor="ctr"/>
+          <a:lstStyle/>
+          <a:p>
+            <a:pPr algn="r" indent="0" marL="0">
+              <a:buNone/>
+            </a:pPr>
+            <a:r>
+              <a:rPr lang="en-US" sz="900" dirty="0">
+                <a:solidFill>
+                  <a:srgbClr val="5D5D72"/>
+                </a:solidFill>
+                <a:latin typeface="Calibri" pitchFamily="34" charset="0"/>
+                <a:ea typeface="Calibri" pitchFamily="34" charset="-122"/>
+                <a:cs typeface="Calibri" pitchFamily="34" charset="-120"/>
+              </a:rPr>
+              <a:t>6</a:t>
+            </a:r>
+            <a:endParaRPr lang="en-US" sz="900" dirty="0"/>
+          </a:p>
+        </p:txBody>
+      </p:sp>
+    </p:spTree>
+  </p:cSld>
+  <p:clrMapOvr>
+    <a:masterClrMapping/>
+  </p:clrMapOvr>
+</p:sld>
+</file>
+
+<file path=ppt/slides/slide7.xml><?xml version="1.0" encoding="utf-8"?>
+<p:sld xmlns:a="http://schemas.openxmlformats.org/drawingml/2006/main" xmlns:r="http://schemas.openxmlformats.org/officeDocument/2006/relationships" xmlns:p="http://schemas.openxmlformats.org/presentationml/2006/main">
+  <p:cSld name="Slide 7">
+    <p:bg>
+      <p:bgPr>
+        <a:solidFill>
+          <a:srgbClr val="FFFFFF"/>
+        </a:solidFill>
+      </p:bgPr>
+    </p:bg>
+    <p:spTree>
+      <p:nvGrpSpPr>
+        <p:cNvPr id="1" name=""/>
+        <p:cNvGrpSpPr/>
+        <p:nvPr/>
+      </p:nvGrpSpPr>
+      <p:grpSpPr>
+        <a:xfrm>
+          <a:off x="0" y="0"/>
+          <a:ext cx="0" cy="0"/>
+          <a:chOff x="0" y="0"/>
+          <a:chExt cx="0" cy="0"/>
+        </a:xfrm>
+      </p:grpSpPr>
+      <p:sp>
+        <p:nvSpPr>
+          <p:cNvPr id="2" name="Text 0"/>
+          <p:cNvSpPr txBox="1"/>
+          <p:nvPr/>
+        </p:nvSpPr>
+        <p:spPr>
+          <a:xfrm>
+            <a:off x="640080" y="457200"/>
+            <a:ext cx="10058400" cy="365760"/>
+          </a:xfrm>
+          <a:prstGeom prst="rect">
+            <a:avLst/>
+          </a:prstGeom>
+          <a:noFill/>
+          <a:ln/>
+        </p:spPr>
+        <p:txBody>
+          <a:bodyPr wrap="square" lIns="0" tIns="0" rIns="0" bIns="0" rtlCol="0" anchor="ctr"/>
+          <a:lstStyle/>
+          <a:p>
+            <a:pPr algn="l" indent="0" marL="0">
+              <a:buNone/>
+            </a:pPr>
+            <a:r>
+              <a:rPr lang="en-US" sz="1300" b="1" spc="300" kern="0" dirty="0">
+                <a:solidFill>
+                  <a:srgbClr val="FF8A3D"/>
+                </a:solidFill>
+                <a:latin typeface="Calibri" pitchFamily="34" charset="0"/>
+                <a:ea typeface="Calibri" pitchFamily="34" charset="-122"/>
+                <a:cs typeface="Calibri" pitchFamily="34" charset="-120"/>
+              </a:rPr>
+              <a:t>SCHEME 3 OF 4</a:t>
+            </a:r>
+            <a:endParaRPr lang="en-US" sz="1300" dirty="0"/>
+          </a:p>
+        </p:txBody>
+      </p:sp>
+      <p:sp>
+        <p:nvSpPr>
+          <p:cNvPr id="3" name="Text 1"/>
+          <p:cNvSpPr txBox="1"/>
+          <p:nvPr/>
+        </p:nvSpPr>
+        <p:spPr>
+          <a:xfrm>
+            <a:off x="640080" y="841248"/>
+            <a:ext cx="10881360" cy="914400"/>
+          </a:xfrm>
+          <a:prstGeom prst="rect">
+            <a:avLst/>
+          </a:prstGeom>
+          <a:noFill/>
+          <a:ln/>
+        </p:spPr>
+        <p:txBody>
+          <a:bodyPr wrap="square" lIns="0" tIns="0" rIns="0" bIns="0" rtlCol="0" anchor="ctr"/>
+          <a:lstStyle/>
+          <a:p>
+            <a:pPr algn="l" indent="0" marL="0">
+              <a:buNone/>
+            </a:pPr>
+            <a:r>
+              <a:rPr lang="en-US" sz="3400" b="1" dirty="0">
+                <a:solidFill>
+                  <a:srgbClr val="2B2B7A"/>
+                </a:solidFill>
+                <a:latin typeface="Cambria" pitchFamily="34" charset="0"/>
+                <a:ea typeface="Cambria" pitchFamily="34" charset="-122"/>
+                <a:cs typeface="Cambria" pitchFamily="34" charset="-120"/>
+              </a:rPr>
+              <a:t>fixed</a:t>
+            </a:r>
+            <a:endParaRPr lang="en-US" sz="3400" dirty="0"/>
+          </a:p>
+        </p:txBody>
+      </p:sp>
+      <p:sp>
+        <p:nvSpPr>
+          <p:cNvPr id="4" name="Shape 2"/>
+          <p:cNvSpPr/>
+          <p:nvPr/>
+        </p:nvSpPr>
+        <p:spPr>
+          <a:xfrm>
+            <a:off x="640080" y="1965960"/>
+            <a:ext cx="10911535" cy="2606040"/>
+          </a:xfrm>
+          <a:prstGeom prst="roundRect">
+            <a:avLst>
+              <a:gd name="adj" fmla="val 2807"/>
+            </a:avLst>
+          </a:prstGeom>
+          <a:solidFill>
+            <a:srgbClr val="1E1E4C"/>
+          </a:solidFill>
+          <a:ln/>
+        </p:spPr>
+      </p:sp>
+      <p:sp>
+        <p:nvSpPr>
+          <p:cNvPr id="5" name="Text 3"/>
+          <p:cNvSpPr txBox="1"/>
+          <p:nvPr/>
+        </p:nvSpPr>
+        <p:spPr>
+          <a:xfrm>
+            <a:off x="960120" y="2194560"/>
+            <a:ext cx="10271455" cy="2148840"/>
+          </a:xfrm>
+          <a:prstGeom prst="rect">
+            <a:avLst/>
+          </a:prstGeom>
+          <a:noFill/>
+          <a:ln/>
+        </p:spPr>
+        <p:txBody>
+          <a:bodyPr wrap="square" lIns="0" tIns="0" rIns="0" bIns="0" rtlCol="0" anchor="t"/>
+          <a:lstStyle/>
+          <a:p>
+            <a:pPr indent="0" marL="0">
+              <a:lnSpc>
+                <a:spcPct val="125000"/>
+              </a:lnSpc>
+              <a:buNone/>
+            </a:pPr>
+            <a:r>
+              <a:rPr lang="en-US" sz="1400" dirty="0">
+                <a:solidFill>
+                  <a:srgbClr val="C9D3F5"/>
+                </a:solidFill>
+                <a:latin typeface="Courier New" pitchFamily="34" charset="0"/>
+                <a:ea typeface="Courier New" pitchFamily="34" charset="-122"/>
+                <a:cs typeface="Courier New" pitchFamily="34" charset="-120"/>
+              </a:rPr>
+              <a:t>.back-to-top {</a:t>
+            </a:r>
+            <a:endParaRPr lang="en-US" sz="1400" dirty="0"/>
+          </a:p>
+          <a:p>
+            <a:pPr indent="0" marL="0">
+              <a:lnSpc>
+                <a:spcPct val="125000"/>
+              </a:lnSpc>
+              <a:buNone/>
+            </a:pPr>
+            <a:r>
+              <a:rPr lang="en-US" sz="1400" dirty="0">
+                <a:solidFill>
+                  <a:srgbClr val="C9D3F5"/>
+                </a:solidFill>
+                <a:latin typeface="Courier New" pitchFamily="34" charset="0"/>
+                <a:ea typeface="Courier New" pitchFamily="34" charset="-122"/>
+                <a:cs typeface="Courier New" pitchFamily="34" charset="-120"/>
+              </a:rPr>
+              <a:t>  position: fixed;</a:t>
+            </a:r>
+            <a:endParaRPr lang="en-US" sz="1400" dirty="0"/>
+          </a:p>
+          <a:p>
+            <a:pPr indent="0" marL="0">
+              <a:lnSpc>
+                <a:spcPct val="125000"/>
+              </a:lnSpc>
+              <a:buNone/>
+            </a:pPr>
+            <a:r>
+              <a:rPr lang="en-US" sz="1400" dirty="0">
+                <a:solidFill>
+                  <a:srgbClr val="C9D3F5"/>
+                </a:solidFill>
+                <a:latin typeface="Courier New" pitchFamily="34" charset="0"/>
+                <a:ea typeface="Courier New" pitchFamily="34" charset="-122"/>
+                <a:cs typeface="Courier New" pitchFamily="34" charset="-120"/>
+              </a:rPr>
+              <a:t>  bottom: 20px;</a:t>
+            </a:r>
+            <a:endParaRPr lang="en-US" sz="1400" dirty="0"/>
+          </a:p>
+          <a:p>
+            <a:pPr indent="0" marL="0">
+              <a:lnSpc>
+                <a:spcPct val="125000"/>
+              </a:lnSpc>
+              <a:buNone/>
+            </a:pPr>
+            <a:r>
+              <a:rPr lang="en-US" sz="1400" dirty="0">
+                <a:solidFill>
+                  <a:srgbClr val="C9D3F5"/>
+                </a:solidFill>
+                <a:latin typeface="Courier New" pitchFamily="34" charset="0"/>
+                <a:ea typeface="Courier New" pitchFamily="34" charset="-122"/>
+                <a:cs typeface="Courier New" pitchFamily="34" charset="-120"/>
+              </a:rPr>
+              <a:t>  right: 20px;</a:t>
+            </a:r>
+            <a:endParaRPr lang="en-US" sz="1400" dirty="0"/>
+          </a:p>
+          <a:p>
+            <a:pPr indent="0" marL="0">
+              <a:lnSpc>
+                <a:spcPct val="125000"/>
+              </a:lnSpc>
+              <a:buNone/>
+            </a:pPr>
+            <a:r>
+              <a:rPr lang="en-US" sz="1400" dirty="0">
+                <a:solidFill>
+                  <a:srgbClr val="C9D3F5"/>
+                </a:solidFill>
+                <a:latin typeface="Courier New" pitchFamily="34" charset="0"/>
+                <a:ea typeface="Courier New" pitchFamily="34" charset="-122"/>
+                <a:cs typeface="Courier New" pitchFamily="34" charset="-120"/>
+              </a:rPr>
+              <a:t>}</a:t>
+            </a:r>
+            <a:endParaRPr lang="en-US" sz="1400" dirty="0"/>
+          </a:p>
+        </p:txBody>
+      </p:sp>
+      <p:sp>
+        <p:nvSpPr>
+          <p:cNvPr id="6" name="Text 4"/>
+          <p:cNvSpPr txBox="1"/>
+          <p:nvPr/>
+        </p:nvSpPr>
+        <p:spPr>
+          <a:xfrm>
+            <a:off x="640080" y="4800600"/>
+            <a:ext cx="10911535" cy="1463040"/>
+          </a:xfrm>
+          <a:prstGeom prst="rect">
+            <a:avLst/>
+          </a:prstGeom>
+          <a:noFill/>
+          <a:ln/>
+        </p:spPr>
+        <p:txBody>
+          <a:bodyPr wrap="square" lIns="0" tIns="0" rIns="0" bIns="0" rtlCol="0" anchor="t"/>
+          <a:lstStyle/>
+          <a:p>
+            <a:pPr indent="0" marL="0">
+              <a:buNone/>
+            </a:pPr>
+            <a:r>
+              <a:rPr lang="en-US" sz="1300" dirty="0">
+                <a:solidFill>
+                  <a:srgbClr val="26262F"/>
+                </a:solidFill>
+                <a:latin typeface="Calibri" pitchFamily="34" charset="0"/>
+                <a:ea typeface="Calibri" pitchFamily="34" charset="-122"/>
+                <a:cs typeface="Calibri" pitchFamily="34" charset="-120"/>
+              </a:rPr>
+              <a:t>Pinned to the browser viewport — stays in the exact same screen spot even as the page scrolls. Classic use: a "back to top" button or a chat widget.</a:t>
+            </a:r>
+            <a:endParaRPr lang="en-US" sz="1300" dirty="0"/>
+          </a:p>
+        </p:txBody>
+      </p:sp>
+      <p:sp>
+        <p:nvSpPr>
+          <p:cNvPr id="7" name="Text 5"/>
+          <p:cNvSpPr txBox="1"/>
+          <p:nvPr/>
+        </p:nvSpPr>
+        <p:spPr>
+          <a:xfrm>
+            <a:off x="640080" y="6446520"/>
+            <a:ext cx="8686800" cy="292608"/>
+          </a:xfrm>
+          <a:prstGeom prst="rect">
+            <a:avLst/>
+          </a:prstGeom>
+          <a:noFill/>
+          <a:ln/>
+        </p:spPr>
+        <p:txBody>
+          <a:bodyPr wrap="square" lIns="0" tIns="0" rIns="0" bIns="0" rtlCol="0" anchor="ctr"/>
+          <a:lstStyle/>
+          <a:p>
+            <a:pPr algn="l" indent="0" marL="0">
+              <a:buNone/>
+            </a:pPr>
+            <a:r>
+              <a:rPr lang="en-US" sz="900" dirty="0">
+                <a:solidFill>
+                  <a:srgbClr val="5D5D72"/>
+                </a:solidFill>
+                <a:latin typeface="Calibri" pitchFamily="34" charset="0"/>
+                <a:ea typeface="Calibri" pitchFamily="34" charset="-122"/>
+                <a:cs typeface="Calibri" pitchFamily="34" charset="-120"/>
+              </a:rPr>
+              <a:t>Usman Akram  •  COMSATS University Islamabad</a:t>
+            </a:r>
+            <a:endParaRPr lang="en-US" sz="900" dirty="0"/>
+          </a:p>
+        </p:txBody>
+      </p:sp>
+      <p:sp>
+        <p:nvSpPr>
+          <p:cNvPr id="8" name="Text 6"/>
+          <p:cNvSpPr txBox="1"/>
+          <p:nvPr/>
+        </p:nvSpPr>
+        <p:spPr>
+          <a:xfrm>
+            <a:off x="11155680" y="6446520"/>
+            <a:ext cx="457200" cy="292608"/>
+          </a:xfrm>
+          <a:prstGeom prst="rect">
+            <a:avLst/>
+          </a:prstGeom>
+          <a:noFill/>
+          <a:ln/>
+        </p:spPr>
+        <p:txBody>
+          <a:bodyPr wrap="square" lIns="0" tIns="0" rIns="0" bIns="0" rtlCol="0" anchor="ctr"/>
+          <a:lstStyle/>
+          <a:p>
+            <a:pPr algn="r" indent="0" marL="0">
+              <a:buNone/>
+            </a:pPr>
+            <a:r>
+              <a:rPr lang="en-US" sz="900" dirty="0">
+                <a:solidFill>
+                  <a:srgbClr val="5D5D72"/>
+                </a:solidFill>
+                <a:latin typeface="Calibri" pitchFamily="34" charset="0"/>
+                <a:ea typeface="Calibri" pitchFamily="34" charset="-122"/>
+                <a:cs typeface="Calibri" pitchFamily="34" charset="-120"/>
+              </a:rPr>
+              <a:t>7</a:t>
+            </a:r>
+            <a:endParaRPr lang="en-US" sz="900" dirty="0"/>
+          </a:p>
+        </p:txBody>
+      </p:sp>
+    </p:spTree>
+  </p:cSld>
+  <p:clrMapOvr>
+    <a:masterClrMapping/>
+  </p:clrMapOvr>
+</p:sld>
+</file>
+
+<file path=ppt/slides/slide8.xml><?xml version="1.0" encoding="utf-8"?>
+<p:sld xmlns:a="http://schemas.openxmlformats.org/drawingml/2006/main" xmlns:r="http://schemas.openxmlformats.org/officeDocument/2006/relationships" xmlns:p="http://schemas.openxmlformats.org/presentationml/2006/main">
+  <p:cSld name="Slide 8">
+    <p:bg>
+      <p:bgPr>
+        <a:solidFill>
+          <a:srgbClr val="FFFFFF"/>
+        </a:solidFill>
+      </p:bgPr>
+    </p:bg>
+    <p:spTree>
+      <p:nvGrpSpPr>
+        <p:cNvPr id="1" name=""/>
+        <p:cNvGrpSpPr/>
+        <p:nvPr/>
+      </p:nvGrpSpPr>
+      <p:grpSpPr>
+        <a:xfrm>
+          <a:off x="0" y="0"/>
+          <a:ext cx="0" cy="0"/>
+          <a:chOff x="0" y="0"/>
+          <a:chExt cx="0" cy="0"/>
+        </a:xfrm>
+      </p:grpSpPr>
+      <p:sp>
+        <p:nvSpPr>
+          <p:cNvPr id="2" name="Text 0"/>
+          <p:cNvSpPr txBox="1"/>
+          <p:nvPr/>
+        </p:nvSpPr>
+        <p:spPr>
+          <a:xfrm>
+            <a:off x="640080" y="457200"/>
+            <a:ext cx="10058400" cy="365760"/>
+          </a:xfrm>
+          <a:prstGeom prst="rect">
+            <a:avLst/>
+          </a:prstGeom>
+          <a:noFill/>
+          <a:ln/>
+        </p:spPr>
+        <p:txBody>
+          <a:bodyPr wrap="square" lIns="0" tIns="0" rIns="0" bIns="0" rtlCol="0" anchor="ctr"/>
+          <a:lstStyle/>
+          <a:p>
+            <a:pPr algn="l" indent="0" marL="0">
+              <a:buNone/>
+            </a:pPr>
+            <a:r>
+              <a:rPr lang="en-US" sz="1300" b="1" spc="300" kern="0" dirty="0">
+                <a:solidFill>
+                  <a:srgbClr val="FF8A3D"/>
+                </a:solidFill>
+                <a:latin typeface="Calibri" pitchFamily="34" charset="0"/>
+                <a:ea typeface="Calibri" pitchFamily="34" charset="-122"/>
+                <a:cs typeface="Calibri" pitchFamily="34" charset="-120"/>
+              </a:rPr>
+              <a:t>SCHEME 4 OF 4</a:t>
+            </a:r>
+            <a:endParaRPr lang="en-US" sz="1300" dirty="0"/>
+          </a:p>
+        </p:txBody>
+      </p:sp>
+      <p:sp>
+        <p:nvSpPr>
+          <p:cNvPr id="3" name="Text 1"/>
+          <p:cNvSpPr txBox="1"/>
+          <p:nvPr/>
+        </p:nvSpPr>
+        <p:spPr>
+          <a:xfrm>
+            <a:off x="640080" y="841248"/>
+            <a:ext cx="10881360" cy="914400"/>
+          </a:xfrm>
+          <a:prstGeom prst="rect">
+            <a:avLst/>
+          </a:prstGeom>
+          <a:noFill/>
+          <a:ln/>
+        </p:spPr>
+        <p:txBody>
+          <a:bodyPr wrap="square" lIns="0" tIns="0" rIns="0" bIns="0" rtlCol="0" anchor="ctr"/>
+          <a:lstStyle/>
+          <a:p>
+            <a:pPr algn="l" indent="0" marL="0">
+              <a:buNone/>
+            </a:pPr>
+            <a:r>
+              <a:rPr lang="en-US" sz="3400" b="1" dirty="0">
+                <a:solidFill>
+                  <a:srgbClr val="2B2B7A"/>
+                </a:solidFill>
+                <a:latin typeface="Cambria" pitchFamily="34" charset="0"/>
+                <a:ea typeface="Cambria" pitchFamily="34" charset="-122"/>
+                <a:cs typeface="Cambria" pitchFamily="34" charset="-120"/>
+              </a:rPr>
+              <a:t>sticky</a:t>
+            </a:r>
+            <a:endParaRPr lang="en-US" sz="3400" dirty="0"/>
+          </a:p>
+        </p:txBody>
+      </p:sp>
+      <p:sp>
+        <p:nvSpPr>
+          <p:cNvPr id="4" name="Shape 2"/>
+          <p:cNvSpPr/>
+          <p:nvPr/>
+        </p:nvSpPr>
+        <p:spPr>
+          <a:xfrm>
+            <a:off x="640080" y="1965960"/>
+            <a:ext cx="10911535" cy="2221992"/>
+          </a:xfrm>
+          <a:prstGeom prst="roundRect">
+            <a:avLst>
+              <a:gd name="adj" fmla="val 3292"/>
+            </a:avLst>
+          </a:prstGeom>
+          <a:solidFill>
+            <a:srgbClr val="1E1E4C"/>
+          </a:solidFill>
+          <a:ln/>
+        </p:spPr>
+      </p:sp>
+      <p:sp>
+        <p:nvSpPr>
+          <p:cNvPr id="5" name="Text 3"/>
+          <p:cNvSpPr txBox="1"/>
+          <p:nvPr/>
+        </p:nvSpPr>
+        <p:spPr>
+          <a:xfrm>
+            <a:off x="960120" y="2194560"/>
+            <a:ext cx="10271455" cy="1764792"/>
+          </a:xfrm>
+          <a:prstGeom prst="rect">
+            <a:avLst/>
+          </a:prstGeom>
+          <a:noFill/>
+          <a:ln/>
+        </p:spPr>
+        <p:txBody>
+          <a:bodyPr wrap="square" lIns="0" tIns="0" rIns="0" bIns="0" rtlCol="0" anchor="t"/>
+          <a:lstStyle/>
+          <a:p>
+            <a:pPr indent="0" marL="0">
+              <a:lnSpc>
+                <a:spcPct val="125000"/>
+              </a:lnSpc>
+              <a:buNone/>
+            </a:pPr>
+            <a:r>
+              <a:rPr lang="en-US" sz="1400" dirty="0">
+                <a:solidFill>
+                  <a:srgbClr val="C9D3F5"/>
+                </a:solidFill>
+                <a:latin typeface="Courier New" pitchFamily="34" charset="0"/>
+                <a:ea typeface="Courier New" pitchFamily="34" charset="-122"/>
+                <a:cs typeface="Courier New" pitchFamily="34" charset="-120"/>
+              </a:rPr>
+              <a:t>.section-heading {</a:t>
+            </a:r>
+            <a:endParaRPr lang="en-US" sz="1400" dirty="0"/>
+          </a:p>
+          <a:p>
+            <a:pPr indent="0" marL="0">
+              <a:lnSpc>
+                <a:spcPct val="125000"/>
+              </a:lnSpc>
+              <a:buNone/>
+            </a:pPr>
+            <a:r>
+              <a:rPr lang="en-US" sz="1400" dirty="0">
+                <a:solidFill>
+                  <a:srgbClr val="C9D3F5"/>
+                </a:solidFill>
+                <a:latin typeface="Courier New" pitchFamily="34" charset="0"/>
+                <a:ea typeface="Courier New" pitchFamily="34" charset="-122"/>
+                <a:cs typeface="Courier New" pitchFamily="34" charset="-120"/>
+              </a:rPr>
+              <a:t>  position: sticky;</a:t>
+            </a:r>
+            <a:endParaRPr lang="en-US" sz="1400" dirty="0"/>
+          </a:p>
+          <a:p>
+            <a:pPr indent="0" marL="0">
+              <a:lnSpc>
+                <a:spcPct val="125000"/>
+              </a:lnSpc>
+              <a:buNone/>
+            </a:pPr>
+            <a:r>
+              <a:rPr lang="en-US" sz="1400" dirty="0">
+                <a:solidFill>
+                  <a:srgbClr val="C9D3F5"/>
+                </a:solidFill>
+                <a:latin typeface="Courier New" pitchFamily="34" charset="0"/>
+                <a:ea typeface="Courier New" pitchFamily="34" charset="-122"/>
+                <a:cs typeface="Courier New" pitchFamily="34" charset="-120"/>
+              </a:rPr>
+              <a:t>  top: 0;  /* the threshold — required for sticky to do anything */</a:t>
+            </a:r>
+            <a:endParaRPr lang="en-US" sz="1400" dirty="0"/>
+          </a:p>
+          <a:p>
+            <a:pPr indent="0" marL="0">
+              <a:lnSpc>
+                <a:spcPct val="125000"/>
+              </a:lnSpc>
+              <a:buNone/>
+            </a:pPr>
+            <a:r>
+              <a:rPr lang="en-US" sz="1400" dirty="0">
+                <a:solidFill>
+                  <a:srgbClr val="C9D3F5"/>
+                </a:solidFill>
+                <a:latin typeface="Courier New" pitchFamily="34" charset="0"/>
+                <a:ea typeface="Courier New" pitchFamily="34" charset="-122"/>
+                <a:cs typeface="Courier New" pitchFamily="34" charset="-120"/>
+              </a:rPr>
+              <a:t>}</a:t>
+            </a:r>
+            <a:endParaRPr lang="en-US" sz="1400" dirty="0"/>
+          </a:p>
+        </p:txBody>
+      </p:sp>
+      <p:sp>
+        <p:nvSpPr>
+          <p:cNvPr id="6" name="Text 4"/>
+          <p:cNvSpPr txBox="1"/>
+          <p:nvPr/>
+        </p:nvSpPr>
+        <p:spPr>
+          <a:xfrm>
+            <a:off x="640080" y="4416552"/>
+            <a:ext cx="10911535" cy="1847088"/>
+          </a:xfrm>
+          <a:prstGeom prst="rect">
+            <a:avLst/>
+          </a:prstGeom>
+          <a:noFill/>
+          <a:ln/>
+        </p:spPr>
+        <p:txBody>
+          <a:bodyPr wrap="square" lIns="0" tIns="0" rIns="0" bIns="0" rtlCol="0" anchor="t"/>
+          <a:lstStyle/>
+          <a:p>
+            <a:pPr indent="0" marL="0">
+              <a:buNone/>
+            </a:pPr>
+            <a:r>
+              <a:rPr lang="en-US" sz="1300" dirty="0">
+                <a:solidFill>
+                  <a:srgbClr val="26262F"/>
+                </a:solidFill>
+                <a:latin typeface="Calibri" pitchFamily="34" charset="0"/>
+                <a:ea typeface="Calibri" pitchFamily="34" charset="-122"/>
+                <a:cs typeface="Calibri" pitchFamily="34" charset="-120"/>
+              </a:rPr>
+              <a:t>Behaves like relative until the page scrolls to the threshold, then sticks like fixed — but only within its own parent's boundaries.</a:t>
+            </a:r>
+            <a:endParaRPr lang="en-US" sz="1300" dirty="0"/>
+          </a:p>
+        </p:txBody>
+      </p:sp>
+      <p:sp>
+        <p:nvSpPr>
+          <p:cNvPr id="7" name="Text 5"/>
+          <p:cNvSpPr txBox="1"/>
+          <p:nvPr/>
+        </p:nvSpPr>
+        <p:spPr>
+          <a:xfrm>
+            <a:off x="640080" y="6446520"/>
+            <a:ext cx="8686800" cy="292608"/>
+          </a:xfrm>
+          <a:prstGeom prst="rect">
+            <a:avLst/>
+          </a:prstGeom>
+          <a:noFill/>
+          <a:ln/>
+        </p:spPr>
+        <p:txBody>
+          <a:bodyPr wrap="square" lIns="0" tIns="0" rIns="0" bIns="0" rtlCol="0" anchor="ctr"/>
+          <a:lstStyle/>
+          <a:p>
+            <a:pPr algn="l" indent="0" marL="0">
+              <a:buNone/>
+            </a:pPr>
+            <a:r>
+              <a:rPr lang="en-US" sz="900" dirty="0">
+                <a:solidFill>
+                  <a:srgbClr val="5D5D72"/>
+                </a:solidFill>
+                <a:latin typeface="Calibri" pitchFamily="34" charset="0"/>
+                <a:ea typeface="Calibri" pitchFamily="34" charset="-122"/>
+                <a:cs typeface="Calibri" pitchFamily="34" charset="-120"/>
+              </a:rPr>
+              <a:t>Usman Akram  •  COMSATS University Islamabad</a:t>
+            </a:r>
+            <a:endParaRPr lang="en-US" sz="900" dirty="0"/>
+          </a:p>
+        </p:txBody>
+      </p:sp>
+      <p:sp>
+        <p:nvSpPr>
+          <p:cNvPr id="8" name="Text 6"/>
+          <p:cNvSpPr txBox="1"/>
+          <p:nvPr/>
+        </p:nvSpPr>
+        <p:spPr>
+          <a:xfrm>
+            <a:off x="11155680" y="6446520"/>
+            <a:ext cx="457200" cy="292608"/>
+          </a:xfrm>
+          <a:prstGeom prst="rect">
+            <a:avLst/>
+          </a:prstGeom>
+          <a:noFill/>
+          <a:ln/>
+        </p:spPr>
+        <p:txBody>
+          <a:bodyPr wrap="square" lIns="0" tIns="0" rIns="0" bIns="0" rtlCol="0" anchor="ctr"/>
+          <a:lstStyle/>
+          <a:p>
+            <a:pPr algn="r" indent="0" marL="0">
+              <a:buNone/>
+            </a:pPr>
+            <a:r>
+              <a:rPr lang="en-US" sz="900" dirty="0">
+                <a:solidFill>
+                  <a:srgbClr val="5D5D72"/>
+                </a:solidFill>
+                <a:latin typeface="Calibri" pitchFamily="34" charset="0"/>
+                <a:ea typeface="Calibri" pitchFamily="34" charset="-122"/>
+                <a:cs typeface="Calibri" pitchFamily="34" charset="-120"/>
+              </a:rPr>
+              <a:t>8</a:t>
+            </a:r>
+            <a:endParaRPr lang="en-US" sz="900" dirty="0"/>
+          </a:p>
+        </p:txBody>
+      </p:sp>
+    </p:spTree>
+  </p:cSld>
+  <p:clrMapOvr>
+    <a:masterClrMapping/>
+  </p:clrMapOvr>
+</p:sld>
+</file>
+
+<file path=ppt/slides/slide9.xml><?xml version="1.0" encoding="utf-8"?>
+<p:sld xmlns:a="http://schemas.openxmlformats.org/drawingml/2006/main" xmlns:r="http://schemas.openxmlformats.org/officeDocument/2006/relationships" xmlns:p="http://schemas.openxmlformats.org/presentationml/2006/main">
+  <p:cSld name="Slide 9">
+    <p:bg>
+      <p:bgPr>
+        <a:solidFill>
+          <a:srgbClr val="FFFFFF"/>
+        </a:solidFill>
+      </p:bgPr>
+    </p:bg>
+    <p:spTree>
+      <p:nvGrpSpPr>
+        <p:cNvPr id="1" name=""/>
+        <p:cNvGrpSpPr/>
+        <p:nvPr/>
+      </p:nvGrpSpPr>
+      <p:grpSpPr>
+        <a:xfrm>
+          <a:off x="0" y="0"/>
+          <a:ext cx="0" cy="0"/>
+          <a:chOff x="0" y="0"/>
+          <a:chExt cx="0" cy="0"/>
+        </a:xfrm>
+      </p:grpSpPr>
+      <p:sp>
+        <p:nvSpPr>
+          <p:cNvPr id="2" name="Text 0"/>
+          <p:cNvSpPr txBox="1"/>
+          <p:nvPr/>
+        </p:nvSpPr>
+        <p:spPr>
+          <a:xfrm>
+            <a:off x="640080" y="457200"/>
+            <a:ext cx="10058400" cy="365760"/>
+          </a:xfrm>
+          <a:prstGeom prst="rect">
+            <a:avLst/>
+          </a:prstGeom>
+          <a:noFill/>
+          <a:ln/>
+        </p:spPr>
+        <p:txBody>
+          <a:bodyPr wrap="square" lIns="0" tIns="0" rIns="0" bIns="0" rtlCol="0" anchor="ctr"/>
+          <a:lstStyle/>
+          <a:p>
+            <a:pPr algn="l" indent="0" marL="0">
+              <a:buNone/>
+            </a:pPr>
+            <a:r>
+              <a:rPr lang="en-US" sz="1300" b="1" spc="300" kern="0" dirty="0">
+                <a:solidFill>
+                  <a:srgbClr val="FF8A3D"/>
+                </a:solidFill>
+                <a:latin typeface="Calibri" pitchFamily="34" charset="0"/>
+                <a:ea typeface="Calibri" pitchFamily="34" charset="-122"/>
+                <a:cs typeface="Calibri" pitchFamily="34" charset="-120"/>
+              </a:rPr>
+              <a:t>QUICK RECAP</a:t>
+            </a:r>
+            <a:endParaRPr lang="en-US" sz="1300" dirty="0"/>
+          </a:p>
+        </p:txBody>
+      </p:sp>
+      <p:sp>
+        <p:nvSpPr>
+          <p:cNvPr id="3" name="Text 1"/>
+          <p:cNvSpPr txBox="1"/>
+          <p:nvPr/>
+        </p:nvSpPr>
+        <p:spPr>
+          <a:xfrm>
+            <a:off x="640080" y="841248"/>
+            <a:ext cx="10881360" cy="914400"/>
+          </a:xfrm>
+          <a:prstGeom prst="rect">
+            <a:avLst/>
+          </a:prstGeom>
+          <a:noFill/>
+          <a:ln/>
+        </p:spPr>
+        <p:txBody>
+          <a:bodyPr wrap="square" lIns="0" tIns="0" rIns="0" bIns="0" rtlCol="0" anchor="ctr"/>
+          <a:lstStyle/>
+          <a:p>
+            <a:pPr algn="l" indent="0" marL="0">
+              <a:buNone/>
+            </a:pPr>
+            <a:r>
+              <a:rPr lang="en-US" sz="3400" b="1" dirty="0">
+                <a:solidFill>
+                  <a:srgbClr val="2B2B7A"/>
+                </a:solidFill>
+                <a:latin typeface="Cambria" pitchFamily="34" charset="0"/>
+                <a:ea typeface="Cambria" pitchFamily="34" charset="-122"/>
+                <a:cs typeface="Cambria" pitchFamily="34" charset="-120"/>
+              </a:rPr>
               <a:t>relative, absolute, fixed, sticky</a:t>
             </a:r>
             <a:endParaRPr lang="en-US" sz="3400" dirty="0"/>
@@ -9119,7 +14364,7 @@
       </p:sp>
       <p:graphicFrame>
         <p:nvGraphicFramePr>
-          <p:cNvPr id="6" name="Table 0"/>
+          <p:cNvPr id="10" name="Table 0"/>
           <p:cNvGraphicFramePr>
             <a:graphicFrameLocks noGrp="1"/>
           </p:cNvGraphicFramePr>
@@ -9909,1189 +15154,6 @@
                 <a:ea typeface="Calibri" pitchFamily="34" charset="-122"/>
                 <a:cs typeface="Calibri" pitchFamily="34" charset="-120"/>
               </a:rPr>
-              <a:t>5</a:t>
-            </a:r>
-            <a:endParaRPr lang="en-US" sz="900" dirty="0"/>
-          </a:p>
-        </p:txBody>
-      </p:sp>
-    </p:spTree>
-  </p:cSld>
-  <p:clrMapOvr>
-    <a:masterClrMapping/>
-  </p:clrMapOvr>
-</p:sld>
-</file>
-
-<file path=ppt/slides/slide6.xml><?xml version="1.0" encoding="utf-8"?>
-<p:sld xmlns:a="http://schemas.openxmlformats.org/drawingml/2006/main" xmlns:r="http://schemas.openxmlformats.org/officeDocument/2006/relationships" xmlns:p="http://schemas.openxmlformats.org/presentationml/2006/main">
-  <p:cSld name="Slide 6">
-    <p:bg>
-      <p:bgPr>
-        <a:solidFill>
-          <a:srgbClr val="FFFFFF"/>
-        </a:solidFill>
-      </p:bgPr>
-    </p:bg>
-    <p:spTree>
-      <p:nvGrpSpPr>
-        <p:cNvPr id="1" name=""/>
-        <p:cNvGrpSpPr/>
-        <p:nvPr/>
-      </p:nvGrpSpPr>
-      <p:grpSpPr>
-        <a:xfrm>
-          <a:off x="0" y="0"/>
-          <a:ext cx="0" cy="0"/>
-          <a:chOff x="0" y="0"/>
-          <a:chExt cx="0" cy="0"/>
-        </a:xfrm>
-      </p:grpSpPr>
-      <p:sp>
-        <p:nvSpPr>
-          <p:cNvPr id="2" name="Text 0"/>
-          <p:cNvSpPr txBox="1"/>
-          <p:nvPr/>
-        </p:nvSpPr>
-        <p:spPr>
-          <a:xfrm>
-            <a:off x="640080" y="457200"/>
-            <a:ext cx="10058400" cy="365760"/>
-          </a:xfrm>
-          <a:prstGeom prst="rect">
-            <a:avLst/>
-          </a:prstGeom>
-          <a:noFill/>
-          <a:ln/>
-        </p:spPr>
-        <p:txBody>
-          <a:bodyPr wrap="square" lIns="0" tIns="0" rIns="0" bIns="0" rtlCol="0" anchor="ctr"/>
-          <a:lstStyle/>
-          <a:p>
-            <a:pPr algn="l" indent="0" marL="0">
-              <a:buNone/>
-            </a:pPr>
-            <a:r>
-              <a:rPr lang="en-US" sz="1300" b="1" spc="300" kern="0" dirty="0">
-                <a:solidFill>
-                  <a:srgbClr val="FF8A3D"/>
-                </a:solidFill>
-                <a:latin typeface="Calibri" pitchFamily="34" charset="0"/>
-                <a:ea typeface="Calibri" pitchFamily="34" charset="-122"/>
-                <a:cs typeface="Calibri" pitchFamily="34" charset="-120"/>
-              </a:rPr>
-              <a:t>A COMMON PATTERN</a:t>
-            </a:r>
-            <a:endParaRPr lang="en-US" sz="1300" dirty="0"/>
-          </a:p>
-        </p:txBody>
-      </p:sp>
-      <p:sp>
-        <p:nvSpPr>
-          <p:cNvPr id="3" name="Text 1"/>
-          <p:cNvSpPr txBox="1"/>
-          <p:nvPr/>
-        </p:nvSpPr>
-        <p:spPr>
-          <a:xfrm>
-            <a:off x="640080" y="841248"/>
-            <a:ext cx="10881360" cy="914400"/>
-          </a:xfrm>
-          <a:prstGeom prst="rect">
-            <a:avLst/>
-          </a:prstGeom>
-          <a:noFill/>
-          <a:ln/>
-        </p:spPr>
-        <p:txBody>
-          <a:bodyPr wrap="square" lIns="0" tIns="0" rIns="0" bIns="0" rtlCol="0" anchor="ctr"/>
-          <a:lstStyle/>
-          <a:p>
-            <a:pPr algn="l" indent="0" marL="0">
-              <a:buNone/>
-            </a:pPr>
-            <a:r>
-              <a:rPr lang="en-US" sz="3400" b="1" dirty="0">
-                <a:solidFill>
-                  <a:srgbClr val="2B2B7A"/>
-                </a:solidFill>
-                <a:latin typeface="Cambria" pitchFamily="34" charset="0"/>
-                <a:ea typeface="Cambria" pitchFamily="34" charset="-122"/>
-                <a:cs typeface="Cambria" pitchFamily="34" charset="-120"/>
-              </a:rPr>
-              <a:t>Relative Parent, Absolute Child</a:t>
-            </a:r>
-            <a:endParaRPr lang="en-US" sz="3400" dirty="0"/>
-          </a:p>
-        </p:txBody>
-      </p:sp>
-      <p:sp>
-        <p:nvSpPr>
-          <p:cNvPr id="4" name="Shape 2"/>
-          <p:cNvSpPr/>
-          <p:nvPr/>
-        </p:nvSpPr>
-        <p:spPr>
-          <a:xfrm>
-            <a:off x="640080" y="1965960"/>
-            <a:ext cx="10911535" cy="2990088"/>
-          </a:xfrm>
-          <a:prstGeom prst="roundRect">
-            <a:avLst>
-              <a:gd name="adj" fmla="val 2446"/>
-            </a:avLst>
-          </a:prstGeom>
-          <a:solidFill>
-            <a:srgbClr val="1E1E4C"/>
-          </a:solidFill>
-          <a:ln/>
-        </p:spPr>
-      </p:sp>
-      <p:sp>
-        <p:nvSpPr>
-          <p:cNvPr id="5" name="Text 3"/>
-          <p:cNvSpPr txBox="1"/>
-          <p:nvPr/>
-        </p:nvSpPr>
-        <p:spPr>
-          <a:xfrm>
-            <a:off x="960120" y="2194560"/>
-            <a:ext cx="10271455" cy="2532888"/>
-          </a:xfrm>
-          <a:prstGeom prst="rect">
-            <a:avLst/>
-          </a:prstGeom>
-          <a:noFill/>
-          <a:ln/>
-        </p:spPr>
-        <p:txBody>
-          <a:bodyPr wrap="square" lIns="0" tIns="0" rIns="0" bIns="0" rtlCol="0" anchor="t"/>
-          <a:lstStyle/>
-          <a:p>
-            <a:pPr indent="0" marL="0">
-              <a:lnSpc>
-                <a:spcPct val="125000"/>
-              </a:lnSpc>
-              <a:buNone/>
-            </a:pPr>
-            <a:r>
-              <a:rPr lang="en-US" sz="1400" dirty="0">
-                <a:solidFill>
-                  <a:srgbClr val="C9D3F5"/>
-                </a:solidFill>
-                <a:latin typeface="Courier New" pitchFamily="34" charset="0"/>
-                <a:ea typeface="Courier New" pitchFamily="34" charset="-122"/>
-                <a:cs typeface="Courier New" pitchFamily="34" charset="-120"/>
-              </a:rPr>
-              <a:t>.card { position: relative; }</a:t>
-            </a:r>
-            <a:endParaRPr lang="en-US" sz="1400" dirty="0"/>
-          </a:p>
-          <a:p>
-            <a:pPr indent="0" marL="0">
-              <a:lnSpc>
-                <a:spcPct val="125000"/>
-              </a:lnSpc>
-              <a:buNone/>
-            </a:pPr>
-            <a:endParaRPr lang="en-US" sz="1400" dirty="0"/>
-          </a:p>
-          <a:p>
-            <a:pPr indent="0" marL="0">
-              <a:lnSpc>
-                <a:spcPct val="125000"/>
-              </a:lnSpc>
-              <a:buNone/>
-            </a:pPr>
-            <a:r>
-              <a:rPr lang="en-US" sz="1400" dirty="0">
-                <a:solidFill>
-                  <a:srgbClr val="C9D3F5"/>
-                </a:solidFill>
-                <a:latin typeface="Courier New" pitchFamily="34" charset="0"/>
-                <a:ea typeface="Courier New" pitchFamily="34" charset="-122"/>
-                <a:cs typeface="Courier New" pitchFamily="34" charset="-120"/>
-              </a:rPr>
-              <a:t>.card .badge {</a:t>
-            </a:r>
-            <a:endParaRPr lang="en-US" sz="1400" dirty="0"/>
-          </a:p>
-          <a:p>
-            <a:pPr indent="0" marL="0">
-              <a:lnSpc>
-                <a:spcPct val="125000"/>
-              </a:lnSpc>
-              <a:buNone/>
-            </a:pPr>
-            <a:r>
-              <a:rPr lang="en-US" sz="1400" dirty="0">
-                <a:solidFill>
-                  <a:srgbClr val="C9D3F5"/>
-                </a:solidFill>
-                <a:latin typeface="Courier New" pitchFamily="34" charset="0"/>
-                <a:ea typeface="Courier New" pitchFamily="34" charset="-122"/>
-                <a:cs typeface="Courier New" pitchFamily="34" charset="-120"/>
-              </a:rPr>
-              <a:t>  position: absolute;</a:t>
-            </a:r>
-            <a:endParaRPr lang="en-US" sz="1400" dirty="0"/>
-          </a:p>
-          <a:p>
-            <a:pPr indent="0" marL="0">
-              <a:lnSpc>
-                <a:spcPct val="125000"/>
-              </a:lnSpc>
-              <a:buNone/>
-            </a:pPr>
-            <a:r>
-              <a:rPr lang="en-US" sz="1400" dirty="0">
-                <a:solidFill>
-                  <a:srgbClr val="C9D3F5"/>
-                </a:solidFill>
-                <a:latin typeface="Courier New" pitchFamily="34" charset="0"/>
-                <a:ea typeface="Courier New" pitchFamily="34" charset="-122"/>
-                <a:cs typeface="Courier New" pitchFamily="34" charset="-120"/>
-              </a:rPr>
-              <a:t>  top: 8px; right: 8px;</a:t>
-            </a:r>
-            <a:endParaRPr lang="en-US" sz="1400" dirty="0"/>
-          </a:p>
-          <a:p>
-            <a:pPr indent="0" marL="0">
-              <a:lnSpc>
-                <a:spcPct val="125000"/>
-              </a:lnSpc>
-              <a:buNone/>
-            </a:pPr>
-            <a:r>
-              <a:rPr lang="en-US" sz="1400" dirty="0">
-                <a:solidFill>
-                  <a:srgbClr val="C9D3F5"/>
-                </a:solidFill>
-                <a:latin typeface="Courier New" pitchFamily="34" charset="0"/>
-                <a:ea typeface="Courier New" pitchFamily="34" charset="-122"/>
-                <a:cs typeface="Courier New" pitchFamily="34" charset="-120"/>
-              </a:rPr>
-              <a:t>}</a:t>
-            </a:r>
-            <a:endParaRPr lang="en-US" sz="1400" dirty="0"/>
-          </a:p>
-        </p:txBody>
-      </p:sp>
-      <p:sp>
-        <p:nvSpPr>
-          <p:cNvPr id="6" name="Text 4"/>
-          <p:cNvSpPr txBox="1"/>
-          <p:nvPr/>
-        </p:nvSpPr>
-        <p:spPr>
-          <a:xfrm>
-            <a:off x="640080" y="5184648"/>
-            <a:ext cx="10911535" cy="1078992"/>
-          </a:xfrm>
-          <a:prstGeom prst="rect">
-            <a:avLst/>
-          </a:prstGeom>
-          <a:noFill/>
-          <a:ln/>
-        </p:spPr>
-        <p:txBody>
-          <a:bodyPr wrap="square" lIns="0" tIns="0" rIns="0" bIns="0" rtlCol="0" anchor="t"/>
-          <a:lstStyle/>
-          <a:p>
-            <a:pPr indent="0" marL="0">
-              <a:buNone/>
-            </a:pPr>
-            <a:r>
-              <a:rPr lang="en-US" sz="1300" dirty="0">
-                <a:solidFill>
-                  <a:srgbClr val="26262F"/>
-                </a:solidFill>
-                <a:latin typeface="Calibri" pitchFamily="34" charset="0"/>
-                <a:ea typeface="Calibri" pitchFamily="34" charset="-122"/>
-                <a:cs typeface="Calibri" pitchFamily="34" charset="-120"/>
-              </a:rPr>
-              <a:t>.card becomes the containing block, so the badge is pinned to the card's corner, not the whole page.</a:t>
-            </a:r>
-            <a:endParaRPr lang="en-US" sz="1300" dirty="0"/>
-          </a:p>
-        </p:txBody>
-      </p:sp>
-      <p:sp>
-        <p:nvSpPr>
-          <p:cNvPr id="7" name="Text 5"/>
-          <p:cNvSpPr txBox="1"/>
-          <p:nvPr/>
-        </p:nvSpPr>
-        <p:spPr>
-          <a:xfrm>
-            <a:off x="640080" y="6446520"/>
-            <a:ext cx="8686800" cy="292608"/>
-          </a:xfrm>
-          <a:prstGeom prst="rect">
-            <a:avLst/>
-          </a:prstGeom>
-          <a:noFill/>
-          <a:ln/>
-        </p:spPr>
-        <p:txBody>
-          <a:bodyPr wrap="square" lIns="0" tIns="0" rIns="0" bIns="0" rtlCol="0" anchor="ctr"/>
-          <a:lstStyle/>
-          <a:p>
-            <a:pPr algn="l" indent="0" marL="0">
-              <a:buNone/>
-            </a:pPr>
-            <a:r>
-              <a:rPr lang="en-US" sz="900" dirty="0">
-                <a:solidFill>
-                  <a:srgbClr val="5D5D72"/>
-                </a:solidFill>
-                <a:latin typeface="Calibri" pitchFamily="34" charset="0"/>
-                <a:ea typeface="Calibri" pitchFamily="34" charset="-122"/>
-                <a:cs typeface="Calibri" pitchFamily="34" charset="-120"/>
-              </a:rPr>
-              <a:t>Usman Akram  •  COMSATS University Islamabad</a:t>
-            </a:r>
-            <a:endParaRPr lang="en-US" sz="900" dirty="0"/>
-          </a:p>
-        </p:txBody>
-      </p:sp>
-      <p:sp>
-        <p:nvSpPr>
-          <p:cNvPr id="8" name="Text 6"/>
-          <p:cNvSpPr txBox="1"/>
-          <p:nvPr/>
-        </p:nvSpPr>
-        <p:spPr>
-          <a:xfrm>
-            <a:off x="11155680" y="6446520"/>
-            <a:ext cx="457200" cy="292608"/>
-          </a:xfrm>
-          <a:prstGeom prst="rect">
-            <a:avLst/>
-          </a:prstGeom>
-          <a:noFill/>
-          <a:ln/>
-        </p:spPr>
-        <p:txBody>
-          <a:bodyPr wrap="square" lIns="0" tIns="0" rIns="0" bIns="0" rtlCol="0" anchor="ctr"/>
-          <a:lstStyle/>
-          <a:p>
-            <a:pPr algn="r" indent="0" marL="0">
-              <a:buNone/>
-            </a:pPr>
-            <a:r>
-              <a:rPr lang="en-US" sz="900" dirty="0">
-                <a:solidFill>
-                  <a:srgbClr val="5D5D72"/>
-                </a:solidFill>
-                <a:latin typeface="Calibri" pitchFamily="34" charset="0"/>
-                <a:ea typeface="Calibri" pitchFamily="34" charset="-122"/>
-                <a:cs typeface="Calibri" pitchFamily="34" charset="-120"/>
-              </a:rPr>
-              <a:t>6</a:t>
-            </a:r>
-            <a:endParaRPr lang="en-US" sz="900" dirty="0"/>
-          </a:p>
-        </p:txBody>
-      </p:sp>
-    </p:spTree>
-  </p:cSld>
-  <p:clrMapOvr>
-    <a:masterClrMapping/>
-  </p:clrMapOvr>
-</p:sld>
-</file>
-
-<file path=ppt/slides/slide7.xml><?xml version="1.0" encoding="utf-8"?>
-<p:sld xmlns:a="http://schemas.openxmlformats.org/drawingml/2006/main" xmlns:r="http://schemas.openxmlformats.org/officeDocument/2006/relationships" xmlns:p="http://schemas.openxmlformats.org/presentationml/2006/main">
-  <p:cSld name="Slide 7">
-    <p:bg>
-      <p:bgPr>
-        <a:solidFill>
-          <a:srgbClr val="FFFFFF"/>
-        </a:solidFill>
-      </p:bgPr>
-    </p:bg>
-    <p:spTree>
-      <p:nvGrpSpPr>
-        <p:cNvPr id="1" name=""/>
-        <p:cNvGrpSpPr/>
-        <p:nvPr/>
-      </p:nvGrpSpPr>
-      <p:grpSpPr>
-        <a:xfrm>
-          <a:off x="0" y="0"/>
-          <a:ext cx="0" cy="0"/>
-          <a:chOff x="0" y="0"/>
-          <a:chExt cx="0" cy="0"/>
-        </a:xfrm>
-      </p:grpSpPr>
-      <p:sp>
-        <p:nvSpPr>
-          <p:cNvPr id="2" name="Text 0"/>
-          <p:cNvSpPr txBox="1"/>
-          <p:nvPr/>
-        </p:nvSpPr>
-        <p:spPr>
-          <a:xfrm>
-            <a:off x="640080" y="457200"/>
-            <a:ext cx="10058400" cy="365760"/>
-          </a:xfrm>
-          <a:prstGeom prst="rect">
-            <a:avLst/>
-          </a:prstGeom>
-          <a:noFill/>
-          <a:ln/>
-        </p:spPr>
-        <p:txBody>
-          <a:bodyPr wrap="square" lIns="0" tIns="0" rIns="0" bIns="0" rtlCol="0" anchor="ctr"/>
-          <a:lstStyle/>
-          <a:p>
-            <a:pPr algn="l" indent="0" marL="0">
-              <a:buNone/>
-            </a:pPr>
-            <a:r>
-              <a:rPr lang="en-US" sz="1300" b="1" spc="300" kern="0" dirty="0">
-                <a:solidFill>
-                  <a:srgbClr val="FF8A3D"/>
-                </a:solidFill>
-                <a:latin typeface="Calibri" pitchFamily="34" charset="0"/>
-                <a:ea typeface="Calibri" pitchFamily="34" charset="-122"/>
-                <a:cs typeface="Calibri" pitchFamily="34" charset="-120"/>
-              </a:rPr>
-              <a:t>A COMMON PATTERN</a:t>
-            </a:r>
-            <a:endParaRPr lang="en-US" sz="1300" dirty="0"/>
-          </a:p>
-        </p:txBody>
-      </p:sp>
-      <p:sp>
-        <p:nvSpPr>
-          <p:cNvPr id="3" name="Text 1"/>
-          <p:cNvSpPr txBox="1"/>
-          <p:nvPr/>
-        </p:nvSpPr>
-        <p:spPr>
-          <a:xfrm>
-            <a:off x="640080" y="841248"/>
-            <a:ext cx="10881360" cy="914400"/>
-          </a:xfrm>
-          <a:prstGeom prst="rect">
-            <a:avLst/>
-          </a:prstGeom>
-          <a:noFill/>
-          <a:ln/>
-        </p:spPr>
-        <p:txBody>
-          <a:bodyPr wrap="square" lIns="0" tIns="0" rIns="0" bIns="0" rtlCol="0" anchor="ctr"/>
-          <a:lstStyle/>
-          <a:p>
-            <a:pPr algn="l" indent="0" marL="0">
-              <a:buNone/>
-            </a:pPr>
-            <a:r>
-              <a:rPr lang="en-US" sz="3400" b="1" dirty="0">
-                <a:solidFill>
-                  <a:srgbClr val="2B2B7A"/>
-                </a:solidFill>
-                <a:latin typeface="Cambria" pitchFamily="34" charset="0"/>
-                <a:ea typeface="Cambria" pitchFamily="34" charset="-122"/>
-                <a:cs typeface="Cambria" pitchFamily="34" charset="-120"/>
-              </a:rPr>
-              <a:t>The Badge, Rendered</a:t>
-            </a:r>
-            <a:endParaRPr lang="en-US" sz="3400" dirty="0"/>
-          </a:p>
-        </p:txBody>
-      </p:sp>
-      <p:sp>
-        <p:nvSpPr>
-          <p:cNvPr id="4" name="Shape 2"/>
-          <p:cNvSpPr/>
-          <p:nvPr/>
-        </p:nvSpPr>
-        <p:spPr>
-          <a:xfrm>
-            <a:off x="530352" y="1947672"/>
-            <a:ext cx="11130991" cy="4334256"/>
-          </a:xfrm>
-          <a:prstGeom prst="roundRect">
-            <a:avLst>
-              <a:gd name="adj" fmla="val 1266"/>
-            </a:avLst>
-          </a:prstGeom>
-          <a:solidFill>
-            <a:srgbClr val="FFFFFF"/>
-          </a:solidFill>
-          <a:ln w="12700">
-            <a:solidFill>
-              <a:srgbClr val="E2E2EE"/>
-            </a:solidFill>
-            <a:prstDash val="solid"/>
-          </a:ln>
-          <a:effectLst>
-            <a:outerShdw sx="100000" sy="100000" kx="0" ky="0" algn="bl" rotWithShape="0" blurRad="101600" dist="38100" dir="5400000">
-              <a:srgbClr val="000000">
-                <a:alpha val="12000"/>
-              </a:srgbClr>
-            </a:outerShdw>
-          </a:effectLst>
-        </p:spPr>
-      </p:sp>
-      <p:pic>
-        <p:nvPicPr>
-          <p:cNvPr id="5" name="Image 0" descr="D:/GitHub/mern-web-book/docs/assets/img/lecture-07/card-badge.png">    </p:cNvPr>
-          <p:cNvPicPr>
-            <a:picLocks noChangeAspect="1"/>
-          </p:cNvPicPr>
-          <p:nvPr/>
-        </p:nvPicPr>
-        <p:blipFill>
-          <a:blip r:embed="rId1"/>
-          <a:stretch>
-            <a:fillRect/>
-          </a:stretch>
-        </p:blipFill>
-        <p:spPr>
-          <a:xfrm>
-            <a:off x="1249528" y="2461260"/>
-            <a:ext cx="9692640" cy="3307080"/>
-          </a:xfrm>
-          <a:prstGeom prst="rect">
-            <a:avLst/>
-          </a:prstGeom>
-        </p:spPr>
-      </p:pic>
-      <p:sp>
-        <p:nvSpPr>
-          <p:cNvPr id="6" name="Text 3"/>
-          <p:cNvSpPr txBox="1"/>
-          <p:nvPr/>
-        </p:nvSpPr>
-        <p:spPr>
-          <a:xfrm>
-            <a:off x="640080" y="6446520"/>
-            <a:ext cx="8686800" cy="292608"/>
-          </a:xfrm>
-          <a:prstGeom prst="rect">
-            <a:avLst/>
-          </a:prstGeom>
-          <a:noFill/>
-          <a:ln/>
-        </p:spPr>
-        <p:txBody>
-          <a:bodyPr wrap="square" lIns="0" tIns="0" rIns="0" bIns="0" rtlCol="0" anchor="ctr"/>
-          <a:lstStyle/>
-          <a:p>
-            <a:pPr algn="l" indent="0" marL="0">
-              <a:buNone/>
-            </a:pPr>
-            <a:r>
-              <a:rPr lang="en-US" sz="900" dirty="0">
-                <a:solidFill>
-                  <a:srgbClr val="5D5D72"/>
-                </a:solidFill>
-                <a:latin typeface="Calibri" pitchFamily="34" charset="0"/>
-                <a:ea typeface="Calibri" pitchFamily="34" charset="-122"/>
-                <a:cs typeface="Calibri" pitchFamily="34" charset="-120"/>
-              </a:rPr>
-              <a:t>Usman Akram  •  COMSATS University Islamabad</a:t>
-            </a:r>
-            <a:endParaRPr lang="en-US" sz="900" dirty="0"/>
-          </a:p>
-        </p:txBody>
-      </p:sp>
-      <p:sp>
-        <p:nvSpPr>
-          <p:cNvPr id="7" name="Text 4"/>
-          <p:cNvSpPr txBox="1"/>
-          <p:nvPr/>
-        </p:nvSpPr>
-        <p:spPr>
-          <a:xfrm>
-            <a:off x="11155680" y="6446520"/>
-            <a:ext cx="457200" cy="292608"/>
-          </a:xfrm>
-          <a:prstGeom prst="rect">
-            <a:avLst/>
-          </a:prstGeom>
-          <a:noFill/>
-          <a:ln/>
-        </p:spPr>
-        <p:txBody>
-          <a:bodyPr wrap="square" lIns="0" tIns="0" rIns="0" bIns="0" rtlCol="0" anchor="ctr"/>
-          <a:lstStyle/>
-          <a:p>
-            <a:pPr algn="r" indent="0" marL="0">
-              <a:buNone/>
-            </a:pPr>
-            <a:r>
-              <a:rPr lang="en-US" sz="900" dirty="0">
-                <a:solidFill>
-                  <a:srgbClr val="5D5D72"/>
-                </a:solidFill>
-                <a:latin typeface="Calibri" pitchFamily="34" charset="0"/>
-                <a:ea typeface="Calibri" pitchFamily="34" charset="-122"/>
-                <a:cs typeface="Calibri" pitchFamily="34" charset="-120"/>
-              </a:rPr>
-              <a:t>7</a:t>
-            </a:r>
-            <a:endParaRPr lang="en-US" sz="900" dirty="0"/>
-          </a:p>
-        </p:txBody>
-      </p:sp>
-    </p:spTree>
-  </p:cSld>
-  <p:clrMapOvr>
-    <a:masterClrMapping/>
-  </p:clrMapOvr>
-</p:sld>
-</file>
-
-<file path=ppt/slides/slide8.xml><?xml version="1.0" encoding="utf-8"?>
-<p:sld xmlns:a="http://schemas.openxmlformats.org/drawingml/2006/main" xmlns:r="http://schemas.openxmlformats.org/officeDocument/2006/relationships" xmlns:p="http://schemas.openxmlformats.org/presentationml/2006/main">
-  <p:cSld name="Slide 8">
-    <p:bg>
-      <p:bgPr>
-        <a:solidFill>
-          <a:srgbClr val="FFFFFF"/>
-        </a:solidFill>
-      </p:bgPr>
-    </p:bg>
-    <p:spTree>
-      <p:nvGrpSpPr>
-        <p:cNvPr id="1" name=""/>
-        <p:cNvGrpSpPr/>
-        <p:nvPr/>
-      </p:nvGrpSpPr>
-      <p:grpSpPr>
-        <a:xfrm>
-          <a:off x="0" y="0"/>
-          <a:ext cx="0" cy="0"/>
-          <a:chOff x="0" y="0"/>
-          <a:chExt cx="0" cy="0"/>
-        </a:xfrm>
-      </p:grpSpPr>
-      <p:sp>
-        <p:nvSpPr>
-          <p:cNvPr id="2" name="Text 0"/>
-          <p:cNvSpPr txBox="1"/>
-          <p:nvPr/>
-        </p:nvSpPr>
-        <p:spPr>
-          <a:xfrm>
-            <a:off x="640080" y="457200"/>
-            <a:ext cx="10058400" cy="365760"/>
-          </a:xfrm>
-          <a:prstGeom prst="rect">
-            <a:avLst/>
-          </a:prstGeom>
-          <a:noFill/>
-          <a:ln/>
-        </p:spPr>
-        <p:txBody>
-          <a:bodyPr wrap="square" lIns="0" tIns="0" rIns="0" bIns="0" rtlCol="0" anchor="ctr"/>
-          <a:lstStyle/>
-          <a:p>
-            <a:pPr algn="l" indent="0" marL="0">
-              <a:buNone/>
-            </a:pPr>
-            <a:r>
-              <a:rPr lang="en-US" sz="1300" b="1" spc="300" kern="0" dirty="0">
-                <a:solidFill>
-                  <a:srgbClr val="FF8A3D"/>
-                </a:solidFill>
-                <a:latin typeface="Calibri" pitchFamily="34" charset="0"/>
-                <a:ea typeface="Calibri" pitchFamily="34" charset="-122"/>
-                <a:cs typeface="Calibri" pitchFamily="34" charset="-120"/>
-              </a:rPr>
-              <a:t>STACKING ORDER</a:t>
-            </a:r>
-            <a:endParaRPr lang="en-US" sz="1300" dirty="0"/>
-          </a:p>
-        </p:txBody>
-      </p:sp>
-      <p:sp>
-        <p:nvSpPr>
-          <p:cNvPr id="3" name="Text 1"/>
-          <p:cNvSpPr txBox="1"/>
-          <p:nvPr/>
-        </p:nvSpPr>
-        <p:spPr>
-          <a:xfrm>
-            <a:off x="640080" y="841248"/>
-            <a:ext cx="10881360" cy="914400"/>
-          </a:xfrm>
-          <a:prstGeom prst="rect">
-            <a:avLst/>
-          </a:prstGeom>
-          <a:noFill/>
-          <a:ln/>
-        </p:spPr>
-        <p:txBody>
-          <a:bodyPr wrap="square" lIns="0" tIns="0" rIns="0" bIns="0" rtlCol="0" anchor="ctr"/>
-          <a:lstStyle/>
-          <a:p>
-            <a:pPr algn="l" indent="0" marL="0">
-              <a:buNone/>
-            </a:pPr>
-            <a:r>
-              <a:rPr lang="en-US" sz="3400" b="1" dirty="0">
-                <a:solidFill>
-                  <a:srgbClr val="2B2B7A"/>
-                </a:solidFill>
-                <a:latin typeface="Cambria" pitchFamily="34" charset="0"/>
-                <a:ea typeface="Cambria" pitchFamily="34" charset="-122"/>
-                <a:cs typeface="Cambria" pitchFamily="34" charset="-120"/>
-              </a:rPr>
-              <a:t>z-index</a:t>
-            </a:r>
-            <a:endParaRPr lang="en-US" sz="3400" dirty="0"/>
-          </a:p>
-        </p:txBody>
-      </p:sp>
-      <p:sp>
-        <p:nvSpPr>
-          <p:cNvPr id="4" name="Shape 2"/>
-          <p:cNvSpPr/>
-          <p:nvPr/>
-        </p:nvSpPr>
-        <p:spPr>
-          <a:xfrm>
-            <a:off x="640080" y="1965960"/>
-            <a:ext cx="10911535" cy="1453896"/>
-          </a:xfrm>
-          <a:prstGeom prst="roundRect">
-            <a:avLst>
-              <a:gd name="adj" fmla="val 5031"/>
-            </a:avLst>
-          </a:prstGeom>
-          <a:solidFill>
-            <a:srgbClr val="1E1E4C"/>
-          </a:solidFill>
-          <a:ln/>
-        </p:spPr>
-      </p:sp>
-      <p:sp>
-        <p:nvSpPr>
-          <p:cNvPr id="5" name="Text 3"/>
-          <p:cNvSpPr txBox="1"/>
-          <p:nvPr/>
-        </p:nvSpPr>
-        <p:spPr>
-          <a:xfrm>
-            <a:off x="960120" y="2194560"/>
-            <a:ext cx="10271455" cy="996696"/>
-          </a:xfrm>
-          <a:prstGeom prst="rect">
-            <a:avLst/>
-          </a:prstGeom>
-          <a:noFill/>
-          <a:ln/>
-        </p:spPr>
-        <p:txBody>
-          <a:bodyPr wrap="square" lIns="0" tIns="0" rIns="0" bIns="0" rtlCol="0" anchor="t"/>
-          <a:lstStyle/>
-          <a:p>
-            <a:pPr indent="0" marL="0">
-              <a:lnSpc>
-                <a:spcPct val="125000"/>
-              </a:lnSpc>
-              <a:buNone/>
-            </a:pPr>
-            <a:r>
-              <a:rPr lang="en-US" sz="1400" dirty="0">
-                <a:solidFill>
-                  <a:srgbClr val="C9D3F5"/>
-                </a:solidFill>
-                <a:latin typeface="Courier New" pitchFamily="34" charset="0"/>
-                <a:ea typeface="Courier New" pitchFamily="34" charset="-122"/>
-                <a:cs typeface="Courier New" pitchFamily="34" charset="-120"/>
-              </a:rPr>
-              <a:t>.back  { position: absolute; z-index: 1; }</a:t>
-            </a:r>
-            <a:endParaRPr lang="en-US" sz="1400" dirty="0"/>
-          </a:p>
-          <a:p>
-            <a:pPr indent="0" marL="0">
-              <a:lnSpc>
-                <a:spcPct val="125000"/>
-              </a:lnSpc>
-              <a:buNone/>
-            </a:pPr>
-            <a:r>
-              <a:rPr lang="en-US" sz="1400" dirty="0">
-                <a:solidFill>
-                  <a:srgbClr val="C9D3F5"/>
-                </a:solidFill>
-                <a:latin typeface="Courier New" pitchFamily="34" charset="0"/>
-                <a:ea typeface="Courier New" pitchFamily="34" charset="-122"/>
-                <a:cs typeface="Courier New" pitchFamily="34" charset="-120"/>
-              </a:rPr>
-              <a:t>.front { position: absolute; z-index: 2; }  /* drawn on top */</a:t>
-            </a:r>
-            <a:endParaRPr lang="en-US" sz="1400" dirty="0"/>
-          </a:p>
-        </p:txBody>
-      </p:sp>
-      <p:sp>
-        <p:nvSpPr>
-          <p:cNvPr id="6" name="Text 4"/>
-          <p:cNvSpPr txBox="1"/>
-          <p:nvPr/>
-        </p:nvSpPr>
-        <p:spPr>
-          <a:xfrm>
-            <a:off x="640080" y="3648456"/>
-            <a:ext cx="10911535" cy="2615184"/>
-          </a:xfrm>
-          <a:prstGeom prst="rect">
-            <a:avLst/>
-          </a:prstGeom>
-          <a:noFill/>
-          <a:ln/>
-        </p:spPr>
-        <p:txBody>
-          <a:bodyPr wrap="square" lIns="0" tIns="0" rIns="0" bIns="0" rtlCol="0" anchor="t"/>
-          <a:lstStyle/>
-          <a:p>
-            <a:pPr indent="0" marL="0">
-              <a:buNone/>
-            </a:pPr>
-            <a:r>
-              <a:rPr lang="en-US" sz="1300" dirty="0">
-                <a:solidFill>
-                  <a:srgbClr val="26262F"/>
-                </a:solidFill>
-                <a:latin typeface="Calibri" pitchFamily="34" charset="0"/>
-                <a:ea typeface="Calibri" pitchFamily="34" charset="-122"/>
-                <a:cs typeface="Calibri" pitchFamily="34" charset="-120"/>
-              </a:rPr>
-              <a:t>z-index only works on positioned elements (not static) — a higher value draws on top among overlapping elements.</a:t>
-            </a:r>
-            <a:endParaRPr lang="en-US" sz="1300" dirty="0"/>
-          </a:p>
-        </p:txBody>
-      </p:sp>
-      <p:sp>
-        <p:nvSpPr>
-          <p:cNvPr id="7" name="Text 5"/>
-          <p:cNvSpPr txBox="1"/>
-          <p:nvPr/>
-        </p:nvSpPr>
-        <p:spPr>
-          <a:xfrm>
-            <a:off x="640080" y="6446520"/>
-            <a:ext cx="8686800" cy="292608"/>
-          </a:xfrm>
-          <a:prstGeom prst="rect">
-            <a:avLst/>
-          </a:prstGeom>
-          <a:noFill/>
-          <a:ln/>
-        </p:spPr>
-        <p:txBody>
-          <a:bodyPr wrap="square" lIns="0" tIns="0" rIns="0" bIns="0" rtlCol="0" anchor="ctr"/>
-          <a:lstStyle/>
-          <a:p>
-            <a:pPr algn="l" indent="0" marL="0">
-              <a:buNone/>
-            </a:pPr>
-            <a:r>
-              <a:rPr lang="en-US" sz="900" dirty="0">
-                <a:solidFill>
-                  <a:srgbClr val="5D5D72"/>
-                </a:solidFill>
-                <a:latin typeface="Calibri" pitchFamily="34" charset="0"/>
-                <a:ea typeface="Calibri" pitchFamily="34" charset="-122"/>
-                <a:cs typeface="Calibri" pitchFamily="34" charset="-120"/>
-              </a:rPr>
-              <a:t>Usman Akram  •  COMSATS University Islamabad</a:t>
-            </a:r>
-            <a:endParaRPr lang="en-US" sz="900" dirty="0"/>
-          </a:p>
-        </p:txBody>
-      </p:sp>
-      <p:sp>
-        <p:nvSpPr>
-          <p:cNvPr id="8" name="Text 6"/>
-          <p:cNvSpPr txBox="1"/>
-          <p:nvPr/>
-        </p:nvSpPr>
-        <p:spPr>
-          <a:xfrm>
-            <a:off x="11155680" y="6446520"/>
-            <a:ext cx="457200" cy="292608"/>
-          </a:xfrm>
-          <a:prstGeom prst="rect">
-            <a:avLst/>
-          </a:prstGeom>
-          <a:noFill/>
-          <a:ln/>
-        </p:spPr>
-        <p:txBody>
-          <a:bodyPr wrap="square" lIns="0" tIns="0" rIns="0" bIns="0" rtlCol="0" anchor="ctr"/>
-          <a:lstStyle/>
-          <a:p>
-            <a:pPr algn="r" indent="0" marL="0">
-              <a:buNone/>
-            </a:pPr>
-            <a:r>
-              <a:rPr lang="en-US" sz="900" dirty="0">
-                <a:solidFill>
-                  <a:srgbClr val="5D5D72"/>
-                </a:solidFill>
-                <a:latin typeface="Calibri" pitchFamily="34" charset="0"/>
-                <a:ea typeface="Calibri" pitchFamily="34" charset="-122"/>
-                <a:cs typeface="Calibri" pitchFamily="34" charset="-120"/>
-              </a:rPr>
-              <a:t>8</a:t>
-            </a:r>
-            <a:endParaRPr lang="en-US" sz="900" dirty="0"/>
-          </a:p>
-        </p:txBody>
-      </p:sp>
-    </p:spTree>
-  </p:cSld>
-  <p:clrMapOvr>
-    <a:masterClrMapping/>
-  </p:clrMapOvr>
-</p:sld>
-</file>
-
-<file path=ppt/slides/slide9.xml><?xml version="1.0" encoding="utf-8"?>
-<p:sld xmlns:a="http://schemas.openxmlformats.org/drawingml/2006/main" xmlns:r="http://schemas.openxmlformats.org/officeDocument/2006/relationships" xmlns:p="http://schemas.openxmlformats.org/presentationml/2006/main">
-  <p:cSld name="Slide 9">
-    <p:bg>
-      <p:bgPr>
-        <a:solidFill>
-          <a:srgbClr val="FFFFFF"/>
-        </a:solidFill>
-      </p:bgPr>
-    </p:bg>
-    <p:spTree>
-      <p:nvGrpSpPr>
-        <p:cNvPr id="1" name=""/>
-        <p:cNvGrpSpPr/>
-        <p:nvPr/>
-      </p:nvGrpSpPr>
-      <p:grpSpPr>
-        <a:xfrm>
-          <a:off x="0" y="0"/>
-          <a:ext cx="0" cy="0"/>
-          <a:chOff x="0" y="0"/>
-          <a:chExt cx="0" cy="0"/>
-        </a:xfrm>
-      </p:grpSpPr>
-      <p:sp>
-        <p:nvSpPr>
-          <p:cNvPr id="2" name="Text 0"/>
-          <p:cNvSpPr txBox="1"/>
-          <p:nvPr/>
-        </p:nvSpPr>
-        <p:spPr>
-          <a:xfrm>
-            <a:off x="640080" y="457200"/>
-            <a:ext cx="10058400" cy="365760"/>
-          </a:xfrm>
-          <a:prstGeom prst="rect">
-            <a:avLst/>
-          </a:prstGeom>
-          <a:noFill/>
-          <a:ln/>
-        </p:spPr>
-        <p:txBody>
-          <a:bodyPr wrap="square" lIns="0" tIns="0" rIns="0" bIns="0" rtlCol="0" anchor="ctr"/>
-          <a:lstStyle/>
-          <a:p>
-            <a:pPr algn="l" indent="0" marL="0">
-              <a:buNone/>
-            </a:pPr>
-            <a:r>
-              <a:rPr lang="en-US" sz="1300" b="1" spc="300" kern="0" dirty="0">
-                <a:solidFill>
-                  <a:srgbClr val="FF8A3D"/>
-                </a:solidFill>
-                <a:latin typeface="Calibri" pitchFamily="34" charset="0"/>
-                <a:ea typeface="Calibri" pitchFamily="34" charset="-122"/>
-                <a:cs typeface="Calibri" pitchFamily="34" charset="-120"/>
-              </a:rPr>
-              <a:t>STACKING ORDER</a:t>
-            </a:r>
-            <a:endParaRPr lang="en-US" sz="1300" dirty="0"/>
-          </a:p>
-        </p:txBody>
-      </p:sp>
-      <p:sp>
-        <p:nvSpPr>
-          <p:cNvPr id="3" name="Text 1"/>
-          <p:cNvSpPr txBox="1"/>
-          <p:nvPr/>
-        </p:nvSpPr>
-        <p:spPr>
-          <a:xfrm>
-            <a:off x="640080" y="841248"/>
-            <a:ext cx="10881360" cy="914400"/>
-          </a:xfrm>
-          <a:prstGeom prst="rect">
-            <a:avLst/>
-          </a:prstGeom>
-          <a:noFill/>
-          <a:ln/>
-        </p:spPr>
-        <p:txBody>
-          <a:bodyPr wrap="square" lIns="0" tIns="0" rIns="0" bIns="0" rtlCol="0" anchor="ctr"/>
-          <a:lstStyle/>
-          <a:p>
-            <a:pPr algn="l" indent="0" marL="0">
-              <a:buNone/>
-            </a:pPr>
-            <a:r>
-              <a:rPr lang="en-US" sz="3400" b="1" dirty="0">
-                <a:solidFill>
-                  <a:srgbClr val="2B2B7A"/>
-                </a:solidFill>
-                <a:latin typeface="Cambria" pitchFamily="34" charset="0"/>
-                <a:ea typeface="Cambria" pitchFamily="34" charset="-122"/>
-                <a:cs typeface="Cambria" pitchFamily="34" charset="-120"/>
-              </a:rPr>
-              <a:t>z-index, Rendered</a:t>
-            </a:r>
-            <a:endParaRPr lang="en-US" sz="3400" dirty="0"/>
-          </a:p>
-        </p:txBody>
-      </p:sp>
-      <p:sp>
-        <p:nvSpPr>
-          <p:cNvPr id="4" name="Shape 2"/>
-          <p:cNvSpPr/>
-          <p:nvPr/>
-        </p:nvSpPr>
-        <p:spPr>
-          <a:xfrm>
-            <a:off x="530352" y="1947672"/>
-            <a:ext cx="11130991" cy="4334256"/>
-          </a:xfrm>
-          <a:prstGeom prst="roundRect">
-            <a:avLst>
-              <a:gd name="adj" fmla="val 1266"/>
-            </a:avLst>
-          </a:prstGeom>
-          <a:solidFill>
-            <a:srgbClr val="FFFFFF"/>
-          </a:solidFill>
-          <a:ln w="12700">
-            <a:solidFill>
-              <a:srgbClr val="E2E2EE"/>
-            </a:solidFill>
-            <a:prstDash val="solid"/>
-          </a:ln>
-          <a:effectLst>
-            <a:outerShdw sx="100000" sy="100000" kx="0" ky="0" algn="bl" rotWithShape="0" blurRad="101600" dist="38100" dir="5400000">
-              <a:srgbClr val="000000">
-                <a:alpha val="12000"/>
-              </a:srgbClr>
-            </a:outerShdw>
-          </a:effectLst>
-        </p:spPr>
-      </p:sp>
-      <p:pic>
-        <p:nvPicPr>
-          <p:cNvPr id="5" name="Image 0" descr="D:/GitHub/mern-web-book/docs/assets/img/lecture-07/z-index-stacking.png">    </p:cNvPr>
-          <p:cNvPicPr>
-            <a:picLocks noChangeAspect="1"/>
-          </p:cNvPicPr>
-          <p:nvPr/>
-        </p:nvPicPr>
-        <p:blipFill>
-          <a:blip r:embed="rId1"/>
-          <a:stretch>
-            <a:fillRect/>
-          </a:stretch>
-        </p:blipFill>
-        <p:spPr>
-          <a:xfrm>
-            <a:off x="3402138" y="2057400"/>
-            <a:ext cx="5387419" cy="4114800"/>
-          </a:xfrm>
-          <a:prstGeom prst="rect">
-            <a:avLst/>
-          </a:prstGeom>
-        </p:spPr>
-      </p:pic>
-      <p:sp>
-        <p:nvSpPr>
-          <p:cNvPr id="6" name="Text 3"/>
-          <p:cNvSpPr txBox="1"/>
-          <p:nvPr/>
-        </p:nvSpPr>
-        <p:spPr>
-          <a:xfrm>
-            <a:off x="640080" y="6446520"/>
-            <a:ext cx="8686800" cy="292608"/>
-          </a:xfrm>
-          <a:prstGeom prst="rect">
-            <a:avLst/>
-          </a:prstGeom>
-          <a:noFill/>
-          <a:ln/>
-        </p:spPr>
-        <p:txBody>
-          <a:bodyPr wrap="square" lIns="0" tIns="0" rIns="0" bIns="0" rtlCol="0" anchor="ctr"/>
-          <a:lstStyle/>
-          <a:p>
-            <a:pPr algn="l" indent="0" marL="0">
-              <a:buNone/>
-            </a:pPr>
-            <a:r>
-              <a:rPr lang="en-US" sz="900" dirty="0">
-                <a:solidFill>
-                  <a:srgbClr val="5D5D72"/>
-                </a:solidFill>
-                <a:latin typeface="Calibri" pitchFamily="34" charset="0"/>
-                <a:ea typeface="Calibri" pitchFamily="34" charset="-122"/>
-                <a:cs typeface="Calibri" pitchFamily="34" charset="-120"/>
-              </a:rPr>
-              <a:t>Usman Akram  •  COMSATS University Islamabad</a:t>
-            </a:r>
-            <a:endParaRPr lang="en-US" sz="900" dirty="0"/>
-          </a:p>
-        </p:txBody>
-      </p:sp>
-      <p:sp>
-        <p:nvSpPr>
-          <p:cNvPr id="7" name="Text 4"/>
-          <p:cNvSpPr txBox="1"/>
-          <p:nvPr/>
-        </p:nvSpPr>
-        <p:spPr>
-          <a:xfrm>
-            <a:off x="11155680" y="6446520"/>
-            <a:ext cx="457200" cy="292608"/>
-          </a:xfrm>
-          <a:prstGeom prst="rect">
-            <a:avLst/>
-          </a:prstGeom>
-          <a:noFill/>
-          <a:ln/>
-        </p:spPr>
-        <p:txBody>
-          <a:bodyPr wrap="square" lIns="0" tIns="0" rIns="0" bIns="0" rtlCol="0" anchor="ctr"/>
-          <a:lstStyle/>
-          <a:p>
-            <a:pPr algn="r" indent="0" marL="0">
-              <a:buNone/>
-            </a:pPr>
-            <a:r>
-              <a:rPr lang="en-US" sz="900" dirty="0">
-                <a:solidFill>
-                  <a:srgbClr val="5D5D72"/>
-                </a:solidFill>
-                <a:latin typeface="Calibri" pitchFamily="34" charset="0"/>
-                <a:ea typeface="Calibri" pitchFamily="34" charset="-122"/>
-                <a:cs typeface="Calibri" pitchFamily="34" charset="-120"/>
-              </a:rPr>
               <a:t>9</a:t>
             </a:r>
             <a:endParaRPr lang="en-US" sz="900" dirty="0"/>

--- a/slides/CSC336-Lecture-07-CSS-Positioning-and-Stacking.pptx
+++ b/slides/CSC336-Lecture-07-CSS-Positioning-and-Stacking.pptx
@@ -3743,11 +3743,11 @@
         <p:spPr>
           <a:xfrm>
             <a:off x="640080" y="1965960"/>
-            <a:ext cx="10911535" cy="2990088"/>
+            <a:ext cx="10911535" cy="2148840"/>
           </a:xfrm>
           <a:prstGeom prst="roundRect">
             <a:avLst>
-              <a:gd name="adj" fmla="val 2446"/>
+              <a:gd name="adj" fmla="val 3404"/>
             </a:avLst>
           </a:prstGeom>
           <a:solidFill>
@@ -3765,7 +3765,7 @@
         <p:spPr>
           <a:xfrm>
             <a:off x="960120" y="2194560"/>
-            <a:ext cx="10271455" cy="2532888"/>
+            <a:ext cx="10271455" cy="1691640"/>
           </a:xfrm>
           <a:prstGeom prst="rect">
             <a:avLst/>
@@ -3895,8 +3895,8 @@
         </p:nvSpPr>
         <p:spPr>
           <a:xfrm>
-            <a:off x="640080" y="5184648"/>
-            <a:ext cx="10911535" cy="1078992"/>
+            <a:off x="640080" y="4343400"/>
+            <a:ext cx="10911535" cy="1920240"/>
           </a:xfrm>
           <a:prstGeom prst="rect">
             <a:avLst/>
@@ -4369,11 +4369,11 @@
         <p:spPr>
           <a:xfrm>
             <a:off x="640080" y="1965960"/>
-            <a:ext cx="10911535" cy="1837944"/>
+            <a:ext cx="10911535" cy="1348740"/>
           </a:xfrm>
           <a:prstGeom prst="roundRect">
             <a:avLst>
-              <a:gd name="adj" fmla="val 3980"/>
+              <a:gd name="adj" fmla="val 5424"/>
             </a:avLst>
           </a:prstGeom>
           <a:solidFill>
@@ -4391,7 +4391,7 @@
         <p:spPr>
           <a:xfrm>
             <a:off x="960120" y="2194560"/>
-            <a:ext cx="10271455" cy="1380744"/>
+            <a:ext cx="10271455" cy="891540"/>
           </a:xfrm>
           <a:prstGeom prst="rect">
             <a:avLst/>
@@ -4472,8 +4472,8 @@
         </p:nvSpPr>
         <p:spPr>
           <a:xfrm>
-            <a:off x="640080" y="4032504"/>
-            <a:ext cx="10911535" cy="2231136"/>
+            <a:off x="640080" y="3543300"/>
+            <a:ext cx="10911535" cy="2720340"/>
           </a:xfrm>
           <a:prstGeom prst="rect">
             <a:avLst/>
@@ -4700,11 +4700,11 @@
         <p:spPr>
           <a:xfrm>
             <a:off x="640080" y="1965960"/>
-            <a:ext cx="10911535" cy="1453896"/>
+            <a:ext cx="10911535" cy="1082040"/>
           </a:xfrm>
           <a:prstGeom prst="roundRect">
             <a:avLst>
-              <a:gd name="adj" fmla="val 5031"/>
+              <a:gd name="adj" fmla="val 6761"/>
             </a:avLst>
           </a:prstGeom>
           <a:solidFill>
@@ -4722,7 +4722,7 @@
         <p:spPr>
           <a:xfrm>
             <a:off x="960120" y="2194560"/>
-            <a:ext cx="10271455" cy="996696"/>
+            <a:ext cx="10271455" cy="624840"/>
           </a:xfrm>
           <a:prstGeom prst="rect">
             <a:avLst/>
@@ -4783,8 +4783,8 @@
         </p:nvSpPr>
         <p:spPr>
           <a:xfrm>
-            <a:off x="640080" y="3648456"/>
-            <a:ext cx="10911535" cy="2615184"/>
+            <a:off x="640080" y="3276600"/>
+            <a:ext cx="10911535" cy="2987040"/>
           </a:xfrm>
           <a:prstGeom prst="rect">
             <a:avLst/>
@@ -5622,11 +5622,11 @@
         <p:spPr>
           <a:xfrm>
             <a:off x="640080" y="1965960"/>
-            <a:ext cx="10911535" cy="1069848"/>
+            <a:ext cx="10911535" cy="815340"/>
           </a:xfrm>
           <a:prstGeom prst="roundRect">
             <a:avLst>
-              <a:gd name="adj" fmla="val 6838"/>
+              <a:gd name="adj" fmla="val 8972"/>
             </a:avLst>
           </a:prstGeom>
           <a:solidFill>
@@ -5644,7 +5644,7 @@
         <p:spPr>
           <a:xfrm>
             <a:off x="960120" y="2194560"/>
-            <a:ext cx="10271455" cy="612648"/>
+            <a:ext cx="10271455" cy="358140"/>
           </a:xfrm>
           <a:prstGeom prst="rect">
             <a:avLst/>
@@ -5685,8 +5685,8 @@
         </p:nvSpPr>
         <p:spPr>
           <a:xfrm>
-            <a:off x="640080" y="3264408"/>
-            <a:ext cx="10911535" cy="2999232"/>
+            <a:off x="640080" y="3009900"/>
+            <a:ext cx="10911535" cy="3253740"/>
           </a:xfrm>
           <a:prstGeom prst="rect">
             <a:avLst/>
@@ -6159,11 +6159,11 @@
         <p:spPr>
           <a:xfrm>
             <a:off x="640080" y="1965960"/>
-            <a:ext cx="10911535" cy="2221992"/>
+            <a:ext cx="10911535" cy="1615440"/>
           </a:xfrm>
           <a:prstGeom prst="roundRect">
             <a:avLst>
-              <a:gd name="adj" fmla="val 3292"/>
+              <a:gd name="adj" fmla="val 4528"/>
             </a:avLst>
           </a:prstGeom>
           <a:solidFill>
@@ -6181,7 +6181,7 @@
         <p:spPr>
           <a:xfrm>
             <a:off x="960120" y="2194560"/>
-            <a:ext cx="10271455" cy="1764792"/>
+            <a:ext cx="10271455" cy="1158240"/>
           </a:xfrm>
           <a:prstGeom prst="rect">
             <a:avLst/>
@@ -6282,8 +6282,8 @@
         </p:nvSpPr>
         <p:spPr>
           <a:xfrm>
-            <a:off x="640080" y="4416552"/>
-            <a:ext cx="10911535" cy="1847088"/>
+            <a:off x="640080" y="3810000"/>
+            <a:ext cx="10911535" cy="2453640"/>
           </a:xfrm>
           <a:prstGeom prst="rect">
             <a:avLst/>
@@ -6510,11 +6510,11 @@
         <p:spPr>
           <a:xfrm>
             <a:off x="640080" y="1965960"/>
-            <a:ext cx="10911535" cy="2606040"/>
+            <a:ext cx="10911535" cy="1882140"/>
           </a:xfrm>
           <a:prstGeom prst="roundRect">
             <a:avLst>
-              <a:gd name="adj" fmla="val 2807"/>
+              <a:gd name="adj" fmla="val 3887"/>
             </a:avLst>
           </a:prstGeom>
           <a:solidFill>
@@ -6532,7 +6532,7 @@
         <p:spPr>
           <a:xfrm>
             <a:off x="960120" y="2194560"/>
-            <a:ext cx="10271455" cy="2148840"/>
+            <a:ext cx="10271455" cy="1424940"/>
           </a:xfrm>
           <a:prstGeom prst="rect">
             <a:avLst/>
@@ -6642,8 +6642,8 @@
         </p:nvSpPr>
         <p:spPr>
           <a:xfrm>
-            <a:off x="640080" y="4800600"/>
-            <a:ext cx="10911535" cy="1463040"/>
+            <a:off x="640080" y="4076700"/>
+            <a:ext cx="10911535" cy="2186940"/>
           </a:xfrm>
           <a:prstGeom prst="rect">
             <a:avLst/>
@@ -8683,11 +8683,11 @@
         <p:spPr>
           <a:xfrm>
             <a:off x="640080" y="1965960"/>
-            <a:ext cx="10911535" cy="1837944"/>
+            <a:ext cx="10911535" cy="1348740"/>
           </a:xfrm>
           <a:prstGeom prst="roundRect">
             <a:avLst>
-              <a:gd name="adj" fmla="val 3980"/>
+              <a:gd name="adj" fmla="val 5424"/>
             </a:avLst>
           </a:prstGeom>
           <a:solidFill>
@@ -8705,7 +8705,7 @@
         <p:spPr>
           <a:xfrm>
             <a:off x="960120" y="2194560"/>
-            <a:ext cx="10271455" cy="1380744"/>
+            <a:ext cx="10271455" cy="891540"/>
           </a:xfrm>
           <a:prstGeom prst="rect">
             <a:avLst/>
@@ -8786,8 +8786,8 @@
         </p:nvSpPr>
         <p:spPr>
           <a:xfrm>
-            <a:off x="640080" y="4032504"/>
-            <a:ext cx="10911535" cy="2231136"/>
+            <a:off x="640080" y="3543300"/>
+            <a:ext cx="10911535" cy="2720340"/>
           </a:xfrm>
           <a:prstGeom prst="rect">
             <a:avLst/>
@@ -9014,11 +9014,11 @@
         <p:spPr>
           <a:xfrm>
             <a:off x="640080" y="1965960"/>
-            <a:ext cx="10911535" cy="2606040"/>
+            <a:ext cx="10911535" cy="1882140"/>
           </a:xfrm>
           <a:prstGeom prst="roundRect">
             <a:avLst>
-              <a:gd name="adj" fmla="val 2807"/>
+              <a:gd name="adj" fmla="val 3887"/>
             </a:avLst>
           </a:prstGeom>
           <a:solidFill>
@@ -9036,7 +9036,7 @@
         <p:spPr>
           <a:xfrm>
             <a:off x="960120" y="2194560"/>
-            <a:ext cx="10271455" cy="2148840"/>
+            <a:ext cx="10271455" cy="1424940"/>
           </a:xfrm>
           <a:prstGeom prst="rect">
             <a:avLst/>
@@ -9157,8 +9157,8 @@
         </p:nvSpPr>
         <p:spPr>
           <a:xfrm>
-            <a:off x="640080" y="4800600"/>
-            <a:ext cx="10911535" cy="1463040"/>
+            <a:off x="640080" y="4076700"/>
+            <a:ext cx="10911535" cy="2186940"/>
           </a:xfrm>
           <a:prstGeom prst="rect">
             <a:avLst/>
@@ -10400,12 +10400,176 @@
         </p:nvSpPr>
         <p:spPr>
           <a:xfrm>
-            <a:off x="530352" y="1947672"/>
-            <a:ext cx="11130991" cy="4334256"/>
+            <a:off x="640080" y="1965960"/>
+            <a:ext cx="10911535" cy="1977390"/>
           </a:xfrm>
           <a:prstGeom prst="roundRect">
             <a:avLst>
-              <a:gd name="adj" fmla="val 1266"/>
+              <a:gd name="adj" fmla="val 3699"/>
+            </a:avLst>
+          </a:prstGeom>
+          <a:solidFill>
+            <a:srgbClr val="1E1E4C"/>
+          </a:solidFill>
+          <a:ln/>
+        </p:spPr>
+      </p:sp>
+      <p:sp>
+        <p:nvSpPr>
+          <p:cNvPr id="5" name="Text 3"/>
+          <p:cNvSpPr txBox="1"/>
+          <p:nvPr/>
+        </p:nvSpPr>
+        <p:spPr>
+          <a:xfrm>
+            <a:off x="960120" y="2194560"/>
+            <a:ext cx="10271455" cy="1520190"/>
+          </a:xfrm>
+          <a:prstGeom prst="rect">
+            <a:avLst/>
+          </a:prstGeom>
+          <a:noFill/>
+          <a:ln/>
+        </p:spPr>
+        <p:txBody>
+          <a:bodyPr wrap="square" lIns="0" tIns="0" rIns="0" bIns="0" rtlCol="0" anchor="t"/>
+          <a:lstStyle/>
+          <a:p>
+            <a:pPr indent="0" marL="0">
+              <a:lnSpc>
+                <a:spcPct val="125000"/>
+              </a:lnSpc>
+              <a:buNone/>
+            </a:pPr>
+            <a:r>
+              <a:rPr lang="en-US" sz="1250" dirty="0">
+                <a:solidFill>
+                  <a:srgbClr val="C9D3F5"/>
+                </a:solidFill>
+                <a:latin typeface="Courier New" pitchFamily="34" charset="0"/>
+                <a:ea typeface="Courier New" pitchFamily="34" charset="-122"/>
+                <a:cs typeface="Courier New" pitchFamily="34" charset="-120"/>
+              </a:rPr>
+              <a:t>.box {</a:t>
+            </a:r>
+            <a:endParaRPr lang="en-US" sz="1250" dirty="0"/>
+          </a:p>
+          <a:p>
+            <a:pPr indent="0" marL="0">
+              <a:lnSpc>
+                <a:spcPct val="125000"/>
+              </a:lnSpc>
+              <a:buNone/>
+            </a:pPr>
+            <a:r>
+              <a:rPr lang="en-US" sz="1250" dirty="0">
+                <a:solidFill>
+                  <a:srgbClr val="C9D3F5"/>
+                </a:solidFill>
+                <a:latin typeface="Courier New" pitchFamily="34" charset="0"/>
+                <a:ea typeface="Courier New" pitchFamily="34" charset="-122"/>
+                <a:cs typeface="Courier New" pitchFamily="34" charset="-120"/>
+              </a:rPr>
+              <a:t>  width: 200px;</a:t>
+            </a:r>
+            <a:endParaRPr lang="en-US" sz="1250" dirty="0"/>
+          </a:p>
+          <a:p>
+            <a:pPr indent="0" marL="0">
+              <a:lnSpc>
+                <a:spcPct val="125000"/>
+              </a:lnSpc>
+              <a:buNone/>
+            </a:pPr>
+            <a:r>
+              <a:rPr lang="en-US" sz="1250" dirty="0">
+                <a:solidFill>
+                  <a:srgbClr val="C9D3F5"/>
+                </a:solidFill>
+                <a:latin typeface="Courier New" pitchFamily="34" charset="0"/>
+                <a:ea typeface="Courier New" pitchFamily="34" charset="-122"/>
+                <a:cs typeface="Courier New" pitchFamily="34" charset="-120"/>
+              </a:rPr>
+              <a:t>  height: 100px;</a:t>
+            </a:r>
+            <a:endParaRPr lang="en-US" sz="1250" dirty="0"/>
+          </a:p>
+          <a:p>
+            <a:pPr indent="0" marL="0">
+              <a:lnSpc>
+                <a:spcPct val="125000"/>
+              </a:lnSpc>
+              <a:buNone/>
+            </a:pPr>
+            <a:r>
+              <a:rPr lang="en-US" sz="1250" dirty="0">
+                <a:solidFill>
+                  <a:srgbClr val="C9D3F5"/>
+                </a:solidFill>
+                <a:latin typeface="Courier New" pitchFamily="34" charset="0"/>
+                <a:ea typeface="Courier New" pitchFamily="34" charset="-122"/>
+                <a:cs typeface="Courier New" pitchFamily="34" charset="-120"/>
+              </a:rPr>
+              <a:t>  overflow: visible; /* default: extra content spills out */</a:t>
+            </a:r>
+            <a:endParaRPr lang="en-US" sz="1250" dirty="0"/>
+          </a:p>
+          <a:p>
+            <a:pPr indent="0" marL="0">
+              <a:lnSpc>
+                <a:spcPct val="125000"/>
+              </a:lnSpc>
+              <a:buNone/>
+            </a:pPr>
+            <a:r>
+              <a:rPr lang="en-US" sz="1250" dirty="0">
+                <a:solidFill>
+                  <a:srgbClr val="C9D3F5"/>
+                </a:solidFill>
+                <a:latin typeface="Courier New" pitchFamily="34" charset="0"/>
+                <a:ea typeface="Courier New" pitchFamily="34" charset="-122"/>
+                <a:cs typeface="Courier New" pitchFamily="34" charset="-120"/>
+              </a:rPr>
+              <a:t>  /* overflow: hidden;  clips content that doesn't fit  */</a:t>
+            </a:r>
+            <a:endParaRPr lang="en-US" sz="1250" dirty="0"/>
+          </a:p>
+          <a:p>
+            <a:pPr indent="0" marL="0">
+              <a:lnSpc>
+                <a:spcPct val="125000"/>
+              </a:lnSpc>
+              <a:buNone/>
+            </a:pPr>
+            <a:r>
+              <a:rPr lang="en-US" sz="1250" dirty="0">
+                <a:solidFill>
+                  <a:srgbClr val="C9D3F5"/>
+                </a:solidFill>
+                <a:latin typeface="Courier New" pitchFamily="34" charset="0"/>
+                <a:ea typeface="Courier New" pitchFamily="34" charset="-122"/>
+                <a:cs typeface="Courier New" pitchFamily="34" charset="-120"/>
+              </a:rPr>
+              <a:t>}</a:t>
+            </a:r>
+            <a:endParaRPr lang="en-US" sz="1250" dirty="0"/>
+          </a:p>
+        </p:txBody>
+      </p:sp>
+      <p:sp>
+        <p:nvSpPr>
+          <p:cNvPr id="6" name="Shape 4"/>
+          <p:cNvSpPr/>
+          <p:nvPr/>
+        </p:nvSpPr>
+        <p:spPr>
+          <a:xfrm>
+            <a:off x="530352" y="4107942"/>
+            <a:ext cx="11130991" cy="2219706"/>
+          </a:xfrm>
+          <a:prstGeom prst="roundRect">
+            <a:avLst>
+              <a:gd name="adj" fmla="val 2472"/>
             </a:avLst>
           </a:prstGeom>
           <a:solidFill>
@@ -10428,7 +10592,7 @@
       </p:sp>
       <p:pic>
         <p:nvPicPr>
-          <p:cNvPr id="5" name="Image 0" descr="D:/GitHub/mern-web-book/docs/assets/img/lecture-07/overflow-comparison.png">    </p:cNvPr>
+          <p:cNvPr id="7" name="Image 0" descr="D:/GitHub/mern-web-book/docs/assets/img/lecture-07/overflow-comparison.png">    </p:cNvPr>
           <p:cNvPicPr>
             <a:picLocks noChangeAspect="1"/>
           </p:cNvPicPr>
@@ -10442,8 +10606,8 @@
         </p:blipFill>
         <p:spPr>
           <a:xfrm>
-            <a:off x="843031" y="2057400"/>
-            <a:ext cx="10505634" cy="4114800"/>
+            <a:off x="3542395" y="4217670"/>
+            <a:ext cx="5106905" cy="2000250"/>
           </a:xfrm>
           <a:prstGeom prst="rect">
             <a:avLst/>
@@ -10452,7 +10616,7 @@
       </p:pic>
       <p:sp>
         <p:nvSpPr>
-          <p:cNvPr id="6" name="Text 3"/>
+          <p:cNvPr id="8" name="Text 5"/>
           <p:cNvSpPr txBox="1"/>
           <p:nvPr/>
         </p:nvSpPr>
@@ -10491,7 +10655,7 @@
       </p:sp>
       <p:sp>
         <p:nvSpPr>
-          <p:cNvPr id="7" name="Text 4"/>
+          <p:cNvPr id="9" name="Text 6"/>
           <p:cNvSpPr txBox="1"/>
           <p:nvPr/>
         </p:nvSpPr>
@@ -12660,12 +12824,156 @@
         </p:nvSpPr>
         <p:spPr>
           <a:xfrm>
-            <a:off x="530352" y="2221992"/>
-            <a:ext cx="11130991" cy="4059936"/>
+            <a:off x="640080" y="2240280"/>
+            <a:ext cx="10911535" cy="1739265"/>
           </a:xfrm>
           <a:prstGeom prst="roundRect">
             <a:avLst>
-              <a:gd name="adj" fmla="val 1351"/>
+              <a:gd name="adj" fmla="val 4206"/>
+            </a:avLst>
+          </a:prstGeom>
+          <a:solidFill>
+            <a:srgbClr val="1E1E4C"/>
+          </a:solidFill>
+          <a:ln/>
+        </p:spPr>
+      </p:sp>
+      <p:sp>
+        <p:nvSpPr>
+          <p:cNvPr id="6" name="Text 4"/>
+          <p:cNvSpPr txBox="1"/>
+          <p:nvPr/>
+        </p:nvSpPr>
+        <p:spPr>
+          <a:xfrm>
+            <a:off x="960120" y="2468880"/>
+            <a:ext cx="10271455" cy="1282065"/>
+          </a:xfrm>
+          <a:prstGeom prst="rect">
+            <a:avLst/>
+          </a:prstGeom>
+          <a:noFill/>
+          <a:ln/>
+        </p:spPr>
+        <p:txBody>
+          <a:bodyPr wrap="square" lIns="0" tIns="0" rIns="0" bIns="0" rtlCol="0" anchor="t"/>
+          <a:lstStyle/>
+          <a:p>
+            <a:pPr indent="0" marL="0">
+              <a:lnSpc>
+                <a:spcPct val="125000"/>
+              </a:lnSpc>
+              <a:buNone/>
+            </a:pPr>
+            <a:r>
+              <a:rPr lang="en-US" sz="1250" dirty="0">
+                <a:solidFill>
+                  <a:srgbClr val="C9D3F5"/>
+                </a:solidFill>
+                <a:latin typeface="Courier New" pitchFamily="34" charset="0"/>
+                <a:ea typeface="Courier New" pitchFamily="34" charset="-122"/>
+                <a:cs typeface="Courier New" pitchFamily="34" charset="-120"/>
+              </a:rPr>
+              <a:t>.static   { position: static; }</a:t>
+            </a:r>
+            <a:endParaRPr lang="en-US" sz="1250" dirty="0"/>
+          </a:p>
+          <a:p>
+            <a:pPr indent="0" marL="0">
+              <a:lnSpc>
+                <a:spcPct val="125000"/>
+              </a:lnSpc>
+              <a:buNone/>
+            </a:pPr>
+            <a:r>
+              <a:rPr lang="en-US" sz="1250" dirty="0">
+                <a:solidFill>
+                  <a:srgbClr val="C9D3F5"/>
+                </a:solidFill>
+                <a:latin typeface="Courier New" pitchFamily="34" charset="0"/>
+                <a:ea typeface="Courier New" pitchFamily="34" charset="-122"/>
+                <a:cs typeface="Courier New" pitchFamily="34" charset="-120"/>
+              </a:rPr>
+              <a:t>.relative { position: relative; top: 10px; left: 20px; }</a:t>
+            </a:r>
+            <a:endParaRPr lang="en-US" sz="1250" dirty="0"/>
+          </a:p>
+          <a:p>
+            <a:pPr indent="0" marL="0">
+              <a:lnSpc>
+                <a:spcPct val="125000"/>
+              </a:lnSpc>
+              <a:buNone/>
+            </a:pPr>
+            <a:r>
+              <a:rPr lang="en-US" sz="1250" dirty="0">
+                <a:solidFill>
+                  <a:srgbClr val="C9D3F5"/>
+                </a:solidFill>
+                <a:latin typeface="Courier New" pitchFamily="34" charset="0"/>
+                <a:ea typeface="Courier New" pitchFamily="34" charset="-122"/>
+                <a:cs typeface="Courier New" pitchFamily="34" charset="-120"/>
+              </a:rPr>
+              <a:t>.absolute { position: absolute; top: 0; right: 0; }</a:t>
+            </a:r>
+            <a:endParaRPr lang="en-US" sz="1250" dirty="0"/>
+          </a:p>
+          <a:p>
+            <a:pPr indent="0" marL="0">
+              <a:lnSpc>
+                <a:spcPct val="125000"/>
+              </a:lnSpc>
+              <a:buNone/>
+            </a:pPr>
+            <a:r>
+              <a:rPr lang="en-US" sz="1250" dirty="0">
+                <a:solidFill>
+                  <a:srgbClr val="C9D3F5"/>
+                </a:solidFill>
+                <a:latin typeface="Courier New" pitchFamily="34" charset="0"/>
+                <a:ea typeface="Courier New" pitchFamily="34" charset="-122"/>
+                <a:cs typeface="Courier New" pitchFamily="34" charset="-120"/>
+              </a:rPr>
+              <a:t>.fixed    { position: fixed; bottom: 20px; right: 20px; }</a:t>
+            </a:r>
+            <a:endParaRPr lang="en-US" sz="1250" dirty="0"/>
+          </a:p>
+          <a:p>
+            <a:pPr indent="0" marL="0">
+              <a:lnSpc>
+                <a:spcPct val="125000"/>
+              </a:lnSpc>
+              <a:buNone/>
+            </a:pPr>
+            <a:r>
+              <a:rPr lang="en-US" sz="1250" dirty="0">
+                <a:solidFill>
+                  <a:srgbClr val="C9D3F5"/>
+                </a:solidFill>
+                <a:latin typeface="Courier New" pitchFamily="34" charset="0"/>
+                <a:ea typeface="Courier New" pitchFamily="34" charset="-122"/>
+                <a:cs typeface="Courier New" pitchFamily="34" charset="-120"/>
+              </a:rPr>
+              <a:t>.sticky   { position: sticky; top: 0; }</a:t>
+            </a:r>
+            <a:endParaRPr lang="en-US" sz="1250" dirty="0"/>
+          </a:p>
+        </p:txBody>
+      </p:sp>
+      <p:sp>
+        <p:nvSpPr>
+          <p:cNvPr id="7" name="Shape 5"/>
+          <p:cNvSpPr/>
+          <p:nvPr/>
+        </p:nvSpPr>
+        <p:spPr>
+          <a:xfrm>
+            <a:off x="530352" y="4144137"/>
+            <a:ext cx="11130991" cy="2183511"/>
+          </a:xfrm>
+          <a:prstGeom prst="roundRect">
+            <a:avLst>
+              <a:gd name="adj" fmla="val 2513"/>
             </a:avLst>
           </a:prstGeom>
           <a:solidFill>
@@ -12688,7 +12996,7 @@
       </p:sp>
       <p:pic>
         <p:nvPicPr>
-          <p:cNvPr id="6" name="Image 0" descr="D:/GitHub/mern-web-book/docs/assets/img/lecture-07/position-values-comparison.png">    </p:cNvPr>
+          <p:cNvPr id="8" name="Image 0" descr="D:/GitHub/mern-web-book/docs/assets/img/lecture-07/position-values-comparison.png">    </p:cNvPr>
           <p:cNvPicPr>
             <a:picLocks noChangeAspect="1"/>
           </p:cNvPicPr>
@@ -12702,8 +13010,8 @@
         </p:blipFill>
         <p:spPr>
           <a:xfrm>
-            <a:off x="4961543" y="2331720"/>
-            <a:ext cx="2268610" cy="3840480"/>
+            <a:off x="5515754" y="4253865"/>
+            <a:ext cx="1160187" cy="1964055"/>
           </a:xfrm>
           <a:prstGeom prst="rect">
             <a:avLst/>
@@ -12712,7 +13020,7 @@
       </p:pic>
       <p:sp>
         <p:nvSpPr>
-          <p:cNvPr id="7" name="Text 4"/>
+          <p:cNvPr id="9" name="Text 6"/>
           <p:cNvSpPr txBox="1"/>
           <p:nvPr/>
         </p:nvSpPr>
@@ -12751,7 +13059,7 @@
       </p:sp>
       <p:sp>
         <p:nvSpPr>
-          <p:cNvPr id="8" name="Text 5"/>
+          <p:cNvPr id="10" name="Text 7"/>
           <p:cNvSpPr txBox="1"/>
           <p:nvPr/>
         </p:nvSpPr>
@@ -12907,11 +13215,11 @@
         <p:spPr>
           <a:xfrm>
             <a:off x="640080" y="1965960"/>
-            <a:ext cx="10911535" cy="2606040"/>
+            <a:ext cx="10911535" cy="1882140"/>
           </a:xfrm>
           <a:prstGeom prst="roundRect">
             <a:avLst>
-              <a:gd name="adj" fmla="val 2807"/>
+              <a:gd name="adj" fmla="val 3887"/>
             </a:avLst>
           </a:prstGeom>
           <a:solidFill>
@@ -12929,7 +13237,7 @@
         <p:spPr>
           <a:xfrm>
             <a:off x="960120" y="2194560"/>
-            <a:ext cx="10271455" cy="2148840"/>
+            <a:ext cx="10271455" cy="1424940"/>
           </a:xfrm>
           <a:prstGeom prst="rect">
             <a:avLst/>
@@ -13050,8 +13358,8 @@
         </p:nvSpPr>
         <p:spPr>
           <a:xfrm>
-            <a:off x="640080" y="4800600"/>
-            <a:ext cx="10911535" cy="1463040"/>
+            <a:off x="640080" y="4076700"/>
+            <a:ext cx="10911535" cy="2186940"/>
           </a:xfrm>
           <a:prstGeom prst="rect">
             <a:avLst/>
@@ -13278,11 +13586,11 @@
         <p:spPr>
           <a:xfrm>
             <a:off x="640080" y="1965960"/>
-            <a:ext cx="10911535" cy="2606040"/>
+            <a:ext cx="10911535" cy="1882140"/>
           </a:xfrm>
           <a:prstGeom prst="roundRect">
             <a:avLst>
-              <a:gd name="adj" fmla="val 2807"/>
+              <a:gd name="adj" fmla="val 3887"/>
             </a:avLst>
           </a:prstGeom>
           <a:solidFill>
@@ -13300,7 +13608,7 @@
         <p:spPr>
           <a:xfrm>
             <a:off x="960120" y="2194560"/>
-            <a:ext cx="10271455" cy="2148840"/>
+            <a:ext cx="10271455" cy="1424940"/>
           </a:xfrm>
           <a:prstGeom prst="rect">
             <a:avLst/>
@@ -13421,8 +13729,8 @@
         </p:nvSpPr>
         <p:spPr>
           <a:xfrm>
-            <a:off x="640080" y="4800600"/>
-            <a:ext cx="10911535" cy="1463040"/>
+            <a:off x="640080" y="4076700"/>
+            <a:ext cx="10911535" cy="2186940"/>
           </a:xfrm>
           <a:prstGeom prst="rect">
             <a:avLst/>
@@ -13649,11 +13957,11 @@
         <p:spPr>
           <a:xfrm>
             <a:off x="640080" y="1965960"/>
-            <a:ext cx="10911535" cy="2606040"/>
+            <a:ext cx="10911535" cy="1882140"/>
           </a:xfrm>
           <a:prstGeom prst="roundRect">
             <a:avLst>
-              <a:gd name="adj" fmla="val 2807"/>
+              <a:gd name="adj" fmla="val 3887"/>
             </a:avLst>
           </a:prstGeom>
           <a:solidFill>
@@ -13671,7 +13979,7 @@
         <p:spPr>
           <a:xfrm>
             <a:off x="960120" y="2194560"/>
-            <a:ext cx="10271455" cy="2148840"/>
+            <a:ext cx="10271455" cy="1424940"/>
           </a:xfrm>
           <a:prstGeom prst="rect">
             <a:avLst/>
@@ -13792,8 +14100,8 @@
         </p:nvSpPr>
         <p:spPr>
           <a:xfrm>
-            <a:off x="640080" y="4800600"/>
-            <a:ext cx="10911535" cy="1463040"/>
+            <a:off x="640080" y="4076700"/>
+            <a:ext cx="10911535" cy="2186940"/>
           </a:xfrm>
           <a:prstGeom prst="rect">
             <a:avLst/>
@@ -14020,11 +14328,11 @@
         <p:spPr>
           <a:xfrm>
             <a:off x="640080" y="1965960"/>
-            <a:ext cx="10911535" cy="2221992"/>
+            <a:ext cx="10911535" cy="1615440"/>
           </a:xfrm>
           <a:prstGeom prst="roundRect">
             <a:avLst>
-              <a:gd name="adj" fmla="val 3292"/>
+              <a:gd name="adj" fmla="val 4528"/>
             </a:avLst>
           </a:prstGeom>
           <a:solidFill>
@@ -14042,7 +14350,7 @@
         <p:spPr>
           <a:xfrm>
             <a:off x="960120" y="2194560"/>
-            <a:ext cx="10271455" cy="1764792"/>
+            <a:ext cx="10271455" cy="1158240"/>
           </a:xfrm>
           <a:prstGeom prst="rect">
             <a:avLst/>
@@ -14143,8 +14451,8 @@
         </p:nvSpPr>
         <p:spPr>
           <a:xfrm>
-            <a:off x="640080" y="4416552"/>
-            <a:ext cx="10911535" cy="1847088"/>
+            <a:off x="640080" y="3810000"/>
+            <a:ext cx="10911535" cy="2453640"/>
           </a:xfrm>
           <a:prstGeom prst="rect">
             <a:avLst/>

--- a/slides/CSC336-Lecture-07-CSS-Positioning-and-Stacking.pptx
+++ b/slides/CSC336-Lecture-07-CSS-Positioning-and-Stacking.pptx
@@ -8682,12 +8682,12 @@
         </p:nvSpPr>
         <p:spPr>
           <a:xfrm>
-            <a:off x="640080" y="1965960"/>
-            <a:ext cx="10911535" cy="1348740"/>
+            <a:off x="640080" y="3491865"/>
+            <a:ext cx="5272888" cy="1291590"/>
           </a:xfrm>
           <a:prstGeom prst="roundRect">
             <a:avLst>
-              <a:gd name="adj" fmla="val 5424"/>
+              <a:gd name="adj" fmla="val 5664"/>
             </a:avLst>
           </a:prstGeom>
           <a:solidFill>
@@ -8704,8 +8704,8 @@
         </p:nvSpPr>
         <p:spPr>
           <a:xfrm>
-            <a:off x="960120" y="2194560"/>
-            <a:ext cx="10271455" cy="891540"/>
+            <a:off x="960120" y="3720465"/>
+            <a:ext cx="4632808" cy="834390"/>
           </a:xfrm>
           <a:prstGeom prst="rect">
             <a:avLst/>
@@ -8724,7 +8724,7 @@
               <a:buNone/>
             </a:pPr>
             <a:r>
-              <a:rPr lang="en-US" sz="1400" dirty="0">
+              <a:rPr lang="en-US" sz="1300" dirty="0">
                 <a:solidFill>
                   <a:srgbClr val="C9D3F5"/>
                 </a:solidFill>
@@ -8732,9 +8732,9 @@
                 <a:ea typeface="Courier New" pitchFamily="34" charset="-122"/>
                 <a:cs typeface="Courier New" pitchFamily="34" charset="-120"/>
               </a:rPr>
-              <a:t>&lt;img class="photo" style="float:left;" ...&gt;</a:t>
-            </a:r>
-            <a:endParaRPr lang="en-US" sz="1400" dirty="0"/>
+              <a:t>&lt;img class="photo" style="float:left;"&gt;</a:t>
+            </a:r>
+            <a:endParaRPr lang="en-US" sz="1300" dirty="0"/>
           </a:p>
           <a:p>
             <a:pPr indent="0" marL="0">
@@ -8744,7 +8744,7 @@
               <a:buNone/>
             </a:pPr>
             <a:r>
-              <a:rPr lang="en-US" sz="1400" dirty="0">
+              <a:rPr lang="en-US" sz="1300" dirty="0">
                 <a:solidFill>
                   <a:srgbClr val="C9D3F5"/>
                 </a:solidFill>
@@ -8752,9 +8752,9 @@
                 <a:ea typeface="Courier New" pitchFamily="34" charset="-122"/>
                 <a:cs typeface="Courier New" pitchFamily="34" charset="-120"/>
               </a:rPr>
-              <a:t>&lt;p&gt;Text wraps the floated photo.&lt;/p&gt;</a:t>
-            </a:r>
-            <a:endParaRPr lang="en-US" sz="1400" dirty="0"/>
+              <a:t>&lt;p&gt;Text wraps the photo.&lt;/p&gt;</a:t>
+            </a:r>
+            <a:endParaRPr lang="en-US" sz="1300" dirty="0"/>
           </a:p>
           <a:p>
             <a:pPr indent="0" marL="0">
@@ -8764,7 +8764,7 @@
               <a:buNone/>
             </a:pPr>
             <a:r>
-              <a:rPr lang="en-US" sz="1400" dirty="0">
+              <a:rPr lang="en-US" sz="1300" dirty="0">
                 <a:solidFill>
                   <a:srgbClr val="C9D3F5"/>
                 </a:solidFill>
@@ -8774,82 +8774,101 @@
               </a:rPr>
               <a:t>&lt;h2 style="clear: both;"&gt;Next Section&lt;/h2&gt;</a:t>
             </a:r>
-            <a:endParaRPr lang="en-US" sz="1400" dirty="0"/>
-          </a:p>
-        </p:txBody>
-      </p:sp>
-      <p:sp>
-        <p:nvSpPr>
-          <p:cNvPr id="6" name="Text 4"/>
-          <p:cNvSpPr txBox="1"/>
-          <p:nvPr/>
-        </p:nvSpPr>
-        <p:spPr>
-          <a:xfrm>
-            <a:off x="640080" y="3543300"/>
-            <a:ext cx="10911535" cy="2720340"/>
-          </a:xfrm>
-          <a:prstGeom prst="rect">
-            <a:avLst/>
-          </a:prstGeom>
-          <a:noFill/>
-          <a:ln/>
-        </p:spPr>
-        <p:txBody>
-          <a:bodyPr wrap="square" lIns="0" tIns="0" rIns="0" bIns="0" rtlCol="0" anchor="t"/>
-          <a:lstStyle/>
-          <a:p>
-            <a:pPr indent="0" marL="0">
-              <a:buNone/>
-            </a:pPr>
-            <a:r>
-              <a:rPr lang="en-US" sz="1300" dirty="0">
-                <a:solidFill>
-                  <a:srgbClr val="26262F"/>
+            <a:endParaRPr lang="en-US" sz="1300" dirty="0"/>
+          </a:p>
+        </p:txBody>
+      </p:sp>
+      <p:sp>
+        <p:nvSpPr>
+          <p:cNvPr id="6" name="Shape 4"/>
+          <p:cNvSpPr/>
+          <p:nvPr/>
+        </p:nvSpPr>
+        <p:spPr>
+          <a:xfrm>
+            <a:off x="6169000" y="1947672"/>
+            <a:ext cx="5492344" cy="4379976"/>
+          </a:xfrm>
+          <a:prstGeom prst="roundRect">
+            <a:avLst>
+              <a:gd name="adj" fmla="val 1253"/>
+            </a:avLst>
+          </a:prstGeom>
+          <a:solidFill>
+            <a:srgbClr val="FFFFFF"/>
+          </a:solidFill>
+          <a:ln w="12700">
+            <a:solidFill>
+              <a:srgbClr val="E2E2EE"/>
+            </a:solidFill>
+            <a:prstDash val="solid"/>
+          </a:ln>
+          <a:effectLst>
+            <a:outerShdw sx="100000" sy="100000" kx="0" ky="0" algn="bl" rotWithShape="0" blurRad="101600" dist="38100" dir="5400000">
+              <a:srgbClr val="000000">
+                <a:alpha val="12000"/>
+              </a:srgbClr>
+            </a:outerShdw>
+          </a:effectLst>
+        </p:spPr>
+      </p:sp>
+      <p:pic>
+        <p:nvPicPr>
+          <p:cNvPr id="7" name="Image 0" descr="D:/GitHub/mern-web-book/docs/assets/img/lecture-07/clear-demo.png">    </p:cNvPr>
+          <p:cNvPicPr>
+            <a:picLocks noChangeAspect="1"/>
+          </p:cNvPicPr>
+          <p:nvPr/>
+        </p:nvPicPr>
+        <p:blipFill>
+          <a:blip r:embed="rId1"/>
+          <a:stretch>
+            <a:fillRect/>
+          </a:stretch>
+        </p:blipFill>
+        <p:spPr>
+          <a:xfrm>
+            <a:off x="6278728" y="2494336"/>
+            <a:ext cx="5272888" cy="3286648"/>
+          </a:xfrm>
+          <a:prstGeom prst="rect">
+            <a:avLst/>
+          </a:prstGeom>
+        </p:spPr>
+      </p:pic>
+      <p:sp>
+        <p:nvSpPr>
+          <p:cNvPr id="8" name="Text 5"/>
+          <p:cNvSpPr txBox="1"/>
+          <p:nvPr/>
+        </p:nvSpPr>
+        <p:spPr>
+          <a:xfrm>
+            <a:off x="640080" y="6446520"/>
+            <a:ext cx="8686800" cy="292608"/>
+          </a:xfrm>
+          <a:prstGeom prst="rect">
+            <a:avLst/>
+          </a:prstGeom>
+          <a:noFill/>
+          <a:ln/>
+        </p:spPr>
+        <p:txBody>
+          <a:bodyPr wrap="square" lIns="0" tIns="0" rIns="0" bIns="0" rtlCol="0" anchor="ctr"/>
+          <a:lstStyle/>
+          <a:p>
+            <a:pPr algn="l" indent="0" marL="0">
+              <a:buNone/>
+            </a:pPr>
+            <a:r>
+              <a:rPr lang="en-US" sz="900" dirty="0">
+                <a:solidFill>
+                  <a:srgbClr val="5D5D72"/>
                 </a:solidFill>
                 <a:latin typeface="Calibri" pitchFamily="34" charset="0"/>
                 <a:ea typeface="Calibri" pitchFamily="34" charset="-122"/>
                 <a:cs typeface="Calibri" pitchFamily="34" charset="-120"/>
               </a:rPr>
-              <a:t>Without clear: both, the heading could get squeezed into the space beside the float instead of starting cleanly below it.</a:t>
-            </a:r>
-            <a:endParaRPr lang="en-US" sz="1300" dirty="0"/>
-          </a:p>
-        </p:txBody>
-      </p:sp>
-      <p:sp>
-        <p:nvSpPr>
-          <p:cNvPr id="7" name="Text 5"/>
-          <p:cNvSpPr txBox="1"/>
-          <p:nvPr/>
-        </p:nvSpPr>
-        <p:spPr>
-          <a:xfrm>
-            <a:off x="640080" y="6446520"/>
-            <a:ext cx="8686800" cy="292608"/>
-          </a:xfrm>
-          <a:prstGeom prst="rect">
-            <a:avLst/>
-          </a:prstGeom>
-          <a:noFill/>
-          <a:ln/>
-        </p:spPr>
-        <p:txBody>
-          <a:bodyPr wrap="square" lIns="0" tIns="0" rIns="0" bIns="0" rtlCol="0" anchor="ctr"/>
-          <a:lstStyle/>
-          <a:p>
-            <a:pPr algn="l" indent="0" marL="0">
-              <a:buNone/>
-            </a:pPr>
-            <a:r>
-              <a:rPr lang="en-US" sz="900" dirty="0">
-                <a:solidFill>
-                  <a:srgbClr val="5D5D72"/>
-                </a:solidFill>
-                <a:latin typeface="Calibri" pitchFamily="34" charset="0"/>
-                <a:ea typeface="Calibri" pitchFamily="34" charset="-122"/>
-                <a:cs typeface="Calibri" pitchFamily="34" charset="-120"/>
-              </a:rPr>
               <a:t>Usman Akram  •  COMSATS University Islamabad</a:t>
             </a:r>
             <a:endParaRPr lang="en-US" sz="900" dirty="0"/>
@@ -8858,7 +8877,7 @@
       </p:sp>
       <p:sp>
         <p:nvSpPr>
-          <p:cNvPr id="8" name="Text 6"/>
+          <p:cNvPr id="9" name="Text 6"/>
           <p:cNvSpPr txBox="1"/>
           <p:nvPr/>
         </p:nvSpPr>
@@ -10606,8 +10625,8 @@
         </p:blipFill>
         <p:spPr>
           <a:xfrm>
-            <a:off x="3542395" y="4217670"/>
-            <a:ext cx="5106905" cy="2000250"/>
+            <a:off x="769738" y="4217670"/>
+            <a:ext cx="10652219" cy="2000250"/>
           </a:xfrm>
           <a:prstGeom prst="rect">
             <a:avLst/>
@@ -11587,7 +11606,7 @@
         <p:spPr>
           <a:xfrm>
             <a:off x="1463040" y="2194560"/>
-            <a:ext cx="10058400" cy="640080"/>
+            <a:ext cx="10058400" cy="624840"/>
           </a:xfrm>
           <a:prstGeom prst="rect">
             <a:avLst/>
@@ -11625,7 +11644,7 @@
         </p:nvSpPr>
         <p:spPr>
           <a:xfrm>
-            <a:off x="822960" y="2971800"/>
+            <a:off x="822960" y="2956560"/>
             <a:ext cx="438912" cy="438912"/>
           </a:xfrm>
           <a:prstGeom prst="ellipse">
@@ -11645,7 +11664,7 @@
         </p:nvSpPr>
         <p:spPr>
           <a:xfrm>
-            <a:off x="822960" y="2971800"/>
+            <a:off x="822960" y="2956560"/>
             <a:ext cx="438912" cy="438912"/>
           </a:xfrm>
           <a:prstGeom prst="rect">
@@ -11684,8 +11703,8 @@
         </p:nvSpPr>
         <p:spPr>
           <a:xfrm>
-            <a:off x="1463040" y="2880360"/>
-            <a:ext cx="10058400" cy="640080"/>
+            <a:off x="1463040" y="2865120"/>
+            <a:ext cx="10058400" cy="624840"/>
           </a:xfrm>
           <a:prstGeom prst="rect">
             <a:avLst/>
@@ -11723,7 +11742,7 @@
         </p:nvSpPr>
         <p:spPr>
           <a:xfrm>
-            <a:off x="822960" y="3657600"/>
+            <a:off x="822960" y="3627120"/>
             <a:ext cx="438912" cy="438912"/>
           </a:xfrm>
           <a:prstGeom prst="ellipse">
@@ -11743,7 +11762,7 @@
         </p:nvSpPr>
         <p:spPr>
           <a:xfrm>
-            <a:off x="822960" y="3657600"/>
+            <a:off x="822960" y="3627120"/>
             <a:ext cx="438912" cy="438912"/>
           </a:xfrm>
           <a:prstGeom prst="rect">
@@ -11782,8 +11801,8 @@
         </p:nvSpPr>
         <p:spPr>
           <a:xfrm>
-            <a:off x="1463040" y="3566160"/>
-            <a:ext cx="10058400" cy="640080"/>
+            <a:off x="1463040" y="3535680"/>
+            <a:ext cx="10058400" cy="624840"/>
           </a:xfrm>
           <a:prstGeom prst="rect">
             <a:avLst/>
@@ -11821,7 +11840,7 @@
         </p:nvSpPr>
         <p:spPr>
           <a:xfrm>
-            <a:off x="822960" y="4343400"/>
+            <a:off x="822960" y="4297680"/>
             <a:ext cx="438912" cy="438912"/>
           </a:xfrm>
           <a:prstGeom prst="ellipse">
@@ -11841,7 +11860,7 @@
         </p:nvSpPr>
         <p:spPr>
           <a:xfrm>
-            <a:off x="822960" y="4343400"/>
+            <a:off x="822960" y="4297680"/>
             <a:ext cx="438912" cy="438912"/>
           </a:xfrm>
           <a:prstGeom prst="rect">
@@ -11880,8 +11899,8 @@
         </p:nvSpPr>
         <p:spPr>
           <a:xfrm>
-            <a:off x="1463040" y="4251960"/>
-            <a:ext cx="10058400" cy="640080"/>
+            <a:off x="1463040" y="4206240"/>
+            <a:ext cx="10058400" cy="624840"/>
           </a:xfrm>
           <a:prstGeom prst="rect">
             <a:avLst/>
@@ -11919,7 +11938,7 @@
         </p:nvSpPr>
         <p:spPr>
           <a:xfrm>
-            <a:off x="822960" y="5029200"/>
+            <a:off x="822960" y="4968240"/>
             <a:ext cx="438912" cy="438912"/>
           </a:xfrm>
           <a:prstGeom prst="ellipse">
@@ -11939,7 +11958,7 @@
         </p:nvSpPr>
         <p:spPr>
           <a:xfrm>
-            <a:off x="822960" y="5029200"/>
+            <a:off x="822960" y="4968240"/>
             <a:ext cx="438912" cy="438912"/>
           </a:xfrm>
           <a:prstGeom prst="rect">
@@ -11978,8 +11997,8 @@
         </p:nvSpPr>
         <p:spPr>
           <a:xfrm>
-            <a:off x="1463040" y="4937760"/>
-            <a:ext cx="10058400" cy="640080"/>
+            <a:off x="1463040" y="4876800"/>
+            <a:ext cx="10058400" cy="624840"/>
           </a:xfrm>
           <a:prstGeom prst="rect">
             <a:avLst/>
@@ -12017,7 +12036,7 @@
         </p:nvSpPr>
         <p:spPr>
           <a:xfrm>
-            <a:off x="822960" y="5715000"/>
+            <a:off x="822960" y="5638800"/>
             <a:ext cx="438912" cy="438912"/>
           </a:xfrm>
           <a:prstGeom prst="ellipse">
@@ -12037,7 +12056,7 @@
         </p:nvSpPr>
         <p:spPr>
           <a:xfrm>
-            <a:off x="822960" y="5715000"/>
+            <a:off x="822960" y="5638800"/>
             <a:ext cx="438912" cy="438912"/>
           </a:xfrm>
           <a:prstGeom prst="rect">
@@ -12076,8 +12095,8 @@
         </p:nvSpPr>
         <p:spPr>
           <a:xfrm>
-            <a:off x="1463040" y="5623560"/>
-            <a:ext cx="10058400" cy="640080"/>
+            <a:off x="1463040" y="5547360"/>
+            <a:ext cx="10058400" cy="624840"/>
           </a:xfrm>
           <a:prstGeom prst="rect">
             <a:avLst/>
@@ -12824,12 +12843,12 @@
         </p:nvSpPr>
         <p:spPr>
           <a:xfrm>
-            <a:off x="640080" y="2240280"/>
-            <a:ext cx="10911535" cy="1739265"/>
+            <a:off x="640080" y="3009900"/>
+            <a:ext cx="5272888" cy="2529840"/>
           </a:xfrm>
           <a:prstGeom prst="roundRect">
             <a:avLst>
-              <a:gd name="adj" fmla="val 4206"/>
+              <a:gd name="adj" fmla="val 2892"/>
             </a:avLst>
           </a:prstGeom>
           <a:solidFill>
@@ -12846,8 +12865,8 @@
         </p:nvSpPr>
         <p:spPr>
           <a:xfrm>
-            <a:off x="960120" y="2468880"/>
-            <a:ext cx="10271455" cy="1282065"/>
+            <a:off x="960120" y="3238500"/>
+            <a:ext cx="4632808" cy="2072640"/>
           </a:xfrm>
           <a:prstGeom prst="rect">
             <a:avLst/>
@@ -12866,7 +12885,7 @@
               <a:buNone/>
             </a:pPr>
             <a:r>
-              <a:rPr lang="en-US" sz="1250" dirty="0">
+              <a:rPr lang="en-US" sz="1300" dirty="0">
                 <a:solidFill>
                   <a:srgbClr val="C9D3F5"/>
                 </a:solidFill>
@@ -12876,7 +12895,7 @@
               </a:rPr>
               <a:t>.static   { position: static; }</a:t>
             </a:r>
-            <a:endParaRPr lang="en-US" sz="1250" dirty="0"/>
+            <a:endParaRPr lang="en-US" sz="1300" dirty="0"/>
           </a:p>
           <a:p>
             <a:pPr indent="0" marL="0">
@@ -12886,7 +12905,7 @@
               <a:buNone/>
             </a:pPr>
             <a:r>
-              <a:rPr lang="en-US" sz="1250" dirty="0">
+              <a:rPr lang="en-US" sz="1300" dirty="0">
                 <a:solidFill>
                   <a:srgbClr val="C9D3F5"/>
                 </a:solidFill>
@@ -12894,9 +12913,9 @@
                 <a:ea typeface="Courier New" pitchFamily="34" charset="-122"/>
                 <a:cs typeface="Courier New" pitchFamily="34" charset="-120"/>
               </a:rPr>
-              <a:t>.relative { position: relative; top: 10px; left: 20px; }</a:t>
-            </a:r>
-            <a:endParaRPr lang="en-US" sz="1250" dirty="0"/>
+              <a:t>.relative { position: relative;</a:t>
+            </a:r>
+            <a:endParaRPr lang="en-US" sz="1300" dirty="0"/>
           </a:p>
           <a:p>
             <a:pPr indent="0" marL="0">
@@ -12906,7 +12925,7 @@
               <a:buNone/>
             </a:pPr>
             <a:r>
-              <a:rPr lang="en-US" sz="1250" dirty="0">
+              <a:rPr lang="en-US" sz="1300" dirty="0">
                 <a:solidFill>
                   <a:srgbClr val="C9D3F5"/>
                 </a:solidFill>
@@ -12914,9 +12933,9 @@
                 <a:ea typeface="Courier New" pitchFamily="34" charset="-122"/>
                 <a:cs typeface="Courier New" pitchFamily="34" charset="-120"/>
               </a:rPr>
-              <a:t>.absolute { position: absolute; top: 0; right: 0; }</a:t>
-            </a:r>
-            <a:endParaRPr lang="en-US" sz="1250" dirty="0"/>
+              <a:t>            top: 10px; left: 20px; }</a:t>
+            </a:r>
+            <a:endParaRPr lang="en-US" sz="1300" dirty="0"/>
           </a:p>
           <a:p>
             <a:pPr indent="0" marL="0">
@@ -12926,7 +12945,7 @@
               <a:buNone/>
             </a:pPr>
             <a:r>
-              <a:rPr lang="en-US" sz="1250" dirty="0">
+              <a:rPr lang="en-US" sz="1300" dirty="0">
                 <a:solidFill>
                   <a:srgbClr val="C9D3F5"/>
                 </a:solidFill>
@@ -12934,9 +12953,9 @@
                 <a:ea typeface="Courier New" pitchFamily="34" charset="-122"/>
                 <a:cs typeface="Courier New" pitchFamily="34" charset="-120"/>
               </a:rPr>
-              <a:t>.fixed    { position: fixed; bottom: 20px; right: 20px; }</a:t>
-            </a:r>
-            <a:endParaRPr lang="en-US" sz="1250" dirty="0"/>
+              <a:t>.absolute { position: absolute;</a:t>
+            </a:r>
+            <a:endParaRPr lang="en-US" sz="1300" dirty="0"/>
           </a:p>
           <a:p>
             <a:pPr indent="0" marL="0">
@@ -12946,7 +12965,7 @@
               <a:buNone/>
             </a:pPr>
             <a:r>
-              <a:rPr lang="en-US" sz="1250" dirty="0">
+              <a:rPr lang="en-US" sz="1300" dirty="0">
                 <a:solidFill>
                   <a:srgbClr val="C9D3F5"/>
                 </a:solidFill>
@@ -12954,9 +12973,69 @@
                 <a:ea typeface="Courier New" pitchFamily="34" charset="-122"/>
                 <a:cs typeface="Courier New" pitchFamily="34" charset="-120"/>
               </a:rPr>
+              <a:t>            top: 0; right: 0; }</a:t>
+            </a:r>
+            <a:endParaRPr lang="en-US" sz="1300" dirty="0"/>
+          </a:p>
+          <a:p>
+            <a:pPr indent="0" marL="0">
+              <a:lnSpc>
+                <a:spcPct val="125000"/>
+              </a:lnSpc>
+              <a:buNone/>
+            </a:pPr>
+            <a:r>
+              <a:rPr lang="en-US" sz="1300" dirty="0">
+                <a:solidFill>
+                  <a:srgbClr val="C9D3F5"/>
+                </a:solidFill>
+                <a:latin typeface="Courier New" pitchFamily="34" charset="0"/>
+                <a:ea typeface="Courier New" pitchFamily="34" charset="-122"/>
+                <a:cs typeface="Courier New" pitchFamily="34" charset="-120"/>
+              </a:rPr>
+              <a:t>.fixed    { position: fixed;</a:t>
+            </a:r>
+            <a:endParaRPr lang="en-US" sz="1300" dirty="0"/>
+          </a:p>
+          <a:p>
+            <a:pPr indent="0" marL="0">
+              <a:lnSpc>
+                <a:spcPct val="125000"/>
+              </a:lnSpc>
+              <a:buNone/>
+            </a:pPr>
+            <a:r>
+              <a:rPr lang="en-US" sz="1300" dirty="0">
+                <a:solidFill>
+                  <a:srgbClr val="C9D3F5"/>
+                </a:solidFill>
+                <a:latin typeface="Courier New" pitchFamily="34" charset="0"/>
+                <a:ea typeface="Courier New" pitchFamily="34" charset="-122"/>
+                <a:cs typeface="Courier New" pitchFamily="34" charset="-120"/>
+              </a:rPr>
+              <a:t>            bottom: 20px; right: 20px; }</a:t>
+            </a:r>
+            <a:endParaRPr lang="en-US" sz="1300" dirty="0"/>
+          </a:p>
+          <a:p>
+            <a:pPr indent="0" marL="0">
+              <a:lnSpc>
+                <a:spcPct val="125000"/>
+              </a:lnSpc>
+              <a:buNone/>
+            </a:pPr>
+            <a:r>
+              <a:rPr lang="en-US" sz="1300" dirty="0">
+                <a:solidFill>
+                  <a:srgbClr val="C9D3F5"/>
+                </a:solidFill>
+                <a:latin typeface="Courier New" pitchFamily="34" charset="0"/>
+                <a:ea typeface="Courier New" pitchFamily="34" charset="-122"/>
+                <a:cs typeface="Courier New" pitchFamily="34" charset="-120"/>
+              </a:rPr>
               <a:t>.sticky   { position: sticky; top: 0; }</a:t>
             </a:r>
-            <a:endParaRPr lang="en-US" sz="1250" dirty="0"/>
+            <a:endParaRPr lang="en-US" sz="1300" dirty="0"/>
           </a:p>
         </p:txBody>
       </p:sp>
@@ -12968,12 +13047,12 @@
         </p:nvSpPr>
         <p:spPr>
           <a:xfrm>
-            <a:off x="530352" y="4144137"/>
-            <a:ext cx="11130991" cy="2183511"/>
+            <a:off x="6169000" y="2221992"/>
+            <a:ext cx="5492344" cy="4105656"/>
           </a:xfrm>
           <a:prstGeom prst="roundRect">
             <a:avLst>
-              <a:gd name="adj" fmla="val 2513"/>
+              <a:gd name="adj" fmla="val 1336"/>
             </a:avLst>
           </a:prstGeom>
           <a:solidFill>
@@ -12996,7 +13075,7 @@
       </p:sp>
       <p:pic>
         <p:nvPicPr>
-          <p:cNvPr id="8" name="Image 0" descr="D:/GitHub/mern-web-book/docs/assets/img/lecture-07/position-values-comparison.png">    </p:cNvPr>
+          <p:cNvPr id="8" name="Image 0" descr="D:/GitHub/mern-web-book/docs/assets/img/lecture-07/position-overview.png">    </p:cNvPr>
           <p:cNvPicPr>
             <a:picLocks noChangeAspect="1"/>
           </p:cNvPicPr>
@@ -13010,8 +13089,8 @@
         </p:blipFill>
         <p:spPr>
           <a:xfrm>
-            <a:off x="5515754" y="4253865"/>
-            <a:ext cx="1160187" cy="1964055"/>
+            <a:off x="6278728" y="3365701"/>
+            <a:ext cx="5272888" cy="1818237"/>
           </a:xfrm>
           <a:prstGeom prst="rect">
             <a:avLst/>
@@ -13214,12 +13293,12 @@
         </p:nvSpPr>
         <p:spPr>
           <a:xfrm>
-            <a:off x="640080" y="1965960"/>
-            <a:ext cx="10911535" cy="1882140"/>
+            <a:off x="640080" y="3244215"/>
+            <a:ext cx="5272888" cy="1786890"/>
           </a:xfrm>
           <a:prstGeom prst="roundRect">
             <a:avLst>
-              <a:gd name="adj" fmla="val 3887"/>
+              <a:gd name="adj" fmla="val 4094"/>
             </a:avLst>
           </a:prstGeom>
           <a:solidFill>
@@ -13236,8 +13315,8 @@
         </p:nvSpPr>
         <p:spPr>
           <a:xfrm>
-            <a:off x="960120" y="2194560"/>
-            <a:ext cx="10271455" cy="1424940"/>
+            <a:off x="960120" y="3472815"/>
+            <a:ext cx="4632808" cy="1329690"/>
           </a:xfrm>
           <a:prstGeom prst="rect">
             <a:avLst/>
@@ -13256,7 +13335,7 @@
               <a:buNone/>
             </a:pPr>
             <a:r>
-              <a:rPr lang="en-US" sz="1400" dirty="0">
+              <a:rPr lang="en-US" sz="1300" dirty="0">
                 <a:solidFill>
                   <a:srgbClr val="C9D3F5"/>
                 </a:solidFill>
@@ -13266,7 +13345,7 @@
               </a:rPr>
               <a:t>.box {</a:t>
             </a:r>
-            <a:endParaRPr lang="en-US" sz="1400" dirty="0"/>
+            <a:endParaRPr lang="en-US" sz="1300" dirty="0"/>
           </a:p>
           <a:p>
             <a:pPr indent="0" marL="0">
@@ -13276,7 +13355,7 @@
               <a:buNone/>
             </a:pPr>
             <a:r>
-              <a:rPr lang="en-US" sz="1400" dirty="0">
+              <a:rPr lang="en-US" sz="1300" dirty="0">
                 <a:solidFill>
                   <a:srgbClr val="C9D3F5"/>
                 </a:solidFill>
@@ -13286,7 +13365,7 @@
               </a:rPr>
               <a:t>  position: relative;</a:t>
             </a:r>
-            <a:endParaRPr lang="en-US" sz="1400" dirty="0"/>
+            <a:endParaRPr lang="en-US" sz="1300" dirty="0"/>
           </a:p>
           <a:p>
             <a:pPr indent="0" marL="0">
@@ -13296,7 +13375,7 @@
               <a:buNone/>
             </a:pPr>
             <a:r>
-              <a:rPr lang="en-US" sz="1400" dirty="0">
+              <a:rPr lang="en-US" sz="1300" dirty="0">
                 <a:solidFill>
                   <a:srgbClr val="C9D3F5"/>
                 </a:solidFill>
@@ -13304,9 +13383,9 @@
                 <a:ea typeface="Courier New" pitchFamily="34" charset="-122"/>
                 <a:cs typeface="Courier New" pitchFamily="34" charset="-120"/>
               </a:rPr>
-              <a:t>  top: 10px;   /* 10px down from its normal spot */</a:t>
-            </a:r>
-            <a:endParaRPr lang="en-US" sz="1400" dirty="0"/>
+              <a:t>  top: 10px;</a:t>
+            </a:r>
+            <a:endParaRPr lang="en-US" sz="1300" dirty="0"/>
           </a:p>
           <a:p>
             <a:pPr indent="0" marL="0">
@@ -13316,7 +13395,7 @@
               <a:buNone/>
             </a:pPr>
             <a:r>
-              <a:rPr lang="en-US" sz="1400" dirty="0">
+              <a:rPr lang="en-US" sz="1300" dirty="0">
                 <a:solidFill>
                   <a:srgbClr val="C9D3F5"/>
                 </a:solidFill>
@@ -13324,9 +13403,9 @@
                 <a:ea typeface="Courier New" pitchFamily="34" charset="-122"/>
                 <a:cs typeface="Courier New" pitchFamily="34" charset="-120"/>
               </a:rPr>
-              <a:t>  left: 20px;  /* 20px right of its normal spot */</a:t>
-            </a:r>
-            <a:endParaRPr lang="en-US" sz="1400" dirty="0"/>
+              <a:t>  left: 20px;</a:t>
+            </a:r>
+            <a:endParaRPr lang="en-US" sz="1300" dirty="0"/>
           </a:p>
           <a:p>
             <a:pPr indent="0" marL="0">
@@ -13336,7 +13415,7 @@
               <a:buNone/>
             </a:pPr>
             <a:r>
-              <a:rPr lang="en-US" sz="1400" dirty="0">
+              <a:rPr lang="en-US" sz="1300" dirty="0">
                 <a:solidFill>
                   <a:srgbClr val="C9D3F5"/>
                 </a:solidFill>
@@ -13346,82 +13425,101 @@
               </a:rPr>
               <a:t>}</a:t>
             </a:r>
-            <a:endParaRPr lang="en-US" sz="1400" dirty="0"/>
-          </a:p>
-        </p:txBody>
-      </p:sp>
-      <p:sp>
-        <p:nvSpPr>
-          <p:cNvPr id="6" name="Text 4"/>
-          <p:cNvSpPr txBox="1"/>
-          <p:nvPr/>
-        </p:nvSpPr>
-        <p:spPr>
-          <a:xfrm>
-            <a:off x="640080" y="4076700"/>
-            <a:ext cx="10911535" cy="2186940"/>
-          </a:xfrm>
-          <a:prstGeom prst="rect">
-            <a:avLst/>
-          </a:prstGeom>
-          <a:noFill/>
-          <a:ln/>
-        </p:spPr>
-        <p:txBody>
-          <a:bodyPr wrap="square" lIns="0" tIns="0" rIns="0" bIns="0" rtlCol="0" anchor="t"/>
-          <a:lstStyle/>
-          <a:p>
-            <a:pPr indent="0" marL="0">
-              <a:buNone/>
-            </a:pPr>
-            <a:r>
-              <a:rPr lang="en-US" sz="1300" dirty="0">
-                <a:solidFill>
-                  <a:srgbClr val="26262F"/>
+            <a:endParaRPr lang="en-US" sz="1300" dirty="0"/>
+          </a:p>
+        </p:txBody>
+      </p:sp>
+      <p:sp>
+        <p:nvSpPr>
+          <p:cNvPr id="6" name="Shape 4"/>
+          <p:cNvSpPr/>
+          <p:nvPr/>
+        </p:nvSpPr>
+        <p:spPr>
+          <a:xfrm>
+            <a:off x="6169000" y="1947672"/>
+            <a:ext cx="5492344" cy="4379976"/>
+          </a:xfrm>
+          <a:prstGeom prst="roundRect">
+            <a:avLst>
+              <a:gd name="adj" fmla="val 1253"/>
+            </a:avLst>
+          </a:prstGeom>
+          <a:solidFill>
+            <a:srgbClr val="FFFFFF"/>
+          </a:solidFill>
+          <a:ln w="12700">
+            <a:solidFill>
+              <a:srgbClr val="E2E2EE"/>
+            </a:solidFill>
+            <a:prstDash val="solid"/>
+          </a:ln>
+          <a:effectLst>
+            <a:outerShdw sx="100000" sy="100000" kx="0" ky="0" algn="bl" rotWithShape="0" blurRad="101600" dist="38100" dir="5400000">
+              <a:srgbClr val="000000">
+                <a:alpha val="12000"/>
+              </a:srgbClr>
+            </a:outerShdw>
+          </a:effectLst>
+        </p:spPr>
+      </p:sp>
+      <p:pic>
+        <p:nvPicPr>
+          <p:cNvPr id="7" name="Image 0" descr="D:/GitHub/mern-web-book/docs/assets/img/lecture-07/relative-demo.png">    </p:cNvPr>
+          <p:cNvPicPr>
+            <a:picLocks noChangeAspect="1"/>
+          </p:cNvPicPr>
+          <p:nvPr/>
+        </p:nvPicPr>
+        <p:blipFill>
+          <a:blip r:embed="rId1"/>
+          <a:stretch>
+            <a:fillRect/>
+          </a:stretch>
+        </p:blipFill>
+        <p:spPr>
+          <a:xfrm>
+            <a:off x="6278728" y="2792717"/>
+            <a:ext cx="5272888" cy="2689885"/>
+          </a:xfrm>
+          <a:prstGeom prst="rect">
+            <a:avLst/>
+          </a:prstGeom>
+        </p:spPr>
+      </p:pic>
+      <p:sp>
+        <p:nvSpPr>
+          <p:cNvPr id="8" name="Text 5"/>
+          <p:cNvSpPr txBox="1"/>
+          <p:nvPr/>
+        </p:nvSpPr>
+        <p:spPr>
+          <a:xfrm>
+            <a:off x="640080" y="6446520"/>
+            <a:ext cx="8686800" cy="292608"/>
+          </a:xfrm>
+          <a:prstGeom prst="rect">
+            <a:avLst/>
+          </a:prstGeom>
+          <a:noFill/>
+          <a:ln/>
+        </p:spPr>
+        <p:txBody>
+          <a:bodyPr wrap="square" lIns="0" tIns="0" rIns="0" bIns="0" rtlCol="0" anchor="ctr"/>
+          <a:lstStyle/>
+          <a:p>
+            <a:pPr algn="l" indent="0" marL="0">
+              <a:buNone/>
+            </a:pPr>
+            <a:r>
+              <a:rPr lang="en-US" sz="900" dirty="0">
+                <a:solidFill>
+                  <a:srgbClr val="5D5D72"/>
                 </a:solidFill>
                 <a:latin typeface="Calibri" pitchFamily="34" charset="0"/>
                 <a:ea typeface="Calibri" pitchFamily="34" charset="-122"/>
                 <a:cs typeface="Calibri" pitchFamily="34" charset="-120"/>
               </a:rPr>
-              <a:t>The box's original space stays reserved — other elements behave as though it never moved, even though it's now drawn 10px/20px away.</a:t>
-            </a:r>
-            <a:endParaRPr lang="en-US" sz="1300" dirty="0"/>
-          </a:p>
-        </p:txBody>
-      </p:sp>
-      <p:sp>
-        <p:nvSpPr>
-          <p:cNvPr id="7" name="Text 5"/>
-          <p:cNvSpPr txBox="1"/>
-          <p:nvPr/>
-        </p:nvSpPr>
-        <p:spPr>
-          <a:xfrm>
-            <a:off x="640080" y="6446520"/>
-            <a:ext cx="8686800" cy="292608"/>
-          </a:xfrm>
-          <a:prstGeom prst="rect">
-            <a:avLst/>
-          </a:prstGeom>
-          <a:noFill/>
-          <a:ln/>
-        </p:spPr>
-        <p:txBody>
-          <a:bodyPr wrap="square" lIns="0" tIns="0" rIns="0" bIns="0" rtlCol="0" anchor="ctr"/>
-          <a:lstStyle/>
-          <a:p>
-            <a:pPr algn="l" indent="0" marL="0">
-              <a:buNone/>
-            </a:pPr>
-            <a:r>
-              <a:rPr lang="en-US" sz="900" dirty="0">
-                <a:solidFill>
-                  <a:srgbClr val="5D5D72"/>
-                </a:solidFill>
-                <a:latin typeface="Calibri" pitchFamily="34" charset="0"/>
-                <a:ea typeface="Calibri" pitchFamily="34" charset="-122"/>
-                <a:cs typeface="Calibri" pitchFamily="34" charset="-120"/>
-              </a:rPr>
               <a:t>Usman Akram  •  COMSATS University Islamabad</a:t>
             </a:r>
             <a:endParaRPr lang="en-US" sz="900" dirty="0"/>
@@ -13430,7 +13528,7 @@
       </p:sp>
       <p:sp>
         <p:nvSpPr>
-          <p:cNvPr id="8" name="Text 6"/>
+          <p:cNvPr id="9" name="Text 6"/>
           <p:cNvSpPr txBox="1"/>
           <p:nvPr/>
         </p:nvSpPr>
@@ -13585,12 +13683,12 @@
         </p:nvSpPr>
         <p:spPr>
           <a:xfrm>
-            <a:off x="640080" y="1965960"/>
-            <a:ext cx="10911535" cy="1882140"/>
+            <a:off x="640080" y="3244215"/>
+            <a:ext cx="5272888" cy="1786890"/>
           </a:xfrm>
           <a:prstGeom prst="roundRect">
             <a:avLst>
-              <a:gd name="adj" fmla="val 3887"/>
+              <a:gd name="adj" fmla="val 4094"/>
             </a:avLst>
           </a:prstGeom>
           <a:solidFill>
@@ -13607,8 +13705,8 @@
         </p:nvSpPr>
         <p:spPr>
           <a:xfrm>
-            <a:off x="960120" y="2194560"/>
-            <a:ext cx="10271455" cy="1424940"/>
+            <a:off x="960120" y="3472815"/>
+            <a:ext cx="4632808" cy="1329690"/>
           </a:xfrm>
           <a:prstGeom prst="rect">
             <a:avLst/>
@@ -13627,7 +13725,7 @@
               <a:buNone/>
             </a:pPr>
             <a:r>
-              <a:rPr lang="en-US" sz="1400" dirty="0">
+              <a:rPr lang="en-US" sz="1300" dirty="0">
                 <a:solidFill>
                   <a:srgbClr val="C9D3F5"/>
                 </a:solidFill>
@@ -13637,7 +13735,7 @@
               </a:rPr>
               <a:t>.box {</a:t>
             </a:r>
-            <a:endParaRPr lang="en-US" sz="1400" dirty="0"/>
+            <a:endParaRPr lang="en-US" sz="1300" dirty="0"/>
           </a:p>
           <a:p>
             <a:pPr indent="0" marL="0">
@@ -13647,7 +13745,7 @@
               <a:buNone/>
             </a:pPr>
             <a:r>
-              <a:rPr lang="en-US" sz="1400" dirty="0">
+              <a:rPr lang="en-US" sz="1300" dirty="0">
                 <a:solidFill>
                   <a:srgbClr val="C9D3F5"/>
                 </a:solidFill>
@@ -13657,7 +13755,7 @@
               </a:rPr>
               <a:t>  position: absolute;</a:t>
             </a:r>
-            <a:endParaRPr lang="en-US" sz="1400" dirty="0"/>
+            <a:endParaRPr lang="en-US" sz="1300" dirty="0"/>
           </a:p>
           <a:p>
             <a:pPr indent="0" marL="0">
@@ -13667,7 +13765,7 @@
               <a:buNone/>
             </a:pPr>
             <a:r>
-              <a:rPr lang="en-US" sz="1400" dirty="0">
+              <a:rPr lang="en-US" sz="1300" dirty="0">
                 <a:solidFill>
                   <a:srgbClr val="C9D3F5"/>
                 </a:solidFill>
@@ -13677,7 +13775,7 @@
               </a:rPr>
               <a:t>  top: 0;</a:t>
             </a:r>
-            <a:endParaRPr lang="en-US" sz="1400" dirty="0"/>
+            <a:endParaRPr lang="en-US" sz="1300" dirty="0"/>
           </a:p>
           <a:p>
             <a:pPr indent="0" marL="0">
@@ -13687,7 +13785,7 @@
               <a:buNone/>
             </a:pPr>
             <a:r>
-              <a:rPr lang="en-US" sz="1400" dirty="0">
+              <a:rPr lang="en-US" sz="1300" dirty="0">
                 <a:solidFill>
                   <a:srgbClr val="C9D3F5"/>
                 </a:solidFill>
@@ -13697,7 +13795,7 @@
               </a:rPr>
               <a:t>  right: 0;</a:t>
             </a:r>
-            <a:endParaRPr lang="en-US" sz="1400" dirty="0"/>
+            <a:endParaRPr lang="en-US" sz="1300" dirty="0"/>
           </a:p>
           <a:p>
             <a:pPr indent="0" marL="0">
@@ -13707,7 +13805,7 @@
               <a:buNone/>
             </a:pPr>
             <a:r>
-              <a:rPr lang="en-US" sz="1400" dirty="0">
+              <a:rPr lang="en-US" sz="1300" dirty="0">
                 <a:solidFill>
                   <a:srgbClr val="C9D3F5"/>
                 </a:solidFill>
@@ -13717,82 +13815,101 @@
               </a:rPr>
               <a:t>}</a:t>
             </a:r>
-            <a:endParaRPr lang="en-US" sz="1400" dirty="0"/>
-          </a:p>
-        </p:txBody>
-      </p:sp>
-      <p:sp>
-        <p:nvSpPr>
-          <p:cNvPr id="6" name="Text 4"/>
-          <p:cNvSpPr txBox="1"/>
-          <p:nvPr/>
-        </p:nvSpPr>
-        <p:spPr>
-          <a:xfrm>
-            <a:off x="640080" y="4076700"/>
-            <a:ext cx="10911535" cy="2186940"/>
-          </a:xfrm>
-          <a:prstGeom prst="rect">
-            <a:avLst/>
-          </a:prstGeom>
-          <a:noFill/>
-          <a:ln/>
-        </p:spPr>
-        <p:txBody>
-          <a:bodyPr wrap="square" lIns="0" tIns="0" rIns="0" bIns="0" rtlCol="0" anchor="t"/>
-          <a:lstStyle/>
-          <a:p>
-            <a:pPr indent="0" marL="0">
-              <a:buNone/>
-            </a:pPr>
-            <a:r>
-              <a:rPr lang="en-US" sz="1300" dirty="0">
-                <a:solidFill>
-                  <a:srgbClr val="26262F"/>
+            <a:endParaRPr lang="en-US" sz="1300" dirty="0"/>
+          </a:p>
+        </p:txBody>
+      </p:sp>
+      <p:sp>
+        <p:nvSpPr>
+          <p:cNvPr id="6" name="Shape 4"/>
+          <p:cNvSpPr/>
+          <p:nvPr/>
+        </p:nvSpPr>
+        <p:spPr>
+          <a:xfrm>
+            <a:off x="6169000" y="1947672"/>
+            <a:ext cx="5492344" cy="4379976"/>
+          </a:xfrm>
+          <a:prstGeom prst="roundRect">
+            <a:avLst>
+              <a:gd name="adj" fmla="val 1253"/>
+            </a:avLst>
+          </a:prstGeom>
+          <a:solidFill>
+            <a:srgbClr val="FFFFFF"/>
+          </a:solidFill>
+          <a:ln w="12700">
+            <a:solidFill>
+              <a:srgbClr val="E2E2EE"/>
+            </a:solidFill>
+            <a:prstDash val="solid"/>
+          </a:ln>
+          <a:effectLst>
+            <a:outerShdw sx="100000" sy="100000" kx="0" ky="0" algn="bl" rotWithShape="0" blurRad="101600" dist="38100" dir="5400000">
+              <a:srgbClr val="000000">
+                <a:alpha val="12000"/>
+              </a:srgbClr>
+            </a:outerShdw>
+          </a:effectLst>
+        </p:spPr>
+      </p:sp>
+      <p:pic>
+        <p:nvPicPr>
+          <p:cNvPr id="7" name="Image 0" descr="D:/GitHub/mern-web-book/docs/assets/img/lecture-07/absolute-demo.png">    </p:cNvPr>
+          <p:cNvPicPr>
+            <a:picLocks noChangeAspect="1"/>
+          </p:cNvPicPr>
+          <p:nvPr/>
+        </p:nvPicPr>
+        <p:blipFill>
+          <a:blip r:embed="rId1"/>
+          <a:stretch>
+            <a:fillRect/>
+          </a:stretch>
+        </p:blipFill>
+        <p:spPr>
+          <a:xfrm>
+            <a:off x="6278728" y="2703648"/>
+            <a:ext cx="5272888" cy="2868023"/>
+          </a:xfrm>
+          <a:prstGeom prst="rect">
+            <a:avLst/>
+          </a:prstGeom>
+        </p:spPr>
+      </p:pic>
+      <p:sp>
+        <p:nvSpPr>
+          <p:cNvPr id="8" name="Text 5"/>
+          <p:cNvSpPr txBox="1"/>
+          <p:nvPr/>
+        </p:nvSpPr>
+        <p:spPr>
+          <a:xfrm>
+            <a:off x="640080" y="6446520"/>
+            <a:ext cx="8686800" cy="292608"/>
+          </a:xfrm>
+          <a:prstGeom prst="rect">
+            <a:avLst/>
+          </a:prstGeom>
+          <a:noFill/>
+          <a:ln/>
+        </p:spPr>
+        <p:txBody>
+          <a:bodyPr wrap="square" lIns="0" tIns="0" rIns="0" bIns="0" rtlCol="0" anchor="ctr"/>
+          <a:lstStyle/>
+          <a:p>
+            <a:pPr algn="l" indent="0" marL="0">
+              <a:buNone/>
+            </a:pPr>
+            <a:r>
+              <a:rPr lang="en-US" sz="900" dirty="0">
+                <a:solidFill>
+                  <a:srgbClr val="5D5D72"/>
                 </a:solidFill>
                 <a:latin typeface="Calibri" pitchFamily="34" charset="0"/>
                 <a:ea typeface="Calibri" pitchFamily="34" charset="-122"/>
                 <a:cs typeface="Calibri" pitchFamily="34" charset="-120"/>
               </a:rPr>
-              <a:t>Removed from flow entirely — siblings slide into the space it used to occupy. Positioned against its containing block, not where it used to sit.</a:t>
-            </a:r>
-            <a:endParaRPr lang="en-US" sz="1300" dirty="0"/>
-          </a:p>
-        </p:txBody>
-      </p:sp>
-      <p:sp>
-        <p:nvSpPr>
-          <p:cNvPr id="7" name="Text 5"/>
-          <p:cNvSpPr txBox="1"/>
-          <p:nvPr/>
-        </p:nvSpPr>
-        <p:spPr>
-          <a:xfrm>
-            <a:off x="640080" y="6446520"/>
-            <a:ext cx="8686800" cy="292608"/>
-          </a:xfrm>
-          <a:prstGeom prst="rect">
-            <a:avLst/>
-          </a:prstGeom>
-          <a:noFill/>
-          <a:ln/>
-        </p:spPr>
-        <p:txBody>
-          <a:bodyPr wrap="square" lIns="0" tIns="0" rIns="0" bIns="0" rtlCol="0" anchor="ctr"/>
-          <a:lstStyle/>
-          <a:p>
-            <a:pPr algn="l" indent="0" marL="0">
-              <a:buNone/>
-            </a:pPr>
-            <a:r>
-              <a:rPr lang="en-US" sz="900" dirty="0">
-                <a:solidFill>
-                  <a:srgbClr val="5D5D72"/>
-                </a:solidFill>
-                <a:latin typeface="Calibri" pitchFamily="34" charset="0"/>
-                <a:ea typeface="Calibri" pitchFamily="34" charset="-122"/>
-                <a:cs typeface="Calibri" pitchFamily="34" charset="-120"/>
-              </a:rPr>
               <a:t>Usman Akram  •  COMSATS University Islamabad</a:t>
             </a:r>
             <a:endParaRPr lang="en-US" sz="900" dirty="0"/>
@@ -13801,7 +13918,7 @@
       </p:sp>
       <p:sp>
         <p:nvSpPr>
-          <p:cNvPr id="8" name="Text 6"/>
+          <p:cNvPr id="9" name="Text 6"/>
           <p:cNvSpPr txBox="1"/>
           <p:nvPr/>
         </p:nvSpPr>
@@ -13956,12 +14073,12 @@
         </p:nvSpPr>
         <p:spPr>
           <a:xfrm>
-            <a:off x="640080" y="1965960"/>
-            <a:ext cx="10911535" cy="1882140"/>
+            <a:off x="640080" y="3244215"/>
+            <a:ext cx="5272888" cy="1786890"/>
           </a:xfrm>
           <a:prstGeom prst="roundRect">
             <a:avLst>
-              <a:gd name="adj" fmla="val 3887"/>
+              <a:gd name="adj" fmla="val 4094"/>
             </a:avLst>
           </a:prstGeom>
           <a:solidFill>
@@ -13978,8 +14095,8 @@
         </p:nvSpPr>
         <p:spPr>
           <a:xfrm>
-            <a:off x="960120" y="2194560"/>
-            <a:ext cx="10271455" cy="1424940"/>
+            <a:off x="960120" y="3472815"/>
+            <a:ext cx="4632808" cy="1329690"/>
           </a:xfrm>
           <a:prstGeom prst="rect">
             <a:avLst/>
@@ -13998,7 +14115,7 @@
               <a:buNone/>
             </a:pPr>
             <a:r>
-              <a:rPr lang="en-US" sz="1400" dirty="0">
+              <a:rPr lang="en-US" sz="1300" dirty="0">
                 <a:solidFill>
                   <a:srgbClr val="C9D3F5"/>
                 </a:solidFill>
@@ -14008,7 +14125,7 @@
               </a:rPr>
               <a:t>.back-to-top {</a:t>
             </a:r>
-            <a:endParaRPr lang="en-US" sz="1400" dirty="0"/>
+            <a:endParaRPr lang="en-US" sz="1300" dirty="0"/>
           </a:p>
           <a:p>
             <a:pPr indent="0" marL="0">
@@ -14018,7 +14135,7 @@
               <a:buNone/>
             </a:pPr>
             <a:r>
-              <a:rPr lang="en-US" sz="1400" dirty="0">
+              <a:rPr lang="en-US" sz="1300" dirty="0">
                 <a:solidFill>
                   <a:srgbClr val="C9D3F5"/>
                 </a:solidFill>
@@ -14028,7 +14145,7 @@
               </a:rPr>
               <a:t>  position: fixed;</a:t>
             </a:r>
-            <a:endParaRPr lang="en-US" sz="1400" dirty="0"/>
+            <a:endParaRPr lang="en-US" sz="1300" dirty="0"/>
           </a:p>
           <a:p>
             <a:pPr indent="0" marL="0">
@@ -14038,7 +14155,7 @@
               <a:buNone/>
             </a:pPr>
             <a:r>
-              <a:rPr lang="en-US" sz="1400" dirty="0">
+              <a:rPr lang="en-US" sz="1300" dirty="0">
                 <a:solidFill>
                   <a:srgbClr val="C9D3F5"/>
                 </a:solidFill>
@@ -14048,7 +14165,7 @@
               </a:rPr>
               <a:t>  bottom: 20px;</a:t>
             </a:r>
-            <a:endParaRPr lang="en-US" sz="1400" dirty="0"/>
+            <a:endParaRPr lang="en-US" sz="1300" dirty="0"/>
           </a:p>
           <a:p>
             <a:pPr indent="0" marL="0">
@@ -14058,7 +14175,7 @@
               <a:buNone/>
             </a:pPr>
             <a:r>
-              <a:rPr lang="en-US" sz="1400" dirty="0">
+              <a:rPr lang="en-US" sz="1300" dirty="0">
                 <a:solidFill>
                   <a:srgbClr val="C9D3F5"/>
                 </a:solidFill>
@@ -14068,7 +14185,7 @@
               </a:rPr>
               <a:t>  right: 20px;</a:t>
             </a:r>
-            <a:endParaRPr lang="en-US" sz="1400" dirty="0"/>
+            <a:endParaRPr lang="en-US" sz="1300" dirty="0"/>
           </a:p>
           <a:p>
             <a:pPr indent="0" marL="0">
@@ -14078,7 +14195,7 @@
               <a:buNone/>
             </a:pPr>
             <a:r>
-              <a:rPr lang="en-US" sz="1400" dirty="0">
+              <a:rPr lang="en-US" sz="1300" dirty="0">
                 <a:solidFill>
                   <a:srgbClr val="C9D3F5"/>
                 </a:solidFill>
@@ -14088,82 +14205,101 @@
               </a:rPr>
               <a:t>}</a:t>
             </a:r>
-            <a:endParaRPr lang="en-US" sz="1400" dirty="0"/>
-          </a:p>
-        </p:txBody>
-      </p:sp>
-      <p:sp>
-        <p:nvSpPr>
-          <p:cNvPr id="6" name="Text 4"/>
-          <p:cNvSpPr txBox="1"/>
-          <p:nvPr/>
-        </p:nvSpPr>
-        <p:spPr>
-          <a:xfrm>
-            <a:off x="640080" y="4076700"/>
-            <a:ext cx="10911535" cy="2186940"/>
-          </a:xfrm>
-          <a:prstGeom prst="rect">
-            <a:avLst/>
-          </a:prstGeom>
-          <a:noFill/>
-          <a:ln/>
-        </p:spPr>
-        <p:txBody>
-          <a:bodyPr wrap="square" lIns="0" tIns="0" rIns="0" bIns="0" rtlCol="0" anchor="t"/>
-          <a:lstStyle/>
-          <a:p>
-            <a:pPr indent="0" marL="0">
-              <a:buNone/>
-            </a:pPr>
-            <a:r>
-              <a:rPr lang="en-US" sz="1300" dirty="0">
-                <a:solidFill>
-                  <a:srgbClr val="26262F"/>
+            <a:endParaRPr lang="en-US" sz="1300" dirty="0"/>
+          </a:p>
+        </p:txBody>
+      </p:sp>
+      <p:sp>
+        <p:nvSpPr>
+          <p:cNvPr id="6" name="Shape 4"/>
+          <p:cNvSpPr/>
+          <p:nvPr/>
+        </p:nvSpPr>
+        <p:spPr>
+          <a:xfrm>
+            <a:off x="6169000" y="1947672"/>
+            <a:ext cx="5492344" cy="4379976"/>
+          </a:xfrm>
+          <a:prstGeom prst="roundRect">
+            <a:avLst>
+              <a:gd name="adj" fmla="val 1253"/>
+            </a:avLst>
+          </a:prstGeom>
+          <a:solidFill>
+            <a:srgbClr val="FFFFFF"/>
+          </a:solidFill>
+          <a:ln w="12700">
+            <a:solidFill>
+              <a:srgbClr val="E2E2EE"/>
+            </a:solidFill>
+            <a:prstDash val="solid"/>
+          </a:ln>
+          <a:effectLst>
+            <a:outerShdw sx="100000" sy="100000" kx="0" ky="0" algn="bl" rotWithShape="0" blurRad="101600" dist="38100" dir="5400000">
+              <a:srgbClr val="000000">
+                <a:alpha val="12000"/>
+              </a:srgbClr>
+            </a:outerShdw>
+          </a:effectLst>
+        </p:spPr>
+      </p:sp>
+      <p:pic>
+        <p:nvPicPr>
+          <p:cNvPr id="7" name="Image 0" descr="D:/GitHub/mern-web-book/docs/assets/img/lecture-07/fixed-demo.png">    </p:cNvPr>
+          <p:cNvPicPr>
+            <a:picLocks noChangeAspect="1"/>
+          </p:cNvPicPr>
+          <p:nvPr/>
+        </p:nvPicPr>
+        <p:blipFill>
+          <a:blip r:embed="rId1"/>
+          <a:stretch>
+            <a:fillRect/>
+          </a:stretch>
+        </p:blipFill>
+        <p:spPr>
+          <a:xfrm>
+            <a:off x="6278728" y="2619033"/>
+            <a:ext cx="5272888" cy="3037255"/>
+          </a:xfrm>
+          <a:prstGeom prst="rect">
+            <a:avLst/>
+          </a:prstGeom>
+        </p:spPr>
+      </p:pic>
+      <p:sp>
+        <p:nvSpPr>
+          <p:cNvPr id="8" name="Text 5"/>
+          <p:cNvSpPr txBox="1"/>
+          <p:nvPr/>
+        </p:nvSpPr>
+        <p:spPr>
+          <a:xfrm>
+            <a:off x="640080" y="6446520"/>
+            <a:ext cx="8686800" cy="292608"/>
+          </a:xfrm>
+          <a:prstGeom prst="rect">
+            <a:avLst/>
+          </a:prstGeom>
+          <a:noFill/>
+          <a:ln/>
+        </p:spPr>
+        <p:txBody>
+          <a:bodyPr wrap="square" lIns="0" tIns="0" rIns="0" bIns="0" rtlCol="0" anchor="ctr"/>
+          <a:lstStyle/>
+          <a:p>
+            <a:pPr algn="l" indent="0" marL="0">
+              <a:buNone/>
+            </a:pPr>
+            <a:r>
+              <a:rPr lang="en-US" sz="900" dirty="0">
+                <a:solidFill>
+                  <a:srgbClr val="5D5D72"/>
                 </a:solidFill>
                 <a:latin typeface="Calibri" pitchFamily="34" charset="0"/>
                 <a:ea typeface="Calibri" pitchFamily="34" charset="-122"/>
                 <a:cs typeface="Calibri" pitchFamily="34" charset="-120"/>
               </a:rPr>
-              <a:t>Pinned to the browser viewport — stays in the exact same screen spot even as the page scrolls. Classic use: a "back to top" button or a chat widget.</a:t>
-            </a:r>
-            <a:endParaRPr lang="en-US" sz="1300" dirty="0"/>
-          </a:p>
-        </p:txBody>
-      </p:sp>
-      <p:sp>
-        <p:nvSpPr>
-          <p:cNvPr id="7" name="Text 5"/>
-          <p:cNvSpPr txBox="1"/>
-          <p:nvPr/>
-        </p:nvSpPr>
-        <p:spPr>
-          <a:xfrm>
-            <a:off x="640080" y="6446520"/>
-            <a:ext cx="8686800" cy="292608"/>
-          </a:xfrm>
-          <a:prstGeom prst="rect">
-            <a:avLst/>
-          </a:prstGeom>
-          <a:noFill/>
-          <a:ln/>
-        </p:spPr>
-        <p:txBody>
-          <a:bodyPr wrap="square" lIns="0" tIns="0" rIns="0" bIns="0" rtlCol="0" anchor="ctr"/>
-          <a:lstStyle/>
-          <a:p>
-            <a:pPr algn="l" indent="0" marL="0">
-              <a:buNone/>
-            </a:pPr>
-            <a:r>
-              <a:rPr lang="en-US" sz="900" dirty="0">
-                <a:solidFill>
-                  <a:srgbClr val="5D5D72"/>
-                </a:solidFill>
-                <a:latin typeface="Calibri" pitchFamily="34" charset="0"/>
-                <a:ea typeface="Calibri" pitchFamily="34" charset="-122"/>
-                <a:cs typeface="Calibri" pitchFamily="34" charset="-120"/>
-              </a:rPr>
               <a:t>Usman Akram  •  COMSATS University Islamabad</a:t>
             </a:r>
             <a:endParaRPr lang="en-US" sz="900" dirty="0"/>
@@ -14172,7 +14308,7 @@
       </p:sp>
       <p:sp>
         <p:nvSpPr>
-          <p:cNvPr id="8" name="Text 6"/>
+          <p:cNvPr id="9" name="Text 6"/>
           <p:cNvSpPr txBox="1"/>
           <p:nvPr/>
         </p:nvSpPr>
@@ -14327,12 +14463,12 @@
         </p:nvSpPr>
         <p:spPr>
           <a:xfrm>
-            <a:off x="640080" y="1965960"/>
-            <a:ext cx="10911535" cy="1615440"/>
+            <a:off x="640080" y="3368040"/>
+            <a:ext cx="5272888" cy="1539240"/>
           </a:xfrm>
           <a:prstGeom prst="roundRect">
             <a:avLst>
-              <a:gd name="adj" fmla="val 4528"/>
+              <a:gd name="adj" fmla="val 4752"/>
             </a:avLst>
           </a:prstGeom>
           <a:solidFill>
@@ -14349,8 +14485,8 @@
         </p:nvSpPr>
         <p:spPr>
           <a:xfrm>
-            <a:off x="960120" y="2194560"/>
-            <a:ext cx="10271455" cy="1158240"/>
+            <a:off x="960120" y="3596640"/>
+            <a:ext cx="4632808" cy="1082040"/>
           </a:xfrm>
           <a:prstGeom prst="rect">
             <a:avLst/>
@@ -14369,7 +14505,7 @@
               <a:buNone/>
             </a:pPr>
             <a:r>
-              <a:rPr lang="en-US" sz="1400" dirty="0">
+              <a:rPr lang="en-US" sz="1300" dirty="0">
                 <a:solidFill>
                   <a:srgbClr val="C9D3F5"/>
                 </a:solidFill>
@@ -14379,7 +14515,7 @@
               </a:rPr>
               <a:t>.section-heading {</a:t>
             </a:r>
-            <a:endParaRPr lang="en-US" sz="1400" dirty="0"/>
+            <a:endParaRPr lang="en-US" sz="1300" dirty="0"/>
           </a:p>
           <a:p>
             <a:pPr indent="0" marL="0">
@@ -14389,7 +14525,7 @@
               <a:buNone/>
             </a:pPr>
             <a:r>
-              <a:rPr lang="en-US" sz="1400" dirty="0">
+              <a:rPr lang="en-US" sz="1300" dirty="0">
                 <a:solidFill>
                   <a:srgbClr val="C9D3F5"/>
                 </a:solidFill>
@@ -14399,7 +14535,7 @@
               </a:rPr>
               <a:t>  position: sticky;</a:t>
             </a:r>
-            <a:endParaRPr lang="en-US" sz="1400" dirty="0"/>
+            <a:endParaRPr lang="en-US" sz="1300" dirty="0"/>
           </a:p>
           <a:p>
             <a:pPr indent="0" marL="0">
@@ -14409,7 +14545,7 @@
               <a:buNone/>
             </a:pPr>
             <a:r>
-              <a:rPr lang="en-US" sz="1400" dirty="0">
+              <a:rPr lang="en-US" sz="1300" dirty="0">
                 <a:solidFill>
                   <a:srgbClr val="C9D3F5"/>
                 </a:solidFill>
@@ -14417,9 +14553,9 @@
                 <a:ea typeface="Courier New" pitchFamily="34" charset="-122"/>
                 <a:cs typeface="Courier New" pitchFamily="34" charset="-120"/>
               </a:rPr>
-              <a:t>  top: 0;  /* the threshold — required for sticky to do anything */</a:t>
-            </a:r>
-            <a:endParaRPr lang="en-US" sz="1400" dirty="0"/>
+              <a:t>  top: 0;</a:t>
+            </a:r>
+            <a:endParaRPr lang="en-US" sz="1300" dirty="0"/>
           </a:p>
           <a:p>
             <a:pPr indent="0" marL="0">
@@ -14429,7 +14565,7 @@
               <a:buNone/>
             </a:pPr>
             <a:r>
-              <a:rPr lang="en-US" sz="1400" dirty="0">
+              <a:rPr lang="en-US" sz="1300" dirty="0">
                 <a:solidFill>
                   <a:srgbClr val="C9D3F5"/>
                 </a:solidFill>
@@ -14439,82 +14575,101 @@
               </a:rPr>
               <a:t>}</a:t>
             </a:r>
-            <a:endParaRPr lang="en-US" sz="1400" dirty="0"/>
-          </a:p>
-        </p:txBody>
-      </p:sp>
-      <p:sp>
-        <p:nvSpPr>
-          <p:cNvPr id="6" name="Text 4"/>
-          <p:cNvSpPr txBox="1"/>
-          <p:nvPr/>
-        </p:nvSpPr>
-        <p:spPr>
-          <a:xfrm>
-            <a:off x="640080" y="3810000"/>
-            <a:ext cx="10911535" cy="2453640"/>
-          </a:xfrm>
-          <a:prstGeom prst="rect">
-            <a:avLst/>
-          </a:prstGeom>
-          <a:noFill/>
-          <a:ln/>
-        </p:spPr>
-        <p:txBody>
-          <a:bodyPr wrap="square" lIns="0" tIns="0" rIns="0" bIns="0" rtlCol="0" anchor="t"/>
-          <a:lstStyle/>
-          <a:p>
-            <a:pPr indent="0" marL="0">
-              <a:buNone/>
-            </a:pPr>
-            <a:r>
-              <a:rPr lang="en-US" sz="1300" dirty="0">
-                <a:solidFill>
-                  <a:srgbClr val="26262F"/>
+            <a:endParaRPr lang="en-US" sz="1300" dirty="0"/>
+          </a:p>
+        </p:txBody>
+      </p:sp>
+      <p:sp>
+        <p:nvSpPr>
+          <p:cNvPr id="6" name="Shape 4"/>
+          <p:cNvSpPr/>
+          <p:nvPr/>
+        </p:nvSpPr>
+        <p:spPr>
+          <a:xfrm>
+            <a:off x="6169000" y="1947672"/>
+            <a:ext cx="5492344" cy="4379976"/>
+          </a:xfrm>
+          <a:prstGeom prst="roundRect">
+            <a:avLst>
+              <a:gd name="adj" fmla="val 1253"/>
+            </a:avLst>
+          </a:prstGeom>
+          <a:solidFill>
+            <a:srgbClr val="FFFFFF"/>
+          </a:solidFill>
+          <a:ln w="12700">
+            <a:solidFill>
+              <a:srgbClr val="E2E2EE"/>
+            </a:solidFill>
+            <a:prstDash val="solid"/>
+          </a:ln>
+          <a:effectLst>
+            <a:outerShdw sx="100000" sy="100000" kx="0" ky="0" algn="bl" rotWithShape="0" blurRad="101600" dist="38100" dir="5400000">
+              <a:srgbClr val="000000">
+                <a:alpha val="12000"/>
+              </a:srgbClr>
+            </a:outerShdw>
+          </a:effectLst>
+        </p:spPr>
+      </p:sp>
+      <p:pic>
+        <p:nvPicPr>
+          <p:cNvPr id="7" name="Image 0" descr="D:/GitHub/mern-web-book/docs/assets/img/lecture-07/sticky-demo.png">    </p:cNvPr>
+          <p:cNvPicPr>
+            <a:picLocks noChangeAspect="1"/>
+          </p:cNvPicPr>
+          <p:nvPr/>
+        </p:nvPicPr>
+        <p:blipFill>
+          <a:blip r:embed="rId1"/>
+          <a:stretch>
+            <a:fillRect/>
+          </a:stretch>
+        </p:blipFill>
+        <p:spPr>
+          <a:xfrm>
+            <a:off x="6278728" y="2863973"/>
+            <a:ext cx="5272888" cy="2547375"/>
+          </a:xfrm>
+          <a:prstGeom prst="rect">
+            <a:avLst/>
+          </a:prstGeom>
+        </p:spPr>
+      </p:pic>
+      <p:sp>
+        <p:nvSpPr>
+          <p:cNvPr id="8" name="Text 5"/>
+          <p:cNvSpPr txBox="1"/>
+          <p:nvPr/>
+        </p:nvSpPr>
+        <p:spPr>
+          <a:xfrm>
+            <a:off x="640080" y="6446520"/>
+            <a:ext cx="8686800" cy="292608"/>
+          </a:xfrm>
+          <a:prstGeom prst="rect">
+            <a:avLst/>
+          </a:prstGeom>
+          <a:noFill/>
+          <a:ln/>
+        </p:spPr>
+        <p:txBody>
+          <a:bodyPr wrap="square" lIns="0" tIns="0" rIns="0" bIns="0" rtlCol="0" anchor="ctr"/>
+          <a:lstStyle/>
+          <a:p>
+            <a:pPr algn="l" indent="0" marL="0">
+              <a:buNone/>
+            </a:pPr>
+            <a:r>
+              <a:rPr lang="en-US" sz="900" dirty="0">
+                <a:solidFill>
+                  <a:srgbClr val="5D5D72"/>
                 </a:solidFill>
                 <a:latin typeface="Calibri" pitchFamily="34" charset="0"/>
                 <a:ea typeface="Calibri" pitchFamily="34" charset="-122"/>
                 <a:cs typeface="Calibri" pitchFamily="34" charset="-120"/>
               </a:rPr>
-              <a:t>Behaves like relative until the page scrolls to the threshold, then sticks like fixed — but only within its own parent's boundaries.</a:t>
-            </a:r>
-            <a:endParaRPr lang="en-US" sz="1300" dirty="0"/>
-          </a:p>
-        </p:txBody>
-      </p:sp>
-      <p:sp>
-        <p:nvSpPr>
-          <p:cNvPr id="7" name="Text 5"/>
-          <p:cNvSpPr txBox="1"/>
-          <p:nvPr/>
-        </p:nvSpPr>
-        <p:spPr>
-          <a:xfrm>
-            <a:off x="640080" y="6446520"/>
-            <a:ext cx="8686800" cy="292608"/>
-          </a:xfrm>
-          <a:prstGeom prst="rect">
-            <a:avLst/>
-          </a:prstGeom>
-          <a:noFill/>
-          <a:ln/>
-        </p:spPr>
-        <p:txBody>
-          <a:bodyPr wrap="square" lIns="0" tIns="0" rIns="0" bIns="0" rtlCol="0" anchor="ctr"/>
-          <a:lstStyle/>
-          <a:p>
-            <a:pPr algn="l" indent="0" marL="0">
-              <a:buNone/>
-            </a:pPr>
-            <a:r>
-              <a:rPr lang="en-US" sz="900" dirty="0">
-                <a:solidFill>
-                  <a:srgbClr val="5D5D72"/>
-                </a:solidFill>
-                <a:latin typeface="Calibri" pitchFamily="34" charset="0"/>
-                <a:ea typeface="Calibri" pitchFamily="34" charset="-122"/>
-                <a:cs typeface="Calibri" pitchFamily="34" charset="-120"/>
-              </a:rPr>
               <a:t>Usman Akram  •  COMSATS University Islamabad</a:t>
             </a:r>
             <a:endParaRPr lang="en-US" sz="900" dirty="0"/>
@@ -14523,7 +14678,7 @@
       </p:sp>
       <p:sp>
         <p:nvSpPr>
-          <p:cNvPr id="8" name="Text 6"/>
+          <p:cNvPr id="9" name="Text 6"/>
           <p:cNvSpPr txBox="1"/>
           <p:nvPr/>
         </p:nvSpPr>

--- a/slides/CSC336-Lecture-07-CSS-Positioning-and-Stacking.pptx
+++ b/slides/CSC336-Lecture-07-CSS-Positioning-and-Stacking.pptx
@@ -3548,79 +3548,44 @@
       </p:sp>
       <p:sp>
         <p:nvSpPr>
-          <p:cNvPr id="6" name="Text 4"/>
+          <p:cNvPr id="8" name="cuinotes-footer-mark"/>
           <p:cNvSpPr txBox="1"/>
           <p:nvPr/>
         </p:nvSpPr>
         <p:spPr>
           <a:xfrm>
-            <a:off x="640080" y="6446520"/>
-            <a:ext cx="8686800" cy="292608"/>
+            <a:off x="9951720" y="6455664"/>
+            <a:ext cx="2011680" cy="292608"/>
           </a:xfrm>
           <a:prstGeom prst="rect">
             <a:avLst/>
           </a:prstGeom>
           <a:noFill/>
-          <a:ln/>
-        </p:spPr>
-        <p:txBody>
-          <a:bodyPr wrap="square" lIns="0" tIns="0" rIns="0" bIns="0" rtlCol="0" anchor="ctr"/>
-          <a:lstStyle/>
-          <a:p>
-            <a:pPr algn="l" indent="0" marL="0">
-              <a:buNone/>
-            </a:pPr>
-            <a:r>
-              <a:rPr lang="en-US" sz="900" dirty="0">
-                <a:solidFill>
-                  <a:srgbClr val="9AA3D8"/>
-                </a:solidFill>
-                <a:latin typeface="Calibri" pitchFamily="34" charset="0"/>
-                <a:ea typeface="Calibri" pitchFamily="34" charset="-122"/>
-                <a:cs typeface="Calibri" pitchFamily="34" charset="-120"/>
-              </a:rPr>
-              <a:t>Usman Akram  •  COMSATS University Islamabad</a:t>
-            </a:r>
-            <a:endParaRPr lang="en-US" sz="900" dirty="0"/>
-          </a:p>
-        </p:txBody>
-      </p:sp>
-      <p:sp>
-        <p:nvSpPr>
-          <p:cNvPr id="7" name="Text 5"/>
-          <p:cNvSpPr txBox="1"/>
-          <p:nvPr/>
-        </p:nvSpPr>
-        <p:spPr>
-          <a:xfrm>
-            <a:off x="11155680" y="6446520"/>
-            <a:ext cx="457200" cy="292608"/>
-          </a:xfrm>
-          <a:prstGeom prst="rect">
-            <a:avLst/>
-          </a:prstGeom>
-          <a:noFill/>
-          <a:ln/>
-        </p:spPr>
-        <p:txBody>
-          <a:bodyPr wrap="square" lIns="0" tIns="0" rIns="0" bIns="0" rtlCol="0" anchor="ctr"/>
-          <a:lstStyle/>
-          <a:p>
-            <a:pPr algn="r" indent="0" marL="0">
-              <a:buNone/>
-            </a:pPr>
-            <a:r>
-              <a:rPr lang="en-US" sz="900" dirty="0">
-                <a:solidFill>
-                  <a:srgbClr val="9AA3D8"/>
-                </a:solidFill>
-                <a:latin typeface="Calibri" pitchFamily="34" charset="0"/>
-                <a:ea typeface="Calibri" pitchFamily="34" charset="-122"/>
-                <a:cs typeface="Calibri" pitchFamily="34" charset="-120"/>
-              </a:rPr>
-              <a:t>1</a:t>
-            </a:r>
-            <a:endParaRPr lang="en-US" sz="900" dirty="0"/>
+        </p:spPr>
+        <p:txBody>
+          <a:bodyPr wrap="none" lIns="0" rIns="0" tIns="0" bIns="0">
+            <a:spAutoFit/>
+          </a:bodyPr>
+          <a:lstStyle/>
+          <a:p>
+            <a:pPr algn="r"/>
+            <a:r>
+              <a:rPr sz="1000">
+                <a:solidFill>
+                  <a:srgbClr val="8A939B"/>
+                </a:solidFill>
+                <a:hlinkClick r:id="rId3"/>
+              </a:rPr>
+              <a:t>cuinotes.com</a:t>
+            </a:r>
+            <a:r>
+              <a:rPr sz="1000">
+                <a:solidFill>
+                  <a:srgbClr val="8A939B"/>
+                </a:solidFill>
+              </a:rPr>
+              <a:t>  ·  1</a:t>
+            </a:r>
           </a:p>
         </p:txBody>
       </p:sp>
@@ -3755,6 +3720,10 @@
           </a:solidFill>
           <a:ln/>
         </p:spPr>
+        <p:txBody>
+          <a:bodyPr/>
+          <a:p/>
+        </p:txBody>
       </p:sp>
       <p:sp>
         <p:nvSpPr>
@@ -3928,79 +3897,44 @@
       </p:sp>
       <p:sp>
         <p:nvSpPr>
-          <p:cNvPr id="7" name="Text 5"/>
+          <p:cNvPr id="9" name="cuinotes-footer-mark"/>
           <p:cNvSpPr txBox="1"/>
           <p:nvPr/>
         </p:nvSpPr>
         <p:spPr>
           <a:xfrm>
-            <a:off x="640080" y="6446520"/>
-            <a:ext cx="8686800" cy="292608"/>
+            <a:off x="9951720" y="6455664"/>
+            <a:ext cx="2011680" cy="292608"/>
           </a:xfrm>
           <a:prstGeom prst="rect">
             <a:avLst/>
           </a:prstGeom>
           <a:noFill/>
-          <a:ln/>
-        </p:spPr>
-        <p:txBody>
-          <a:bodyPr wrap="square" lIns="0" tIns="0" rIns="0" bIns="0" rtlCol="0" anchor="ctr"/>
-          <a:lstStyle/>
-          <a:p>
-            <a:pPr algn="l" indent="0" marL="0">
-              <a:buNone/>
-            </a:pPr>
-            <a:r>
-              <a:rPr lang="en-US" sz="900" dirty="0">
-                <a:solidFill>
-                  <a:srgbClr val="5D5D72"/>
-                </a:solidFill>
-                <a:latin typeface="Calibri" pitchFamily="34" charset="0"/>
-                <a:ea typeface="Calibri" pitchFamily="34" charset="-122"/>
-                <a:cs typeface="Calibri" pitchFamily="34" charset="-120"/>
-              </a:rPr>
-              <a:t>Usman Akram  •  COMSATS University Islamabad</a:t>
-            </a:r>
-            <a:endParaRPr lang="en-US" sz="900" dirty="0"/>
-          </a:p>
-        </p:txBody>
-      </p:sp>
-      <p:sp>
-        <p:nvSpPr>
-          <p:cNvPr id="8" name="Text 6"/>
-          <p:cNvSpPr txBox="1"/>
-          <p:nvPr/>
-        </p:nvSpPr>
-        <p:spPr>
-          <a:xfrm>
-            <a:off x="11155680" y="6446520"/>
-            <a:ext cx="457200" cy="292608"/>
-          </a:xfrm>
-          <a:prstGeom prst="rect">
-            <a:avLst/>
-          </a:prstGeom>
-          <a:noFill/>
-          <a:ln/>
-        </p:spPr>
-        <p:txBody>
-          <a:bodyPr wrap="square" lIns="0" tIns="0" rIns="0" bIns="0" rtlCol="0" anchor="ctr"/>
-          <a:lstStyle/>
-          <a:p>
-            <a:pPr algn="r" indent="0" marL="0">
-              <a:buNone/>
-            </a:pPr>
-            <a:r>
-              <a:rPr lang="en-US" sz="900" dirty="0">
-                <a:solidFill>
-                  <a:srgbClr val="5D5D72"/>
-                </a:solidFill>
-                <a:latin typeface="Calibri" pitchFamily="34" charset="0"/>
-                <a:ea typeface="Calibri" pitchFamily="34" charset="-122"/>
-                <a:cs typeface="Calibri" pitchFamily="34" charset="-120"/>
-              </a:rPr>
-              <a:t>10</a:t>
-            </a:r>
-            <a:endParaRPr lang="en-US" sz="900" dirty="0"/>
+        </p:spPr>
+        <p:txBody>
+          <a:bodyPr wrap="none" lIns="0" rIns="0" tIns="0" bIns="0">
+            <a:spAutoFit/>
+          </a:bodyPr>
+          <a:lstStyle/>
+          <a:p>
+            <a:pPr algn="r"/>
+            <a:r>
+              <a:rPr sz="1000">
+                <a:solidFill>
+                  <a:srgbClr val="8A939B"/>
+                </a:solidFill>
+                <a:hlinkClick r:id="rId3"/>
+              </a:rPr>
+              <a:t>cuinotes.com</a:t>
+            </a:r>
+            <a:r>
+              <a:rPr sz="1000">
+                <a:solidFill>
+                  <a:srgbClr val="8A939B"/>
+                </a:solidFill>
+              </a:rPr>
+              <a:t>  ·  10</a:t>
+            </a:r>
           </a:p>
         </p:txBody>
       </p:sp>
@@ -4147,6 +4081,10 @@
             </a:outerShdw>
           </a:effectLst>
         </p:spPr>
+        <p:txBody>
+          <a:bodyPr/>
+          <a:p/>
+        </p:txBody>
       </p:sp>
       <p:pic>
         <p:nvPicPr>
@@ -4174,79 +4112,44 @@
       </p:pic>
       <p:sp>
         <p:nvSpPr>
-          <p:cNvPr id="6" name="Text 3"/>
+          <p:cNvPr id="8" name="cuinotes-footer-mark"/>
           <p:cNvSpPr txBox="1"/>
           <p:nvPr/>
         </p:nvSpPr>
         <p:spPr>
           <a:xfrm>
-            <a:off x="640080" y="6446520"/>
-            <a:ext cx="8686800" cy="292608"/>
+            <a:off x="9951720" y="6455664"/>
+            <a:ext cx="2011680" cy="292608"/>
           </a:xfrm>
           <a:prstGeom prst="rect">
             <a:avLst/>
           </a:prstGeom>
           <a:noFill/>
-          <a:ln/>
-        </p:spPr>
-        <p:txBody>
-          <a:bodyPr wrap="square" lIns="0" tIns="0" rIns="0" bIns="0" rtlCol="0" anchor="ctr"/>
-          <a:lstStyle/>
-          <a:p>
-            <a:pPr algn="l" indent="0" marL="0">
-              <a:buNone/>
-            </a:pPr>
-            <a:r>
-              <a:rPr lang="en-US" sz="900" dirty="0">
-                <a:solidFill>
-                  <a:srgbClr val="5D5D72"/>
-                </a:solidFill>
-                <a:latin typeface="Calibri" pitchFamily="34" charset="0"/>
-                <a:ea typeface="Calibri" pitchFamily="34" charset="-122"/>
-                <a:cs typeface="Calibri" pitchFamily="34" charset="-120"/>
-              </a:rPr>
-              <a:t>Usman Akram  •  COMSATS University Islamabad</a:t>
-            </a:r>
-            <a:endParaRPr lang="en-US" sz="900" dirty="0"/>
-          </a:p>
-        </p:txBody>
-      </p:sp>
-      <p:sp>
-        <p:nvSpPr>
-          <p:cNvPr id="7" name="Text 4"/>
-          <p:cNvSpPr txBox="1"/>
-          <p:nvPr/>
-        </p:nvSpPr>
-        <p:spPr>
-          <a:xfrm>
-            <a:off x="11155680" y="6446520"/>
-            <a:ext cx="457200" cy="292608"/>
-          </a:xfrm>
-          <a:prstGeom prst="rect">
-            <a:avLst/>
-          </a:prstGeom>
-          <a:noFill/>
-          <a:ln/>
-        </p:spPr>
-        <p:txBody>
-          <a:bodyPr wrap="square" lIns="0" tIns="0" rIns="0" bIns="0" rtlCol="0" anchor="ctr"/>
-          <a:lstStyle/>
-          <a:p>
-            <a:pPr algn="r" indent="0" marL="0">
-              <a:buNone/>
-            </a:pPr>
-            <a:r>
-              <a:rPr lang="en-US" sz="900" dirty="0">
-                <a:solidFill>
-                  <a:srgbClr val="5D5D72"/>
-                </a:solidFill>
-                <a:latin typeface="Calibri" pitchFamily="34" charset="0"/>
-                <a:ea typeface="Calibri" pitchFamily="34" charset="-122"/>
-                <a:cs typeface="Calibri" pitchFamily="34" charset="-120"/>
-              </a:rPr>
-              <a:t>11</a:t>
-            </a:r>
-            <a:endParaRPr lang="en-US" sz="900" dirty="0"/>
+        </p:spPr>
+        <p:txBody>
+          <a:bodyPr wrap="none" lIns="0" rIns="0" tIns="0" bIns="0">
+            <a:spAutoFit/>
+          </a:bodyPr>
+          <a:lstStyle/>
+          <a:p>
+            <a:pPr algn="r"/>
+            <a:r>
+              <a:rPr sz="1000">
+                <a:solidFill>
+                  <a:srgbClr val="8A939B"/>
+                </a:solidFill>
+                <a:hlinkClick r:id="rId4"/>
+              </a:rPr>
+              <a:t>cuinotes.com</a:t>
+            </a:r>
+            <a:r>
+              <a:rPr sz="1000">
+                <a:solidFill>
+                  <a:srgbClr val="8A939B"/>
+                </a:solidFill>
+              </a:rPr>
+              <a:t>  ·  11</a:t>
+            </a:r>
           </a:p>
         </p:txBody>
       </p:sp>
@@ -4381,6 +4284,10 @@
           </a:solidFill>
           <a:ln/>
         </p:spPr>
+        <p:txBody>
+          <a:bodyPr/>
+          <a:p/>
+        </p:txBody>
       </p:sp>
       <p:sp>
         <p:nvSpPr>
@@ -4505,79 +4412,44 @@
       </p:sp>
       <p:sp>
         <p:nvSpPr>
-          <p:cNvPr id="7" name="Text 5"/>
+          <p:cNvPr id="9" name="cuinotes-footer-mark"/>
           <p:cNvSpPr txBox="1"/>
           <p:nvPr/>
         </p:nvSpPr>
         <p:spPr>
           <a:xfrm>
-            <a:off x="640080" y="6446520"/>
-            <a:ext cx="8686800" cy="292608"/>
+            <a:off x="9951720" y="6455664"/>
+            <a:ext cx="2011680" cy="292608"/>
           </a:xfrm>
           <a:prstGeom prst="rect">
             <a:avLst/>
           </a:prstGeom>
           <a:noFill/>
-          <a:ln/>
-        </p:spPr>
-        <p:txBody>
-          <a:bodyPr wrap="square" lIns="0" tIns="0" rIns="0" bIns="0" rtlCol="0" anchor="ctr"/>
-          <a:lstStyle/>
-          <a:p>
-            <a:pPr algn="l" indent="0" marL="0">
-              <a:buNone/>
-            </a:pPr>
-            <a:r>
-              <a:rPr lang="en-US" sz="900" dirty="0">
-                <a:solidFill>
-                  <a:srgbClr val="5D5D72"/>
-                </a:solidFill>
-                <a:latin typeface="Calibri" pitchFamily="34" charset="0"/>
-                <a:ea typeface="Calibri" pitchFamily="34" charset="-122"/>
-                <a:cs typeface="Calibri" pitchFamily="34" charset="-120"/>
-              </a:rPr>
-              <a:t>Usman Akram  •  COMSATS University Islamabad</a:t>
-            </a:r>
-            <a:endParaRPr lang="en-US" sz="900" dirty="0"/>
-          </a:p>
-        </p:txBody>
-      </p:sp>
-      <p:sp>
-        <p:nvSpPr>
-          <p:cNvPr id="8" name="Text 6"/>
-          <p:cNvSpPr txBox="1"/>
-          <p:nvPr/>
-        </p:nvSpPr>
-        <p:spPr>
-          <a:xfrm>
-            <a:off x="11155680" y="6446520"/>
-            <a:ext cx="457200" cy="292608"/>
-          </a:xfrm>
-          <a:prstGeom prst="rect">
-            <a:avLst/>
-          </a:prstGeom>
-          <a:noFill/>
-          <a:ln/>
-        </p:spPr>
-        <p:txBody>
-          <a:bodyPr wrap="square" lIns="0" tIns="0" rIns="0" bIns="0" rtlCol="0" anchor="ctr"/>
-          <a:lstStyle/>
-          <a:p>
-            <a:pPr algn="r" indent="0" marL="0">
-              <a:buNone/>
-            </a:pPr>
-            <a:r>
-              <a:rPr lang="en-US" sz="900" dirty="0">
-                <a:solidFill>
-                  <a:srgbClr val="5D5D72"/>
-                </a:solidFill>
-                <a:latin typeface="Calibri" pitchFamily="34" charset="0"/>
-                <a:ea typeface="Calibri" pitchFamily="34" charset="-122"/>
-                <a:cs typeface="Calibri" pitchFamily="34" charset="-120"/>
-              </a:rPr>
-              <a:t>12</a:t>
-            </a:r>
-            <a:endParaRPr lang="en-US" sz="900" dirty="0"/>
+        </p:spPr>
+        <p:txBody>
+          <a:bodyPr wrap="none" lIns="0" rIns="0" tIns="0" bIns="0">
+            <a:spAutoFit/>
+          </a:bodyPr>
+          <a:lstStyle/>
+          <a:p>
+            <a:pPr algn="r"/>
+            <a:r>
+              <a:rPr sz="1000">
+                <a:solidFill>
+                  <a:srgbClr val="8A939B"/>
+                </a:solidFill>
+                <a:hlinkClick r:id="rId3"/>
+              </a:rPr>
+              <a:t>cuinotes.com</a:t>
+            </a:r>
+            <a:r>
+              <a:rPr sz="1000">
+                <a:solidFill>
+                  <a:srgbClr val="8A939B"/>
+                </a:solidFill>
+              </a:rPr>
+              <a:t>  ·  12</a:t>
+            </a:r>
           </a:p>
         </p:txBody>
       </p:sp>
@@ -4712,6 +4584,10 @@
           </a:solidFill>
           <a:ln/>
         </p:spPr>
+        <p:txBody>
+          <a:bodyPr/>
+          <a:p/>
+        </p:txBody>
       </p:sp>
       <p:sp>
         <p:nvSpPr>
@@ -4816,79 +4692,44 @@
       </p:sp>
       <p:sp>
         <p:nvSpPr>
-          <p:cNvPr id="7" name="Text 5"/>
+          <p:cNvPr id="9" name="cuinotes-footer-mark"/>
           <p:cNvSpPr txBox="1"/>
           <p:nvPr/>
         </p:nvSpPr>
         <p:spPr>
           <a:xfrm>
-            <a:off x="640080" y="6446520"/>
-            <a:ext cx="8686800" cy="292608"/>
+            <a:off x="9951720" y="6455664"/>
+            <a:ext cx="2011680" cy="292608"/>
           </a:xfrm>
           <a:prstGeom prst="rect">
             <a:avLst/>
           </a:prstGeom>
           <a:noFill/>
-          <a:ln/>
-        </p:spPr>
-        <p:txBody>
-          <a:bodyPr wrap="square" lIns="0" tIns="0" rIns="0" bIns="0" rtlCol="0" anchor="ctr"/>
-          <a:lstStyle/>
-          <a:p>
-            <a:pPr algn="l" indent="0" marL="0">
-              <a:buNone/>
-            </a:pPr>
-            <a:r>
-              <a:rPr lang="en-US" sz="900" dirty="0">
-                <a:solidFill>
-                  <a:srgbClr val="5D5D72"/>
-                </a:solidFill>
-                <a:latin typeface="Calibri" pitchFamily="34" charset="0"/>
-                <a:ea typeface="Calibri" pitchFamily="34" charset="-122"/>
-                <a:cs typeface="Calibri" pitchFamily="34" charset="-120"/>
-              </a:rPr>
-              <a:t>Usman Akram  •  COMSATS University Islamabad</a:t>
-            </a:r>
-            <a:endParaRPr lang="en-US" sz="900" dirty="0"/>
-          </a:p>
-        </p:txBody>
-      </p:sp>
-      <p:sp>
-        <p:nvSpPr>
-          <p:cNvPr id="8" name="Text 6"/>
-          <p:cNvSpPr txBox="1"/>
-          <p:nvPr/>
-        </p:nvSpPr>
-        <p:spPr>
-          <a:xfrm>
-            <a:off x="11155680" y="6446520"/>
-            <a:ext cx="457200" cy="292608"/>
-          </a:xfrm>
-          <a:prstGeom prst="rect">
-            <a:avLst/>
-          </a:prstGeom>
-          <a:noFill/>
-          <a:ln/>
-        </p:spPr>
-        <p:txBody>
-          <a:bodyPr wrap="square" lIns="0" tIns="0" rIns="0" bIns="0" rtlCol="0" anchor="ctr"/>
-          <a:lstStyle/>
-          <a:p>
-            <a:pPr algn="r" indent="0" marL="0">
-              <a:buNone/>
-            </a:pPr>
-            <a:r>
-              <a:rPr lang="en-US" sz="900" dirty="0">
-                <a:solidFill>
-                  <a:srgbClr val="5D5D72"/>
-                </a:solidFill>
-                <a:latin typeface="Calibri" pitchFamily="34" charset="0"/>
-                <a:ea typeface="Calibri" pitchFamily="34" charset="-122"/>
-                <a:cs typeface="Calibri" pitchFamily="34" charset="-120"/>
-              </a:rPr>
-              <a:t>13</a:t>
-            </a:r>
-            <a:endParaRPr lang="en-US" sz="900" dirty="0"/>
+        </p:spPr>
+        <p:txBody>
+          <a:bodyPr wrap="none" lIns="0" rIns="0" tIns="0" bIns="0">
+            <a:spAutoFit/>
+          </a:bodyPr>
+          <a:lstStyle/>
+          <a:p>
+            <a:pPr algn="r"/>
+            <a:r>
+              <a:rPr sz="1000">
+                <a:solidFill>
+                  <a:srgbClr val="8A939B"/>
+                </a:solidFill>
+                <a:hlinkClick r:id="rId3"/>
+              </a:rPr>
+              <a:t>cuinotes.com</a:t>
+            </a:r>
+            <a:r>
+              <a:rPr sz="1000">
+                <a:solidFill>
+                  <a:srgbClr val="8A939B"/>
+                </a:solidFill>
+              </a:rPr>
+              <a:t>  ·  13</a:t>
+            </a:r>
           </a:p>
         </p:txBody>
       </p:sp>
@@ -5035,6 +4876,10 @@
             </a:outerShdw>
           </a:effectLst>
         </p:spPr>
+        <p:txBody>
+          <a:bodyPr/>
+          <a:p/>
+        </p:txBody>
       </p:sp>
       <p:pic>
         <p:nvPicPr>
@@ -5062,79 +4907,44 @@
       </p:pic>
       <p:sp>
         <p:nvSpPr>
-          <p:cNvPr id="6" name="Text 3"/>
+          <p:cNvPr id="8" name="cuinotes-footer-mark"/>
           <p:cNvSpPr txBox="1"/>
           <p:nvPr/>
         </p:nvSpPr>
         <p:spPr>
           <a:xfrm>
-            <a:off x="640080" y="6446520"/>
-            <a:ext cx="8686800" cy="292608"/>
+            <a:off x="9951720" y="6455664"/>
+            <a:ext cx="2011680" cy="292608"/>
           </a:xfrm>
           <a:prstGeom prst="rect">
             <a:avLst/>
           </a:prstGeom>
           <a:noFill/>
-          <a:ln/>
-        </p:spPr>
-        <p:txBody>
-          <a:bodyPr wrap="square" lIns="0" tIns="0" rIns="0" bIns="0" rtlCol="0" anchor="ctr"/>
-          <a:lstStyle/>
-          <a:p>
-            <a:pPr algn="l" indent="0" marL="0">
-              <a:buNone/>
-            </a:pPr>
-            <a:r>
-              <a:rPr lang="en-US" sz="900" dirty="0">
-                <a:solidFill>
-                  <a:srgbClr val="5D5D72"/>
-                </a:solidFill>
-                <a:latin typeface="Calibri" pitchFamily="34" charset="0"/>
-                <a:ea typeface="Calibri" pitchFamily="34" charset="-122"/>
-                <a:cs typeface="Calibri" pitchFamily="34" charset="-120"/>
-              </a:rPr>
-              <a:t>Usman Akram  •  COMSATS University Islamabad</a:t>
-            </a:r>
-            <a:endParaRPr lang="en-US" sz="900" dirty="0"/>
-          </a:p>
-        </p:txBody>
-      </p:sp>
-      <p:sp>
-        <p:nvSpPr>
-          <p:cNvPr id="7" name="Text 4"/>
-          <p:cNvSpPr txBox="1"/>
-          <p:nvPr/>
-        </p:nvSpPr>
-        <p:spPr>
-          <a:xfrm>
-            <a:off x="11155680" y="6446520"/>
-            <a:ext cx="457200" cy="292608"/>
-          </a:xfrm>
-          <a:prstGeom prst="rect">
-            <a:avLst/>
-          </a:prstGeom>
-          <a:noFill/>
-          <a:ln/>
-        </p:spPr>
-        <p:txBody>
-          <a:bodyPr wrap="square" lIns="0" tIns="0" rIns="0" bIns="0" rtlCol="0" anchor="ctr"/>
-          <a:lstStyle/>
-          <a:p>
-            <a:pPr algn="r" indent="0" marL="0">
-              <a:buNone/>
-            </a:pPr>
-            <a:r>
-              <a:rPr lang="en-US" sz="900" dirty="0">
-                <a:solidFill>
-                  <a:srgbClr val="5D5D72"/>
-                </a:solidFill>
-                <a:latin typeface="Calibri" pitchFamily="34" charset="0"/>
-                <a:ea typeface="Calibri" pitchFamily="34" charset="-122"/>
-                <a:cs typeface="Calibri" pitchFamily="34" charset="-120"/>
-              </a:rPr>
-              <a:t>14</a:t>
-            </a:r>
-            <a:endParaRPr lang="en-US" sz="900" dirty="0"/>
+        </p:spPr>
+        <p:txBody>
+          <a:bodyPr wrap="none" lIns="0" rIns="0" tIns="0" bIns="0">
+            <a:spAutoFit/>
+          </a:bodyPr>
+          <a:lstStyle/>
+          <a:p>
+            <a:pPr algn="r"/>
+            <a:r>
+              <a:rPr sz="1000">
+                <a:solidFill>
+                  <a:srgbClr val="8A939B"/>
+                </a:solidFill>
+                <a:hlinkClick r:id="rId4"/>
+              </a:rPr>
+              <a:t>cuinotes.com</a:t>
+            </a:r>
+            <a:r>
+              <a:rPr sz="1000">
+                <a:solidFill>
+                  <a:srgbClr val="8A939B"/>
+                </a:solidFill>
+              </a:rPr>
+              <a:t>  ·  14</a:t>
+            </a:r>
           </a:p>
         </p:txBody>
       </p:sp>
@@ -5267,6 +5077,10 @@
           </a:solidFill>
           <a:ln/>
         </p:spPr>
+        <p:txBody>
+          <a:bodyPr/>
+          <a:p/>
+        </p:txBody>
       </p:sp>
       <p:sp>
         <p:nvSpPr>
@@ -5326,6 +5140,10 @@
           </a:solidFill>
           <a:ln/>
         </p:spPr>
+        <p:txBody>
+          <a:bodyPr/>
+          <a:p/>
+        </p:txBody>
       </p:sp>
       <p:sp>
         <p:nvSpPr>
@@ -5385,6 +5203,10 @@
           </a:solidFill>
           <a:ln/>
         </p:spPr>
+        <p:txBody>
+          <a:bodyPr/>
+          <a:p/>
+        </p:txBody>
       </p:sp>
       <p:sp>
         <p:nvSpPr>
@@ -5427,79 +5249,44 @@
       </p:sp>
       <p:sp>
         <p:nvSpPr>
-          <p:cNvPr id="10" name="Text 8"/>
+          <p:cNvPr id="12" name="cuinotes-footer-mark"/>
           <p:cNvSpPr txBox="1"/>
           <p:nvPr/>
         </p:nvSpPr>
         <p:spPr>
           <a:xfrm>
-            <a:off x="640080" y="6446520"/>
-            <a:ext cx="8686800" cy="292608"/>
+            <a:off x="9951720" y="6455664"/>
+            <a:ext cx="2011680" cy="292608"/>
           </a:xfrm>
           <a:prstGeom prst="rect">
             <a:avLst/>
           </a:prstGeom>
           <a:noFill/>
-          <a:ln/>
-        </p:spPr>
-        <p:txBody>
-          <a:bodyPr wrap="square" lIns="0" tIns="0" rIns="0" bIns="0" rtlCol="0" anchor="ctr"/>
-          <a:lstStyle/>
-          <a:p>
-            <a:pPr algn="l" indent="0" marL="0">
-              <a:buNone/>
-            </a:pPr>
-            <a:r>
-              <a:rPr lang="en-US" sz="900" dirty="0">
-                <a:solidFill>
-                  <a:srgbClr val="5D5D72"/>
-                </a:solidFill>
-                <a:latin typeface="Calibri" pitchFamily="34" charset="0"/>
-                <a:ea typeface="Calibri" pitchFamily="34" charset="-122"/>
-                <a:cs typeface="Calibri" pitchFamily="34" charset="-120"/>
-              </a:rPr>
-              <a:t>Usman Akram  •  COMSATS University Islamabad</a:t>
-            </a:r>
-            <a:endParaRPr lang="en-US" sz="900" dirty="0"/>
-          </a:p>
-        </p:txBody>
-      </p:sp>
-      <p:sp>
-        <p:nvSpPr>
-          <p:cNvPr id="11" name="Text 9"/>
-          <p:cNvSpPr txBox="1"/>
-          <p:nvPr/>
-        </p:nvSpPr>
-        <p:spPr>
-          <a:xfrm>
-            <a:off x="11155680" y="6446520"/>
-            <a:ext cx="457200" cy="292608"/>
-          </a:xfrm>
-          <a:prstGeom prst="rect">
-            <a:avLst/>
-          </a:prstGeom>
-          <a:noFill/>
-          <a:ln/>
-        </p:spPr>
-        <p:txBody>
-          <a:bodyPr wrap="square" lIns="0" tIns="0" rIns="0" bIns="0" rtlCol="0" anchor="ctr"/>
-          <a:lstStyle/>
-          <a:p>
-            <a:pPr algn="r" indent="0" marL="0">
-              <a:buNone/>
-            </a:pPr>
-            <a:r>
-              <a:rPr lang="en-US" sz="900" dirty="0">
-                <a:solidFill>
-                  <a:srgbClr val="5D5D72"/>
-                </a:solidFill>
-                <a:latin typeface="Calibri" pitchFamily="34" charset="0"/>
-                <a:ea typeface="Calibri" pitchFamily="34" charset="-122"/>
-                <a:cs typeface="Calibri" pitchFamily="34" charset="-120"/>
-              </a:rPr>
-              <a:t>15</a:t>
-            </a:r>
-            <a:endParaRPr lang="en-US" sz="900" dirty="0"/>
+        </p:spPr>
+        <p:txBody>
+          <a:bodyPr wrap="none" lIns="0" rIns="0" tIns="0" bIns="0">
+            <a:spAutoFit/>
+          </a:bodyPr>
+          <a:lstStyle/>
+          <a:p>
+            <a:pPr algn="r"/>
+            <a:r>
+              <a:rPr sz="1000">
+                <a:solidFill>
+                  <a:srgbClr val="8A939B"/>
+                </a:solidFill>
+                <a:hlinkClick r:id="rId3"/>
+              </a:rPr>
+              <a:t>cuinotes.com</a:t>
+            </a:r>
+            <a:r>
+              <a:rPr sz="1000">
+                <a:solidFill>
+                  <a:srgbClr val="8A939B"/>
+                </a:solidFill>
+              </a:rPr>
+              <a:t>  ·  15</a:t>
+            </a:r>
           </a:p>
         </p:txBody>
       </p:sp>
@@ -5634,6 +5421,10 @@
           </a:solidFill>
           <a:ln/>
         </p:spPr>
+        <p:txBody>
+          <a:bodyPr/>
+          <a:p/>
+        </p:txBody>
       </p:sp>
       <p:sp>
         <p:nvSpPr>
@@ -5718,79 +5509,44 @@
       </p:sp>
       <p:sp>
         <p:nvSpPr>
-          <p:cNvPr id="7" name="Text 5"/>
+          <p:cNvPr id="9" name="cuinotes-footer-mark"/>
           <p:cNvSpPr txBox="1"/>
           <p:nvPr/>
         </p:nvSpPr>
         <p:spPr>
           <a:xfrm>
-            <a:off x="640080" y="6446520"/>
-            <a:ext cx="8686800" cy="292608"/>
+            <a:off x="9951720" y="6455664"/>
+            <a:ext cx="2011680" cy="292608"/>
           </a:xfrm>
           <a:prstGeom prst="rect">
             <a:avLst/>
           </a:prstGeom>
           <a:noFill/>
-          <a:ln/>
-        </p:spPr>
-        <p:txBody>
-          <a:bodyPr wrap="square" lIns="0" tIns="0" rIns="0" bIns="0" rtlCol="0" anchor="ctr"/>
-          <a:lstStyle/>
-          <a:p>
-            <a:pPr algn="l" indent="0" marL="0">
-              <a:buNone/>
-            </a:pPr>
-            <a:r>
-              <a:rPr lang="en-US" sz="900" dirty="0">
-                <a:solidFill>
-                  <a:srgbClr val="5D5D72"/>
-                </a:solidFill>
-                <a:latin typeface="Calibri" pitchFamily="34" charset="0"/>
-                <a:ea typeface="Calibri" pitchFamily="34" charset="-122"/>
-                <a:cs typeface="Calibri" pitchFamily="34" charset="-120"/>
-              </a:rPr>
-              <a:t>Usman Akram  •  COMSATS University Islamabad</a:t>
-            </a:r>
-            <a:endParaRPr lang="en-US" sz="900" dirty="0"/>
-          </a:p>
-        </p:txBody>
-      </p:sp>
-      <p:sp>
-        <p:nvSpPr>
-          <p:cNvPr id="8" name="Text 6"/>
-          <p:cNvSpPr txBox="1"/>
-          <p:nvPr/>
-        </p:nvSpPr>
-        <p:spPr>
-          <a:xfrm>
-            <a:off x="11155680" y="6446520"/>
-            <a:ext cx="457200" cy="292608"/>
-          </a:xfrm>
-          <a:prstGeom prst="rect">
-            <a:avLst/>
-          </a:prstGeom>
-          <a:noFill/>
-          <a:ln/>
-        </p:spPr>
-        <p:txBody>
-          <a:bodyPr wrap="square" lIns="0" tIns="0" rIns="0" bIns="0" rtlCol="0" anchor="ctr"/>
-          <a:lstStyle/>
-          <a:p>
-            <a:pPr algn="r" indent="0" marL="0">
-              <a:buNone/>
-            </a:pPr>
-            <a:r>
-              <a:rPr lang="en-US" sz="900" dirty="0">
-                <a:solidFill>
-                  <a:srgbClr val="5D5D72"/>
-                </a:solidFill>
-                <a:latin typeface="Calibri" pitchFamily="34" charset="0"/>
-                <a:ea typeface="Calibri" pitchFamily="34" charset="-122"/>
-                <a:cs typeface="Calibri" pitchFamily="34" charset="-120"/>
-              </a:rPr>
-              <a:t>16</a:t>
-            </a:r>
-            <a:endParaRPr lang="en-US" sz="900" dirty="0"/>
+        </p:spPr>
+        <p:txBody>
+          <a:bodyPr wrap="none" lIns="0" rIns="0" tIns="0" bIns="0">
+            <a:spAutoFit/>
+          </a:bodyPr>
+          <a:lstStyle/>
+          <a:p>
+            <a:pPr algn="r"/>
+            <a:r>
+              <a:rPr sz="1000">
+                <a:solidFill>
+                  <a:srgbClr val="8A939B"/>
+                </a:solidFill>
+                <a:hlinkClick r:id="rId3"/>
+              </a:rPr>
+              <a:t>cuinotes.com</a:t>
+            </a:r>
+            <a:r>
+              <a:rPr sz="1000">
+                <a:solidFill>
+                  <a:srgbClr val="8A939B"/>
+                </a:solidFill>
+              </a:rPr>
+              <a:t>  ·  16</a:t>
+            </a:r>
           </a:p>
         </p:txBody>
       </p:sp>
@@ -5937,6 +5693,10 @@
             </a:outerShdw>
           </a:effectLst>
         </p:spPr>
+        <p:txBody>
+          <a:bodyPr/>
+          <a:p/>
+        </p:txBody>
       </p:sp>
       <p:pic>
         <p:nvPicPr>
@@ -5964,79 +5724,44 @@
       </p:pic>
       <p:sp>
         <p:nvSpPr>
-          <p:cNvPr id="6" name="Text 3"/>
+          <p:cNvPr id="8" name="cuinotes-footer-mark"/>
           <p:cNvSpPr txBox="1"/>
           <p:nvPr/>
         </p:nvSpPr>
         <p:spPr>
           <a:xfrm>
-            <a:off x="640080" y="6446520"/>
-            <a:ext cx="8686800" cy="292608"/>
+            <a:off x="9951720" y="6455664"/>
+            <a:ext cx="2011680" cy="292608"/>
           </a:xfrm>
           <a:prstGeom prst="rect">
             <a:avLst/>
           </a:prstGeom>
           <a:noFill/>
-          <a:ln/>
-        </p:spPr>
-        <p:txBody>
-          <a:bodyPr wrap="square" lIns="0" tIns="0" rIns="0" bIns="0" rtlCol="0" anchor="ctr"/>
-          <a:lstStyle/>
-          <a:p>
-            <a:pPr algn="l" indent="0" marL="0">
-              <a:buNone/>
-            </a:pPr>
-            <a:r>
-              <a:rPr lang="en-US" sz="900" dirty="0">
-                <a:solidFill>
-                  <a:srgbClr val="5D5D72"/>
-                </a:solidFill>
-                <a:latin typeface="Calibri" pitchFamily="34" charset="0"/>
-                <a:ea typeface="Calibri" pitchFamily="34" charset="-122"/>
-                <a:cs typeface="Calibri" pitchFamily="34" charset="-120"/>
-              </a:rPr>
-              <a:t>Usman Akram  •  COMSATS University Islamabad</a:t>
-            </a:r>
-            <a:endParaRPr lang="en-US" sz="900" dirty="0"/>
-          </a:p>
-        </p:txBody>
-      </p:sp>
-      <p:sp>
-        <p:nvSpPr>
-          <p:cNvPr id="7" name="Text 4"/>
-          <p:cNvSpPr txBox="1"/>
-          <p:nvPr/>
-        </p:nvSpPr>
-        <p:spPr>
-          <a:xfrm>
-            <a:off x="11155680" y="6446520"/>
-            <a:ext cx="457200" cy="292608"/>
-          </a:xfrm>
-          <a:prstGeom prst="rect">
-            <a:avLst/>
-          </a:prstGeom>
-          <a:noFill/>
-          <a:ln/>
-        </p:spPr>
-        <p:txBody>
-          <a:bodyPr wrap="square" lIns="0" tIns="0" rIns="0" bIns="0" rtlCol="0" anchor="ctr"/>
-          <a:lstStyle/>
-          <a:p>
-            <a:pPr algn="r" indent="0" marL="0">
-              <a:buNone/>
-            </a:pPr>
-            <a:r>
-              <a:rPr lang="en-US" sz="900" dirty="0">
-                <a:solidFill>
-                  <a:srgbClr val="5D5D72"/>
-                </a:solidFill>
-                <a:latin typeface="Calibri" pitchFamily="34" charset="0"/>
-                <a:ea typeface="Calibri" pitchFamily="34" charset="-122"/>
-                <a:cs typeface="Calibri" pitchFamily="34" charset="-120"/>
-              </a:rPr>
-              <a:t>17</a:t>
-            </a:r>
-            <a:endParaRPr lang="en-US" sz="900" dirty="0"/>
+        </p:spPr>
+        <p:txBody>
+          <a:bodyPr wrap="none" lIns="0" rIns="0" tIns="0" bIns="0">
+            <a:spAutoFit/>
+          </a:bodyPr>
+          <a:lstStyle/>
+          <a:p>
+            <a:pPr algn="r"/>
+            <a:r>
+              <a:rPr sz="1000">
+                <a:solidFill>
+                  <a:srgbClr val="8A939B"/>
+                </a:solidFill>
+                <a:hlinkClick r:id="rId4"/>
+              </a:rPr>
+              <a:t>cuinotes.com</a:t>
+            </a:r>
+            <a:r>
+              <a:rPr sz="1000">
+                <a:solidFill>
+                  <a:srgbClr val="8A939B"/>
+                </a:solidFill>
+              </a:rPr>
+              <a:t>  ·  17</a:t>
+            </a:r>
           </a:p>
         </p:txBody>
       </p:sp>
@@ -6171,6 +5896,10 @@
           </a:solidFill>
           <a:ln/>
         </p:spPr>
+        <p:txBody>
+          <a:bodyPr/>
+          <a:p/>
+        </p:txBody>
       </p:sp>
       <p:sp>
         <p:nvSpPr>
@@ -6315,79 +6044,44 @@
       </p:sp>
       <p:sp>
         <p:nvSpPr>
-          <p:cNvPr id="7" name="Text 5"/>
+          <p:cNvPr id="9" name="cuinotes-footer-mark"/>
           <p:cNvSpPr txBox="1"/>
           <p:nvPr/>
         </p:nvSpPr>
         <p:spPr>
           <a:xfrm>
-            <a:off x="640080" y="6446520"/>
-            <a:ext cx="8686800" cy="292608"/>
+            <a:off x="9951720" y="6455664"/>
+            <a:ext cx="2011680" cy="292608"/>
           </a:xfrm>
           <a:prstGeom prst="rect">
             <a:avLst/>
           </a:prstGeom>
           <a:noFill/>
-          <a:ln/>
-        </p:spPr>
-        <p:txBody>
-          <a:bodyPr wrap="square" lIns="0" tIns="0" rIns="0" bIns="0" rtlCol="0" anchor="ctr"/>
-          <a:lstStyle/>
-          <a:p>
-            <a:pPr algn="l" indent="0" marL="0">
-              <a:buNone/>
-            </a:pPr>
-            <a:r>
-              <a:rPr lang="en-US" sz="900" dirty="0">
-                <a:solidFill>
-                  <a:srgbClr val="5D5D72"/>
-                </a:solidFill>
-                <a:latin typeface="Calibri" pitchFamily="34" charset="0"/>
-                <a:ea typeface="Calibri" pitchFamily="34" charset="-122"/>
-                <a:cs typeface="Calibri" pitchFamily="34" charset="-120"/>
-              </a:rPr>
-              <a:t>Usman Akram  •  COMSATS University Islamabad</a:t>
-            </a:r>
-            <a:endParaRPr lang="en-US" sz="900" dirty="0"/>
-          </a:p>
-        </p:txBody>
-      </p:sp>
-      <p:sp>
-        <p:nvSpPr>
-          <p:cNvPr id="8" name="Text 6"/>
-          <p:cNvSpPr txBox="1"/>
-          <p:nvPr/>
-        </p:nvSpPr>
-        <p:spPr>
-          <a:xfrm>
-            <a:off x="11155680" y="6446520"/>
-            <a:ext cx="457200" cy="292608"/>
-          </a:xfrm>
-          <a:prstGeom prst="rect">
-            <a:avLst/>
-          </a:prstGeom>
-          <a:noFill/>
-          <a:ln/>
-        </p:spPr>
-        <p:txBody>
-          <a:bodyPr wrap="square" lIns="0" tIns="0" rIns="0" bIns="0" rtlCol="0" anchor="ctr"/>
-          <a:lstStyle/>
-          <a:p>
-            <a:pPr algn="r" indent="0" marL="0">
-              <a:buNone/>
-            </a:pPr>
-            <a:r>
-              <a:rPr lang="en-US" sz="900" dirty="0">
-                <a:solidFill>
-                  <a:srgbClr val="5D5D72"/>
-                </a:solidFill>
-                <a:latin typeface="Calibri" pitchFamily="34" charset="0"/>
-                <a:ea typeface="Calibri" pitchFamily="34" charset="-122"/>
-                <a:cs typeface="Calibri" pitchFamily="34" charset="-120"/>
-              </a:rPr>
-              <a:t>18</a:t>
-            </a:r>
-            <a:endParaRPr lang="en-US" sz="900" dirty="0"/>
+        </p:spPr>
+        <p:txBody>
+          <a:bodyPr wrap="none" lIns="0" rIns="0" tIns="0" bIns="0">
+            <a:spAutoFit/>
+          </a:bodyPr>
+          <a:lstStyle/>
+          <a:p>
+            <a:pPr algn="r"/>
+            <a:r>
+              <a:rPr sz="1000">
+                <a:solidFill>
+                  <a:srgbClr val="8A939B"/>
+                </a:solidFill>
+                <a:hlinkClick r:id="rId3"/>
+              </a:rPr>
+              <a:t>cuinotes.com</a:t>
+            </a:r>
+            <a:r>
+              <a:rPr sz="1000">
+                <a:solidFill>
+                  <a:srgbClr val="8A939B"/>
+                </a:solidFill>
+              </a:rPr>
+              <a:t>  ·  18</a:t>
+            </a:r>
           </a:p>
         </p:txBody>
       </p:sp>
@@ -6522,6 +6216,10 @@
           </a:solidFill>
           <a:ln/>
         </p:spPr>
+        <p:txBody>
+          <a:bodyPr/>
+          <a:p/>
+        </p:txBody>
       </p:sp>
       <p:sp>
         <p:nvSpPr>
@@ -6675,79 +6373,44 @@
       </p:sp>
       <p:sp>
         <p:nvSpPr>
-          <p:cNvPr id="7" name="Text 5"/>
+          <p:cNvPr id="9" name="cuinotes-footer-mark"/>
           <p:cNvSpPr txBox="1"/>
           <p:nvPr/>
         </p:nvSpPr>
         <p:spPr>
           <a:xfrm>
-            <a:off x="640080" y="6446520"/>
-            <a:ext cx="8686800" cy="292608"/>
+            <a:off x="9951720" y="6455664"/>
+            <a:ext cx="2011680" cy="292608"/>
           </a:xfrm>
           <a:prstGeom prst="rect">
             <a:avLst/>
           </a:prstGeom>
           <a:noFill/>
-          <a:ln/>
-        </p:spPr>
-        <p:txBody>
-          <a:bodyPr wrap="square" lIns="0" tIns="0" rIns="0" bIns="0" rtlCol="0" anchor="ctr"/>
-          <a:lstStyle/>
-          <a:p>
-            <a:pPr algn="l" indent="0" marL="0">
-              <a:buNone/>
-            </a:pPr>
-            <a:r>
-              <a:rPr lang="en-US" sz="900" dirty="0">
-                <a:solidFill>
-                  <a:srgbClr val="5D5D72"/>
-                </a:solidFill>
-                <a:latin typeface="Calibri" pitchFamily="34" charset="0"/>
-                <a:ea typeface="Calibri" pitchFamily="34" charset="-122"/>
-                <a:cs typeface="Calibri" pitchFamily="34" charset="-120"/>
-              </a:rPr>
-              <a:t>Usman Akram  •  COMSATS University Islamabad</a:t>
-            </a:r>
-            <a:endParaRPr lang="en-US" sz="900" dirty="0"/>
-          </a:p>
-        </p:txBody>
-      </p:sp>
-      <p:sp>
-        <p:nvSpPr>
-          <p:cNvPr id="8" name="Text 6"/>
-          <p:cNvSpPr txBox="1"/>
-          <p:nvPr/>
-        </p:nvSpPr>
-        <p:spPr>
-          <a:xfrm>
-            <a:off x="11155680" y="6446520"/>
-            <a:ext cx="457200" cy="292608"/>
-          </a:xfrm>
-          <a:prstGeom prst="rect">
-            <a:avLst/>
-          </a:prstGeom>
-          <a:noFill/>
-          <a:ln/>
-        </p:spPr>
-        <p:txBody>
-          <a:bodyPr wrap="square" lIns="0" tIns="0" rIns="0" bIns="0" rtlCol="0" anchor="ctr"/>
-          <a:lstStyle/>
-          <a:p>
-            <a:pPr algn="r" indent="0" marL="0">
-              <a:buNone/>
-            </a:pPr>
-            <a:r>
-              <a:rPr lang="en-US" sz="900" dirty="0">
-                <a:solidFill>
-                  <a:srgbClr val="5D5D72"/>
-                </a:solidFill>
-                <a:latin typeface="Calibri" pitchFamily="34" charset="0"/>
-                <a:ea typeface="Calibri" pitchFamily="34" charset="-122"/>
-                <a:cs typeface="Calibri" pitchFamily="34" charset="-120"/>
-              </a:rPr>
-              <a:t>19</a:t>
-            </a:r>
-            <a:endParaRPr lang="en-US" sz="900" dirty="0"/>
+        </p:spPr>
+        <p:txBody>
+          <a:bodyPr wrap="none" lIns="0" rIns="0" tIns="0" bIns="0">
+            <a:spAutoFit/>
+          </a:bodyPr>
+          <a:lstStyle/>
+          <a:p>
+            <a:pPr algn="r"/>
+            <a:r>
+              <a:rPr sz="1000">
+                <a:solidFill>
+                  <a:srgbClr val="8A939B"/>
+                </a:solidFill>
+                <a:hlinkClick r:id="rId3"/>
+              </a:rPr>
+              <a:t>cuinotes.com</a:t>
+            </a:r>
+            <a:r>
+              <a:rPr sz="1000">
+                <a:solidFill>
+                  <a:srgbClr val="8A939B"/>
+                </a:solidFill>
+              </a:rPr>
+              <a:t>  ·  19</a:t>
+            </a:r>
           </a:p>
         </p:txBody>
       </p:sp>
@@ -6880,6 +6543,10 @@
           </a:solidFill>
           <a:ln/>
         </p:spPr>
+        <p:txBody>
+          <a:bodyPr/>
+          <a:p/>
+        </p:txBody>
       </p:sp>
       <p:sp>
         <p:nvSpPr>
@@ -6978,6 +6645,10 @@
           </a:solidFill>
           <a:ln/>
         </p:spPr>
+        <p:txBody>
+          <a:bodyPr/>
+          <a:p/>
+        </p:txBody>
       </p:sp>
       <p:sp>
         <p:nvSpPr>
@@ -7076,6 +6747,10 @@
           </a:solidFill>
           <a:ln/>
         </p:spPr>
+        <p:txBody>
+          <a:bodyPr/>
+          <a:p/>
+        </p:txBody>
       </p:sp>
       <p:sp>
         <p:nvSpPr>
@@ -7174,6 +6849,10 @@
           </a:solidFill>
           <a:ln/>
         </p:spPr>
+        <p:txBody>
+          <a:bodyPr/>
+          <a:p/>
+        </p:txBody>
       </p:sp>
       <p:sp>
         <p:nvSpPr>
@@ -7272,6 +6951,10 @@
           </a:solidFill>
           <a:ln/>
         </p:spPr>
+        <p:txBody>
+          <a:bodyPr/>
+          <a:p/>
+        </p:txBody>
       </p:sp>
       <p:sp>
         <p:nvSpPr>
@@ -7353,79 +7036,44 @@
       </p:sp>
       <p:sp>
         <p:nvSpPr>
-          <p:cNvPr id="19" name="Text 17"/>
+          <p:cNvPr id="21" name="cuinotes-footer-mark"/>
           <p:cNvSpPr txBox="1"/>
           <p:nvPr/>
         </p:nvSpPr>
         <p:spPr>
           <a:xfrm>
-            <a:off x="640080" y="6446520"/>
-            <a:ext cx="8686800" cy="292608"/>
+            <a:off x="9951720" y="6455664"/>
+            <a:ext cx="2011680" cy="292608"/>
           </a:xfrm>
           <a:prstGeom prst="rect">
             <a:avLst/>
           </a:prstGeom>
           <a:noFill/>
-          <a:ln/>
-        </p:spPr>
-        <p:txBody>
-          <a:bodyPr wrap="square" lIns="0" tIns="0" rIns="0" bIns="0" rtlCol="0" anchor="ctr"/>
-          <a:lstStyle/>
-          <a:p>
-            <a:pPr algn="l" indent="0" marL="0">
-              <a:buNone/>
-            </a:pPr>
-            <a:r>
-              <a:rPr lang="en-US" sz="900" dirty="0">
-                <a:solidFill>
-                  <a:srgbClr val="5D5D72"/>
-                </a:solidFill>
-                <a:latin typeface="Calibri" pitchFamily="34" charset="0"/>
-                <a:ea typeface="Calibri" pitchFamily="34" charset="-122"/>
-                <a:cs typeface="Calibri" pitchFamily="34" charset="-120"/>
-              </a:rPr>
-              <a:t>Usman Akram  •  COMSATS University Islamabad</a:t>
-            </a:r>
-            <a:endParaRPr lang="en-US" sz="900" dirty="0"/>
-          </a:p>
-        </p:txBody>
-      </p:sp>
-      <p:sp>
-        <p:nvSpPr>
-          <p:cNvPr id="20" name="Text 18"/>
-          <p:cNvSpPr txBox="1"/>
-          <p:nvPr/>
-        </p:nvSpPr>
-        <p:spPr>
-          <a:xfrm>
-            <a:off x="11155680" y="6446520"/>
-            <a:ext cx="457200" cy="292608"/>
-          </a:xfrm>
-          <a:prstGeom prst="rect">
-            <a:avLst/>
-          </a:prstGeom>
-          <a:noFill/>
-          <a:ln/>
-        </p:spPr>
-        <p:txBody>
-          <a:bodyPr wrap="square" lIns="0" tIns="0" rIns="0" bIns="0" rtlCol="0" anchor="ctr"/>
-          <a:lstStyle/>
-          <a:p>
-            <a:pPr algn="r" indent="0" marL="0">
-              <a:buNone/>
-            </a:pPr>
-            <a:r>
-              <a:rPr lang="en-US" sz="900" dirty="0">
-                <a:solidFill>
-                  <a:srgbClr val="5D5D72"/>
-                </a:solidFill>
-                <a:latin typeface="Calibri" pitchFamily="34" charset="0"/>
-                <a:ea typeface="Calibri" pitchFamily="34" charset="-122"/>
-                <a:cs typeface="Calibri" pitchFamily="34" charset="-120"/>
-              </a:rPr>
-              <a:t>2</a:t>
-            </a:r>
-            <a:endParaRPr lang="en-US" sz="900" dirty="0"/>
+        </p:spPr>
+        <p:txBody>
+          <a:bodyPr wrap="none" lIns="0" rIns="0" tIns="0" bIns="0">
+            <a:spAutoFit/>
+          </a:bodyPr>
+          <a:lstStyle/>
+          <a:p>
+            <a:pPr algn="r"/>
+            <a:r>
+              <a:rPr sz="1000">
+                <a:solidFill>
+                  <a:srgbClr val="8A939B"/>
+                </a:solidFill>
+                <a:hlinkClick r:id="rId3"/>
+              </a:rPr>
+              <a:t>cuinotes.com</a:t>
+            </a:r>
+            <a:r>
+              <a:rPr sz="1000">
+                <a:solidFill>
+                  <a:srgbClr val="8A939B"/>
+                </a:solidFill>
+              </a:rPr>
+              <a:t>  ·  2</a:t>
+            </a:r>
           </a:p>
         </p:txBody>
       </p:sp>
@@ -7558,6 +7206,10 @@
           </a:solidFill>
           <a:ln/>
         </p:spPr>
+        <p:txBody>
+          <a:bodyPr/>
+          <a:p/>
+        </p:txBody>
       </p:sp>
       <p:sp>
         <p:nvSpPr>
@@ -7617,6 +7269,10 @@
           </a:solidFill>
           <a:ln/>
         </p:spPr>
+        <p:txBody>
+          <a:bodyPr/>
+          <a:p/>
+        </p:txBody>
       </p:sp>
       <p:sp>
         <p:nvSpPr>
@@ -7676,6 +7332,10 @@
           </a:solidFill>
           <a:ln/>
         </p:spPr>
+        <p:txBody>
+          <a:bodyPr/>
+          <a:p/>
+        </p:txBody>
       </p:sp>
       <p:sp>
         <p:nvSpPr>
@@ -7718,79 +7378,44 @@
       </p:sp>
       <p:sp>
         <p:nvSpPr>
-          <p:cNvPr id="10" name="Text 8"/>
+          <p:cNvPr id="12" name="cuinotes-footer-mark"/>
           <p:cNvSpPr txBox="1"/>
           <p:nvPr/>
         </p:nvSpPr>
         <p:spPr>
           <a:xfrm>
-            <a:off x="640080" y="6446520"/>
-            <a:ext cx="8686800" cy="292608"/>
+            <a:off x="9951720" y="6455664"/>
+            <a:ext cx="2011680" cy="292608"/>
           </a:xfrm>
           <a:prstGeom prst="rect">
             <a:avLst/>
           </a:prstGeom>
           <a:noFill/>
-          <a:ln/>
-        </p:spPr>
-        <p:txBody>
-          <a:bodyPr wrap="square" lIns="0" tIns="0" rIns="0" bIns="0" rtlCol="0" anchor="ctr"/>
-          <a:lstStyle/>
-          <a:p>
-            <a:pPr algn="l" indent="0" marL="0">
-              <a:buNone/>
-            </a:pPr>
-            <a:r>
-              <a:rPr lang="en-US" sz="900" dirty="0">
-                <a:solidFill>
-                  <a:srgbClr val="5D5D72"/>
-                </a:solidFill>
-                <a:latin typeface="Calibri" pitchFamily="34" charset="0"/>
-                <a:ea typeface="Calibri" pitchFamily="34" charset="-122"/>
-                <a:cs typeface="Calibri" pitchFamily="34" charset="-120"/>
-              </a:rPr>
-              <a:t>Usman Akram  •  COMSATS University Islamabad</a:t>
-            </a:r>
-            <a:endParaRPr lang="en-US" sz="900" dirty="0"/>
-          </a:p>
-        </p:txBody>
-      </p:sp>
-      <p:sp>
-        <p:nvSpPr>
-          <p:cNvPr id="11" name="Text 9"/>
-          <p:cNvSpPr txBox="1"/>
-          <p:nvPr/>
-        </p:nvSpPr>
-        <p:spPr>
-          <a:xfrm>
-            <a:off x="11155680" y="6446520"/>
-            <a:ext cx="457200" cy="292608"/>
-          </a:xfrm>
-          <a:prstGeom prst="rect">
-            <a:avLst/>
-          </a:prstGeom>
-          <a:noFill/>
-          <a:ln/>
-        </p:spPr>
-        <p:txBody>
-          <a:bodyPr wrap="square" lIns="0" tIns="0" rIns="0" bIns="0" rtlCol="0" anchor="ctr"/>
-          <a:lstStyle/>
-          <a:p>
-            <a:pPr algn="r" indent="0" marL="0">
-              <a:buNone/>
-            </a:pPr>
-            <a:r>
-              <a:rPr lang="en-US" sz="900" dirty="0">
-                <a:solidFill>
-                  <a:srgbClr val="5D5D72"/>
-                </a:solidFill>
-                <a:latin typeface="Calibri" pitchFamily="34" charset="0"/>
-                <a:ea typeface="Calibri" pitchFamily="34" charset="-122"/>
-                <a:cs typeface="Calibri" pitchFamily="34" charset="-120"/>
-              </a:rPr>
-              <a:t>20</a:t>
-            </a:r>
-            <a:endParaRPr lang="en-US" sz="900" dirty="0"/>
+        </p:spPr>
+        <p:txBody>
+          <a:bodyPr wrap="none" lIns="0" rIns="0" tIns="0" bIns="0">
+            <a:spAutoFit/>
+          </a:bodyPr>
+          <a:lstStyle/>
+          <a:p>
+            <a:pPr algn="r"/>
+            <a:r>
+              <a:rPr sz="1000">
+                <a:solidFill>
+                  <a:srgbClr val="8A939B"/>
+                </a:solidFill>
+                <a:hlinkClick r:id="rId3"/>
+              </a:rPr>
+              <a:t>cuinotes.com</a:t>
+            </a:r>
+            <a:r>
+              <a:rPr sz="1000">
+                <a:solidFill>
+                  <a:srgbClr val="8A939B"/>
+                </a:solidFill>
+              </a:rPr>
+              <a:t>  ·  20</a:t>
+            </a:r>
           </a:p>
         </p:txBody>
       </p:sp>
@@ -8488,79 +8113,44 @@
       </p:graphicFrame>
       <p:sp>
         <p:nvSpPr>
-          <p:cNvPr id="5" name="Text 2"/>
+          <p:cNvPr id="23" name="cuinotes-footer-mark"/>
           <p:cNvSpPr txBox="1"/>
           <p:nvPr/>
         </p:nvSpPr>
         <p:spPr>
           <a:xfrm>
-            <a:off x="640080" y="6446520"/>
-            <a:ext cx="8686800" cy="292608"/>
+            <a:off x="9951720" y="6455664"/>
+            <a:ext cx="2011680" cy="292608"/>
           </a:xfrm>
           <a:prstGeom prst="rect">
             <a:avLst/>
           </a:prstGeom>
           <a:noFill/>
-          <a:ln/>
-        </p:spPr>
-        <p:txBody>
-          <a:bodyPr wrap="square" lIns="0" tIns="0" rIns="0" bIns="0" rtlCol="0" anchor="ctr"/>
-          <a:lstStyle/>
-          <a:p>
-            <a:pPr algn="l" indent="0" marL="0">
-              <a:buNone/>
-            </a:pPr>
-            <a:r>
-              <a:rPr lang="en-US" sz="900" dirty="0">
-                <a:solidFill>
-                  <a:srgbClr val="5D5D72"/>
-                </a:solidFill>
-                <a:latin typeface="Calibri" pitchFamily="34" charset="0"/>
-                <a:ea typeface="Calibri" pitchFamily="34" charset="-122"/>
-                <a:cs typeface="Calibri" pitchFamily="34" charset="-120"/>
-              </a:rPr>
-              <a:t>Usman Akram  •  COMSATS University Islamabad</a:t>
-            </a:r>
-            <a:endParaRPr lang="en-US" sz="900" dirty="0"/>
-          </a:p>
-        </p:txBody>
-      </p:sp>
-      <p:sp>
-        <p:nvSpPr>
-          <p:cNvPr id="6" name="Text 3"/>
-          <p:cNvSpPr txBox="1"/>
-          <p:nvPr/>
-        </p:nvSpPr>
-        <p:spPr>
-          <a:xfrm>
-            <a:off x="11155680" y="6446520"/>
-            <a:ext cx="457200" cy="292608"/>
-          </a:xfrm>
-          <a:prstGeom prst="rect">
-            <a:avLst/>
-          </a:prstGeom>
-          <a:noFill/>
-          <a:ln/>
-        </p:spPr>
-        <p:txBody>
-          <a:bodyPr wrap="square" lIns="0" tIns="0" rIns="0" bIns="0" rtlCol="0" anchor="ctr"/>
-          <a:lstStyle/>
-          <a:p>
-            <a:pPr algn="r" indent="0" marL="0">
-              <a:buNone/>
-            </a:pPr>
-            <a:r>
-              <a:rPr lang="en-US" sz="900" dirty="0">
-                <a:solidFill>
-                  <a:srgbClr val="5D5D72"/>
-                </a:solidFill>
-                <a:latin typeface="Calibri" pitchFamily="34" charset="0"/>
-                <a:ea typeface="Calibri" pitchFamily="34" charset="-122"/>
-                <a:cs typeface="Calibri" pitchFamily="34" charset="-120"/>
-              </a:rPr>
-              <a:t>21</a:t>
-            </a:r>
-            <a:endParaRPr lang="en-US" sz="900" dirty="0"/>
+        </p:spPr>
+        <p:txBody>
+          <a:bodyPr wrap="none" lIns="0" rIns="0" tIns="0" bIns="0">
+            <a:spAutoFit/>
+          </a:bodyPr>
+          <a:lstStyle/>
+          <a:p>
+            <a:pPr algn="r"/>
+            <a:r>
+              <a:rPr sz="1000">
+                <a:solidFill>
+                  <a:srgbClr val="8A939B"/>
+                </a:solidFill>
+                <a:hlinkClick r:id="rId3"/>
+              </a:rPr>
+              <a:t>cuinotes.com</a:t>
+            </a:r>
+            <a:r>
+              <a:rPr sz="1000">
+                <a:solidFill>
+                  <a:srgbClr val="8A939B"/>
+                </a:solidFill>
+              </a:rPr>
+              <a:t>  ·  21</a:t>
+            </a:r>
           </a:p>
         </p:txBody>
       </p:sp>
@@ -8695,6 +8285,10 @@
           </a:solidFill>
           <a:ln/>
         </p:spPr>
+        <p:txBody>
+          <a:bodyPr/>
+          <a:p/>
+        </p:txBody>
       </p:sp>
       <p:sp>
         <p:nvSpPr>
@@ -8811,6 +8405,10 @@
             </a:outerShdw>
           </a:effectLst>
         </p:spPr>
+        <p:txBody>
+          <a:bodyPr/>
+          <a:p/>
+        </p:txBody>
       </p:sp>
       <p:pic>
         <p:nvPicPr>
@@ -8838,79 +8436,44 @@
       </p:pic>
       <p:sp>
         <p:nvSpPr>
-          <p:cNvPr id="8" name="Text 5"/>
+          <p:cNvPr id="10" name="cuinotes-footer-mark"/>
           <p:cNvSpPr txBox="1"/>
           <p:nvPr/>
         </p:nvSpPr>
         <p:spPr>
           <a:xfrm>
-            <a:off x="640080" y="6446520"/>
-            <a:ext cx="8686800" cy="292608"/>
+            <a:off x="9951720" y="6455664"/>
+            <a:ext cx="2011680" cy="292608"/>
           </a:xfrm>
           <a:prstGeom prst="rect">
             <a:avLst/>
           </a:prstGeom>
           <a:noFill/>
-          <a:ln/>
-        </p:spPr>
-        <p:txBody>
-          <a:bodyPr wrap="square" lIns="0" tIns="0" rIns="0" bIns="0" rtlCol="0" anchor="ctr"/>
-          <a:lstStyle/>
-          <a:p>
-            <a:pPr algn="l" indent="0" marL="0">
-              <a:buNone/>
-            </a:pPr>
-            <a:r>
-              <a:rPr lang="en-US" sz="900" dirty="0">
-                <a:solidFill>
-                  <a:srgbClr val="5D5D72"/>
-                </a:solidFill>
-                <a:latin typeface="Calibri" pitchFamily="34" charset="0"/>
-                <a:ea typeface="Calibri" pitchFamily="34" charset="-122"/>
-                <a:cs typeface="Calibri" pitchFamily="34" charset="-120"/>
-              </a:rPr>
-              <a:t>Usman Akram  •  COMSATS University Islamabad</a:t>
-            </a:r>
-            <a:endParaRPr lang="en-US" sz="900" dirty="0"/>
-          </a:p>
-        </p:txBody>
-      </p:sp>
-      <p:sp>
-        <p:nvSpPr>
-          <p:cNvPr id="9" name="Text 6"/>
-          <p:cNvSpPr txBox="1"/>
-          <p:nvPr/>
-        </p:nvSpPr>
-        <p:spPr>
-          <a:xfrm>
-            <a:off x="11155680" y="6446520"/>
-            <a:ext cx="457200" cy="292608"/>
-          </a:xfrm>
-          <a:prstGeom prst="rect">
-            <a:avLst/>
-          </a:prstGeom>
-          <a:noFill/>
-          <a:ln/>
-        </p:spPr>
-        <p:txBody>
-          <a:bodyPr wrap="square" lIns="0" tIns="0" rIns="0" bIns="0" rtlCol="0" anchor="ctr"/>
-          <a:lstStyle/>
-          <a:p>
-            <a:pPr algn="r" indent="0" marL="0">
-              <a:buNone/>
-            </a:pPr>
-            <a:r>
-              <a:rPr lang="en-US" sz="900" dirty="0">
-                <a:solidFill>
-                  <a:srgbClr val="5D5D72"/>
-                </a:solidFill>
-                <a:latin typeface="Calibri" pitchFamily="34" charset="0"/>
-                <a:ea typeface="Calibri" pitchFamily="34" charset="-122"/>
-                <a:cs typeface="Calibri" pitchFamily="34" charset="-120"/>
-              </a:rPr>
-              <a:t>22</a:t>
-            </a:r>
-            <a:endParaRPr lang="en-US" sz="900" dirty="0"/>
+        </p:spPr>
+        <p:txBody>
+          <a:bodyPr wrap="none" lIns="0" rIns="0" tIns="0" bIns="0">
+            <a:spAutoFit/>
+          </a:bodyPr>
+          <a:lstStyle/>
+          <a:p>
+            <a:pPr algn="r"/>
+            <a:r>
+              <a:rPr sz="1000">
+                <a:solidFill>
+                  <a:srgbClr val="8A939B"/>
+                </a:solidFill>
+                <a:hlinkClick r:id="rId4"/>
+              </a:rPr>
+              <a:t>cuinotes.com</a:t>
+            </a:r>
+            <a:r>
+              <a:rPr sz="1000">
+                <a:solidFill>
+                  <a:srgbClr val="8A939B"/>
+                </a:solidFill>
+              </a:rPr>
+              <a:t>  ·  22</a:t>
+            </a:r>
           </a:p>
         </p:txBody>
       </p:sp>
@@ -9045,6 +8608,10 @@
           </a:solidFill>
           <a:ln/>
         </p:spPr>
+        <p:txBody>
+          <a:bodyPr/>
+          <a:p/>
+        </p:txBody>
       </p:sp>
       <p:sp>
         <p:nvSpPr>
@@ -9209,79 +8776,44 @@
       </p:sp>
       <p:sp>
         <p:nvSpPr>
-          <p:cNvPr id="7" name="Text 5"/>
+          <p:cNvPr id="9" name="cuinotes-footer-mark"/>
           <p:cNvSpPr txBox="1"/>
           <p:nvPr/>
         </p:nvSpPr>
         <p:spPr>
           <a:xfrm>
-            <a:off x="640080" y="6446520"/>
-            <a:ext cx="8686800" cy="292608"/>
+            <a:off x="9951720" y="6455664"/>
+            <a:ext cx="2011680" cy="292608"/>
           </a:xfrm>
           <a:prstGeom prst="rect">
             <a:avLst/>
           </a:prstGeom>
           <a:noFill/>
-          <a:ln/>
-        </p:spPr>
-        <p:txBody>
-          <a:bodyPr wrap="square" lIns="0" tIns="0" rIns="0" bIns="0" rtlCol="0" anchor="ctr"/>
-          <a:lstStyle/>
-          <a:p>
-            <a:pPr algn="l" indent="0" marL="0">
-              <a:buNone/>
-            </a:pPr>
-            <a:r>
-              <a:rPr lang="en-US" sz="900" dirty="0">
-                <a:solidFill>
-                  <a:srgbClr val="5D5D72"/>
-                </a:solidFill>
-                <a:latin typeface="Calibri" pitchFamily="34" charset="0"/>
-                <a:ea typeface="Calibri" pitchFamily="34" charset="-122"/>
-                <a:cs typeface="Calibri" pitchFamily="34" charset="-120"/>
-              </a:rPr>
-              <a:t>Usman Akram  •  COMSATS University Islamabad</a:t>
-            </a:r>
-            <a:endParaRPr lang="en-US" sz="900" dirty="0"/>
-          </a:p>
-        </p:txBody>
-      </p:sp>
-      <p:sp>
-        <p:nvSpPr>
-          <p:cNvPr id="8" name="Text 6"/>
-          <p:cNvSpPr txBox="1"/>
-          <p:nvPr/>
-        </p:nvSpPr>
-        <p:spPr>
-          <a:xfrm>
-            <a:off x="11155680" y="6446520"/>
-            <a:ext cx="457200" cy="292608"/>
-          </a:xfrm>
-          <a:prstGeom prst="rect">
-            <a:avLst/>
-          </a:prstGeom>
-          <a:noFill/>
-          <a:ln/>
-        </p:spPr>
-        <p:txBody>
-          <a:bodyPr wrap="square" lIns="0" tIns="0" rIns="0" bIns="0" rtlCol="0" anchor="ctr"/>
-          <a:lstStyle/>
-          <a:p>
-            <a:pPr algn="r" indent="0" marL="0">
-              <a:buNone/>
-            </a:pPr>
-            <a:r>
-              <a:rPr lang="en-US" sz="900" dirty="0">
-                <a:solidFill>
-                  <a:srgbClr val="5D5D72"/>
-                </a:solidFill>
-                <a:latin typeface="Calibri" pitchFamily="34" charset="0"/>
-                <a:ea typeface="Calibri" pitchFamily="34" charset="-122"/>
-                <a:cs typeface="Calibri" pitchFamily="34" charset="-120"/>
-              </a:rPr>
-              <a:t>23</a:t>
-            </a:r>
-            <a:endParaRPr lang="en-US" sz="900" dirty="0"/>
+        </p:spPr>
+        <p:txBody>
+          <a:bodyPr wrap="none" lIns="0" rIns="0" tIns="0" bIns="0">
+            <a:spAutoFit/>
+          </a:bodyPr>
+          <a:lstStyle/>
+          <a:p>
+            <a:pPr algn="r"/>
+            <a:r>
+              <a:rPr sz="1000">
+                <a:solidFill>
+                  <a:srgbClr val="8A939B"/>
+                </a:solidFill>
+                <a:hlinkClick r:id="rId3"/>
+              </a:rPr>
+              <a:t>cuinotes.com</a:t>
+            </a:r>
+            <a:r>
+              <a:rPr sz="1000">
+                <a:solidFill>
+                  <a:srgbClr val="8A939B"/>
+                </a:solidFill>
+              </a:rPr>
+              <a:t>  ·  23</a:t>
+            </a:r>
           </a:p>
         </p:txBody>
       </p:sp>
@@ -9428,6 +8960,10 @@
             </a:outerShdw>
           </a:effectLst>
         </p:spPr>
+        <p:txBody>
+          <a:bodyPr/>
+          <a:p/>
+        </p:txBody>
       </p:sp>
       <p:pic>
         <p:nvPicPr>
@@ -9455,79 +8991,44 @@
       </p:pic>
       <p:sp>
         <p:nvSpPr>
-          <p:cNvPr id="6" name="Text 3"/>
+          <p:cNvPr id="8" name="cuinotes-footer-mark"/>
           <p:cNvSpPr txBox="1"/>
           <p:nvPr/>
         </p:nvSpPr>
         <p:spPr>
           <a:xfrm>
-            <a:off x="640080" y="6446520"/>
-            <a:ext cx="8686800" cy="292608"/>
+            <a:off x="9951720" y="6455664"/>
+            <a:ext cx="2011680" cy="292608"/>
           </a:xfrm>
           <a:prstGeom prst="rect">
             <a:avLst/>
           </a:prstGeom>
           <a:noFill/>
-          <a:ln/>
-        </p:spPr>
-        <p:txBody>
-          <a:bodyPr wrap="square" lIns="0" tIns="0" rIns="0" bIns="0" rtlCol="0" anchor="ctr"/>
-          <a:lstStyle/>
-          <a:p>
-            <a:pPr algn="l" indent="0" marL="0">
-              <a:buNone/>
-            </a:pPr>
-            <a:r>
-              <a:rPr lang="en-US" sz="900" dirty="0">
-                <a:solidFill>
-                  <a:srgbClr val="5D5D72"/>
-                </a:solidFill>
-                <a:latin typeface="Calibri" pitchFamily="34" charset="0"/>
-                <a:ea typeface="Calibri" pitchFamily="34" charset="-122"/>
-                <a:cs typeface="Calibri" pitchFamily="34" charset="-120"/>
-              </a:rPr>
-              <a:t>Usman Akram  •  COMSATS University Islamabad</a:t>
-            </a:r>
-            <a:endParaRPr lang="en-US" sz="900" dirty="0"/>
-          </a:p>
-        </p:txBody>
-      </p:sp>
-      <p:sp>
-        <p:nvSpPr>
-          <p:cNvPr id="7" name="Text 4"/>
-          <p:cNvSpPr txBox="1"/>
-          <p:nvPr/>
-        </p:nvSpPr>
-        <p:spPr>
-          <a:xfrm>
-            <a:off x="11155680" y="6446520"/>
-            <a:ext cx="457200" cy="292608"/>
-          </a:xfrm>
-          <a:prstGeom prst="rect">
-            <a:avLst/>
-          </a:prstGeom>
-          <a:noFill/>
-          <a:ln/>
-        </p:spPr>
-        <p:txBody>
-          <a:bodyPr wrap="square" lIns="0" tIns="0" rIns="0" bIns="0" rtlCol="0" anchor="ctr"/>
-          <a:lstStyle/>
-          <a:p>
-            <a:pPr algn="r" indent="0" marL="0">
-              <a:buNone/>
-            </a:pPr>
-            <a:r>
-              <a:rPr lang="en-US" sz="900" dirty="0">
-                <a:solidFill>
-                  <a:srgbClr val="5D5D72"/>
-                </a:solidFill>
-                <a:latin typeface="Calibri" pitchFamily="34" charset="0"/>
-                <a:ea typeface="Calibri" pitchFamily="34" charset="-122"/>
-                <a:cs typeface="Calibri" pitchFamily="34" charset="-120"/>
-              </a:rPr>
-              <a:t>24</a:t>
-            </a:r>
-            <a:endParaRPr lang="en-US" sz="900" dirty="0"/>
+        </p:spPr>
+        <p:txBody>
+          <a:bodyPr wrap="none" lIns="0" rIns="0" tIns="0" bIns="0">
+            <a:spAutoFit/>
+          </a:bodyPr>
+          <a:lstStyle/>
+          <a:p>
+            <a:pPr algn="r"/>
+            <a:r>
+              <a:rPr sz="1000">
+                <a:solidFill>
+                  <a:srgbClr val="8A939B"/>
+                </a:solidFill>
+                <a:hlinkClick r:id="rId4"/>
+              </a:rPr>
+              <a:t>cuinotes.com</a:t>
+            </a:r>
+            <a:r>
+              <a:rPr sz="1000">
+                <a:solidFill>
+                  <a:srgbClr val="8A939B"/>
+                </a:solidFill>
+              </a:rPr>
+              <a:t>  ·  24</a:t>
+            </a:r>
           </a:p>
         </p:txBody>
       </p:sp>
@@ -10225,79 +9726,44 @@
       </p:graphicFrame>
       <p:sp>
         <p:nvSpPr>
-          <p:cNvPr id="5" name="Text 2"/>
+          <p:cNvPr id="27" name="cuinotes-footer-mark"/>
           <p:cNvSpPr txBox="1"/>
           <p:nvPr/>
         </p:nvSpPr>
         <p:spPr>
           <a:xfrm>
-            <a:off x="640080" y="6446520"/>
-            <a:ext cx="8686800" cy="292608"/>
+            <a:off x="9951720" y="6455664"/>
+            <a:ext cx="2011680" cy="292608"/>
           </a:xfrm>
           <a:prstGeom prst="rect">
             <a:avLst/>
           </a:prstGeom>
           <a:noFill/>
-          <a:ln/>
-        </p:spPr>
-        <p:txBody>
-          <a:bodyPr wrap="square" lIns="0" tIns="0" rIns="0" bIns="0" rtlCol="0" anchor="ctr"/>
-          <a:lstStyle/>
-          <a:p>
-            <a:pPr algn="l" indent="0" marL="0">
-              <a:buNone/>
-            </a:pPr>
-            <a:r>
-              <a:rPr lang="en-US" sz="900" dirty="0">
-                <a:solidFill>
-                  <a:srgbClr val="5D5D72"/>
-                </a:solidFill>
-                <a:latin typeface="Calibri" pitchFamily="34" charset="0"/>
-                <a:ea typeface="Calibri" pitchFamily="34" charset="-122"/>
-                <a:cs typeface="Calibri" pitchFamily="34" charset="-120"/>
-              </a:rPr>
-              <a:t>Usman Akram  •  COMSATS University Islamabad</a:t>
-            </a:r>
-            <a:endParaRPr lang="en-US" sz="900" dirty="0"/>
-          </a:p>
-        </p:txBody>
-      </p:sp>
-      <p:sp>
-        <p:nvSpPr>
-          <p:cNvPr id="6" name="Text 3"/>
-          <p:cNvSpPr txBox="1"/>
-          <p:nvPr/>
-        </p:nvSpPr>
-        <p:spPr>
-          <a:xfrm>
-            <a:off x="11155680" y="6446520"/>
-            <a:ext cx="457200" cy="292608"/>
-          </a:xfrm>
-          <a:prstGeom prst="rect">
-            <a:avLst/>
-          </a:prstGeom>
-          <a:noFill/>
-          <a:ln/>
-        </p:spPr>
-        <p:txBody>
-          <a:bodyPr wrap="square" lIns="0" tIns="0" rIns="0" bIns="0" rtlCol="0" anchor="ctr"/>
-          <a:lstStyle/>
-          <a:p>
-            <a:pPr algn="r" indent="0" marL="0">
-              <a:buNone/>
-            </a:pPr>
-            <a:r>
-              <a:rPr lang="en-US" sz="900" dirty="0">
-                <a:solidFill>
-                  <a:srgbClr val="5D5D72"/>
-                </a:solidFill>
-                <a:latin typeface="Calibri" pitchFamily="34" charset="0"/>
-                <a:ea typeface="Calibri" pitchFamily="34" charset="-122"/>
-                <a:cs typeface="Calibri" pitchFamily="34" charset="-120"/>
-              </a:rPr>
-              <a:t>25</a:t>
-            </a:r>
-            <a:endParaRPr lang="en-US" sz="900" dirty="0"/>
+        </p:spPr>
+        <p:txBody>
+          <a:bodyPr wrap="none" lIns="0" rIns="0" tIns="0" bIns="0">
+            <a:spAutoFit/>
+          </a:bodyPr>
+          <a:lstStyle/>
+          <a:p>
+            <a:pPr algn="r"/>
+            <a:r>
+              <a:rPr sz="1000">
+                <a:solidFill>
+                  <a:srgbClr val="8A939B"/>
+                </a:solidFill>
+                <a:hlinkClick r:id="rId3"/>
+              </a:rPr>
+              <a:t>cuinotes.com</a:t>
+            </a:r>
+            <a:r>
+              <a:rPr sz="1000">
+                <a:solidFill>
+                  <a:srgbClr val="8A939B"/>
+                </a:solidFill>
+              </a:rPr>
+              <a:t>  ·  25</a:t>
+            </a:r>
           </a:p>
         </p:txBody>
       </p:sp>
@@ -10432,6 +9898,10 @@
           </a:solidFill>
           <a:ln/>
         </p:spPr>
+        <p:txBody>
+          <a:bodyPr/>
+          <a:p/>
+        </p:txBody>
       </p:sp>
       <p:sp>
         <p:nvSpPr>
@@ -10608,6 +10078,10 @@
             </a:outerShdw>
           </a:effectLst>
         </p:spPr>
+        <p:txBody>
+          <a:bodyPr/>
+          <a:p/>
+        </p:txBody>
       </p:sp>
       <p:pic>
         <p:nvPicPr>
@@ -10635,79 +10109,44 @@
       </p:pic>
       <p:sp>
         <p:nvSpPr>
-          <p:cNvPr id="8" name="Text 5"/>
+          <p:cNvPr id="10" name="cuinotes-footer-mark"/>
           <p:cNvSpPr txBox="1"/>
           <p:nvPr/>
         </p:nvSpPr>
         <p:spPr>
           <a:xfrm>
-            <a:off x="640080" y="6446520"/>
-            <a:ext cx="8686800" cy="292608"/>
+            <a:off x="9951720" y="6455664"/>
+            <a:ext cx="2011680" cy="292608"/>
           </a:xfrm>
           <a:prstGeom prst="rect">
             <a:avLst/>
           </a:prstGeom>
           <a:noFill/>
-          <a:ln/>
-        </p:spPr>
-        <p:txBody>
-          <a:bodyPr wrap="square" lIns="0" tIns="0" rIns="0" bIns="0" rtlCol="0" anchor="ctr"/>
-          <a:lstStyle/>
-          <a:p>
-            <a:pPr algn="l" indent="0" marL="0">
-              <a:buNone/>
-            </a:pPr>
-            <a:r>
-              <a:rPr lang="en-US" sz="900" dirty="0">
-                <a:solidFill>
-                  <a:srgbClr val="5D5D72"/>
-                </a:solidFill>
-                <a:latin typeface="Calibri" pitchFamily="34" charset="0"/>
-                <a:ea typeface="Calibri" pitchFamily="34" charset="-122"/>
-                <a:cs typeface="Calibri" pitchFamily="34" charset="-120"/>
-              </a:rPr>
-              <a:t>Usman Akram  •  COMSATS University Islamabad</a:t>
-            </a:r>
-            <a:endParaRPr lang="en-US" sz="900" dirty="0"/>
-          </a:p>
-        </p:txBody>
-      </p:sp>
-      <p:sp>
-        <p:nvSpPr>
-          <p:cNvPr id="9" name="Text 6"/>
-          <p:cNvSpPr txBox="1"/>
-          <p:nvPr/>
-        </p:nvSpPr>
-        <p:spPr>
-          <a:xfrm>
-            <a:off x="11155680" y="6446520"/>
-            <a:ext cx="457200" cy="292608"/>
-          </a:xfrm>
-          <a:prstGeom prst="rect">
-            <a:avLst/>
-          </a:prstGeom>
-          <a:noFill/>
-          <a:ln/>
-        </p:spPr>
-        <p:txBody>
-          <a:bodyPr wrap="square" lIns="0" tIns="0" rIns="0" bIns="0" rtlCol="0" anchor="ctr"/>
-          <a:lstStyle/>
-          <a:p>
-            <a:pPr algn="r" indent="0" marL="0">
-              <a:buNone/>
-            </a:pPr>
-            <a:r>
-              <a:rPr lang="en-US" sz="900" dirty="0">
-                <a:solidFill>
-                  <a:srgbClr val="5D5D72"/>
-                </a:solidFill>
-                <a:latin typeface="Calibri" pitchFamily="34" charset="0"/>
-                <a:ea typeface="Calibri" pitchFamily="34" charset="-122"/>
-                <a:cs typeface="Calibri" pitchFamily="34" charset="-120"/>
-              </a:rPr>
-              <a:t>26</a:t>
-            </a:r>
-            <a:endParaRPr lang="en-US" sz="900" dirty="0"/>
+        </p:spPr>
+        <p:txBody>
+          <a:bodyPr wrap="none" lIns="0" rIns="0" tIns="0" bIns="0">
+            <a:spAutoFit/>
+          </a:bodyPr>
+          <a:lstStyle/>
+          <a:p>
+            <a:pPr algn="r"/>
+            <a:r>
+              <a:rPr sz="1000">
+                <a:solidFill>
+                  <a:srgbClr val="8A939B"/>
+                </a:solidFill>
+                <a:hlinkClick r:id="rId4"/>
+              </a:rPr>
+              <a:t>cuinotes.com</a:t>
+            </a:r>
+            <a:r>
+              <a:rPr sz="1000">
+                <a:solidFill>
+                  <a:srgbClr val="8A939B"/>
+                </a:solidFill>
+              </a:rPr>
+              <a:t>  ·  26</a:t>
+            </a:r>
           </a:p>
         </p:txBody>
       </p:sp>
@@ -10847,6 +10286,10 @@
             <a:prstDash val="solid"/>
           </a:ln>
         </p:spPr>
+        <p:txBody>
+          <a:bodyPr/>
+          <a:p/>
+        </p:txBody>
       </p:sp>
       <p:sp>
         <p:nvSpPr>
@@ -10928,79 +10371,44 @@
       </p:sp>
       <p:sp>
         <p:nvSpPr>
-          <p:cNvPr id="7" name="Text 5"/>
+          <p:cNvPr id="9" name="cuinotes-footer-mark"/>
           <p:cNvSpPr txBox="1"/>
           <p:nvPr/>
         </p:nvSpPr>
         <p:spPr>
           <a:xfrm>
-            <a:off x="640080" y="6446520"/>
-            <a:ext cx="8686800" cy="292608"/>
+            <a:off x="9951720" y="6455664"/>
+            <a:ext cx="2011680" cy="292608"/>
           </a:xfrm>
           <a:prstGeom prst="rect">
             <a:avLst/>
           </a:prstGeom>
           <a:noFill/>
-          <a:ln/>
-        </p:spPr>
-        <p:txBody>
-          <a:bodyPr wrap="square" lIns="0" tIns="0" rIns="0" bIns="0" rtlCol="0" anchor="ctr"/>
-          <a:lstStyle/>
-          <a:p>
-            <a:pPr algn="l" indent="0" marL="0">
-              <a:buNone/>
-            </a:pPr>
-            <a:r>
-              <a:rPr lang="en-US" sz="900" dirty="0">
-                <a:solidFill>
-                  <a:srgbClr val="5D5D72"/>
-                </a:solidFill>
-                <a:latin typeface="Calibri" pitchFamily="34" charset="0"/>
-                <a:ea typeface="Calibri" pitchFamily="34" charset="-122"/>
-                <a:cs typeface="Calibri" pitchFamily="34" charset="-120"/>
-              </a:rPr>
-              <a:t>Usman Akram  •  COMSATS University Islamabad</a:t>
-            </a:r>
-            <a:endParaRPr lang="en-US" sz="900" dirty="0"/>
-          </a:p>
-        </p:txBody>
-      </p:sp>
-      <p:sp>
-        <p:nvSpPr>
-          <p:cNvPr id="8" name="Text 6"/>
-          <p:cNvSpPr txBox="1"/>
-          <p:nvPr/>
-        </p:nvSpPr>
-        <p:spPr>
-          <a:xfrm>
-            <a:off x="11155680" y="6446520"/>
-            <a:ext cx="457200" cy="292608"/>
-          </a:xfrm>
-          <a:prstGeom prst="rect">
-            <a:avLst/>
-          </a:prstGeom>
-          <a:noFill/>
-          <a:ln/>
-        </p:spPr>
-        <p:txBody>
-          <a:bodyPr wrap="square" lIns="0" tIns="0" rIns="0" bIns="0" rtlCol="0" anchor="ctr"/>
-          <a:lstStyle/>
-          <a:p>
-            <a:pPr algn="r" indent="0" marL="0">
-              <a:buNone/>
-            </a:pPr>
-            <a:r>
-              <a:rPr lang="en-US" sz="900" dirty="0">
-                <a:solidFill>
-                  <a:srgbClr val="5D5D72"/>
-                </a:solidFill>
-                <a:latin typeface="Calibri" pitchFamily="34" charset="0"/>
-                <a:ea typeface="Calibri" pitchFamily="34" charset="-122"/>
-                <a:cs typeface="Calibri" pitchFamily="34" charset="-120"/>
-              </a:rPr>
-              <a:t>27</a:t>
-            </a:r>
-            <a:endParaRPr lang="en-US" sz="900" dirty="0"/>
+        </p:spPr>
+        <p:txBody>
+          <a:bodyPr wrap="none" lIns="0" rIns="0" tIns="0" bIns="0">
+            <a:spAutoFit/>
+          </a:bodyPr>
+          <a:lstStyle/>
+          <a:p>
+            <a:pPr algn="r"/>
+            <a:r>
+              <a:rPr sz="1000">
+                <a:solidFill>
+                  <a:srgbClr val="8A939B"/>
+                </a:solidFill>
+                <a:hlinkClick r:id="rId3"/>
+              </a:rPr>
+              <a:t>cuinotes.com</a:t>
+            </a:r>
+            <a:r>
+              <a:rPr sz="1000">
+                <a:solidFill>
+                  <a:srgbClr val="8A939B"/>
+                </a:solidFill>
+              </a:rPr>
+              <a:t>  ·  27</a:t>
+            </a:r>
           </a:p>
         </p:txBody>
       </p:sp>
@@ -11133,6 +10541,10 @@
           </a:solidFill>
           <a:ln/>
         </p:spPr>
+        <p:txBody>
+          <a:bodyPr/>
+          <a:p/>
+        </p:txBody>
       </p:sp>
       <p:sp>
         <p:nvSpPr>
@@ -11192,6 +10604,10 @@
           </a:solidFill>
           <a:ln/>
         </p:spPr>
+        <p:txBody>
+          <a:bodyPr/>
+          <a:p/>
+        </p:txBody>
       </p:sp>
       <p:sp>
         <p:nvSpPr>
@@ -11251,6 +10667,10 @@
           </a:solidFill>
           <a:ln/>
         </p:spPr>
+        <p:txBody>
+          <a:bodyPr/>
+          <a:p/>
+        </p:txBody>
       </p:sp>
       <p:sp>
         <p:nvSpPr>
@@ -11310,6 +10730,10 @@
           </a:solidFill>
           <a:ln/>
         </p:spPr>
+        <p:txBody>
+          <a:bodyPr/>
+          <a:p/>
+        </p:txBody>
       </p:sp>
       <p:sp>
         <p:nvSpPr>
@@ -11352,79 +10776,44 @@
       </p:sp>
       <p:sp>
         <p:nvSpPr>
-          <p:cNvPr id="12" name="Text 10"/>
+          <p:cNvPr id="14" name="cuinotes-footer-mark"/>
           <p:cNvSpPr txBox="1"/>
           <p:nvPr/>
         </p:nvSpPr>
         <p:spPr>
           <a:xfrm>
-            <a:off x="640080" y="6446520"/>
-            <a:ext cx="8686800" cy="292608"/>
+            <a:off x="9951720" y="6455664"/>
+            <a:ext cx="2011680" cy="292608"/>
           </a:xfrm>
           <a:prstGeom prst="rect">
             <a:avLst/>
           </a:prstGeom>
           <a:noFill/>
-          <a:ln/>
-        </p:spPr>
-        <p:txBody>
-          <a:bodyPr wrap="square" lIns="0" tIns="0" rIns="0" bIns="0" rtlCol="0" anchor="ctr"/>
-          <a:lstStyle/>
-          <a:p>
-            <a:pPr algn="l" indent="0" marL="0">
-              <a:buNone/>
-            </a:pPr>
-            <a:r>
-              <a:rPr lang="en-US" sz="900" dirty="0">
-                <a:solidFill>
-                  <a:srgbClr val="5D5D72"/>
-                </a:solidFill>
-                <a:latin typeface="Calibri" pitchFamily="34" charset="0"/>
-                <a:ea typeface="Calibri" pitchFamily="34" charset="-122"/>
-                <a:cs typeface="Calibri" pitchFamily="34" charset="-120"/>
-              </a:rPr>
-              <a:t>Usman Akram  •  COMSATS University Islamabad</a:t>
-            </a:r>
-            <a:endParaRPr lang="en-US" sz="900" dirty="0"/>
-          </a:p>
-        </p:txBody>
-      </p:sp>
-      <p:sp>
-        <p:nvSpPr>
-          <p:cNvPr id="13" name="Text 11"/>
-          <p:cNvSpPr txBox="1"/>
-          <p:nvPr/>
-        </p:nvSpPr>
-        <p:spPr>
-          <a:xfrm>
-            <a:off x="11155680" y="6446520"/>
-            <a:ext cx="457200" cy="292608"/>
-          </a:xfrm>
-          <a:prstGeom prst="rect">
-            <a:avLst/>
-          </a:prstGeom>
-          <a:noFill/>
-          <a:ln/>
-        </p:spPr>
-        <p:txBody>
-          <a:bodyPr wrap="square" lIns="0" tIns="0" rIns="0" bIns="0" rtlCol="0" anchor="ctr"/>
-          <a:lstStyle/>
-          <a:p>
-            <a:pPr algn="r" indent="0" marL="0">
-              <a:buNone/>
-            </a:pPr>
-            <a:r>
-              <a:rPr lang="en-US" sz="900" dirty="0">
-                <a:solidFill>
-                  <a:srgbClr val="5D5D72"/>
-                </a:solidFill>
-                <a:latin typeface="Calibri" pitchFamily="34" charset="0"/>
-                <a:ea typeface="Calibri" pitchFamily="34" charset="-122"/>
-                <a:cs typeface="Calibri" pitchFamily="34" charset="-120"/>
-              </a:rPr>
-              <a:t>28</a:t>
-            </a:r>
-            <a:endParaRPr lang="en-US" sz="900" dirty="0"/>
+        </p:spPr>
+        <p:txBody>
+          <a:bodyPr wrap="none" lIns="0" rIns="0" tIns="0" bIns="0">
+            <a:spAutoFit/>
+          </a:bodyPr>
+          <a:lstStyle/>
+          <a:p>
+            <a:pPr algn="r"/>
+            <a:r>
+              <a:rPr sz="1000">
+                <a:solidFill>
+                  <a:srgbClr val="8A939B"/>
+                </a:solidFill>
+                <a:hlinkClick r:id="rId3"/>
+              </a:rPr>
+              <a:t>cuinotes.com</a:t>
+            </a:r>
+            <a:r>
+              <a:rPr sz="1000">
+                <a:solidFill>
+                  <a:srgbClr val="8A939B"/>
+                </a:solidFill>
+              </a:rPr>
+              <a:t>  ·  28</a:t>
+            </a:r>
           </a:p>
         </p:txBody>
       </p:sp>
@@ -11557,6 +10946,10 @@
           </a:solidFill>
           <a:ln/>
         </p:spPr>
+        <p:txBody>
+          <a:bodyPr/>
+          <a:p/>
+        </p:txBody>
       </p:sp>
       <p:sp>
         <p:nvSpPr>
@@ -11655,6 +11048,10 @@
           </a:solidFill>
           <a:ln/>
         </p:spPr>
+        <p:txBody>
+          <a:bodyPr/>
+          <a:p/>
+        </p:txBody>
       </p:sp>
       <p:sp>
         <p:nvSpPr>
@@ -11753,6 +11150,10 @@
           </a:solidFill>
           <a:ln/>
         </p:spPr>
+        <p:txBody>
+          <a:bodyPr/>
+          <a:p/>
+        </p:txBody>
       </p:sp>
       <p:sp>
         <p:nvSpPr>
@@ -11851,6 +11252,10 @@
           </a:solidFill>
           <a:ln/>
         </p:spPr>
+        <p:txBody>
+          <a:bodyPr/>
+          <a:p/>
+        </p:txBody>
       </p:sp>
       <p:sp>
         <p:nvSpPr>
@@ -11949,6 +11354,10 @@
           </a:solidFill>
           <a:ln/>
         </p:spPr>
+        <p:txBody>
+          <a:bodyPr/>
+          <a:p/>
+        </p:txBody>
       </p:sp>
       <p:sp>
         <p:nvSpPr>
@@ -12047,6 +11456,10 @@
           </a:solidFill>
           <a:ln/>
         </p:spPr>
+        <p:txBody>
+          <a:bodyPr/>
+          <a:p/>
+        </p:txBody>
       </p:sp>
       <p:sp>
         <p:nvSpPr>
@@ -12128,79 +11541,44 @@
       </p:sp>
       <p:sp>
         <p:nvSpPr>
-          <p:cNvPr id="22" name="Text 20"/>
+          <p:cNvPr id="24" name="cuinotes-footer-mark"/>
           <p:cNvSpPr txBox="1"/>
           <p:nvPr/>
         </p:nvSpPr>
         <p:spPr>
           <a:xfrm>
-            <a:off x="640080" y="6446520"/>
-            <a:ext cx="8686800" cy="292608"/>
+            <a:off x="9951720" y="6455664"/>
+            <a:ext cx="2011680" cy="292608"/>
           </a:xfrm>
           <a:prstGeom prst="rect">
             <a:avLst/>
           </a:prstGeom>
           <a:noFill/>
-          <a:ln/>
-        </p:spPr>
-        <p:txBody>
-          <a:bodyPr wrap="square" lIns="0" tIns="0" rIns="0" bIns="0" rtlCol="0" anchor="ctr"/>
-          <a:lstStyle/>
-          <a:p>
-            <a:pPr algn="l" indent="0" marL="0">
-              <a:buNone/>
-            </a:pPr>
-            <a:r>
-              <a:rPr lang="en-US" sz="900" dirty="0">
-                <a:solidFill>
-                  <a:srgbClr val="9AA3D8"/>
-                </a:solidFill>
-                <a:latin typeface="Calibri" pitchFamily="34" charset="0"/>
-                <a:ea typeface="Calibri" pitchFamily="34" charset="-122"/>
-                <a:cs typeface="Calibri" pitchFamily="34" charset="-120"/>
-              </a:rPr>
-              <a:t>Usman Akram  •  COMSATS University Islamabad</a:t>
-            </a:r>
-            <a:endParaRPr lang="en-US" sz="900" dirty="0"/>
-          </a:p>
-        </p:txBody>
-      </p:sp>
-      <p:sp>
-        <p:nvSpPr>
-          <p:cNvPr id="23" name="Text 21"/>
-          <p:cNvSpPr txBox="1"/>
-          <p:nvPr/>
-        </p:nvSpPr>
-        <p:spPr>
-          <a:xfrm>
-            <a:off x="11155680" y="6446520"/>
-            <a:ext cx="457200" cy="292608"/>
-          </a:xfrm>
-          <a:prstGeom prst="rect">
-            <a:avLst/>
-          </a:prstGeom>
-          <a:noFill/>
-          <a:ln/>
-        </p:spPr>
-        <p:txBody>
-          <a:bodyPr wrap="square" lIns="0" tIns="0" rIns="0" bIns="0" rtlCol="0" anchor="ctr"/>
-          <a:lstStyle/>
-          <a:p>
-            <a:pPr algn="r" indent="0" marL="0">
-              <a:buNone/>
-            </a:pPr>
-            <a:r>
-              <a:rPr lang="en-US" sz="900" dirty="0">
-                <a:solidFill>
-                  <a:srgbClr val="9AA3D8"/>
-                </a:solidFill>
-                <a:latin typeface="Calibri" pitchFamily="34" charset="0"/>
-                <a:ea typeface="Calibri" pitchFamily="34" charset="-122"/>
-                <a:cs typeface="Calibri" pitchFamily="34" charset="-120"/>
-              </a:rPr>
-              <a:t>29</a:t>
-            </a:r>
-            <a:endParaRPr lang="en-US" sz="900" dirty="0"/>
+        </p:spPr>
+        <p:txBody>
+          <a:bodyPr wrap="none" lIns="0" rIns="0" tIns="0" bIns="0">
+            <a:spAutoFit/>
+          </a:bodyPr>
+          <a:lstStyle/>
+          <a:p>
+            <a:pPr algn="r"/>
+            <a:r>
+              <a:rPr sz="1000">
+                <a:solidFill>
+                  <a:srgbClr val="8A939B"/>
+                </a:solidFill>
+                <a:hlinkClick r:id="rId3"/>
+              </a:rPr>
+              <a:t>cuinotes.com</a:t>
+            </a:r>
+            <a:r>
+              <a:rPr sz="1000">
+                <a:solidFill>
+                  <a:srgbClr val="8A939B"/>
+                </a:solidFill>
+              </a:rPr>
+              <a:t>  ·  29</a:t>
+            </a:r>
           </a:p>
         </p:txBody>
       </p:sp>
@@ -12333,6 +11711,10 @@
           </a:solidFill>
           <a:ln/>
         </p:spPr>
+        <p:txBody>
+          <a:bodyPr/>
+          <a:p/>
+        </p:txBody>
       </p:sp>
       <p:sp>
         <p:nvSpPr>
@@ -12431,6 +11813,10 @@
           </a:solidFill>
           <a:ln/>
         </p:spPr>
+        <p:txBody>
+          <a:bodyPr/>
+          <a:p/>
+        </p:txBody>
       </p:sp>
       <p:sp>
         <p:nvSpPr>
@@ -12529,6 +11915,10 @@
           </a:solidFill>
           <a:ln/>
         </p:spPr>
+        <p:txBody>
+          <a:bodyPr/>
+          <a:p/>
+        </p:txBody>
       </p:sp>
       <p:sp>
         <p:nvSpPr>
@@ -12610,79 +12000,44 @@
       </p:sp>
       <p:sp>
         <p:nvSpPr>
-          <p:cNvPr id="13" name="Text 11"/>
+          <p:cNvPr id="15" name="cuinotes-footer-mark"/>
           <p:cNvSpPr txBox="1"/>
           <p:nvPr/>
         </p:nvSpPr>
         <p:spPr>
           <a:xfrm>
-            <a:off x="640080" y="6446520"/>
-            <a:ext cx="8686800" cy="292608"/>
+            <a:off x="9951720" y="6455664"/>
+            <a:ext cx="2011680" cy="292608"/>
           </a:xfrm>
           <a:prstGeom prst="rect">
             <a:avLst/>
           </a:prstGeom>
           <a:noFill/>
-          <a:ln/>
-        </p:spPr>
-        <p:txBody>
-          <a:bodyPr wrap="square" lIns="0" tIns="0" rIns="0" bIns="0" rtlCol="0" anchor="ctr"/>
-          <a:lstStyle/>
-          <a:p>
-            <a:pPr algn="l" indent="0" marL="0">
-              <a:buNone/>
-            </a:pPr>
-            <a:r>
-              <a:rPr lang="en-US" sz="900" dirty="0">
-                <a:solidFill>
-                  <a:srgbClr val="5D5D72"/>
-                </a:solidFill>
-                <a:latin typeface="Calibri" pitchFamily="34" charset="0"/>
-                <a:ea typeface="Calibri" pitchFamily="34" charset="-122"/>
-                <a:cs typeface="Calibri" pitchFamily="34" charset="-120"/>
-              </a:rPr>
-              <a:t>Usman Akram  •  COMSATS University Islamabad</a:t>
-            </a:r>
-            <a:endParaRPr lang="en-US" sz="900" dirty="0"/>
-          </a:p>
-        </p:txBody>
-      </p:sp>
-      <p:sp>
-        <p:nvSpPr>
-          <p:cNvPr id="14" name="Text 12"/>
-          <p:cNvSpPr txBox="1"/>
-          <p:nvPr/>
-        </p:nvSpPr>
-        <p:spPr>
-          <a:xfrm>
-            <a:off x="11155680" y="6446520"/>
-            <a:ext cx="457200" cy="292608"/>
-          </a:xfrm>
-          <a:prstGeom prst="rect">
-            <a:avLst/>
-          </a:prstGeom>
-          <a:noFill/>
-          <a:ln/>
-        </p:spPr>
-        <p:txBody>
-          <a:bodyPr wrap="square" lIns="0" tIns="0" rIns="0" bIns="0" rtlCol="0" anchor="ctr"/>
-          <a:lstStyle/>
-          <a:p>
-            <a:pPr algn="r" indent="0" marL="0">
-              <a:buNone/>
-            </a:pPr>
-            <a:r>
-              <a:rPr lang="en-US" sz="900" dirty="0">
-                <a:solidFill>
-                  <a:srgbClr val="5D5D72"/>
-                </a:solidFill>
-                <a:latin typeface="Calibri" pitchFamily="34" charset="0"/>
-                <a:ea typeface="Calibri" pitchFamily="34" charset="-122"/>
-                <a:cs typeface="Calibri" pitchFamily="34" charset="-120"/>
-              </a:rPr>
-              <a:t>3</a:t>
-            </a:r>
-            <a:endParaRPr lang="en-US" sz="900" dirty="0"/>
+        </p:spPr>
+        <p:txBody>
+          <a:bodyPr wrap="none" lIns="0" rIns="0" tIns="0" bIns="0">
+            <a:spAutoFit/>
+          </a:bodyPr>
+          <a:lstStyle/>
+          <a:p>
+            <a:pPr algn="r"/>
+            <a:r>
+              <a:rPr sz="1000">
+                <a:solidFill>
+                  <a:srgbClr val="8A939B"/>
+                </a:solidFill>
+                <a:hlinkClick r:id="rId3"/>
+              </a:rPr>
+              <a:t>cuinotes.com</a:t>
+            </a:r>
+            <a:r>
+              <a:rPr sz="1000">
+                <a:solidFill>
+                  <a:srgbClr val="8A939B"/>
+                </a:solidFill>
+              </a:rPr>
+              <a:t>  ·  3</a:t>
+            </a:r>
           </a:p>
         </p:txBody>
       </p:sp>
@@ -12856,6 +12211,10 @@
           </a:solidFill>
           <a:ln/>
         </p:spPr>
+        <p:txBody>
+          <a:bodyPr/>
+          <a:p/>
+        </p:txBody>
       </p:sp>
       <p:sp>
         <p:nvSpPr>
@@ -13072,6 +12431,10 @@
             </a:outerShdw>
           </a:effectLst>
         </p:spPr>
+        <p:txBody>
+          <a:bodyPr/>
+          <a:p/>
+        </p:txBody>
       </p:sp>
       <p:pic>
         <p:nvPicPr>
@@ -13099,79 +12462,44 @@
       </p:pic>
       <p:sp>
         <p:nvSpPr>
-          <p:cNvPr id="9" name="Text 6"/>
+          <p:cNvPr id="11" name="cuinotes-footer-mark"/>
           <p:cNvSpPr txBox="1"/>
           <p:nvPr/>
         </p:nvSpPr>
         <p:spPr>
           <a:xfrm>
-            <a:off x="640080" y="6446520"/>
-            <a:ext cx="8686800" cy="292608"/>
+            <a:off x="9951720" y="6455664"/>
+            <a:ext cx="2011680" cy="292608"/>
           </a:xfrm>
           <a:prstGeom prst="rect">
             <a:avLst/>
           </a:prstGeom>
           <a:noFill/>
-          <a:ln/>
-        </p:spPr>
-        <p:txBody>
-          <a:bodyPr wrap="square" lIns="0" tIns="0" rIns="0" bIns="0" rtlCol="0" anchor="ctr"/>
-          <a:lstStyle/>
-          <a:p>
-            <a:pPr algn="l" indent="0" marL="0">
-              <a:buNone/>
-            </a:pPr>
-            <a:r>
-              <a:rPr lang="en-US" sz="900" dirty="0">
-                <a:solidFill>
-                  <a:srgbClr val="5D5D72"/>
-                </a:solidFill>
-                <a:latin typeface="Calibri" pitchFamily="34" charset="0"/>
-                <a:ea typeface="Calibri" pitchFamily="34" charset="-122"/>
-                <a:cs typeface="Calibri" pitchFamily="34" charset="-120"/>
-              </a:rPr>
-              <a:t>Usman Akram  •  COMSATS University Islamabad</a:t>
-            </a:r>
-            <a:endParaRPr lang="en-US" sz="900" dirty="0"/>
-          </a:p>
-        </p:txBody>
-      </p:sp>
-      <p:sp>
-        <p:nvSpPr>
-          <p:cNvPr id="10" name="Text 7"/>
-          <p:cNvSpPr txBox="1"/>
-          <p:nvPr/>
-        </p:nvSpPr>
-        <p:spPr>
-          <a:xfrm>
-            <a:off x="11155680" y="6446520"/>
-            <a:ext cx="457200" cy="292608"/>
-          </a:xfrm>
-          <a:prstGeom prst="rect">
-            <a:avLst/>
-          </a:prstGeom>
-          <a:noFill/>
-          <a:ln/>
-        </p:spPr>
-        <p:txBody>
-          <a:bodyPr wrap="square" lIns="0" tIns="0" rIns="0" bIns="0" rtlCol="0" anchor="ctr"/>
-          <a:lstStyle/>
-          <a:p>
-            <a:pPr algn="r" indent="0" marL="0">
-              <a:buNone/>
-            </a:pPr>
-            <a:r>
-              <a:rPr lang="en-US" sz="900" dirty="0">
-                <a:solidFill>
-                  <a:srgbClr val="5D5D72"/>
-                </a:solidFill>
-                <a:latin typeface="Calibri" pitchFamily="34" charset="0"/>
-                <a:ea typeface="Calibri" pitchFamily="34" charset="-122"/>
-                <a:cs typeface="Calibri" pitchFamily="34" charset="-120"/>
-              </a:rPr>
-              <a:t>4</a:t>
-            </a:r>
-            <a:endParaRPr lang="en-US" sz="900" dirty="0"/>
+        </p:spPr>
+        <p:txBody>
+          <a:bodyPr wrap="none" lIns="0" rIns="0" tIns="0" bIns="0">
+            <a:spAutoFit/>
+          </a:bodyPr>
+          <a:lstStyle/>
+          <a:p>
+            <a:pPr algn="r"/>
+            <a:r>
+              <a:rPr sz="1000">
+                <a:solidFill>
+                  <a:srgbClr val="8A939B"/>
+                </a:solidFill>
+                <a:hlinkClick r:id="rId4"/>
+              </a:rPr>
+              <a:t>cuinotes.com</a:t>
+            </a:r>
+            <a:r>
+              <a:rPr sz="1000">
+                <a:solidFill>
+                  <a:srgbClr val="8A939B"/>
+                </a:solidFill>
+              </a:rPr>
+              <a:t>  ·  4</a:t>
+            </a:r>
           </a:p>
         </p:txBody>
       </p:sp>
@@ -13306,6 +12634,10 @@
           </a:solidFill>
           <a:ln/>
         </p:spPr>
+        <p:txBody>
+          <a:bodyPr/>
+          <a:p/>
+        </p:txBody>
       </p:sp>
       <p:sp>
         <p:nvSpPr>
@@ -13462,6 +12794,10 @@
             </a:outerShdw>
           </a:effectLst>
         </p:spPr>
+        <p:txBody>
+          <a:bodyPr/>
+          <a:p/>
+        </p:txBody>
       </p:sp>
       <p:pic>
         <p:nvPicPr>
@@ -13489,79 +12825,44 @@
       </p:pic>
       <p:sp>
         <p:nvSpPr>
-          <p:cNvPr id="8" name="Text 5"/>
+          <p:cNvPr id="10" name="cuinotes-footer-mark"/>
           <p:cNvSpPr txBox="1"/>
           <p:nvPr/>
         </p:nvSpPr>
         <p:spPr>
           <a:xfrm>
-            <a:off x="640080" y="6446520"/>
-            <a:ext cx="8686800" cy="292608"/>
+            <a:off x="9951720" y="6455664"/>
+            <a:ext cx="2011680" cy="292608"/>
           </a:xfrm>
           <a:prstGeom prst="rect">
             <a:avLst/>
           </a:prstGeom>
           <a:noFill/>
-          <a:ln/>
-        </p:spPr>
-        <p:txBody>
-          <a:bodyPr wrap="square" lIns="0" tIns="0" rIns="0" bIns="0" rtlCol="0" anchor="ctr"/>
-          <a:lstStyle/>
-          <a:p>
-            <a:pPr algn="l" indent="0" marL="0">
-              <a:buNone/>
-            </a:pPr>
-            <a:r>
-              <a:rPr lang="en-US" sz="900" dirty="0">
-                <a:solidFill>
-                  <a:srgbClr val="5D5D72"/>
-                </a:solidFill>
-                <a:latin typeface="Calibri" pitchFamily="34" charset="0"/>
-                <a:ea typeface="Calibri" pitchFamily="34" charset="-122"/>
-                <a:cs typeface="Calibri" pitchFamily="34" charset="-120"/>
-              </a:rPr>
-              <a:t>Usman Akram  •  COMSATS University Islamabad</a:t>
-            </a:r>
-            <a:endParaRPr lang="en-US" sz="900" dirty="0"/>
-          </a:p>
-        </p:txBody>
-      </p:sp>
-      <p:sp>
-        <p:nvSpPr>
-          <p:cNvPr id="9" name="Text 6"/>
-          <p:cNvSpPr txBox="1"/>
-          <p:nvPr/>
-        </p:nvSpPr>
-        <p:spPr>
-          <a:xfrm>
-            <a:off x="11155680" y="6446520"/>
-            <a:ext cx="457200" cy="292608"/>
-          </a:xfrm>
-          <a:prstGeom prst="rect">
-            <a:avLst/>
-          </a:prstGeom>
-          <a:noFill/>
-          <a:ln/>
-        </p:spPr>
-        <p:txBody>
-          <a:bodyPr wrap="square" lIns="0" tIns="0" rIns="0" bIns="0" rtlCol="0" anchor="ctr"/>
-          <a:lstStyle/>
-          <a:p>
-            <a:pPr algn="r" indent="0" marL="0">
-              <a:buNone/>
-            </a:pPr>
-            <a:r>
-              <a:rPr lang="en-US" sz="900" dirty="0">
-                <a:solidFill>
-                  <a:srgbClr val="5D5D72"/>
-                </a:solidFill>
-                <a:latin typeface="Calibri" pitchFamily="34" charset="0"/>
-                <a:ea typeface="Calibri" pitchFamily="34" charset="-122"/>
-                <a:cs typeface="Calibri" pitchFamily="34" charset="-120"/>
-              </a:rPr>
-              <a:t>5</a:t>
-            </a:r>
-            <a:endParaRPr lang="en-US" sz="900" dirty="0"/>
+        </p:spPr>
+        <p:txBody>
+          <a:bodyPr wrap="none" lIns="0" rIns="0" tIns="0" bIns="0">
+            <a:spAutoFit/>
+          </a:bodyPr>
+          <a:lstStyle/>
+          <a:p>
+            <a:pPr algn="r"/>
+            <a:r>
+              <a:rPr sz="1000">
+                <a:solidFill>
+                  <a:srgbClr val="8A939B"/>
+                </a:solidFill>
+                <a:hlinkClick r:id="rId4"/>
+              </a:rPr>
+              <a:t>cuinotes.com</a:t>
+            </a:r>
+            <a:r>
+              <a:rPr sz="1000">
+                <a:solidFill>
+                  <a:srgbClr val="8A939B"/>
+                </a:solidFill>
+              </a:rPr>
+              <a:t>  ·  5</a:t>
+            </a:r>
           </a:p>
         </p:txBody>
       </p:sp>
@@ -13696,6 +12997,10 @@
           </a:solidFill>
           <a:ln/>
         </p:spPr>
+        <p:txBody>
+          <a:bodyPr/>
+          <a:p/>
+        </p:txBody>
       </p:sp>
       <p:sp>
         <p:nvSpPr>
@@ -13852,6 +13157,10 @@
             </a:outerShdw>
           </a:effectLst>
         </p:spPr>
+        <p:txBody>
+          <a:bodyPr/>
+          <a:p/>
+        </p:txBody>
       </p:sp>
       <p:pic>
         <p:nvPicPr>
@@ -13879,79 +13188,44 @@
       </p:pic>
       <p:sp>
         <p:nvSpPr>
-          <p:cNvPr id="8" name="Text 5"/>
+          <p:cNvPr id="10" name="cuinotes-footer-mark"/>
           <p:cNvSpPr txBox="1"/>
           <p:nvPr/>
         </p:nvSpPr>
         <p:spPr>
           <a:xfrm>
-            <a:off x="640080" y="6446520"/>
-            <a:ext cx="8686800" cy="292608"/>
+            <a:off x="9951720" y="6455664"/>
+            <a:ext cx="2011680" cy="292608"/>
           </a:xfrm>
           <a:prstGeom prst="rect">
             <a:avLst/>
           </a:prstGeom>
           <a:noFill/>
-          <a:ln/>
-        </p:spPr>
-        <p:txBody>
-          <a:bodyPr wrap="square" lIns="0" tIns="0" rIns="0" bIns="0" rtlCol="0" anchor="ctr"/>
-          <a:lstStyle/>
-          <a:p>
-            <a:pPr algn="l" indent="0" marL="0">
-              <a:buNone/>
-            </a:pPr>
-            <a:r>
-              <a:rPr lang="en-US" sz="900" dirty="0">
-                <a:solidFill>
-                  <a:srgbClr val="5D5D72"/>
-                </a:solidFill>
-                <a:latin typeface="Calibri" pitchFamily="34" charset="0"/>
-                <a:ea typeface="Calibri" pitchFamily="34" charset="-122"/>
-                <a:cs typeface="Calibri" pitchFamily="34" charset="-120"/>
-              </a:rPr>
-              <a:t>Usman Akram  •  COMSATS University Islamabad</a:t>
-            </a:r>
-            <a:endParaRPr lang="en-US" sz="900" dirty="0"/>
-          </a:p>
-        </p:txBody>
-      </p:sp>
-      <p:sp>
-        <p:nvSpPr>
-          <p:cNvPr id="9" name="Text 6"/>
-          <p:cNvSpPr txBox="1"/>
-          <p:nvPr/>
-        </p:nvSpPr>
-        <p:spPr>
-          <a:xfrm>
-            <a:off x="11155680" y="6446520"/>
-            <a:ext cx="457200" cy="292608"/>
-          </a:xfrm>
-          <a:prstGeom prst="rect">
-            <a:avLst/>
-          </a:prstGeom>
-          <a:noFill/>
-          <a:ln/>
-        </p:spPr>
-        <p:txBody>
-          <a:bodyPr wrap="square" lIns="0" tIns="0" rIns="0" bIns="0" rtlCol="0" anchor="ctr"/>
-          <a:lstStyle/>
-          <a:p>
-            <a:pPr algn="r" indent="0" marL="0">
-              <a:buNone/>
-            </a:pPr>
-            <a:r>
-              <a:rPr lang="en-US" sz="900" dirty="0">
-                <a:solidFill>
-                  <a:srgbClr val="5D5D72"/>
-                </a:solidFill>
-                <a:latin typeface="Calibri" pitchFamily="34" charset="0"/>
-                <a:ea typeface="Calibri" pitchFamily="34" charset="-122"/>
-                <a:cs typeface="Calibri" pitchFamily="34" charset="-120"/>
-              </a:rPr>
-              <a:t>6</a:t>
-            </a:r>
-            <a:endParaRPr lang="en-US" sz="900" dirty="0"/>
+        </p:spPr>
+        <p:txBody>
+          <a:bodyPr wrap="none" lIns="0" rIns="0" tIns="0" bIns="0">
+            <a:spAutoFit/>
+          </a:bodyPr>
+          <a:lstStyle/>
+          <a:p>
+            <a:pPr algn="r"/>
+            <a:r>
+              <a:rPr sz="1000">
+                <a:solidFill>
+                  <a:srgbClr val="8A939B"/>
+                </a:solidFill>
+                <a:hlinkClick r:id="rId4"/>
+              </a:rPr>
+              <a:t>cuinotes.com</a:t>
+            </a:r>
+            <a:r>
+              <a:rPr sz="1000">
+                <a:solidFill>
+                  <a:srgbClr val="8A939B"/>
+                </a:solidFill>
+              </a:rPr>
+              <a:t>  ·  6</a:t>
+            </a:r>
           </a:p>
         </p:txBody>
       </p:sp>
@@ -14086,6 +13360,10 @@
           </a:solidFill>
           <a:ln/>
         </p:spPr>
+        <p:txBody>
+          <a:bodyPr/>
+          <a:p/>
+        </p:txBody>
       </p:sp>
       <p:sp>
         <p:nvSpPr>
@@ -14242,6 +13520,10 @@
             </a:outerShdw>
           </a:effectLst>
         </p:spPr>
+        <p:txBody>
+          <a:bodyPr/>
+          <a:p/>
+        </p:txBody>
       </p:sp>
       <p:pic>
         <p:nvPicPr>
@@ -14269,79 +13551,44 @@
       </p:pic>
       <p:sp>
         <p:nvSpPr>
-          <p:cNvPr id="8" name="Text 5"/>
+          <p:cNvPr id="10" name="cuinotes-footer-mark"/>
           <p:cNvSpPr txBox="1"/>
           <p:nvPr/>
         </p:nvSpPr>
         <p:spPr>
           <a:xfrm>
-            <a:off x="640080" y="6446520"/>
-            <a:ext cx="8686800" cy="292608"/>
+            <a:off x="9951720" y="6455664"/>
+            <a:ext cx="2011680" cy="292608"/>
           </a:xfrm>
           <a:prstGeom prst="rect">
             <a:avLst/>
           </a:prstGeom>
           <a:noFill/>
-          <a:ln/>
-        </p:spPr>
-        <p:txBody>
-          <a:bodyPr wrap="square" lIns="0" tIns="0" rIns="0" bIns="0" rtlCol="0" anchor="ctr"/>
-          <a:lstStyle/>
-          <a:p>
-            <a:pPr algn="l" indent="0" marL="0">
-              <a:buNone/>
-            </a:pPr>
-            <a:r>
-              <a:rPr lang="en-US" sz="900" dirty="0">
-                <a:solidFill>
-                  <a:srgbClr val="5D5D72"/>
-                </a:solidFill>
-                <a:latin typeface="Calibri" pitchFamily="34" charset="0"/>
-                <a:ea typeface="Calibri" pitchFamily="34" charset="-122"/>
-                <a:cs typeface="Calibri" pitchFamily="34" charset="-120"/>
-              </a:rPr>
-              <a:t>Usman Akram  •  COMSATS University Islamabad</a:t>
-            </a:r>
-            <a:endParaRPr lang="en-US" sz="900" dirty="0"/>
-          </a:p>
-        </p:txBody>
-      </p:sp>
-      <p:sp>
-        <p:nvSpPr>
-          <p:cNvPr id="9" name="Text 6"/>
-          <p:cNvSpPr txBox="1"/>
-          <p:nvPr/>
-        </p:nvSpPr>
-        <p:spPr>
-          <a:xfrm>
-            <a:off x="11155680" y="6446520"/>
-            <a:ext cx="457200" cy="292608"/>
-          </a:xfrm>
-          <a:prstGeom prst="rect">
-            <a:avLst/>
-          </a:prstGeom>
-          <a:noFill/>
-          <a:ln/>
-        </p:spPr>
-        <p:txBody>
-          <a:bodyPr wrap="square" lIns="0" tIns="0" rIns="0" bIns="0" rtlCol="0" anchor="ctr"/>
-          <a:lstStyle/>
-          <a:p>
-            <a:pPr algn="r" indent="0" marL="0">
-              <a:buNone/>
-            </a:pPr>
-            <a:r>
-              <a:rPr lang="en-US" sz="900" dirty="0">
-                <a:solidFill>
-                  <a:srgbClr val="5D5D72"/>
-                </a:solidFill>
-                <a:latin typeface="Calibri" pitchFamily="34" charset="0"/>
-                <a:ea typeface="Calibri" pitchFamily="34" charset="-122"/>
-                <a:cs typeface="Calibri" pitchFamily="34" charset="-120"/>
-              </a:rPr>
-              <a:t>7</a:t>
-            </a:r>
-            <a:endParaRPr lang="en-US" sz="900" dirty="0"/>
+        </p:spPr>
+        <p:txBody>
+          <a:bodyPr wrap="none" lIns="0" rIns="0" tIns="0" bIns="0">
+            <a:spAutoFit/>
+          </a:bodyPr>
+          <a:lstStyle/>
+          <a:p>
+            <a:pPr algn="r"/>
+            <a:r>
+              <a:rPr sz="1000">
+                <a:solidFill>
+                  <a:srgbClr val="8A939B"/>
+                </a:solidFill>
+                <a:hlinkClick r:id="rId4"/>
+              </a:rPr>
+              <a:t>cuinotes.com</a:t>
+            </a:r>
+            <a:r>
+              <a:rPr sz="1000">
+                <a:solidFill>
+                  <a:srgbClr val="8A939B"/>
+                </a:solidFill>
+              </a:rPr>
+              <a:t>  ·  7</a:t>
+            </a:r>
           </a:p>
         </p:txBody>
       </p:sp>
@@ -14476,6 +13723,10 @@
           </a:solidFill>
           <a:ln/>
         </p:spPr>
+        <p:txBody>
+          <a:bodyPr/>
+          <a:p/>
+        </p:txBody>
       </p:sp>
       <p:sp>
         <p:nvSpPr>
@@ -14612,6 +13863,10 @@
             </a:outerShdw>
           </a:effectLst>
         </p:spPr>
+        <p:txBody>
+          <a:bodyPr/>
+          <a:p/>
+        </p:txBody>
       </p:sp>
       <p:pic>
         <p:nvPicPr>
@@ -14639,79 +13894,44 @@
       </p:pic>
       <p:sp>
         <p:nvSpPr>
-          <p:cNvPr id="8" name="Text 5"/>
+          <p:cNvPr id="10" name="cuinotes-footer-mark"/>
           <p:cNvSpPr txBox="1"/>
           <p:nvPr/>
         </p:nvSpPr>
         <p:spPr>
           <a:xfrm>
-            <a:off x="640080" y="6446520"/>
-            <a:ext cx="8686800" cy="292608"/>
+            <a:off x="9951720" y="6455664"/>
+            <a:ext cx="2011680" cy="292608"/>
           </a:xfrm>
           <a:prstGeom prst="rect">
             <a:avLst/>
           </a:prstGeom>
           <a:noFill/>
-          <a:ln/>
-        </p:spPr>
-        <p:txBody>
-          <a:bodyPr wrap="square" lIns="0" tIns="0" rIns="0" bIns="0" rtlCol="0" anchor="ctr"/>
-          <a:lstStyle/>
-          <a:p>
-            <a:pPr algn="l" indent="0" marL="0">
-              <a:buNone/>
-            </a:pPr>
-            <a:r>
-              <a:rPr lang="en-US" sz="900" dirty="0">
-                <a:solidFill>
-                  <a:srgbClr val="5D5D72"/>
-                </a:solidFill>
-                <a:latin typeface="Calibri" pitchFamily="34" charset="0"/>
-                <a:ea typeface="Calibri" pitchFamily="34" charset="-122"/>
-                <a:cs typeface="Calibri" pitchFamily="34" charset="-120"/>
-              </a:rPr>
-              <a:t>Usman Akram  •  COMSATS University Islamabad</a:t>
-            </a:r>
-            <a:endParaRPr lang="en-US" sz="900" dirty="0"/>
-          </a:p>
-        </p:txBody>
-      </p:sp>
-      <p:sp>
-        <p:nvSpPr>
-          <p:cNvPr id="9" name="Text 6"/>
-          <p:cNvSpPr txBox="1"/>
-          <p:nvPr/>
-        </p:nvSpPr>
-        <p:spPr>
-          <a:xfrm>
-            <a:off x="11155680" y="6446520"/>
-            <a:ext cx="457200" cy="292608"/>
-          </a:xfrm>
-          <a:prstGeom prst="rect">
-            <a:avLst/>
-          </a:prstGeom>
-          <a:noFill/>
-          <a:ln/>
-        </p:spPr>
-        <p:txBody>
-          <a:bodyPr wrap="square" lIns="0" tIns="0" rIns="0" bIns="0" rtlCol="0" anchor="ctr"/>
-          <a:lstStyle/>
-          <a:p>
-            <a:pPr algn="r" indent="0" marL="0">
-              <a:buNone/>
-            </a:pPr>
-            <a:r>
-              <a:rPr lang="en-US" sz="900" dirty="0">
-                <a:solidFill>
-                  <a:srgbClr val="5D5D72"/>
-                </a:solidFill>
-                <a:latin typeface="Calibri" pitchFamily="34" charset="0"/>
-                <a:ea typeface="Calibri" pitchFamily="34" charset="-122"/>
-                <a:cs typeface="Calibri" pitchFamily="34" charset="-120"/>
-              </a:rPr>
-              <a:t>8</a:t>
-            </a:r>
-            <a:endParaRPr lang="en-US" sz="900" dirty="0"/>
+        </p:spPr>
+        <p:txBody>
+          <a:bodyPr wrap="none" lIns="0" rIns="0" tIns="0" bIns="0">
+            <a:spAutoFit/>
+          </a:bodyPr>
+          <a:lstStyle/>
+          <a:p>
+            <a:pPr algn="r"/>
+            <a:r>
+              <a:rPr sz="1000">
+                <a:solidFill>
+                  <a:srgbClr val="8A939B"/>
+                </a:solidFill>
+                <a:hlinkClick r:id="rId4"/>
+              </a:rPr>
+              <a:t>cuinotes.com</a:t>
+            </a:r>
+            <a:r>
+              <a:rPr sz="1000">
+                <a:solidFill>
+                  <a:srgbClr val="8A939B"/>
+                </a:solidFill>
+              </a:rPr>
+              <a:t>  ·  8</a:t>
+            </a:r>
           </a:p>
         </p:txBody>
       </p:sp>
@@ -15547,79 +14767,44 @@
       </p:graphicFrame>
       <p:sp>
         <p:nvSpPr>
-          <p:cNvPr id="5" name="Text 2"/>
+          <p:cNvPr id="11" name="cuinotes-footer-mark"/>
           <p:cNvSpPr txBox="1"/>
           <p:nvPr/>
         </p:nvSpPr>
         <p:spPr>
           <a:xfrm>
-            <a:off x="640080" y="6446520"/>
-            <a:ext cx="8686800" cy="292608"/>
+            <a:off x="9951720" y="6455664"/>
+            <a:ext cx="2011680" cy="292608"/>
           </a:xfrm>
           <a:prstGeom prst="rect">
             <a:avLst/>
           </a:prstGeom>
           <a:noFill/>
-          <a:ln/>
-        </p:spPr>
-        <p:txBody>
-          <a:bodyPr wrap="square" lIns="0" tIns="0" rIns="0" bIns="0" rtlCol="0" anchor="ctr"/>
-          <a:lstStyle/>
-          <a:p>
-            <a:pPr algn="l" indent="0" marL="0">
-              <a:buNone/>
-            </a:pPr>
-            <a:r>
-              <a:rPr lang="en-US" sz="900" dirty="0">
-                <a:solidFill>
-                  <a:srgbClr val="5D5D72"/>
-                </a:solidFill>
-                <a:latin typeface="Calibri" pitchFamily="34" charset="0"/>
-                <a:ea typeface="Calibri" pitchFamily="34" charset="-122"/>
-                <a:cs typeface="Calibri" pitchFamily="34" charset="-120"/>
-              </a:rPr>
-              <a:t>Usman Akram  •  COMSATS University Islamabad</a:t>
-            </a:r>
-            <a:endParaRPr lang="en-US" sz="900" dirty="0"/>
-          </a:p>
-        </p:txBody>
-      </p:sp>
-      <p:sp>
-        <p:nvSpPr>
-          <p:cNvPr id="6" name="Text 3"/>
-          <p:cNvSpPr txBox="1"/>
-          <p:nvPr/>
-        </p:nvSpPr>
-        <p:spPr>
-          <a:xfrm>
-            <a:off x="11155680" y="6446520"/>
-            <a:ext cx="457200" cy="292608"/>
-          </a:xfrm>
-          <a:prstGeom prst="rect">
-            <a:avLst/>
-          </a:prstGeom>
-          <a:noFill/>
-          <a:ln/>
-        </p:spPr>
-        <p:txBody>
-          <a:bodyPr wrap="square" lIns="0" tIns="0" rIns="0" bIns="0" rtlCol="0" anchor="ctr"/>
-          <a:lstStyle/>
-          <a:p>
-            <a:pPr algn="r" indent="0" marL="0">
-              <a:buNone/>
-            </a:pPr>
-            <a:r>
-              <a:rPr lang="en-US" sz="900" dirty="0">
-                <a:solidFill>
-                  <a:srgbClr val="5D5D72"/>
-                </a:solidFill>
-                <a:latin typeface="Calibri" pitchFamily="34" charset="0"/>
-                <a:ea typeface="Calibri" pitchFamily="34" charset="-122"/>
-                <a:cs typeface="Calibri" pitchFamily="34" charset="-120"/>
-              </a:rPr>
-              <a:t>9</a:t>
-            </a:r>
-            <a:endParaRPr lang="en-US" sz="900" dirty="0"/>
+        </p:spPr>
+        <p:txBody>
+          <a:bodyPr wrap="none" lIns="0" rIns="0" tIns="0" bIns="0">
+            <a:spAutoFit/>
+          </a:bodyPr>
+          <a:lstStyle/>
+          <a:p>
+            <a:pPr algn="r"/>
+            <a:r>
+              <a:rPr sz="1000">
+                <a:solidFill>
+                  <a:srgbClr val="8A939B"/>
+                </a:solidFill>
+                <a:hlinkClick r:id="rId3"/>
+              </a:rPr>
+              <a:t>cuinotes.com</a:t>
+            </a:r>
+            <a:r>
+              <a:rPr sz="1000">
+                <a:solidFill>
+                  <a:srgbClr val="8A939B"/>
+                </a:solidFill>
+              </a:rPr>
+              <a:t>  ·  9</a:t>
+            </a:r>
           </a:p>
         </p:txBody>
       </p:sp>

--- a/slides/CSC336-Lecture-07-CSS-Positioning-and-Stacking.pptx
+++ b/slides/CSC336-Lecture-07-CSS-Positioning-and-Stacking.pptx
@@ -3716,9 +3716,13 @@
             </a:avLst>
           </a:prstGeom>
           <a:solidFill>
-            <a:srgbClr val="1E1E4C"/>
+            <a:srgbClr val="F7F8F9"/>
           </a:solidFill>
-          <a:ln/>
+          <a:ln w="9525">
+            <a:solidFill>
+              <a:srgbClr val="D0D5DD"/>
+            </a:solidFill>
+          </a:ln>
         </p:spPr>
         <p:txBody>
           <a:bodyPr/>
@@ -3755,7 +3759,7 @@
             <a:r>
               <a:rPr lang="en-US" sz="1400" dirty="0">
                 <a:solidFill>
-                  <a:srgbClr val="C9D3F5"/>
+                  <a:srgbClr val="1F2429"/>
                 </a:solidFill>
                 <a:latin typeface="Courier New" pitchFamily="34" charset="0"/>
                 <a:ea typeface="Courier New" pitchFamily="34" charset="-122"/>
@@ -3784,7 +3788,7 @@
             <a:r>
               <a:rPr lang="en-US" sz="1400" dirty="0">
                 <a:solidFill>
-                  <a:srgbClr val="C9D3F5"/>
+                  <a:srgbClr val="1F2429"/>
                 </a:solidFill>
                 <a:latin typeface="Courier New" pitchFamily="34" charset="0"/>
                 <a:ea typeface="Courier New" pitchFamily="34" charset="-122"/>
@@ -3804,7 +3808,7 @@
             <a:r>
               <a:rPr lang="en-US" sz="1400" dirty="0">
                 <a:solidFill>
-                  <a:srgbClr val="C9D3F5"/>
+                  <a:srgbClr val="1F2429"/>
                 </a:solidFill>
                 <a:latin typeface="Courier New" pitchFamily="34" charset="0"/>
                 <a:ea typeface="Courier New" pitchFamily="34" charset="-122"/>
@@ -3824,7 +3828,7 @@
             <a:r>
               <a:rPr lang="en-US" sz="1400" dirty="0">
                 <a:solidFill>
-                  <a:srgbClr val="C9D3F5"/>
+                  <a:srgbClr val="1F2429"/>
                 </a:solidFill>
                 <a:latin typeface="Courier New" pitchFamily="34" charset="0"/>
                 <a:ea typeface="Courier New" pitchFamily="34" charset="-122"/>
@@ -3844,7 +3848,7 @@
             <a:r>
               <a:rPr lang="en-US" sz="1400" dirty="0">
                 <a:solidFill>
-                  <a:srgbClr val="C9D3F5"/>
+                  <a:srgbClr val="1F2429"/>
                 </a:solidFill>
                 <a:latin typeface="Courier New" pitchFamily="34" charset="0"/>
                 <a:ea typeface="Courier New" pitchFamily="34" charset="-122"/>
@@ -4280,9 +4284,13 @@
             </a:avLst>
           </a:prstGeom>
           <a:solidFill>
-            <a:srgbClr val="1E1E4C"/>
+            <a:srgbClr val="F7F8F9"/>
           </a:solidFill>
-          <a:ln/>
+          <a:ln w="9525">
+            <a:solidFill>
+              <a:srgbClr val="D0D5DD"/>
+            </a:solidFill>
+          </a:ln>
         </p:spPr>
         <p:txBody>
           <a:bodyPr/>
@@ -4319,7 +4327,7 @@
             <a:r>
               <a:rPr lang="en-US" sz="1400" dirty="0">
                 <a:solidFill>
-                  <a:srgbClr val="C9D3F5"/>
+                  <a:srgbClr val="1F2429"/>
                 </a:solidFill>
                 <a:latin typeface="Courier New" pitchFamily="34" charset="0"/>
                 <a:ea typeface="Courier New" pitchFamily="34" charset="-122"/>
@@ -4339,7 +4347,7 @@
             <a:r>
               <a:rPr lang="en-US" sz="1400" dirty="0">
                 <a:solidFill>
-                  <a:srgbClr val="C9D3F5"/>
+                  <a:srgbClr val="1F2429"/>
                 </a:solidFill>
                 <a:latin typeface="Courier New" pitchFamily="34" charset="0"/>
                 <a:ea typeface="Courier New" pitchFamily="34" charset="-122"/>
@@ -4359,7 +4367,7 @@
             <a:r>
               <a:rPr lang="en-US" sz="1400" dirty="0">
                 <a:solidFill>
-                  <a:srgbClr val="C9D3F5"/>
+                  <a:srgbClr val="1F2429"/>
                 </a:solidFill>
                 <a:latin typeface="Courier New" pitchFamily="34" charset="0"/>
                 <a:ea typeface="Courier New" pitchFamily="34" charset="-122"/>
@@ -4580,9 +4588,13 @@
             </a:avLst>
           </a:prstGeom>
           <a:solidFill>
-            <a:srgbClr val="1E1E4C"/>
+            <a:srgbClr val="F7F8F9"/>
           </a:solidFill>
-          <a:ln/>
+          <a:ln w="9525">
+            <a:solidFill>
+              <a:srgbClr val="D0D5DD"/>
+            </a:solidFill>
+          </a:ln>
         </p:spPr>
         <p:txBody>
           <a:bodyPr/>
@@ -4619,7 +4631,7 @@
             <a:r>
               <a:rPr lang="en-US" sz="1400" dirty="0">
                 <a:solidFill>
-                  <a:srgbClr val="C9D3F5"/>
+                  <a:srgbClr val="1F2429"/>
                 </a:solidFill>
                 <a:latin typeface="Courier New" pitchFamily="34" charset="0"/>
                 <a:ea typeface="Courier New" pitchFamily="34" charset="-122"/>
@@ -4639,7 +4651,7 @@
             <a:r>
               <a:rPr lang="en-US" sz="1400" dirty="0">
                 <a:solidFill>
-                  <a:srgbClr val="C9D3F5"/>
+                  <a:srgbClr val="1F2429"/>
                 </a:solidFill>
                 <a:latin typeface="Courier New" pitchFamily="34" charset="0"/>
                 <a:ea typeface="Courier New" pitchFamily="34" charset="-122"/>
@@ -5417,9 +5429,13 @@
             </a:avLst>
           </a:prstGeom>
           <a:solidFill>
-            <a:srgbClr val="1E1E4C"/>
+            <a:srgbClr val="F7F8F9"/>
           </a:solidFill>
-          <a:ln/>
+          <a:ln w="9525">
+            <a:solidFill>
+              <a:srgbClr val="D0D5DD"/>
+            </a:solidFill>
+          </a:ln>
         </p:spPr>
         <p:txBody>
           <a:bodyPr/>
@@ -5456,7 +5472,7 @@
             <a:r>
               <a:rPr lang="en-US" sz="1400" dirty="0">
                 <a:solidFill>
-                  <a:srgbClr val="C9D3F5"/>
+                  <a:srgbClr val="1F2429"/>
                 </a:solidFill>
                 <a:latin typeface="Courier New" pitchFamily="34" charset="0"/>
                 <a:ea typeface="Courier New" pitchFamily="34" charset="-122"/>
@@ -5892,9 +5908,13 @@
             </a:avLst>
           </a:prstGeom>
           <a:solidFill>
-            <a:srgbClr val="1E1E4C"/>
+            <a:srgbClr val="F7F8F9"/>
           </a:solidFill>
-          <a:ln/>
+          <a:ln w="9525">
+            <a:solidFill>
+              <a:srgbClr val="D0D5DD"/>
+            </a:solidFill>
+          </a:ln>
         </p:spPr>
         <p:txBody>
           <a:bodyPr/>
@@ -5931,7 +5951,7 @@
             <a:r>
               <a:rPr lang="en-US" sz="1400" dirty="0">
                 <a:solidFill>
-                  <a:srgbClr val="C9D3F5"/>
+                  <a:srgbClr val="1F2429"/>
                 </a:solidFill>
                 <a:latin typeface="Courier New" pitchFamily="34" charset="0"/>
                 <a:ea typeface="Courier New" pitchFamily="34" charset="-122"/>
@@ -5951,7 +5971,7 @@
             <a:r>
               <a:rPr lang="en-US" sz="1400" dirty="0">
                 <a:solidFill>
-                  <a:srgbClr val="C9D3F5"/>
+                  <a:srgbClr val="1F2429"/>
                 </a:solidFill>
                 <a:latin typeface="Courier New" pitchFamily="34" charset="0"/>
                 <a:ea typeface="Courier New" pitchFamily="34" charset="-122"/>
@@ -5971,7 +5991,7 @@
             <a:r>
               <a:rPr lang="en-US" sz="1400" dirty="0">
                 <a:solidFill>
-                  <a:srgbClr val="C9D3F5"/>
+                  <a:srgbClr val="1F2429"/>
                 </a:solidFill>
                 <a:latin typeface="Courier New" pitchFamily="34" charset="0"/>
                 <a:ea typeface="Courier New" pitchFamily="34" charset="-122"/>
@@ -5991,7 +6011,7 @@
             <a:r>
               <a:rPr lang="en-US" sz="1400" dirty="0">
                 <a:solidFill>
-                  <a:srgbClr val="C9D3F5"/>
+                  <a:srgbClr val="1F2429"/>
                 </a:solidFill>
                 <a:latin typeface="Courier New" pitchFamily="34" charset="0"/>
                 <a:ea typeface="Courier New" pitchFamily="34" charset="-122"/>
@@ -6212,9 +6232,13 @@
             </a:avLst>
           </a:prstGeom>
           <a:solidFill>
-            <a:srgbClr val="1E1E4C"/>
+            <a:srgbClr val="F7F8F9"/>
           </a:solidFill>
-          <a:ln/>
+          <a:ln w="9525">
+            <a:solidFill>
+              <a:srgbClr val="D0D5DD"/>
+            </a:solidFill>
+          </a:ln>
         </p:spPr>
         <p:txBody>
           <a:bodyPr/>
@@ -6251,7 +6275,7 @@
             <a:r>
               <a:rPr lang="en-US" sz="1400" dirty="0">
                 <a:solidFill>
-                  <a:srgbClr val="C9D3F5"/>
+                  <a:srgbClr val="1F2429"/>
                 </a:solidFill>
                 <a:latin typeface="Courier New" pitchFamily="34" charset="0"/>
                 <a:ea typeface="Courier New" pitchFamily="34" charset="-122"/>
@@ -6271,7 +6295,7 @@
             <a:r>
               <a:rPr lang="en-US" sz="1400" dirty="0">
                 <a:solidFill>
-                  <a:srgbClr val="C9D3F5"/>
+                  <a:srgbClr val="1F2429"/>
                 </a:solidFill>
                 <a:latin typeface="Courier New" pitchFamily="34" charset="0"/>
                 <a:ea typeface="Courier New" pitchFamily="34" charset="-122"/>
@@ -6300,7 +6324,7 @@
             <a:r>
               <a:rPr lang="en-US" sz="1400" dirty="0">
                 <a:solidFill>
-                  <a:srgbClr val="C9D3F5"/>
+                  <a:srgbClr val="1F2429"/>
                 </a:solidFill>
                 <a:latin typeface="Courier New" pitchFamily="34" charset="0"/>
                 <a:ea typeface="Courier New" pitchFamily="34" charset="-122"/>
@@ -6320,7 +6344,7 @@
             <a:r>
               <a:rPr lang="en-US" sz="1400" dirty="0">
                 <a:solidFill>
-                  <a:srgbClr val="C9D3F5"/>
+                  <a:srgbClr val="1F2429"/>
                 </a:solidFill>
                 <a:latin typeface="Courier New" pitchFamily="34" charset="0"/>
                 <a:ea typeface="Courier New" pitchFamily="34" charset="-122"/>
@@ -8281,9 +8305,13 @@
             </a:avLst>
           </a:prstGeom>
           <a:solidFill>
-            <a:srgbClr val="1E1E4C"/>
+            <a:srgbClr val="F7F8F9"/>
           </a:solidFill>
-          <a:ln/>
+          <a:ln w="9525">
+            <a:solidFill>
+              <a:srgbClr val="D0D5DD"/>
+            </a:solidFill>
+          </a:ln>
         </p:spPr>
         <p:txBody>
           <a:bodyPr/>
@@ -8320,7 +8348,7 @@
             <a:r>
               <a:rPr lang="en-US" sz="1300" dirty="0">
                 <a:solidFill>
-                  <a:srgbClr val="C9D3F5"/>
+                  <a:srgbClr val="1F2429"/>
                 </a:solidFill>
                 <a:latin typeface="Courier New" pitchFamily="34" charset="0"/>
                 <a:ea typeface="Courier New" pitchFamily="34" charset="-122"/>
@@ -8340,7 +8368,7 @@
             <a:r>
               <a:rPr lang="en-US" sz="1300" dirty="0">
                 <a:solidFill>
-                  <a:srgbClr val="C9D3F5"/>
+                  <a:srgbClr val="1F2429"/>
                 </a:solidFill>
                 <a:latin typeface="Courier New" pitchFamily="34" charset="0"/>
                 <a:ea typeface="Courier New" pitchFamily="34" charset="-122"/>
@@ -8360,7 +8388,7 @@
             <a:r>
               <a:rPr lang="en-US" sz="1300" dirty="0">
                 <a:solidFill>
-                  <a:srgbClr val="C9D3F5"/>
+                  <a:srgbClr val="1F2429"/>
                 </a:solidFill>
                 <a:latin typeface="Courier New" pitchFamily="34" charset="0"/>
                 <a:ea typeface="Courier New" pitchFamily="34" charset="-122"/>
@@ -8604,9 +8632,13 @@
             </a:avLst>
           </a:prstGeom>
           <a:solidFill>
-            <a:srgbClr val="1E1E4C"/>
+            <a:srgbClr val="F7F8F9"/>
           </a:solidFill>
-          <a:ln/>
+          <a:ln w="9525">
+            <a:solidFill>
+              <a:srgbClr val="D0D5DD"/>
+            </a:solidFill>
+          </a:ln>
         </p:spPr>
         <p:txBody>
           <a:bodyPr/>
@@ -8643,7 +8675,7 @@
             <a:r>
               <a:rPr lang="en-US" sz="1400" dirty="0">
                 <a:solidFill>
-                  <a:srgbClr val="C9D3F5"/>
+                  <a:srgbClr val="1F2429"/>
                 </a:solidFill>
                 <a:latin typeface="Courier New" pitchFamily="34" charset="0"/>
                 <a:ea typeface="Courier New" pitchFamily="34" charset="-122"/>
@@ -8663,7 +8695,7 @@
             <a:r>
               <a:rPr lang="en-US" sz="1400" dirty="0">
                 <a:solidFill>
-                  <a:srgbClr val="C9D3F5"/>
+                  <a:srgbClr val="1F2429"/>
                 </a:solidFill>
                 <a:latin typeface="Courier New" pitchFamily="34" charset="0"/>
                 <a:ea typeface="Courier New" pitchFamily="34" charset="-122"/>
@@ -8683,7 +8715,7 @@
             <a:r>
               <a:rPr lang="en-US" sz="1400" dirty="0">
                 <a:solidFill>
-                  <a:srgbClr val="C9D3F5"/>
+                  <a:srgbClr val="1F2429"/>
                 </a:solidFill>
                 <a:latin typeface="Courier New" pitchFamily="34" charset="0"/>
                 <a:ea typeface="Courier New" pitchFamily="34" charset="-122"/>
@@ -8703,7 +8735,7 @@
             <a:r>
               <a:rPr lang="en-US" sz="1400" dirty="0">
                 <a:solidFill>
-                  <a:srgbClr val="C9D3F5"/>
+                  <a:srgbClr val="1F2429"/>
                 </a:solidFill>
                 <a:latin typeface="Courier New" pitchFamily="34" charset="0"/>
                 <a:ea typeface="Courier New" pitchFamily="34" charset="-122"/>
@@ -8723,7 +8755,7 @@
             <a:r>
               <a:rPr lang="en-US" sz="1400" dirty="0">
                 <a:solidFill>
-                  <a:srgbClr val="C9D3F5"/>
+                  <a:srgbClr val="1F2429"/>
                 </a:solidFill>
                 <a:latin typeface="Courier New" pitchFamily="34" charset="0"/>
                 <a:ea typeface="Courier New" pitchFamily="34" charset="-122"/>
@@ -9894,9 +9926,13 @@
             </a:avLst>
           </a:prstGeom>
           <a:solidFill>
-            <a:srgbClr val="1E1E4C"/>
+            <a:srgbClr val="F7F8F9"/>
           </a:solidFill>
-          <a:ln/>
+          <a:ln w="9525">
+            <a:solidFill>
+              <a:srgbClr val="D0D5DD"/>
+            </a:solidFill>
+          </a:ln>
         </p:spPr>
         <p:txBody>
           <a:bodyPr/>
@@ -9933,7 +9969,7 @@
             <a:r>
               <a:rPr lang="en-US" sz="1250" dirty="0">
                 <a:solidFill>
-                  <a:srgbClr val="C9D3F5"/>
+                  <a:srgbClr val="1F2429"/>
                 </a:solidFill>
                 <a:latin typeface="Courier New" pitchFamily="34" charset="0"/>
                 <a:ea typeface="Courier New" pitchFamily="34" charset="-122"/>
@@ -9953,7 +9989,7 @@
             <a:r>
               <a:rPr lang="en-US" sz="1250" dirty="0">
                 <a:solidFill>
-                  <a:srgbClr val="C9D3F5"/>
+                  <a:srgbClr val="1F2429"/>
                 </a:solidFill>
                 <a:latin typeface="Courier New" pitchFamily="34" charset="0"/>
                 <a:ea typeface="Courier New" pitchFamily="34" charset="-122"/>
@@ -9973,7 +10009,7 @@
             <a:r>
               <a:rPr lang="en-US" sz="1250" dirty="0">
                 <a:solidFill>
-                  <a:srgbClr val="C9D3F5"/>
+                  <a:srgbClr val="1F2429"/>
                 </a:solidFill>
                 <a:latin typeface="Courier New" pitchFamily="34" charset="0"/>
                 <a:ea typeface="Courier New" pitchFamily="34" charset="-122"/>
@@ -9993,7 +10029,7 @@
             <a:r>
               <a:rPr lang="en-US" sz="1250" dirty="0">
                 <a:solidFill>
-                  <a:srgbClr val="C9D3F5"/>
+                  <a:srgbClr val="1F2429"/>
                 </a:solidFill>
                 <a:latin typeface="Courier New" pitchFamily="34" charset="0"/>
                 <a:ea typeface="Courier New" pitchFamily="34" charset="-122"/>
@@ -10013,7 +10049,7 @@
             <a:r>
               <a:rPr lang="en-US" sz="1250" dirty="0">
                 <a:solidFill>
-                  <a:srgbClr val="C9D3F5"/>
+                  <a:srgbClr val="1F2429"/>
                 </a:solidFill>
                 <a:latin typeface="Courier New" pitchFamily="34" charset="0"/>
                 <a:ea typeface="Courier New" pitchFamily="34" charset="-122"/>
@@ -10033,7 +10069,7 @@
             <a:r>
               <a:rPr lang="en-US" sz="1250" dirty="0">
                 <a:solidFill>
-                  <a:srgbClr val="C9D3F5"/>
+                  <a:srgbClr val="1F2429"/>
                 </a:solidFill>
                 <a:latin typeface="Courier New" pitchFamily="34" charset="0"/>
                 <a:ea typeface="Courier New" pitchFamily="34" charset="-122"/>
@@ -10269,7 +10305,7 @@
         <p:spPr>
           <a:xfrm>
             <a:off x="640080" y="1965960"/>
-            <a:ext cx="10911535" cy="1737360"/>
+            <a:ext cx="10911535" cy="3657600"/>
           </a:xfrm>
           <a:prstGeom prst="roundRect">
             <a:avLst>
@@ -10300,7 +10336,7 @@
         <p:spPr>
           <a:xfrm>
             <a:off x="868680" y="2103120"/>
-            <a:ext cx="10454335" cy="274320"/>
+            <a:ext cx="10454335" cy="400000"/>
           </a:xfrm>
           <a:prstGeom prst="rect">
             <a:avLst/>
@@ -10316,7 +10352,7 @@
               <a:buNone/>
             </a:pPr>
             <a:r>
-              <a:rPr lang="en-US" sz="1000" b="1" spc="200" kern="0" dirty="0">
+              <a:rPr lang="en-US" sz="1800" b="1" spc="200" kern="0" dirty="0">
                 <a:solidFill>
                   <a:srgbClr val="1F7A46"/>
                 </a:solidFill>
@@ -10326,7 +10362,7 @@
               </a:rPr>
               <a:t>TIP</a:t>
             </a:r>
-            <a:endParaRPr lang="en-US" sz="1000" dirty="0"/>
+            <a:endParaRPr lang="en-US" sz="1800" dirty="0"/>
           </a:p>
         </p:txBody>
       </p:sp>
@@ -10338,8 +10374,8 @@
         </p:nvSpPr>
         <p:spPr>
           <a:xfrm>
-            <a:off x="868680" y="2404872"/>
-            <a:ext cx="10454335" cy="1143000"/>
+            <a:off x="868680" y="2795960"/>
+            <a:ext cx="10454335" cy="2500000"/>
           </a:xfrm>
           <a:prstGeom prst="rect">
             <a:avLst/>
@@ -10348,14 +10384,14 @@
           <a:ln/>
         </p:spPr>
         <p:txBody>
-          <a:bodyPr wrap="square" lIns="0" tIns="0" rIns="0" bIns="0" rtlCol="0" anchor="t"/>
+          <a:bodyPr wrap="square" lIns="0" tIns="0" rIns="0" bIns="0" rtlCol="0" anchor="ctr"/>
           <a:lstStyle/>
           <a:p>
             <a:pPr indent="0" marL="0">
               <a:buNone/>
             </a:pPr>
             <a:r>
-              <a:rPr lang="en-US" sz="1250" dirty="0">
+              <a:rPr lang="en-US" sz="2800" dirty="0">
                 <a:solidFill>
                   <a:srgbClr val="26262F"/>
                 </a:solidFill>
@@ -10365,7 +10401,7 @@
               </a:rPr>
               <a:t>overflow: hidden (or auto) on a float's parent fixes the collapsing-parent problem too, in one line. Trade-off: it also clips any OTHER content that overflows that container, like a dropdown or tooltip — the .clearfix trick is the safer, general-purpose tool.</a:t>
             </a:r>
-            <a:endParaRPr lang="en-US" sz="1250" dirty="0"/>
+            <a:endParaRPr lang="en-US" sz="2800" dirty="0"/>
           </a:p>
         </p:txBody>
       </p:sp>
@@ -12207,9 +12243,13 @@
             </a:avLst>
           </a:prstGeom>
           <a:solidFill>
-            <a:srgbClr val="1E1E4C"/>
+            <a:srgbClr val="F7F8F9"/>
           </a:solidFill>
-          <a:ln/>
+          <a:ln w="9525">
+            <a:solidFill>
+              <a:srgbClr val="D0D5DD"/>
+            </a:solidFill>
+          </a:ln>
         </p:spPr>
         <p:txBody>
           <a:bodyPr/>
@@ -12246,7 +12286,7 @@
             <a:r>
               <a:rPr lang="en-US" sz="1300" dirty="0">
                 <a:solidFill>
-                  <a:srgbClr val="C9D3F5"/>
+                  <a:srgbClr val="1F2429"/>
                 </a:solidFill>
                 <a:latin typeface="Courier New" pitchFamily="34" charset="0"/>
                 <a:ea typeface="Courier New" pitchFamily="34" charset="-122"/>
@@ -12266,7 +12306,7 @@
             <a:r>
               <a:rPr lang="en-US" sz="1300" dirty="0">
                 <a:solidFill>
-                  <a:srgbClr val="C9D3F5"/>
+                  <a:srgbClr val="1F2429"/>
                 </a:solidFill>
                 <a:latin typeface="Courier New" pitchFamily="34" charset="0"/>
                 <a:ea typeface="Courier New" pitchFamily="34" charset="-122"/>
@@ -12286,7 +12326,7 @@
             <a:r>
               <a:rPr lang="en-US" sz="1300" dirty="0">
                 <a:solidFill>
-                  <a:srgbClr val="C9D3F5"/>
+                  <a:srgbClr val="1F2429"/>
                 </a:solidFill>
                 <a:latin typeface="Courier New" pitchFamily="34" charset="0"/>
                 <a:ea typeface="Courier New" pitchFamily="34" charset="-122"/>
@@ -12306,7 +12346,7 @@
             <a:r>
               <a:rPr lang="en-US" sz="1300" dirty="0">
                 <a:solidFill>
-                  <a:srgbClr val="C9D3F5"/>
+                  <a:srgbClr val="1F2429"/>
                 </a:solidFill>
                 <a:latin typeface="Courier New" pitchFamily="34" charset="0"/>
                 <a:ea typeface="Courier New" pitchFamily="34" charset="-122"/>
@@ -12326,7 +12366,7 @@
             <a:r>
               <a:rPr lang="en-US" sz="1300" dirty="0">
                 <a:solidFill>
-                  <a:srgbClr val="C9D3F5"/>
+                  <a:srgbClr val="1F2429"/>
                 </a:solidFill>
                 <a:latin typeface="Courier New" pitchFamily="34" charset="0"/>
                 <a:ea typeface="Courier New" pitchFamily="34" charset="-122"/>
@@ -12346,7 +12386,7 @@
             <a:r>
               <a:rPr lang="en-US" sz="1300" dirty="0">
                 <a:solidFill>
-                  <a:srgbClr val="C9D3F5"/>
+                  <a:srgbClr val="1F2429"/>
                 </a:solidFill>
                 <a:latin typeface="Courier New" pitchFamily="34" charset="0"/>
                 <a:ea typeface="Courier New" pitchFamily="34" charset="-122"/>
@@ -12366,7 +12406,7 @@
             <a:r>
               <a:rPr lang="en-US" sz="1300" dirty="0">
                 <a:solidFill>
-                  <a:srgbClr val="C9D3F5"/>
+                  <a:srgbClr val="1F2429"/>
                 </a:solidFill>
                 <a:latin typeface="Courier New" pitchFamily="34" charset="0"/>
                 <a:ea typeface="Courier New" pitchFamily="34" charset="-122"/>
@@ -12386,7 +12426,7 @@
             <a:r>
               <a:rPr lang="en-US" sz="1300" dirty="0">
                 <a:solidFill>
-                  <a:srgbClr val="C9D3F5"/>
+                  <a:srgbClr val="1F2429"/>
                 </a:solidFill>
                 <a:latin typeface="Courier New" pitchFamily="34" charset="0"/>
                 <a:ea typeface="Courier New" pitchFamily="34" charset="-122"/>
@@ -12630,9 +12670,13 @@
             </a:avLst>
           </a:prstGeom>
           <a:solidFill>
-            <a:srgbClr val="1E1E4C"/>
+            <a:srgbClr val="F7F8F9"/>
           </a:solidFill>
-          <a:ln/>
+          <a:ln w="9525">
+            <a:solidFill>
+              <a:srgbClr val="D0D5DD"/>
+            </a:solidFill>
+          </a:ln>
         </p:spPr>
         <p:txBody>
           <a:bodyPr/>
@@ -12669,7 +12713,7 @@
             <a:r>
               <a:rPr lang="en-US" sz="1300" dirty="0">
                 <a:solidFill>
-                  <a:srgbClr val="C9D3F5"/>
+                  <a:srgbClr val="1F2429"/>
                 </a:solidFill>
                 <a:latin typeface="Courier New" pitchFamily="34" charset="0"/>
                 <a:ea typeface="Courier New" pitchFamily="34" charset="-122"/>
@@ -12689,7 +12733,7 @@
             <a:r>
               <a:rPr lang="en-US" sz="1300" dirty="0">
                 <a:solidFill>
-                  <a:srgbClr val="C9D3F5"/>
+                  <a:srgbClr val="1F2429"/>
                 </a:solidFill>
                 <a:latin typeface="Courier New" pitchFamily="34" charset="0"/>
                 <a:ea typeface="Courier New" pitchFamily="34" charset="-122"/>
@@ -12709,7 +12753,7 @@
             <a:r>
               <a:rPr lang="en-US" sz="1300" dirty="0">
                 <a:solidFill>
-                  <a:srgbClr val="C9D3F5"/>
+                  <a:srgbClr val="1F2429"/>
                 </a:solidFill>
                 <a:latin typeface="Courier New" pitchFamily="34" charset="0"/>
                 <a:ea typeface="Courier New" pitchFamily="34" charset="-122"/>
@@ -12729,7 +12773,7 @@
             <a:r>
               <a:rPr lang="en-US" sz="1300" dirty="0">
                 <a:solidFill>
-                  <a:srgbClr val="C9D3F5"/>
+                  <a:srgbClr val="1F2429"/>
                 </a:solidFill>
                 <a:latin typeface="Courier New" pitchFamily="34" charset="0"/>
                 <a:ea typeface="Courier New" pitchFamily="34" charset="-122"/>
@@ -12749,7 +12793,7 @@
             <a:r>
               <a:rPr lang="en-US" sz="1300" dirty="0">
                 <a:solidFill>
-                  <a:srgbClr val="C9D3F5"/>
+                  <a:srgbClr val="1F2429"/>
                 </a:solidFill>
                 <a:latin typeface="Courier New" pitchFamily="34" charset="0"/>
                 <a:ea typeface="Courier New" pitchFamily="34" charset="-122"/>
@@ -12993,9 +13037,13 @@
             </a:avLst>
           </a:prstGeom>
           <a:solidFill>
-            <a:srgbClr val="1E1E4C"/>
+            <a:srgbClr val="F7F8F9"/>
           </a:solidFill>
-          <a:ln/>
+          <a:ln w="9525">
+            <a:solidFill>
+              <a:srgbClr val="D0D5DD"/>
+            </a:solidFill>
+          </a:ln>
         </p:spPr>
         <p:txBody>
           <a:bodyPr/>
@@ -13032,7 +13080,7 @@
             <a:r>
               <a:rPr lang="en-US" sz="1300" dirty="0">
                 <a:solidFill>
-                  <a:srgbClr val="C9D3F5"/>
+                  <a:srgbClr val="1F2429"/>
                 </a:solidFill>
                 <a:latin typeface="Courier New" pitchFamily="34" charset="0"/>
                 <a:ea typeface="Courier New" pitchFamily="34" charset="-122"/>
@@ -13052,7 +13100,7 @@
             <a:r>
               <a:rPr lang="en-US" sz="1300" dirty="0">
                 <a:solidFill>
-                  <a:srgbClr val="C9D3F5"/>
+                  <a:srgbClr val="1F2429"/>
                 </a:solidFill>
                 <a:latin typeface="Courier New" pitchFamily="34" charset="0"/>
                 <a:ea typeface="Courier New" pitchFamily="34" charset="-122"/>
@@ -13072,7 +13120,7 @@
             <a:r>
               <a:rPr lang="en-US" sz="1300" dirty="0">
                 <a:solidFill>
-                  <a:srgbClr val="C9D3F5"/>
+                  <a:srgbClr val="1F2429"/>
                 </a:solidFill>
                 <a:latin typeface="Courier New" pitchFamily="34" charset="0"/>
                 <a:ea typeface="Courier New" pitchFamily="34" charset="-122"/>
@@ -13092,7 +13140,7 @@
             <a:r>
               <a:rPr lang="en-US" sz="1300" dirty="0">
                 <a:solidFill>
-                  <a:srgbClr val="C9D3F5"/>
+                  <a:srgbClr val="1F2429"/>
                 </a:solidFill>
                 <a:latin typeface="Courier New" pitchFamily="34" charset="0"/>
                 <a:ea typeface="Courier New" pitchFamily="34" charset="-122"/>
@@ -13112,7 +13160,7 @@
             <a:r>
               <a:rPr lang="en-US" sz="1300" dirty="0">
                 <a:solidFill>
-                  <a:srgbClr val="C9D3F5"/>
+                  <a:srgbClr val="1F2429"/>
                 </a:solidFill>
                 <a:latin typeface="Courier New" pitchFamily="34" charset="0"/>
                 <a:ea typeface="Courier New" pitchFamily="34" charset="-122"/>
@@ -13356,9 +13404,13 @@
             </a:avLst>
           </a:prstGeom>
           <a:solidFill>
-            <a:srgbClr val="1E1E4C"/>
+            <a:srgbClr val="F7F8F9"/>
           </a:solidFill>
-          <a:ln/>
+          <a:ln w="9525">
+            <a:solidFill>
+              <a:srgbClr val="D0D5DD"/>
+            </a:solidFill>
+          </a:ln>
         </p:spPr>
         <p:txBody>
           <a:bodyPr/>
@@ -13395,7 +13447,7 @@
             <a:r>
               <a:rPr lang="en-US" sz="1300" dirty="0">
                 <a:solidFill>
-                  <a:srgbClr val="C9D3F5"/>
+                  <a:srgbClr val="1F2429"/>
                 </a:solidFill>
                 <a:latin typeface="Courier New" pitchFamily="34" charset="0"/>
                 <a:ea typeface="Courier New" pitchFamily="34" charset="-122"/>
@@ -13415,7 +13467,7 @@
             <a:r>
               <a:rPr lang="en-US" sz="1300" dirty="0">
                 <a:solidFill>
-                  <a:srgbClr val="C9D3F5"/>
+                  <a:srgbClr val="1F2429"/>
                 </a:solidFill>
                 <a:latin typeface="Courier New" pitchFamily="34" charset="0"/>
                 <a:ea typeface="Courier New" pitchFamily="34" charset="-122"/>
@@ -13435,7 +13487,7 @@
             <a:r>
               <a:rPr lang="en-US" sz="1300" dirty="0">
                 <a:solidFill>
-                  <a:srgbClr val="C9D3F5"/>
+                  <a:srgbClr val="1F2429"/>
                 </a:solidFill>
                 <a:latin typeface="Courier New" pitchFamily="34" charset="0"/>
                 <a:ea typeface="Courier New" pitchFamily="34" charset="-122"/>
@@ -13455,7 +13507,7 @@
             <a:r>
               <a:rPr lang="en-US" sz="1300" dirty="0">
                 <a:solidFill>
-                  <a:srgbClr val="C9D3F5"/>
+                  <a:srgbClr val="1F2429"/>
                 </a:solidFill>
                 <a:latin typeface="Courier New" pitchFamily="34" charset="0"/>
                 <a:ea typeface="Courier New" pitchFamily="34" charset="-122"/>
@@ -13475,7 +13527,7 @@
             <a:r>
               <a:rPr lang="en-US" sz="1300" dirty="0">
                 <a:solidFill>
-                  <a:srgbClr val="C9D3F5"/>
+                  <a:srgbClr val="1F2429"/>
                 </a:solidFill>
                 <a:latin typeface="Courier New" pitchFamily="34" charset="0"/>
                 <a:ea typeface="Courier New" pitchFamily="34" charset="-122"/>
@@ -13719,9 +13771,13 @@
             </a:avLst>
           </a:prstGeom>
           <a:solidFill>
-            <a:srgbClr val="1E1E4C"/>
+            <a:srgbClr val="F7F8F9"/>
           </a:solidFill>
-          <a:ln/>
+          <a:ln w="9525">
+            <a:solidFill>
+              <a:srgbClr val="D0D5DD"/>
+            </a:solidFill>
+          </a:ln>
         </p:spPr>
         <p:txBody>
           <a:bodyPr/>
@@ -13758,7 +13814,7 @@
             <a:r>
               <a:rPr lang="en-US" sz="1300" dirty="0">
                 <a:solidFill>
-                  <a:srgbClr val="C9D3F5"/>
+                  <a:srgbClr val="1F2429"/>
                 </a:solidFill>
                 <a:latin typeface="Courier New" pitchFamily="34" charset="0"/>
                 <a:ea typeface="Courier New" pitchFamily="34" charset="-122"/>
@@ -13778,7 +13834,7 @@
             <a:r>
               <a:rPr lang="en-US" sz="1300" dirty="0">
                 <a:solidFill>
-                  <a:srgbClr val="C9D3F5"/>
+                  <a:srgbClr val="1F2429"/>
                 </a:solidFill>
                 <a:latin typeface="Courier New" pitchFamily="34" charset="0"/>
                 <a:ea typeface="Courier New" pitchFamily="34" charset="-122"/>
@@ -13798,7 +13854,7 @@
             <a:r>
               <a:rPr lang="en-US" sz="1300" dirty="0">
                 <a:solidFill>
-                  <a:srgbClr val="C9D3F5"/>
+                  <a:srgbClr val="1F2429"/>
                 </a:solidFill>
                 <a:latin typeface="Courier New" pitchFamily="34" charset="0"/>
                 <a:ea typeface="Courier New" pitchFamily="34" charset="-122"/>
@@ -13818,7 +13874,7 @@
             <a:r>
               <a:rPr lang="en-US" sz="1300" dirty="0">
                 <a:solidFill>
-                  <a:srgbClr val="C9D3F5"/>
+                  <a:srgbClr val="1F2429"/>
                 </a:solidFill>
                 <a:latin typeface="Courier New" pitchFamily="34" charset="0"/>
                 <a:ea typeface="Courier New" pitchFamily="34" charset="-122"/>
